--- a/Slides/Slides-PPT/Exam 1 - Review A.pptx
+++ b/Slides/Slides-PPT/Exam 1 - Review A.pptx
@@ -6,43 +6,42 @@
     <p:sldMasterId id="2147483672" r:id="rId2"/>
   </p:sldMasterIdLst>
   <p:notesMasterIdLst>
-    <p:notesMasterId r:id="rId37"/>
+    <p:notesMasterId r:id="rId36"/>
   </p:notesMasterIdLst>
   <p:sldIdLst>
     <p:sldId id="268" r:id="rId3"/>
     <p:sldId id="440" r:id="rId4"/>
     <p:sldId id="377" r:id="rId5"/>
     <p:sldId id="493" r:id="rId6"/>
-    <p:sldId id="691" r:id="rId7"/>
-    <p:sldId id="406" r:id="rId8"/>
-    <p:sldId id="504" r:id="rId9"/>
-    <p:sldId id="505" r:id="rId10"/>
-    <p:sldId id="480" r:id="rId11"/>
-    <p:sldId id="494" r:id="rId12"/>
-    <p:sldId id="496" r:id="rId13"/>
-    <p:sldId id="497" r:id="rId14"/>
-    <p:sldId id="498" r:id="rId15"/>
-    <p:sldId id="499" r:id="rId16"/>
-    <p:sldId id="500" r:id="rId17"/>
-    <p:sldId id="501" r:id="rId18"/>
-    <p:sldId id="502" r:id="rId19"/>
-    <p:sldId id="506" r:id="rId20"/>
-    <p:sldId id="507" r:id="rId21"/>
-    <p:sldId id="508" r:id="rId22"/>
-    <p:sldId id="681" r:id="rId23"/>
-    <p:sldId id="682" r:id="rId24"/>
-    <p:sldId id="485" r:id="rId25"/>
-    <p:sldId id="487" r:id="rId26"/>
-    <p:sldId id="509" r:id="rId27"/>
-    <p:sldId id="486" r:id="rId28"/>
-    <p:sldId id="688" r:id="rId29"/>
-    <p:sldId id="690" r:id="rId30"/>
-    <p:sldId id="689" r:id="rId31"/>
-    <p:sldId id="684" r:id="rId32"/>
-    <p:sldId id="686" r:id="rId33"/>
-    <p:sldId id="685" r:id="rId34"/>
-    <p:sldId id="687" r:id="rId35"/>
-    <p:sldId id="394" r:id="rId36"/>
+    <p:sldId id="406" r:id="rId7"/>
+    <p:sldId id="504" r:id="rId8"/>
+    <p:sldId id="505" r:id="rId9"/>
+    <p:sldId id="480" r:id="rId10"/>
+    <p:sldId id="494" r:id="rId11"/>
+    <p:sldId id="496" r:id="rId12"/>
+    <p:sldId id="497" r:id="rId13"/>
+    <p:sldId id="498" r:id="rId14"/>
+    <p:sldId id="499" r:id="rId15"/>
+    <p:sldId id="500" r:id="rId16"/>
+    <p:sldId id="501" r:id="rId17"/>
+    <p:sldId id="502" r:id="rId18"/>
+    <p:sldId id="506" r:id="rId19"/>
+    <p:sldId id="507" r:id="rId20"/>
+    <p:sldId id="508" r:id="rId21"/>
+    <p:sldId id="681" r:id="rId22"/>
+    <p:sldId id="682" r:id="rId23"/>
+    <p:sldId id="485" r:id="rId24"/>
+    <p:sldId id="487" r:id="rId25"/>
+    <p:sldId id="509" r:id="rId26"/>
+    <p:sldId id="486" r:id="rId27"/>
+    <p:sldId id="688" r:id="rId28"/>
+    <p:sldId id="690" r:id="rId29"/>
+    <p:sldId id="689" r:id="rId30"/>
+    <p:sldId id="684" r:id="rId31"/>
+    <p:sldId id="686" r:id="rId32"/>
+    <p:sldId id="685" r:id="rId33"/>
+    <p:sldId id="687" r:id="rId34"/>
+    <p:sldId id="394" r:id="rId35"/>
   </p:sldIdLst>
   <p:sldSz cx="12192000" cy="6858000"/>
   <p:notesSz cx="6858000" cy="9144000"/>
@@ -231,7 +230,7 @@
           <a:p>
             <a:fld id="{43386AF1-EF24-4659-9089-2771856A9EA2}" type="datetimeFigureOut">
               <a:rPr lang="en-US" smtClean="0"/>
-              <a:t>2/24/2026</a:t>
+              <a:t>6/15/2026</a:t>
             </a:fld>
             <a:endParaRPr lang="en-US"/>
           </a:p>
@@ -794,7 +793,7 @@
     </p:spTree>
     <p:extLst>
       <p:ext uri="{BB962C8B-B14F-4D97-AF65-F5344CB8AC3E}">
-        <p14:creationId xmlns:p14="http://schemas.microsoft.com/office/powerpoint/2010/main" val="3728816664"/>
+        <p14:creationId xmlns:p14="http://schemas.microsoft.com/office/powerpoint/2010/main" val="876250993"/>
       </p:ext>
     </p:extLst>
   </p:cSld>
@@ -945,7 +944,7 @@
     </p:spTree>
     <p:extLst>
       <p:ext uri="{BB962C8B-B14F-4D97-AF65-F5344CB8AC3E}">
-        <p14:creationId xmlns:p14="http://schemas.microsoft.com/office/powerpoint/2010/main" val="876250993"/>
+        <p14:creationId xmlns:p14="http://schemas.microsoft.com/office/powerpoint/2010/main" val="1072344791"/>
       </p:ext>
     </p:extLst>
   </p:cSld>
@@ -1096,7 +1095,7 @@
     </p:spTree>
     <p:extLst>
       <p:ext uri="{BB962C8B-B14F-4D97-AF65-F5344CB8AC3E}">
-        <p14:creationId xmlns:p14="http://schemas.microsoft.com/office/powerpoint/2010/main" val="1072344791"/>
+        <p14:creationId xmlns:p14="http://schemas.microsoft.com/office/powerpoint/2010/main" val="3614317947"/>
       </p:ext>
     </p:extLst>
   </p:cSld>
@@ -1247,7 +1246,7 @@
     </p:spTree>
     <p:extLst>
       <p:ext uri="{BB962C8B-B14F-4D97-AF65-F5344CB8AC3E}">
-        <p14:creationId xmlns:p14="http://schemas.microsoft.com/office/powerpoint/2010/main" val="3614317947"/>
+        <p14:creationId xmlns:p14="http://schemas.microsoft.com/office/powerpoint/2010/main" val="2237797566"/>
       </p:ext>
     </p:extLst>
   </p:cSld>
@@ -1398,7 +1397,7 @@
     </p:spTree>
     <p:extLst>
       <p:ext uri="{BB962C8B-B14F-4D97-AF65-F5344CB8AC3E}">
-        <p14:creationId xmlns:p14="http://schemas.microsoft.com/office/powerpoint/2010/main" val="2237797566"/>
+        <p14:creationId xmlns:p14="http://schemas.microsoft.com/office/powerpoint/2010/main" val="4111444355"/>
       </p:ext>
     </p:extLst>
   </p:cSld>
@@ -1549,7 +1548,7 @@
     </p:spTree>
     <p:extLst>
       <p:ext uri="{BB962C8B-B14F-4D97-AF65-F5344CB8AC3E}">
-        <p14:creationId xmlns:p14="http://schemas.microsoft.com/office/powerpoint/2010/main" val="4111444355"/>
+        <p14:creationId xmlns:p14="http://schemas.microsoft.com/office/powerpoint/2010/main" val="3298322181"/>
       </p:ext>
     </p:extLst>
   </p:cSld>
@@ -1700,7 +1699,7 @@
     </p:spTree>
     <p:extLst>
       <p:ext uri="{BB962C8B-B14F-4D97-AF65-F5344CB8AC3E}">
-        <p14:creationId xmlns:p14="http://schemas.microsoft.com/office/powerpoint/2010/main" val="3298322181"/>
+        <p14:creationId xmlns:p14="http://schemas.microsoft.com/office/powerpoint/2010/main" val="3067095419"/>
       </p:ext>
     </p:extLst>
   </p:cSld>
@@ -1851,7 +1850,7 @@
     </p:spTree>
     <p:extLst>
       <p:ext uri="{BB962C8B-B14F-4D97-AF65-F5344CB8AC3E}">
-        <p14:creationId xmlns:p14="http://schemas.microsoft.com/office/powerpoint/2010/main" val="3067095419"/>
+        <p14:creationId xmlns:p14="http://schemas.microsoft.com/office/powerpoint/2010/main" val="1788011804"/>
       </p:ext>
     </p:extLst>
   </p:cSld>
@@ -2002,7 +2001,7 @@
     </p:spTree>
     <p:extLst>
       <p:ext uri="{BB962C8B-B14F-4D97-AF65-F5344CB8AC3E}">
-        <p14:creationId xmlns:p14="http://schemas.microsoft.com/office/powerpoint/2010/main" val="1788011804"/>
+        <p14:creationId xmlns:p14="http://schemas.microsoft.com/office/powerpoint/2010/main" val="3426796180"/>
       </p:ext>
     </p:extLst>
   </p:cSld>
@@ -2153,7 +2152,7 @@
     </p:spTree>
     <p:extLst>
       <p:ext uri="{BB962C8B-B14F-4D97-AF65-F5344CB8AC3E}">
-        <p14:creationId xmlns:p14="http://schemas.microsoft.com/office/powerpoint/2010/main" val="3426796180"/>
+        <p14:creationId xmlns:p14="http://schemas.microsoft.com/office/powerpoint/2010/main" val="91040651"/>
       </p:ext>
     </p:extLst>
   </p:cSld>
@@ -2455,7 +2454,7 @@
     </p:spTree>
     <p:extLst>
       <p:ext uri="{BB962C8B-B14F-4D97-AF65-F5344CB8AC3E}">
-        <p14:creationId xmlns:p14="http://schemas.microsoft.com/office/powerpoint/2010/main" val="91040651"/>
+        <p14:creationId xmlns:p14="http://schemas.microsoft.com/office/powerpoint/2010/main" val="3737278891"/>
       </p:ext>
     </p:extLst>
   </p:cSld>
@@ -2606,7 +2605,7 @@
     </p:spTree>
     <p:extLst>
       <p:ext uri="{BB962C8B-B14F-4D97-AF65-F5344CB8AC3E}">
-        <p14:creationId xmlns:p14="http://schemas.microsoft.com/office/powerpoint/2010/main" val="3737278891"/>
+        <p14:creationId xmlns:p14="http://schemas.microsoft.com/office/powerpoint/2010/main" val="595954518"/>
       </p:ext>
     </p:extLst>
   </p:cSld>
@@ -2757,7 +2756,7 @@
     </p:spTree>
     <p:extLst>
       <p:ext uri="{BB962C8B-B14F-4D97-AF65-F5344CB8AC3E}">
-        <p14:creationId xmlns:p14="http://schemas.microsoft.com/office/powerpoint/2010/main" val="595954518"/>
+        <p14:creationId xmlns:p14="http://schemas.microsoft.com/office/powerpoint/2010/main" val="3998982496"/>
       </p:ext>
     </p:extLst>
   </p:cSld>
@@ -2908,7 +2907,7 @@
     </p:spTree>
     <p:extLst>
       <p:ext uri="{BB962C8B-B14F-4D97-AF65-F5344CB8AC3E}">
-        <p14:creationId xmlns:p14="http://schemas.microsoft.com/office/powerpoint/2010/main" val="3998982496"/>
+        <p14:creationId xmlns:p14="http://schemas.microsoft.com/office/powerpoint/2010/main" val="1141541792"/>
       </p:ext>
     </p:extLst>
   </p:cSld>
@@ -3059,7 +3058,7 @@
     </p:spTree>
     <p:extLst>
       <p:ext uri="{BB962C8B-B14F-4D97-AF65-F5344CB8AC3E}">
-        <p14:creationId xmlns:p14="http://schemas.microsoft.com/office/powerpoint/2010/main" val="1141541792"/>
+        <p14:creationId xmlns:p14="http://schemas.microsoft.com/office/powerpoint/2010/main" val="2441855014"/>
       </p:ext>
     </p:extLst>
   </p:cSld>
@@ -3210,7 +3209,7 @@
     </p:spTree>
     <p:extLst>
       <p:ext uri="{BB962C8B-B14F-4D97-AF65-F5344CB8AC3E}">
-        <p14:creationId xmlns:p14="http://schemas.microsoft.com/office/powerpoint/2010/main" val="2441855014"/>
+        <p14:creationId xmlns:p14="http://schemas.microsoft.com/office/powerpoint/2010/main" val="3372863684"/>
       </p:ext>
     </p:extLst>
   </p:cSld>
@@ -3225,7 +3224,13 @@
   <p:cSld>
     <p:spTree>
       <p:nvGrpSpPr>
-        <p:cNvPr id="1" name=""/>
+        <p:cNvPr id="1" name="">
+          <a:extLst>
+            <a:ext uri="{FF2B5EF4-FFF2-40B4-BE49-F238E27FC236}">
+              <a16:creationId xmlns:a16="http://schemas.microsoft.com/office/drawing/2014/main" id="{F1FC9B61-F069-091E-40CA-3B40AF64A4FA}"/>
+            </a:ext>
+          </a:extLst>
+        </p:cNvPr>
         <p:cNvGrpSpPr/>
         <p:nvPr/>
       </p:nvGrpSpPr>
@@ -3239,7 +3244,13 @@
       </p:grpSpPr>
       <p:sp>
         <p:nvSpPr>
-          <p:cNvPr id="2" name="Slide Image Placeholder 1"/>
+          <p:cNvPr id="2" name="Slide Image Placeholder 1">
+            <a:extLst>
+              <a:ext uri="{FF2B5EF4-FFF2-40B4-BE49-F238E27FC236}">
+                <a16:creationId xmlns:a16="http://schemas.microsoft.com/office/drawing/2014/main" id="{69AD06FB-9C88-8377-19FB-1CFF5EA1391D}"/>
+              </a:ext>
+            </a:extLst>
+          </p:cNvPr>
           <p:cNvSpPr>
             <a:spLocks noGrp="1" noRot="1" noChangeAspect="1"/>
           </p:cNvSpPr>
@@ -3251,7 +3262,13 @@
       </p:sp>
       <p:sp>
         <p:nvSpPr>
-          <p:cNvPr id="3" name="Notes Placeholder 2"/>
+          <p:cNvPr id="3" name="Notes Placeholder 2">
+            <a:extLst>
+              <a:ext uri="{FF2B5EF4-FFF2-40B4-BE49-F238E27FC236}">
+                <a16:creationId xmlns:a16="http://schemas.microsoft.com/office/drawing/2014/main" id="{2FC19E2E-4051-DC97-3ED5-CC796D440E0E}"/>
+              </a:ext>
+            </a:extLst>
+          </p:cNvPr>
           <p:cNvSpPr>
             <a:spLocks noGrp="1"/>
           </p:cNvSpPr>
@@ -3277,7 +3294,13 @@
       </p:sp>
       <p:sp>
         <p:nvSpPr>
-          <p:cNvPr id="4" name="Slide Number Placeholder 3"/>
+          <p:cNvPr id="4" name="Slide Number Placeholder 3">
+            <a:extLst>
+              <a:ext uri="{FF2B5EF4-FFF2-40B4-BE49-F238E27FC236}">
+                <a16:creationId xmlns:a16="http://schemas.microsoft.com/office/drawing/2014/main" id="{AD7CADB8-8989-063C-C59D-CF6112D3DD5F}"/>
+              </a:ext>
+            </a:extLst>
+          </p:cNvPr>
           <p:cNvSpPr>
             <a:spLocks noGrp="1"/>
           </p:cNvSpPr>
@@ -3361,7 +3384,7 @@
     </p:spTree>
     <p:extLst>
       <p:ext uri="{BB962C8B-B14F-4D97-AF65-F5344CB8AC3E}">
-        <p14:creationId xmlns:p14="http://schemas.microsoft.com/office/powerpoint/2010/main" val="3372863684"/>
+        <p14:creationId xmlns:p14="http://schemas.microsoft.com/office/powerpoint/2010/main" val="3747576725"/>
       </p:ext>
     </p:extLst>
   </p:cSld>
@@ -3379,7 +3402,7 @@
         <p:cNvPr id="1" name="">
           <a:extLst>
             <a:ext uri="{FF2B5EF4-FFF2-40B4-BE49-F238E27FC236}">
-              <a16:creationId xmlns:a16="http://schemas.microsoft.com/office/drawing/2014/main" id="{F1FC9B61-F069-091E-40CA-3B40AF64A4FA}"/>
+              <a16:creationId xmlns:a16="http://schemas.microsoft.com/office/drawing/2014/main" id="{58A1E6EB-47E5-3D8F-806E-6D3ABF75492D}"/>
             </a:ext>
           </a:extLst>
         </p:cNvPr>
@@ -3399,7 +3422,7 @@
           <p:cNvPr id="2" name="Slide Image Placeholder 1">
             <a:extLst>
               <a:ext uri="{FF2B5EF4-FFF2-40B4-BE49-F238E27FC236}">
-                <a16:creationId xmlns:a16="http://schemas.microsoft.com/office/drawing/2014/main" id="{69AD06FB-9C88-8377-19FB-1CFF5EA1391D}"/>
+                <a16:creationId xmlns:a16="http://schemas.microsoft.com/office/drawing/2014/main" id="{09BD1E1D-26B8-4DD4-1D22-A733CAFEC05E}"/>
               </a:ext>
             </a:extLst>
           </p:cNvPr>
@@ -3417,7 +3440,7 @@
           <p:cNvPr id="3" name="Notes Placeholder 2">
             <a:extLst>
               <a:ext uri="{FF2B5EF4-FFF2-40B4-BE49-F238E27FC236}">
-                <a16:creationId xmlns:a16="http://schemas.microsoft.com/office/drawing/2014/main" id="{2FC19E2E-4051-DC97-3ED5-CC796D440E0E}"/>
+                <a16:creationId xmlns:a16="http://schemas.microsoft.com/office/drawing/2014/main" id="{2387A0C2-AEAD-A1F5-620B-F676A3226287}"/>
               </a:ext>
             </a:extLst>
           </p:cNvPr>
@@ -3449,7 +3472,7 @@
           <p:cNvPr id="4" name="Slide Number Placeholder 3">
             <a:extLst>
               <a:ext uri="{FF2B5EF4-FFF2-40B4-BE49-F238E27FC236}">
-                <a16:creationId xmlns:a16="http://schemas.microsoft.com/office/drawing/2014/main" id="{AD7CADB8-8989-063C-C59D-CF6112D3DD5F}"/>
+                <a16:creationId xmlns:a16="http://schemas.microsoft.com/office/drawing/2014/main" id="{C4A4F8B8-422C-1CC1-6896-5CE9BA249346}"/>
               </a:ext>
             </a:extLst>
           </p:cNvPr>
@@ -3536,7 +3559,7 @@
     </p:spTree>
     <p:extLst>
       <p:ext uri="{BB962C8B-B14F-4D97-AF65-F5344CB8AC3E}">
-        <p14:creationId xmlns:p14="http://schemas.microsoft.com/office/powerpoint/2010/main" val="3747576725"/>
+        <p14:creationId xmlns:p14="http://schemas.microsoft.com/office/powerpoint/2010/main" val="2132109679"/>
       </p:ext>
     </p:extLst>
   </p:cSld>
@@ -3554,7 +3577,7 @@
         <p:cNvPr id="1" name="">
           <a:extLst>
             <a:ext uri="{FF2B5EF4-FFF2-40B4-BE49-F238E27FC236}">
-              <a16:creationId xmlns:a16="http://schemas.microsoft.com/office/drawing/2014/main" id="{58A1E6EB-47E5-3D8F-806E-6D3ABF75492D}"/>
+              <a16:creationId xmlns:a16="http://schemas.microsoft.com/office/drawing/2014/main" id="{27E3851A-28DE-1D37-691E-C40AF3C00FD2}"/>
             </a:ext>
           </a:extLst>
         </p:cNvPr>
@@ -3574,7 +3597,7 @@
           <p:cNvPr id="2" name="Slide Image Placeholder 1">
             <a:extLst>
               <a:ext uri="{FF2B5EF4-FFF2-40B4-BE49-F238E27FC236}">
-                <a16:creationId xmlns:a16="http://schemas.microsoft.com/office/drawing/2014/main" id="{09BD1E1D-26B8-4DD4-1D22-A733CAFEC05E}"/>
+                <a16:creationId xmlns:a16="http://schemas.microsoft.com/office/drawing/2014/main" id="{26BDCFC6-C116-1055-08CD-36344CDCD59E}"/>
               </a:ext>
             </a:extLst>
           </p:cNvPr>
@@ -3592,7 +3615,7 @@
           <p:cNvPr id="3" name="Notes Placeholder 2">
             <a:extLst>
               <a:ext uri="{FF2B5EF4-FFF2-40B4-BE49-F238E27FC236}">
-                <a16:creationId xmlns:a16="http://schemas.microsoft.com/office/drawing/2014/main" id="{2387A0C2-AEAD-A1F5-620B-F676A3226287}"/>
+                <a16:creationId xmlns:a16="http://schemas.microsoft.com/office/drawing/2014/main" id="{194E23F2-9099-5C16-F684-A9F19247A78B}"/>
               </a:ext>
             </a:extLst>
           </p:cNvPr>
@@ -3624,7 +3647,7 @@
           <p:cNvPr id="4" name="Slide Number Placeholder 3">
             <a:extLst>
               <a:ext uri="{FF2B5EF4-FFF2-40B4-BE49-F238E27FC236}">
-                <a16:creationId xmlns:a16="http://schemas.microsoft.com/office/drawing/2014/main" id="{C4A4F8B8-422C-1CC1-6896-5CE9BA249346}"/>
+                <a16:creationId xmlns:a16="http://schemas.microsoft.com/office/drawing/2014/main" id="{90EDFD61-0969-DA35-AB64-B317AD46F257}"/>
               </a:ext>
             </a:extLst>
           </p:cNvPr>
@@ -3711,7 +3734,7 @@
     </p:spTree>
     <p:extLst>
       <p:ext uri="{BB962C8B-B14F-4D97-AF65-F5344CB8AC3E}">
-        <p14:creationId xmlns:p14="http://schemas.microsoft.com/office/powerpoint/2010/main" val="2132109679"/>
+        <p14:creationId xmlns:p14="http://schemas.microsoft.com/office/powerpoint/2010/main" val="658268153"/>
       </p:ext>
     </p:extLst>
   </p:cSld>
@@ -3726,13 +3749,7 @@
   <p:cSld>
     <p:spTree>
       <p:nvGrpSpPr>
-        <p:cNvPr id="1" name="">
-          <a:extLst>
-            <a:ext uri="{FF2B5EF4-FFF2-40B4-BE49-F238E27FC236}">
-              <a16:creationId xmlns:a16="http://schemas.microsoft.com/office/drawing/2014/main" id="{27E3851A-28DE-1D37-691E-C40AF3C00FD2}"/>
-            </a:ext>
-          </a:extLst>
-        </p:cNvPr>
+        <p:cNvPr id="1" name=""/>
         <p:cNvGrpSpPr/>
         <p:nvPr/>
       </p:nvGrpSpPr>
@@ -3746,13 +3763,7 @@
       </p:grpSpPr>
       <p:sp>
         <p:nvSpPr>
-          <p:cNvPr id="2" name="Slide Image Placeholder 1">
-            <a:extLst>
-              <a:ext uri="{FF2B5EF4-FFF2-40B4-BE49-F238E27FC236}">
-                <a16:creationId xmlns:a16="http://schemas.microsoft.com/office/drawing/2014/main" id="{26BDCFC6-C116-1055-08CD-36344CDCD59E}"/>
-              </a:ext>
-            </a:extLst>
-          </p:cNvPr>
+          <p:cNvPr id="2" name="Slide Image Placeholder 1"/>
           <p:cNvSpPr>
             <a:spLocks noGrp="1" noRot="1" noChangeAspect="1"/>
           </p:cNvSpPr>
@@ -3764,13 +3775,7 @@
       </p:sp>
       <p:sp>
         <p:nvSpPr>
-          <p:cNvPr id="3" name="Notes Placeholder 2">
-            <a:extLst>
-              <a:ext uri="{FF2B5EF4-FFF2-40B4-BE49-F238E27FC236}">
-                <a16:creationId xmlns:a16="http://schemas.microsoft.com/office/drawing/2014/main" id="{194E23F2-9099-5C16-F684-A9F19247A78B}"/>
-              </a:ext>
-            </a:extLst>
-          </p:cNvPr>
+          <p:cNvPr id="3" name="Notes Placeholder 2"/>
           <p:cNvSpPr>
             <a:spLocks noGrp="1"/>
           </p:cNvSpPr>
@@ -3796,13 +3801,7 @@
       </p:sp>
       <p:sp>
         <p:nvSpPr>
-          <p:cNvPr id="4" name="Slide Number Placeholder 3">
-            <a:extLst>
-              <a:ext uri="{FF2B5EF4-FFF2-40B4-BE49-F238E27FC236}">
-                <a16:creationId xmlns:a16="http://schemas.microsoft.com/office/drawing/2014/main" id="{90EDFD61-0969-DA35-AB64-B317AD46F257}"/>
-              </a:ext>
-            </a:extLst>
-          </p:cNvPr>
+          <p:cNvPr id="4" name="Slide Number Placeholder 3"/>
           <p:cNvSpPr>
             <a:spLocks noGrp="1"/>
           </p:cNvSpPr>
@@ -3886,7 +3885,7 @@
     </p:spTree>
     <p:extLst>
       <p:ext uri="{BB962C8B-B14F-4D97-AF65-F5344CB8AC3E}">
-        <p14:creationId xmlns:p14="http://schemas.microsoft.com/office/powerpoint/2010/main" val="658268153"/>
+        <p14:creationId xmlns:p14="http://schemas.microsoft.com/office/powerpoint/2010/main" val="2467873718"/>
       </p:ext>
     </p:extLst>
   </p:cSld>
@@ -4130,7 +4129,7 @@
     </p:spTree>
     <p:extLst>
       <p:ext uri="{BB962C8B-B14F-4D97-AF65-F5344CB8AC3E}">
-        <p14:creationId xmlns:p14="http://schemas.microsoft.com/office/powerpoint/2010/main" val="2467873718"/>
+        <p14:creationId xmlns:p14="http://schemas.microsoft.com/office/powerpoint/2010/main" val="1868775921"/>
       </p:ext>
     </p:extLst>
   </p:cSld>
@@ -4281,7 +4280,7 @@
     </p:spTree>
     <p:extLst>
       <p:ext uri="{BB962C8B-B14F-4D97-AF65-F5344CB8AC3E}">
-        <p14:creationId xmlns:p14="http://schemas.microsoft.com/office/powerpoint/2010/main" val="1868775921"/>
+        <p14:creationId xmlns:p14="http://schemas.microsoft.com/office/powerpoint/2010/main" val="554930333"/>
       </p:ext>
     </p:extLst>
   </p:cSld>
@@ -4432,7 +4431,7 @@
     </p:spTree>
     <p:extLst>
       <p:ext uri="{BB962C8B-B14F-4D97-AF65-F5344CB8AC3E}">
-        <p14:creationId xmlns:p14="http://schemas.microsoft.com/office/powerpoint/2010/main" val="554930333"/>
+        <p14:creationId xmlns:p14="http://schemas.microsoft.com/office/powerpoint/2010/main" val="3059179596"/>
       </p:ext>
     </p:extLst>
   </p:cSld>
@@ -4487,12 +4486,8 @@
           <a:lstStyle/>
           <a:p>
             <a:r>
-              <a:rPr lang="en-US" dirty="0" err="1"/>
-              <a:t>Psuedocode</a:t>
-            </a:r>
-            <a:r>
               <a:rPr lang="en-US" dirty="0"/>
-              <a:t> and code</a:t>
+              <a:t>Space: O1, Time n2</a:t>
             </a:r>
           </a:p>
         </p:txBody>
@@ -4583,153 +4578,6 @@
     </p:spTree>
     <p:extLst>
       <p:ext uri="{BB962C8B-B14F-4D97-AF65-F5344CB8AC3E}">
-        <p14:creationId xmlns:p14="http://schemas.microsoft.com/office/powerpoint/2010/main" val="3059179596"/>
-      </p:ext>
-    </p:extLst>
-  </p:cSld>
-  <p:clrMapOvr>
-    <a:masterClrMapping/>
-  </p:clrMapOvr>
-</p:notes>
-</file>
-
-<file path=ppt/notesSlides/notesSlide34.xml><?xml version="1.0" encoding="utf-8"?>
-<p:notes xmlns:a="http://schemas.openxmlformats.org/drawingml/2006/main" xmlns:r="http://schemas.openxmlformats.org/officeDocument/2006/relationships" xmlns:p="http://schemas.openxmlformats.org/presentationml/2006/main">
-  <p:cSld>
-    <p:spTree>
-      <p:nvGrpSpPr>
-        <p:cNvPr id="1" name=""/>
-        <p:cNvGrpSpPr/>
-        <p:nvPr/>
-      </p:nvGrpSpPr>
-      <p:grpSpPr>
-        <a:xfrm>
-          <a:off x="0" y="0"/>
-          <a:ext cx="0" cy="0"/>
-          <a:chOff x="0" y="0"/>
-          <a:chExt cx="0" cy="0"/>
-        </a:xfrm>
-      </p:grpSpPr>
-      <p:sp>
-        <p:nvSpPr>
-          <p:cNvPr id="2" name="Slide Image Placeholder 1"/>
-          <p:cNvSpPr>
-            <a:spLocks noGrp="1" noRot="1" noChangeAspect="1"/>
-          </p:cNvSpPr>
-          <p:nvPr>
-            <p:ph type="sldImg"/>
-          </p:nvPr>
-        </p:nvSpPr>
-        <p:spPr/>
-      </p:sp>
-      <p:sp>
-        <p:nvSpPr>
-          <p:cNvPr id="3" name="Notes Placeholder 2"/>
-          <p:cNvSpPr>
-            <a:spLocks noGrp="1"/>
-          </p:cNvSpPr>
-          <p:nvPr>
-            <p:ph type="body" idx="1"/>
-          </p:nvPr>
-        </p:nvSpPr>
-        <p:spPr/>
-        <p:txBody>
-          <a:bodyPr/>
-          <a:lstStyle/>
-          <a:p>
-            <a:r>
-              <a:rPr lang="en-US" dirty="0"/>
-              <a:t>Space: O1, Time n2</a:t>
-            </a:r>
-          </a:p>
-        </p:txBody>
-      </p:sp>
-      <p:sp>
-        <p:nvSpPr>
-          <p:cNvPr id="4" name="Slide Number Placeholder 3"/>
-          <p:cNvSpPr>
-            <a:spLocks noGrp="1"/>
-          </p:cNvSpPr>
-          <p:nvPr>
-            <p:ph type="sldNum" sz="quarter" idx="5"/>
-          </p:nvPr>
-        </p:nvSpPr>
-        <p:spPr/>
-        <p:txBody>
-          <a:bodyPr/>
-          <a:lstStyle/>
-          <a:p>
-            <a:pPr marL="0" marR="0" lvl="0" indent="0" algn="r" defTabSz="914400" rtl="0" eaLnBrk="1" fontAlgn="auto" latinLnBrk="0" hangingPunct="1">
-              <a:lnSpc>
-                <a:spcPct val="100000"/>
-              </a:lnSpc>
-              <a:spcBef>
-                <a:spcPts val="0"/>
-              </a:spcBef>
-              <a:spcAft>
-                <a:spcPts val="0"/>
-              </a:spcAft>
-              <a:buClrTx/>
-              <a:buSzTx/>
-              <a:buFontTx/>
-              <a:buNone/>
-              <a:tabLst/>
-              <a:defRPr/>
-            </a:pPr>
-            <a:fld id="{E2B3017C-A127-4C06-BF43-1875A8859C4B}" type="slidenum">
-              <a:rPr kumimoji="0" lang="en-US" sz="1200" b="0" i="0" u="none" strike="noStrike" kern="1200" cap="none" spc="0" normalizeH="0" baseline="0" noProof="0" smtClean="0">
-                <a:ln>
-                  <a:noFill/>
-                </a:ln>
-                <a:solidFill>
-                  <a:prstClr val="black"/>
-                </a:solidFill>
-                <a:effectLst/>
-                <a:uLnTx/>
-                <a:uFillTx/>
-                <a:latin typeface="Calibri" panose="020F0502020204030204"/>
-                <a:ea typeface="+mn-ea"/>
-                <a:cs typeface="+mn-cs"/>
-              </a:rPr>
-              <a:pPr marL="0" marR="0" lvl="0" indent="0" algn="r" defTabSz="914400" rtl="0" eaLnBrk="1" fontAlgn="auto" latinLnBrk="0" hangingPunct="1">
-                <a:lnSpc>
-                  <a:spcPct val="100000"/>
-                </a:lnSpc>
-                <a:spcBef>
-                  <a:spcPts val="0"/>
-                </a:spcBef>
-                <a:spcAft>
-                  <a:spcPts val="0"/>
-                </a:spcAft>
-                <a:buClrTx/>
-                <a:buSzTx/>
-                <a:buFontTx/>
-                <a:buNone/>
-                <a:tabLst/>
-                <a:defRPr/>
-              </a:pPr>
-              <a:t>34</a:t>
-            </a:fld>
-            <a:endParaRPr kumimoji="0" lang="en-US" sz="1200" b="0" i="0" u="none" strike="noStrike" kern="1200" cap="none" spc="0" normalizeH="0" baseline="0" noProof="0">
-              <a:ln>
-                <a:noFill/>
-              </a:ln>
-              <a:solidFill>
-                <a:prstClr val="black"/>
-              </a:solidFill>
-              <a:effectLst/>
-              <a:uLnTx/>
-              <a:uFillTx/>
-              <a:latin typeface="Calibri" panose="020F0502020204030204"/>
-              <a:ea typeface="+mn-ea"/>
-              <a:cs typeface="+mn-cs"/>
-            </a:endParaRPr>
-          </a:p>
-        </p:txBody>
-      </p:sp>
-    </p:spTree>
-    <p:extLst>
-      <p:ext uri="{BB962C8B-B14F-4D97-AF65-F5344CB8AC3E}">
         <p14:creationId xmlns:p14="http://schemas.microsoft.com/office/powerpoint/2010/main" val="1422712198"/>
       </p:ext>
     </p:extLst>
@@ -4838,13 +4686,7 @@
   <p:cSld>
     <p:spTree>
       <p:nvGrpSpPr>
-        <p:cNvPr id="1" name="">
-          <a:extLst>
-            <a:ext uri="{FF2B5EF4-FFF2-40B4-BE49-F238E27FC236}">
-              <a16:creationId xmlns:a16="http://schemas.microsoft.com/office/drawing/2014/main" id="{3C8FBBC6-E3B5-D2D4-5CD2-57C825FDEE9F}"/>
-            </a:ext>
-          </a:extLst>
-        </p:cNvPr>
+        <p:cNvPr id="1" name=""/>
         <p:cNvGrpSpPr/>
         <p:nvPr/>
       </p:nvGrpSpPr>
@@ -4858,13 +4700,7 @@
       </p:grpSpPr>
       <p:sp>
         <p:nvSpPr>
-          <p:cNvPr id="2" name="Slide Image Placeholder 1">
-            <a:extLst>
-              <a:ext uri="{FF2B5EF4-FFF2-40B4-BE49-F238E27FC236}">
-                <a16:creationId xmlns:a16="http://schemas.microsoft.com/office/drawing/2014/main" id="{5A0ACCBE-2350-1932-3534-AE296B00744E}"/>
-              </a:ext>
-            </a:extLst>
-          </p:cNvPr>
+          <p:cNvPr id="2" name="Slide Image Placeholder 1"/>
           <p:cNvSpPr>
             <a:spLocks noGrp="1" noRot="1" noChangeAspect="1"/>
           </p:cNvSpPr>
@@ -4876,13 +4712,7 @@
       </p:sp>
       <p:sp>
         <p:nvSpPr>
-          <p:cNvPr id="3" name="Notes Placeholder 2">
-            <a:extLst>
-              <a:ext uri="{FF2B5EF4-FFF2-40B4-BE49-F238E27FC236}">
-                <a16:creationId xmlns:a16="http://schemas.microsoft.com/office/drawing/2014/main" id="{C105B156-75CE-7E7E-7889-B308538BEEF1}"/>
-              </a:ext>
-            </a:extLst>
-          </p:cNvPr>
+          <p:cNvPr id="3" name="Notes Placeholder 2"/>
           <p:cNvSpPr>
             <a:spLocks noGrp="1"/>
           </p:cNvSpPr>
@@ -4896,27 +4726,19 @@
           <a:lstStyle/>
           <a:p>
             <a:r>
+              <a:rPr lang="en-US" dirty="0" err="1"/>
+              <a:t>Psuedocode</a:t>
+            </a:r>
+            <a:r>
               <a:rPr lang="en-US" dirty="0"/>
-              <a:t>Discussed, touched upon, went over, covered</a:t>
-            </a:r>
-          </a:p>
-          <a:p>
-            <a:r>
-              <a:rPr lang="en-US" dirty="0"/>
-              <a:t>Emerges out of the limitations offered by our second approach</a:t>
-            </a:r>
-          </a:p>
-        </p:txBody>
-      </p:sp>
-      <p:sp>
-        <p:nvSpPr>
-          <p:cNvPr id="4" name="Slide Number Placeholder 3">
-            <a:extLst>
-              <a:ext uri="{FF2B5EF4-FFF2-40B4-BE49-F238E27FC236}">
-                <a16:creationId xmlns:a16="http://schemas.microsoft.com/office/drawing/2014/main" id="{0C97CAF3-6029-94D9-2368-66F9D3141EA9}"/>
-              </a:ext>
-            </a:extLst>
-          </p:cNvPr>
+              <a:t> and code</a:t>
+            </a:r>
+          </a:p>
+        </p:txBody>
+      </p:sp>
+      <p:sp>
+        <p:nvSpPr>
+          <p:cNvPr id="4" name="Slide Number Placeholder 3"/>
           <p:cNvSpPr>
             <a:spLocks noGrp="1"/>
           </p:cNvSpPr>
@@ -4929,18 +4751,78 @@
           <a:bodyPr/>
           <a:lstStyle/>
           <a:p>
+            <a:pPr marL="0" marR="0" lvl="0" indent="0" algn="r" defTabSz="914400" rtl="0" eaLnBrk="1" fontAlgn="auto" latinLnBrk="0" hangingPunct="1">
+              <a:lnSpc>
+                <a:spcPct val="100000"/>
+              </a:lnSpc>
+              <a:spcBef>
+                <a:spcPts val="0"/>
+              </a:spcBef>
+              <a:spcAft>
+                <a:spcPts val="0"/>
+              </a:spcAft>
+              <a:buClrTx/>
+              <a:buSzTx/>
+              <a:buFontTx/>
+              <a:buNone/>
+              <a:tabLst/>
+              <a:defRPr/>
+            </a:pPr>
             <a:fld id="{E2B3017C-A127-4C06-BF43-1875A8859C4B}" type="slidenum">
-              <a:rPr lang="en-US" smtClean="0"/>
+              <a:rPr kumimoji="0" lang="en-US" sz="1200" b="0" i="0" u="none" strike="noStrike" kern="1200" cap="none" spc="0" normalizeH="0" baseline="0" noProof="0" smtClean="0">
+                <a:ln>
+                  <a:noFill/>
+                </a:ln>
+                <a:solidFill>
+                  <a:prstClr val="black"/>
+                </a:solidFill>
+                <a:effectLst/>
+                <a:uLnTx/>
+                <a:uFillTx/>
+                <a:latin typeface="Calibri" panose="020F0502020204030204"/>
+                <a:ea typeface="+mn-ea"/>
+                <a:cs typeface="+mn-cs"/>
+              </a:rPr>
+              <a:pPr marL="0" marR="0" lvl="0" indent="0" algn="r" defTabSz="914400" rtl="0" eaLnBrk="1" fontAlgn="auto" latinLnBrk="0" hangingPunct="1">
+                <a:lnSpc>
+                  <a:spcPct val="100000"/>
+                </a:lnSpc>
+                <a:spcBef>
+                  <a:spcPts val="0"/>
+                </a:spcBef>
+                <a:spcAft>
+                  <a:spcPts val="0"/>
+                </a:spcAft>
+                <a:buClrTx/>
+                <a:buSzTx/>
+                <a:buFontTx/>
+                <a:buNone/>
+                <a:tabLst/>
+                <a:defRPr/>
+              </a:pPr>
               <a:t>5</a:t>
             </a:fld>
-            <a:endParaRPr lang="en-US"/>
+            <a:endParaRPr kumimoji="0" lang="en-US" sz="1200" b="0" i="0" u="none" strike="noStrike" kern="1200" cap="none" spc="0" normalizeH="0" baseline="0" noProof="0">
+              <a:ln>
+                <a:noFill/>
+              </a:ln>
+              <a:solidFill>
+                <a:prstClr val="black"/>
+              </a:solidFill>
+              <a:effectLst/>
+              <a:uLnTx/>
+              <a:uFillTx/>
+              <a:latin typeface="Calibri" panose="020F0502020204030204"/>
+              <a:ea typeface="+mn-ea"/>
+              <a:cs typeface="+mn-cs"/>
+            </a:endParaRPr>
           </a:p>
         </p:txBody>
       </p:sp>
     </p:spTree>
     <p:extLst>
       <p:ext uri="{BB962C8B-B14F-4D97-AF65-F5344CB8AC3E}">
-        <p14:creationId xmlns:p14="http://schemas.microsoft.com/office/powerpoint/2010/main" val="1581212327"/>
+        <p14:creationId xmlns:p14="http://schemas.microsoft.com/office/powerpoint/2010/main" val="1599246421"/>
       </p:ext>
     </p:extLst>
   </p:cSld>
@@ -5091,7 +4973,7 @@
     </p:spTree>
     <p:extLst>
       <p:ext uri="{BB962C8B-B14F-4D97-AF65-F5344CB8AC3E}">
-        <p14:creationId xmlns:p14="http://schemas.microsoft.com/office/powerpoint/2010/main" val="1599246421"/>
+        <p14:creationId xmlns:p14="http://schemas.microsoft.com/office/powerpoint/2010/main" val="933738657"/>
       </p:ext>
     </p:extLst>
   </p:cSld>
@@ -5242,7 +5124,7 @@
     </p:spTree>
     <p:extLst>
       <p:ext uri="{BB962C8B-B14F-4D97-AF65-F5344CB8AC3E}">
-        <p14:creationId xmlns:p14="http://schemas.microsoft.com/office/powerpoint/2010/main" val="933738657"/>
+        <p14:creationId xmlns:p14="http://schemas.microsoft.com/office/powerpoint/2010/main" val="1723869126"/>
       </p:ext>
     </p:extLst>
   </p:cSld>
@@ -5393,7 +5275,7 @@
     </p:spTree>
     <p:extLst>
       <p:ext uri="{BB962C8B-B14F-4D97-AF65-F5344CB8AC3E}">
-        <p14:creationId xmlns:p14="http://schemas.microsoft.com/office/powerpoint/2010/main" val="1723869126"/>
+        <p14:creationId xmlns:p14="http://schemas.microsoft.com/office/powerpoint/2010/main" val="6819268"/>
       </p:ext>
     </p:extLst>
   </p:cSld>
@@ -5544,7 +5426,7 @@
     </p:spTree>
     <p:extLst>
       <p:ext uri="{BB962C8B-B14F-4D97-AF65-F5344CB8AC3E}">
-        <p14:creationId xmlns:p14="http://schemas.microsoft.com/office/powerpoint/2010/main" val="6819268"/>
+        <p14:creationId xmlns:p14="http://schemas.microsoft.com/office/powerpoint/2010/main" val="3728816664"/>
       </p:ext>
     </p:extLst>
   </p:cSld>
@@ -5685,7 +5567,7 @@
           <a:p>
             <a:fld id="{F8616885-9ED8-4298-9149-C5A410E7F61A}" type="datetime1">
               <a:rPr lang="en-US" smtClean="0"/>
-              <a:t>2/24/2026</a:t>
+              <a:t>6/15/2026</a:t>
             </a:fld>
             <a:endParaRPr lang="en-US"/>
           </a:p>
@@ -5855,7 +5737,7 @@
           <a:p>
             <a:fld id="{46647952-6535-4065-B4F6-C94B3D00772F}" type="datetime1">
               <a:rPr lang="en-US" smtClean="0"/>
-              <a:t>2/24/2026</a:t>
+              <a:t>6/15/2026</a:t>
             </a:fld>
             <a:endParaRPr lang="en-US"/>
           </a:p>
@@ -6035,7 +5917,7 @@
           <a:p>
             <a:fld id="{63870D39-F97D-4ECC-909C-35255E9A37F7}" type="datetime1">
               <a:rPr lang="en-US" smtClean="0"/>
-              <a:t>2/24/2026</a:t>
+              <a:t>6/15/2026</a:t>
             </a:fld>
             <a:endParaRPr lang="en-US"/>
           </a:p>
@@ -6227,7 +6109,7 @@
           <a:p>
             <a:fld id="{38C9C2D7-406E-45EE-9F57-B83131B49240}" type="datetimeFigureOut">
               <a:rPr lang="en-US" smtClean="0"/>
-              <a:t>2/24/2026</a:t>
+              <a:t>6/15/2026</a:t>
             </a:fld>
             <a:endParaRPr lang="en-US"/>
           </a:p>
@@ -6397,7 +6279,7 @@
           <a:p>
             <a:fld id="{38C9C2D7-406E-45EE-9F57-B83131B49240}" type="datetimeFigureOut">
               <a:rPr lang="en-US" smtClean="0"/>
-              <a:t>2/24/2026</a:t>
+              <a:t>6/15/2026</a:t>
             </a:fld>
             <a:endParaRPr lang="en-US"/>
           </a:p>
@@ -6643,7 +6525,7 @@
           <a:p>
             <a:fld id="{38C9C2D7-406E-45EE-9F57-B83131B49240}" type="datetimeFigureOut">
               <a:rPr lang="en-US" smtClean="0"/>
-              <a:t>2/24/2026</a:t>
+              <a:t>6/15/2026</a:t>
             </a:fld>
             <a:endParaRPr lang="en-US"/>
           </a:p>
@@ -6875,7 +6757,7 @@
           <a:p>
             <a:fld id="{38C9C2D7-406E-45EE-9F57-B83131B49240}" type="datetimeFigureOut">
               <a:rPr lang="en-US" smtClean="0"/>
-              <a:t>2/24/2026</a:t>
+              <a:t>6/15/2026</a:t>
             </a:fld>
             <a:endParaRPr lang="en-US"/>
           </a:p>
@@ -7242,7 +7124,7 @@
           <a:p>
             <a:fld id="{38C9C2D7-406E-45EE-9F57-B83131B49240}" type="datetimeFigureOut">
               <a:rPr lang="en-US" smtClean="0"/>
-              <a:t>2/24/2026</a:t>
+              <a:t>6/15/2026</a:t>
             </a:fld>
             <a:endParaRPr lang="en-US"/>
           </a:p>
@@ -7360,7 +7242,7 @@
           <a:p>
             <a:fld id="{38C9C2D7-406E-45EE-9F57-B83131B49240}" type="datetimeFigureOut">
               <a:rPr lang="en-US" smtClean="0"/>
-              <a:t>2/24/2026</a:t>
+              <a:t>6/15/2026</a:t>
             </a:fld>
             <a:endParaRPr lang="en-US"/>
           </a:p>
@@ -7455,7 +7337,7 @@
           <a:p>
             <a:fld id="{38C9C2D7-406E-45EE-9F57-B83131B49240}" type="datetimeFigureOut">
               <a:rPr lang="en-US" smtClean="0"/>
-              <a:t>2/24/2026</a:t>
+              <a:t>6/15/2026</a:t>
             </a:fld>
             <a:endParaRPr lang="en-US"/>
           </a:p>
@@ -7732,7 +7614,7 @@
           <a:p>
             <a:fld id="{38C9C2D7-406E-45EE-9F57-B83131B49240}" type="datetimeFigureOut">
               <a:rPr lang="en-US" smtClean="0"/>
-              <a:t>2/24/2026</a:t>
+              <a:t>6/15/2026</a:t>
             </a:fld>
             <a:endParaRPr lang="en-US"/>
           </a:p>
@@ -7902,7 +7784,7 @@
           <a:p>
             <a:fld id="{7325EFF0-82F5-4880-81B9-BC73A963ECC3}" type="datetime1">
               <a:rPr lang="en-US" smtClean="0"/>
-              <a:t>2/24/2026</a:t>
+              <a:t>6/15/2026</a:t>
             </a:fld>
             <a:endParaRPr lang="en-US"/>
           </a:p>
@@ -8159,7 +8041,7 @@
           <a:p>
             <a:fld id="{38C9C2D7-406E-45EE-9F57-B83131B49240}" type="datetimeFigureOut">
               <a:rPr lang="en-US" smtClean="0"/>
-              <a:t>2/24/2026</a:t>
+              <a:t>6/15/2026</a:t>
             </a:fld>
             <a:endParaRPr lang="en-US"/>
           </a:p>
@@ -8329,7 +8211,7 @@
           <a:p>
             <a:fld id="{38C9C2D7-406E-45EE-9F57-B83131B49240}" type="datetimeFigureOut">
               <a:rPr lang="en-US" smtClean="0"/>
-              <a:t>2/24/2026</a:t>
+              <a:t>6/15/2026</a:t>
             </a:fld>
             <a:endParaRPr lang="en-US"/>
           </a:p>
@@ -8509,7 +8391,7 @@
           <a:p>
             <a:fld id="{38C9C2D7-406E-45EE-9F57-B83131B49240}" type="datetimeFigureOut">
               <a:rPr lang="en-US" smtClean="0"/>
-              <a:t>2/24/2026</a:t>
+              <a:t>6/15/2026</a:t>
             </a:fld>
             <a:endParaRPr lang="en-US"/>
           </a:p>
@@ -8755,7 +8637,7 @@
           <a:p>
             <a:fld id="{5A946811-681C-4AC5-84B7-A52FB525DDA0}" type="datetime1">
               <a:rPr lang="en-US" smtClean="0"/>
-              <a:t>2/24/2026</a:t>
+              <a:t>6/15/2026</a:t>
             </a:fld>
             <a:endParaRPr lang="en-US"/>
           </a:p>
@@ -8987,7 +8869,7 @@
           <a:p>
             <a:fld id="{B26718EC-8AAB-4CFD-80CE-1D0FB821064C}" type="datetime1">
               <a:rPr lang="en-US" smtClean="0"/>
-              <a:t>2/24/2026</a:t>
+              <a:t>6/15/2026</a:t>
             </a:fld>
             <a:endParaRPr lang="en-US"/>
           </a:p>
@@ -9354,7 +9236,7 @@
           <a:p>
             <a:fld id="{B9FC400D-05DF-4711-8592-640F86665B5F}" type="datetime1">
               <a:rPr lang="en-US" smtClean="0"/>
-              <a:t>2/24/2026</a:t>
+              <a:t>6/15/2026</a:t>
             </a:fld>
             <a:endParaRPr lang="en-US"/>
           </a:p>
@@ -9472,7 +9354,7 @@
           <a:p>
             <a:fld id="{21DCA921-A295-445C-9DF4-D32E11171EBC}" type="datetime1">
               <a:rPr lang="en-US" smtClean="0"/>
-              <a:t>2/24/2026</a:t>
+              <a:t>6/15/2026</a:t>
             </a:fld>
             <a:endParaRPr lang="en-US"/>
           </a:p>
@@ -9567,7 +9449,7 @@
           <a:p>
             <a:fld id="{410F1947-2C73-49DA-BF00-06FEB90FBFE0}" type="datetime1">
               <a:rPr lang="en-US" smtClean="0"/>
-              <a:t>2/24/2026</a:t>
+              <a:t>6/15/2026</a:t>
             </a:fld>
             <a:endParaRPr lang="en-US"/>
           </a:p>
@@ -9844,7 +9726,7 @@
           <a:p>
             <a:fld id="{7909FA88-D630-40A8-A7C1-451FFA95718D}" type="datetime1">
               <a:rPr lang="en-US" smtClean="0"/>
-              <a:t>2/24/2026</a:t>
+              <a:t>6/15/2026</a:t>
             </a:fld>
             <a:endParaRPr lang="en-US"/>
           </a:p>
@@ -10101,7 +9983,7 @@
           <a:p>
             <a:fld id="{0B22107A-0A76-4A69-98CE-85E509F6FEC6}" type="datetime1">
               <a:rPr lang="en-US" smtClean="0"/>
-              <a:t>2/24/2026</a:t>
+              <a:t>6/15/2026</a:t>
             </a:fld>
             <a:endParaRPr lang="en-US"/>
           </a:p>
@@ -10314,7 +10196,7 @@
           <a:p>
             <a:fld id="{BFC3CE7D-A49F-42F1-B54B-0205BF41E480}" type="datetime1">
               <a:rPr lang="en-US" smtClean="0"/>
-              <a:t>2/24/2026</a:t>
+              <a:t>6/15/2026</a:t>
             </a:fld>
             <a:endParaRPr lang="en-US"/>
           </a:p>
@@ -10855,7 +10737,7 @@
           <a:p>
             <a:fld id="{38C9C2D7-406E-45EE-9F57-B83131B49240}" type="datetimeFigureOut">
               <a:rPr lang="en-US" smtClean="0"/>
-              <a:t>2/24/2026</a:t>
+              <a:t>6/15/2026</a:t>
             </a:fld>
             <a:endParaRPr lang="en-US"/>
           </a:p>
@@ -11484,14 +11366,16 @@
           </a:p>
           <a:p>
             <a:r>
-              <a:rPr lang="en-US" sz="2000" dirty="0" err="1">
+              <a:rPr lang="en-US" sz="2000" dirty="0">
                 <a:solidFill>
                   <a:srgbClr val="EB6E19"/>
                 </a:solidFill>
                 <a:latin typeface="Consolas" panose="020B0609020204030204" pitchFamily="49" charset="0"/>
               </a:rPr>
-              <a:t>int</a:t>
-            </a:r>
+              <a:t>int i = 1;</a:t>
+            </a:r>
+          </a:p>
+          <a:p>
             <a:r>
               <a:rPr lang="en-US" sz="2000" dirty="0">
                 <a:solidFill>
@@ -11499,7 +11383,7 @@
                 </a:solidFill>
                 <a:latin typeface="Consolas" panose="020B0609020204030204" pitchFamily="49" charset="0"/>
               </a:rPr>
-              <a:t> k;</a:t>
+              <a:t>while (i &lt; n)</a:t>
             </a:r>
           </a:p>
           <a:p>
@@ -11510,7 +11394,7 @@
                 </a:solidFill>
                 <a:latin typeface="Consolas" panose="020B0609020204030204" pitchFamily="49" charset="0"/>
               </a:rPr>
-              <a:t>for (int i=1; i &lt; n; i++)</a:t>
+              <a:t>{</a:t>
             </a:r>
           </a:p>
           <a:p>
@@ -11521,36 +11405,18 @@
                 </a:solidFill>
                 <a:latin typeface="Consolas" panose="020B0609020204030204" pitchFamily="49" charset="0"/>
               </a:rPr>
-              <a:t>	for (</a:t>
-            </a:r>
-            <a:r>
-              <a:rPr lang="en-US" sz="2000" dirty="0" err="1">
+              <a:t>   i = i * m;</a:t>
+            </a:r>
+          </a:p>
+          <a:p>
+            <a:r>
+              <a:rPr lang="en-US" sz="2000" dirty="0">
                 <a:solidFill>
                   <a:srgbClr val="EB6E19"/>
                 </a:solidFill>
                 <a:latin typeface="Consolas" panose="020B0609020204030204" pitchFamily="49" charset="0"/>
               </a:rPr>
-              <a:t>int</a:t>
-            </a:r>
-            <a:r>
-              <a:rPr lang="en-US" sz="2000" dirty="0">
-                <a:solidFill>
-                  <a:srgbClr val="EB6E19"/>
-                </a:solidFill>
-                <a:latin typeface="Consolas" panose="020B0609020204030204" pitchFamily="49" charset="0"/>
-              </a:rPr>
-              <a:t> j=n; j&gt;1; j=j/2)</a:t>
-            </a:r>
-          </a:p>
-          <a:p>
-            <a:r>
-              <a:rPr lang="en-US" sz="2000" dirty="0">
-                <a:solidFill>
-                  <a:srgbClr val="EB6E19"/>
-                </a:solidFill>
-                <a:latin typeface="Consolas" panose="020B0609020204030204" pitchFamily="49" charset="0"/>
-              </a:rPr>
-              <a:t>		k = i*j;</a:t>
+              <a:t>}</a:t>
             </a:r>
           </a:p>
           <a:p>
@@ -11577,41 +11443,12 @@
               <a:latin typeface="Consolas" panose="020B0609020204030204" pitchFamily="49" charset="0"/>
             </a:endParaRPr>
           </a:p>
-          <a:p>
-            <a:r>
-              <a:rPr lang="en-US" sz="2000" dirty="0">
-                <a:solidFill>
-                  <a:srgbClr val="00DA63"/>
-                </a:solidFill>
-                <a:latin typeface="Consolas" panose="020B0609020204030204" pitchFamily="49" charset="0"/>
-              </a:rPr>
-              <a:t>Answer: O(n log</a:t>
-            </a:r>
-            <a:r>
-              <a:rPr lang="en-US" sz="2000" baseline="-25000" dirty="0">
-                <a:solidFill>
-                  <a:srgbClr val="00DA63"/>
-                </a:solidFill>
-                <a:latin typeface="Consolas" panose="020B0609020204030204" pitchFamily="49" charset="0"/>
-              </a:rPr>
-              <a:t>2</a:t>
-            </a:r>
-            <a:r>
-              <a:rPr lang="en-US" sz="2000" dirty="0">
-                <a:solidFill>
-                  <a:srgbClr val="00DA63"/>
-                </a:solidFill>
-                <a:latin typeface="Consolas" panose="020B0609020204030204" pitchFamily="49" charset="0"/>
-              </a:rPr>
-              <a:t> n)</a:t>
-            </a:r>
-          </a:p>
         </p:txBody>
       </p:sp>
     </p:spTree>
     <p:extLst>
       <p:ext uri="{BB962C8B-B14F-4D97-AF65-F5344CB8AC3E}">
-        <p14:creationId xmlns:p14="http://schemas.microsoft.com/office/powerpoint/2010/main" val="2941247419"/>
+        <p14:creationId xmlns:p14="http://schemas.microsoft.com/office/powerpoint/2010/main" val="4086734313"/>
       </p:ext>
     </p:extLst>
   </p:cSld>
@@ -11696,7 +11533,7 @@
         <p:spPr>
           <a:xfrm>
             <a:off x="1039618" y="1828743"/>
-            <a:ext cx="9635971" cy="3170099"/>
+            <a:ext cx="9635971" cy="3477875"/>
           </a:xfrm>
           <a:prstGeom prst="rect">
             <a:avLst/>
@@ -11806,12 +11643,59 @@
               <a:latin typeface="Consolas" panose="020B0609020204030204" pitchFamily="49" charset="0"/>
             </a:endParaRPr>
           </a:p>
+          <a:p>
+            <a:r>
+              <a:rPr lang="en-US" sz="2000" dirty="0">
+                <a:solidFill>
+                  <a:srgbClr val="00DA63"/>
+                </a:solidFill>
+                <a:latin typeface="Consolas" panose="020B0609020204030204" pitchFamily="49" charset="0"/>
+              </a:rPr>
+              <a:t>Answer: O (</a:t>
+            </a:r>
+            <a:r>
+              <a:rPr lang="en-US" sz="2000" dirty="0" err="1">
+                <a:solidFill>
+                  <a:srgbClr val="00DA63"/>
+                </a:solidFill>
+                <a:latin typeface="Consolas" panose="020B0609020204030204" pitchFamily="49" charset="0"/>
+              </a:rPr>
+              <a:t>log</a:t>
+            </a:r>
+            <a:r>
+              <a:rPr lang="en-US" sz="2000" baseline="-25000" dirty="0" err="1">
+                <a:solidFill>
+                  <a:srgbClr val="00DA63"/>
+                </a:solidFill>
+                <a:latin typeface="Consolas" panose="020B0609020204030204" pitchFamily="49" charset="0"/>
+              </a:rPr>
+              <a:t>m</a:t>
+            </a:r>
+            <a:r>
+              <a:rPr lang="en-US" sz="2000" baseline="-25000" dirty="0">
+                <a:solidFill>
+                  <a:srgbClr val="00DA63"/>
+                </a:solidFill>
+                <a:latin typeface="Consolas" panose="020B0609020204030204" pitchFamily="49" charset="0"/>
+              </a:rPr>
+              <a:t> </a:t>
+            </a:r>
+            <a:r>
+              <a:rPr lang="en-US" sz="2000" dirty="0">
+                <a:solidFill>
+                  <a:srgbClr val="00DA63"/>
+                </a:solidFill>
+                <a:latin typeface="Consolas" panose="020B0609020204030204" pitchFamily="49" charset="0"/>
+              </a:rPr>
+              <a:t>n)</a:t>
+            </a:r>
+          </a:p>
         </p:txBody>
       </p:sp>
     </p:spTree>
     <p:extLst>
       <p:ext uri="{BB962C8B-B14F-4D97-AF65-F5344CB8AC3E}">
-        <p14:creationId xmlns:p14="http://schemas.microsoft.com/office/powerpoint/2010/main" val="4086734313"/>
+        <p14:creationId xmlns:p14="http://schemas.microsoft.com/office/powerpoint/2010/main" val="329785858"/>
       </p:ext>
     </p:extLst>
   </p:cSld>
@@ -11896,7 +11780,7 @@
         <p:spPr>
           <a:xfrm>
             <a:off x="1039618" y="1828743"/>
-            <a:ext cx="9635971" cy="3477875"/>
+            <a:ext cx="9635971" cy="2862322"/>
           </a:xfrm>
           <a:prstGeom prst="rect">
             <a:avLst/>
@@ -11935,7 +11819,7 @@
                 </a:solidFill>
                 <a:latin typeface="Consolas" panose="020B0609020204030204" pitchFamily="49" charset="0"/>
               </a:rPr>
-              <a:t>int i = 1;</a:t>
+              <a:t>result = 0</a:t>
             </a:r>
           </a:p>
           <a:p>
@@ -11946,7 +11830,7 @@
                 </a:solidFill>
                 <a:latin typeface="Consolas" panose="020B0609020204030204" pitchFamily="49" charset="0"/>
               </a:rPr>
-              <a:t>while (i &lt; n)</a:t>
+              <a:t>for (int i = 0; i &lt; n; i++)</a:t>
             </a:r>
           </a:p>
           <a:p>
@@ -11957,7 +11841,7 @@
                 </a:solidFill>
                 <a:latin typeface="Consolas" panose="020B0609020204030204" pitchFamily="49" charset="0"/>
               </a:rPr>
-              <a:t>{</a:t>
+              <a:t>  result += i;</a:t>
             </a:r>
           </a:p>
           <a:p>
@@ -11968,7 +11852,7 @@
                 </a:solidFill>
                 <a:latin typeface="Consolas" panose="020B0609020204030204" pitchFamily="49" charset="0"/>
               </a:rPr>
-              <a:t>   i = i * m;</a:t>
+              <a:t>for (int j = 1; j &lt; m; j *= 2)</a:t>
             </a:r>
           </a:p>
           <a:p>
@@ -11979,7 +11863,7 @@
                 </a:solidFill>
                 <a:latin typeface="Consolas" panose="020B0609020204030204" pitchFamily="49" charset="0"/>
               </a:rPr>
-              <a:t>}</a:t>
+              <a:t>  result *= j;</a:t>
             </a:r>
           </a:p>
           <a:p>
@@ -11998,67 +11882,12 @@
               <a:latin typeface="Consolas" panose="020B0609020204030204" pitchFamily="49" charset="0"/>
             </a:endParaRPr>
           </a:p>
-          <a:p>
-            <a:endParaRPr lang="en-US" sz="2000" dirty="0">
-              <a:solidFill>
-                <a:srgbClr val="EB6E19"/>
-              </a:solidFill>
-              <a:latin typeface="Consolas" panose="020B0609020204030204" pitchFamily="49" charset="0"/>
-            </a:endParaRPr>
-          </a:p>
-          <a:p>
-            <a:r>
-              <a:rPr lang="en-US" sz="2000" dirty="0">
-                <a:solidFill>
-                  <a:srgbClr val="00DA63"/>
-                </a:solidFill>
-                <a:latin typeface="Consolas" panose="020B0609020204030204" pitchFamily="49" charset="0"/>
-              </a:rPr>
-              <a:t>Answer: O (</a:t>
-            </a:r>
-            <a:r>
-              <a:rPr lang="en-US" sz="2000" dirty="0" err="1">
-                <a:solidFill>
-                  <a:srgbClr val="00DA63"/>
-                </a:solidFill>
-                <a:latin typeface="Consolas" panose="020B0609020204030204" pitchFamily="49" charset="0"/>
-              </a:rPr>
-              <a:t>log</a:t>
-            </a:r>
-            <a:r>
-              <a:rPr lang="en-US" sz="2000" baseline="-25000" dirty="0" err="1">
-                <a:solidFill>
-                  <a:srgbClr val="00DA63"/>
-                </a:solidFill>
-                <a:latin typeface="Consolas" panose="020B0609020204030204" pitchFamily="49" charset="0"/>
-              </a:rPr>
-              <a:t>m</a:t>
-            </a:r>
-            <a:r>
-              <a:rPr lang="en-US" sz="2000" baseline="-25000" dirty="0">
-                <a:solidFill>
-                  <a:srgbClr val="00DA63"/>
-                </a:solidFill>
-                <a:latin typeface="Consolas" panose="020B0609020204030204" pitchFamily="49" charset="0"/>
-              </a:rPr>
-              <a:t> </a:t>
-            </a:r>
-            <a:r>
-              <a:rPr lang="en-US" sz="2000" dirty="0">
-                <a:solidFill>
-                  <a:srgbClr val="00DA63"/>
-                </a:solidFill>
-                <a:latin typeface="Consolas" panose="020B0609020204030204" pitchFamily="49" charset="0"/>
-              </a:rPr>
-              <a:t>n)</a:t>
-            </a:r>
-          </a:p>
         </p:txBody>
       </p:sp>
     </p:spTree>
     <p:extLst>
       <p:ext uri="{BB962C8B-B14F-4D97-AF65-F5344CB8AC3E}">
-        <p14:creationId xmlns:p14="http://schemas.microsoft.com/office/powerpoint/2010/main" val="329785858"/>
+        <p14:creationId xmlns:p14="http://schemas.microsoft.com/office/powerpoint/2010/main" val="1688701363"/>
       </p:ext>
     </p:extLst>
   </p:cSld>
@@ -12143,7 +11972,7 @@
         <p:spPr>
           <a:xfrm>
             <a:off x="1039618" y="1828743"/>
-            <a:ext cx="9635971" cy="2862322"/>
+            <a:ext cx="9635971" cy="3170099"/>
           </a:xfrm>
           <a:prstGeom prst="rect">
             <a:avLst/>
@@ -12245,12 +12074,41 @@
               <a:latin typeface="Consolas" panose="020B0609020204030204" pitchFamily="49" charset="0"/>
             </a:endParaRPr>
           </a:p>
+          <a:p>
+            <a:r>
+              <a:rPr lang="en-US" sz="2000" dirty="0">
+                <a:solidFill>
+                  <a:srgbClr val="00DA63"/>
+                </a:solidFill>
+                <a:latin typeface="Consolas" panose="020B0609020204030204" pitchFamily="49" charset="0"/>
+              </a:rPr>
+              <a:t>Answer: O(n+log</a:t>
+            </a:r>
+            <a:r>
+              <a:rPr lang="en-US" sz="2000" baseline="-25000" dirty="0">
+                <a:solidFill>
+                  <a:srgbClr val="00DA63"/>
+                </a:solidFill>
+                <a:latin typeface="Consolas" panose="020B0609020204030204" pitchFamily="49" charset="0"/>
+              </a:rPr>
+              <a:t>2 </a:t>
+            </a:r>
+            <a:r>
+              <a:rPr lang="en-US" sz="2000" dirty="0">
+                <a:solidFill>
+                  <a:srgbClr val="00DA63"/>
+                </a:solidFill>
+                <a:latin typeface="Consolas" panose="020B0609020204030204" pitchFamily="49" charset="0"/>
+              </a:rPr>
+              <a:t>m)</a:t>
+            </a:r>
+          </a:p>
         </p:txBody>
       </p:sp>
     </p:spTree>
     <p:extLst>
       <p:ext uri="{BB962C8B-B14F-4D97-AF65-F5344CB8AC3E}">
-        <p14:creationId xmlns:p14="http://schemas.microsoft.com/office/powerpoint/2010/main" val="1688701363"/>
+        <p14:creationId xmlns:p14="http://schemas.microsoft.com/office/powerpoint/2010/main" val="2504223234"/>
       </p:ext>
     </p:extLst>
   </p:cSld>
@@ -12335,7 +12193,7 @@
         <p:spPr>
           <a:xfrm>
             <a:off x="1039618" y="1828743"/>
-            <a:ext cx="9635971" cy="3170099"/>
+            <a:ext cx="9635971" cy="2246769"/>
           </a:xfrm>
           <a:prstGeom prst="rect">
             <a:avLst/>
@@ -12374,7 +12232,7 @@
                 </a:solidFill>
                 <a:latin typeface="Consolas" panose="020B0609020204030204" pitchFamily="49" charset="0"/>
               </a:rPr>
-              <a:t>result = 0</a:t>
+              <a:t>for (int i=n; i&gt;0; i/=2)</a:t>
             </a:r>
           </a:p>
           <a:p>
@@ -12385,10 +12243,17 @@
                 </a:solidFill>
                 <a:latin typeface="Consolas" panose="020B0609020204030204" pitchFamily="49" charset="0"/>
               </a:rPr>
-              <a:t>for (int i = 0; i &lt; n; i++)</a:t>
-            </a:r>
-          </a:p>
-          <a:p>
+              <a:t>	for (int j=1; j&lt;i; </a:t>
+            </a:r>
+            <a:r>
+              <a:rPr lang="en-US" sz="2000" dirty="0" err="1">
+                <a:solidFill>
+                  <a:srgbClr val="EB6E19"/>
+                </a:solidFill>
+                <a:latin typeface="Consolas" panose="020B0609020204030204" pitchFamily="49" charset="0"/>
+              </a:rPr>
+              <a:t>j++</a:t>
+            </a:r>
             <a:r>
               <a:rPr lang="en-US" sz="2000" dirty="0">
                 <a:solidFill>
@@ -12396,7 +12261,7 @@
                 </a:solidFill>
                 <a:latin typeface="Consolas" panose="020B0609020204030204" pitchFamily="49" charset="0"/>
               </a:rPr>
-              <a:t>  result += i;</a:t>
+              <a:t>)</a:t>
             </a:r>
           </a:p>
           <a:p>
@@ -12407,18 +12272,7 @@
                 </a:solidFill>
                 <a:latin typeface="Consolas" panose="020B0609020204030204" pitchFamily="49" charset="0"/>
               </a:rPr>
-              <a:t>for (int j = 1; j &lt; m; j *= 2)</a:t>
-            </a:r>
-          </a:p>
-          <a:p>
-            <a:r>
-              <a:rPr lang="en-US" sz="2000" dirty="0">
-                <a:solidFill>
-                  <a:srgbClr val="EB6E19"/>
-                </a:solidFill>
-                <a:latin typeface="Consolas" panose="020B0609020204030204" pitchFamily="49" charset="0"/>
-              </a:rPr>
-              <a:t>  result *= j;</a:t>
+              <a:t>		sum = sum + 1;</a:t>
             </a:r>
           </a:p>
           <a:p>
@@ -12437,41 +12291,12 @@
               <a:latin typeface="Consolas" panose="020B0609020204030204" pitchFamily="49" charset="0"/>
             </a:endParaRPr>
           </a:p>
-          <a:p>
-            <a:r>
-              <a:rPr lang="en-US" sz="2000" dirty="0">
-                <a:solidFill>
-                  <a:srgbClr val="00DA63"/>
-                </a:solidFill>
-                <a:latin typeface="Consolas" panose="020B0609020204030204" pitchFamily="49" charset="0"/>
-              </a:rPr>
-              <a:t>Answer: O(n+log</a:t>
-            </a:r>
-            <a:r>
-              <a:rPr lang="en-US" sz="2000" baseline="-25000" dirty="0">
-                <a:solidFill>
-                  <a:srgbClr val="00DA63"/>
-                </a:solidFill>
-                <a:latin typeface="Consolas" panose="020B0609020204030204" pitchFamily="49" charset="0"/>
-              </a:rPr>
-              <a:t>2 </a:t>
-            </a:r>
-            <a:r>
-              <a:rPr lang="en-US" sz="2000" dirty="0">
-                <a:solidFill>
-                  <a:srgbClr val="00DA63"/>
-                </a:solidFill>
-                <a:latin typeface="Consolas" panose="020B0609020204030204" pitchFamily="49" charset="0"/>
-              </a:rPr>
-              <a:t>m)</a:t>
-            </a:r>
-          </a:p>
         </p:txBody>
       </p:sp>
     </p:spTree>
     <p:extLst>
       <p:ext uri="{BB962C8B-B14F-4D97-AF65-F5344CB8AC3E}">
-        <p14:creationId xmlns:p14="http://schemas.microsoft.com/office/powerpoint/2010/main" val="2504223234"/>
+        <p14:creationId xmlns:p14="http://schemas.microsoft.com/office/powerpoint/2010/main" val="1877007125"/>
       </p:ext>
     </p:extLst>
   </p:cSld>
@@ -12556,7 +12381,7 @@
         <p:spPr>
           <a:xfrm>
             <a:off x="1039618" y="1828743"/>
-            <a:ext cx="9635971" cy="2246769"/>
+            <a:ext cx="9635971" cy="2554545"/>
           </a:xfrm>
           <a:prstGeom prst="rect">
             <a:avLst/>
@@ -12654,12 +12479,23 @@
               <a:latin typeface="Consolas" panose="020B0609020204030204" pitchFamily="49" charset="0"/>
             </a:endParaRPr>
           </a:p>
+          <a:p>
+            <a:r>
+              <a:rPr lang="en-US" sz="2000" dirty="0">
+                <a:solidFill>
+                  <a:srgbClr val="00DA63"/>
+                </a:solidFill>
+                <a:latin typeface="Consolas" panose="020B0609020204030204" pitchFamily="49" charset="0"/>
+              </a:rPr>
+              <a:t>Answer: O(n)</a:t>
+            </a:r>
+          </a:p>
         </p:txBody>
       </p:sp>
     </p:spTree>
     <p:extLst>
       <p:ext uri="{BB962C8B-B14F-4D97-AF65-F5344CB8AC3E}">
-        <p14:creationId xmlns:p14="http://schemas.microsoft.com/office/powerpoint/2010/main" val="1877007125"/>
+        <p14:creationId xmlns:p14="http://schemas.microsoft.com/office/powerpoint/2010/main" val="2916700440"/>
       </p:ext>
     </p:extLst>
   </p:cSld>
@@ -12744,7 +12580,7 @@
         <p:spPr>
           <a:xfrm>
             <a:off x="1039618" y="1828743"/>
-            <a:ext cx="9635971" cy="2554545"/>
+            <a:ext cx="9212778" cy="2554545"/>
           </a:xfrm>
           <a:prstGeom prst="rect">
             <a:avLst/>
@@ -12764,7 +12600,7 @@
                 </a:solidFill>
                 <a:latin typeface="Consolas" panose="020B0609020204030204" pitchFamily="49" charset="0"/>
               </a:rPr>
-              <a:t>What is the computational complexity of the following code snippet?</a:t>
+              <a:t>Which code snippet will take less time to execute on a computer?</a:t>
             </a:r>
           </a:p>
           <a:p>
@@ -12783,18 +12619,38 @@
                 </a:solidFill>
                 <a:latin typeface="Consolas" panose="020B0609020204030204" pitchFamily="49" charset="0"/>
               </a:rPr>
-              <a:t>for (int i=n; i&gt;0; i/=2)</a:t>
-            </a:r>
-          </a:p>
-          <a:p>
+              <a:t>            </a:t>
+            </a:r>
             <a:r>
               <a:rPr lang="en-US" sz="2000" dirty="0">
                 <a:solidFill>
+                  <a:srgbClr val="00DA63"/>
+                </a:solidFill>
+                <a:latin typeface="Consolas" panose="020B0609020204030204" pitchFamily="49" charset="0"/>
+              </a:rPr>
+              <a:t> A                                    B</a:t>
+            </a:r>
+          </a:p>
+          <a:p>
+            <a:r>
+              <a:rPr lang="en-US" sz="2000" dirty="0">
+                <a:solidFill>
                   <a:srgbClr val="EB6E19"/>
                 </a:solidFill>
                 <a:latin typeface="Consolas" panose="020B0609020204030204" pitchFamily="49" charset="0"/>
               </a:rPr>
-              <a:t>	for (int j=1; j&lt;i; </a:t>
+              <a:t>for (int i=1; i &lt; n; i++)</a:t>
+            </a:r>
+          </a:p>
+          <a:p>
+            <a:r>
+              <a:rPr lang="en-US" sz="2000" dirty="0">
+                <a:solidFill>
+                  <a:srgbClr val="EB6E19"/>
+                </a:solidFill>
+                <a:latin typeface="Consolas" panose="020B0609020204030204" pitchFamily="49" charset="0"/>
+              </a:rPr>
+              <a:t>	for (int j=1; j &lt; n; </a:t>
             </a:r>
             <a:r>
               <a:rPr lang="en-US" sz="2000" dirty="0" err="1">
@@ -12842,15 +12698,84 @@
               <a:latin typeface="Consolas" panose="020B0609020204030204" pitchFamily="49" charset="0"/>
             </a:endParaRPr>
           </a:p>
-          <a:p>
-            <a:r>
-              <a:rPr lang="en-US" sz="2000" dirty="0">
-                <a:solidFill>
-                  <a:srgbClr val="00DA63"/>
-                </a:solidFill>
-                <a:latin typeface="Consolas" panose="020B0609020204030204" pitchFamily="49" charset="0"/>
-              </a:rPr>
-              <a:t>Answer: O(n)</a:t>
+        </p:txBody>
+      </p:sp>
+      <p:sp>
+        <p:nvSpPr>
+          <p:cNvPr id="7" name="TextBox 6">
+            <a:extLst>
+              <a:ext uri="{FF2B5EF4-FFF2-40B4-BE49-F238E27FC236}">
+                <a16:creationId xmlns:a16="http://schemas.microsoft.com/office/drawing/2014/main" id="{92A4DF68-D3B8-4D4F-85C6-D314CAD1A865}"/>
+              </a:ext>
+            </a:extLst>
+          </p:cNvPr>
+          <p:cNvSpPr txBox="1"/>
+          <p:nvPr/>
+        </p:nvSpPr>
+        <p:spPr>
+          <a:xfrm>
+            <a:off x="6353071" y="2798239"/>
+            <a:ext cx="6094324" cy="923330"/>
+          </a:xfrm>
+          <a:prstGeom prst="rect">
+            <a:avLst/>
+          </a:prstGeom>
+          <a:noFill/>
+        </p:spPr>
+        <p:txBody>
+          <a:bodyPr wrap="square">
+            <a:spAutoFit/>
+          </a:bodyPr>
+          <a:lstStyle/>
+          <a:p>
+            <a:r>
+              <a:rPr lang="en-US" sz="1800" dirty="0">
+                <a:solidFill>
+                  <a:srgbClr val="EB6E19"/>
+                </a:solidFill>
+                <a:latin typeface="Consolas" panose="020B0609020204030204" pitchFamily="49" charset="0"/>
+              </a:rPr>
+              <a:t>for (int i=1; i &lt; 2n; i++)</a:t>
+            </a:r>
+          </a:p>
+          <a:p>
+            <a:r>
+              <a:rPr lang="en-US" sz="1800" dirty="0">
+                <a:solidFill>
+                  <a:srgbClr val="EB6E19"/>
+                </a:solidFill>
+                <a:latin typeface="Consolas" panose="020B0609020204030204" pitchFamily="49" charset="0"/>
+              </a:rPr>
+              <a:t>	for (int j=1; j &lt; 2n; </a:t>
+            </a:r>
+            <a:r>
+              <a:rPr lang="en-US" sz="1800" dirty="0" err="1">
+                <a:solidFill>
+                  <a:srgbClr val="EB6E19"/>
+                </a:solidFill>
+                <a:latin typeface="Consolas" panose="020B0609020204030204" pitchFamily="49" charset="0"/>
+              </a:rPr>
+              <a:t>j++</a:t>
+            </a:r>
+            <a:r>
+              <a:rPr lang="en-US" sz="1800" dirty="0">
+                <a:solidFill>
+                  <a:srgbClr val="EB6E19"/>
+                </a:solidFill>
+                <a:latin typeface="Consolas" panose="020B0609020204030204" pitchFamily="49" charset="0"/>
+              </a:rPr>
+              <a:t>)</a:t>
+            </a:r>
+          </a:p>
+          <a:p>
+            <a:r>
+              <a:rPr lang="en-US" sz="1800" dirty="0">
+                <a:solidFill>
+                  <a:srgbClr val="EB6E19"/>
+                </a:solidFill>
+                <a:latin typeface="Consolas" panose="020B0609020204030204" pitchFamily="49" charset="0"/>
+              </a:rPr>
+              <a:t>		sum = sum + 1;</a:t>
             </a:r>
           </a:p>
         </p:txBody>
@@ -12858,7 +12783,7 @@
     </p:spTree>
     <p:extLst>
       <p:ext uri="{BB962C8B-B14F-4D97-AF65-F5344CB8AC3E}">
-        <p14:creationId xmlns:p14="http://schemas.microsoft.com/office/powerpoint/2010/main" val="2916700440"/>
+        <p14:creationId xmlns:p14="http://schemas.microsoft.com/office/powerpoint/2010/main" val="188823183"/>
       </p:ext>
     </p:extLst>
   </p:cSld>
@@ -12943,7 +12868,7 @@
         <p:spPr>
           <a:xfrm>
             <a:off x="1039618" y="1828743"/>
-            <a:ext cx="9212778" cy="2554545"/>
+            <a:ext cx="9212778" cy="2862322"/>
           </a:xfrm>
           <a:prstGeom prst="rect">
             <a:avLst/>
@@ -13060,6 +12985,17 @@
               </a:solidFill>
               <a:latin typeface="Consolas" panose="020B0609020204030204" pitchFamily="49" charset="0"/>
             </a:endParaRPr>
+          </a:p>
+          <a:p>
+            <a:r>
+              <a:rPr lang="en-US" sz="2000" dirty="0">
+                <a:solidFill>
+                  <a:srgbClr val="00DA63"/>
+                </a:solidFill>
+                <a:latin typeface="Consolas" panose="020B0609020204030204" pitchFamily="49" charset="0"/>
+              </a:rPr>
+              <a:t>Answer: A</a:t>
+            </a:r>
           </a:p>
         </p:txBody>
       </p:sp>
@@ -13146,7 +13082,7 @@
     </p:spTree>
     <p:extLst>
       <p:ext uri="{BB962C8B-B14F-4D97-AF65-F5344CB8AC3E}">
-        <p14:creationId xmlns:p14="http://schemas.microsoft.com/office/powerpoint/2010/main" val="188823183"/>
+        <p14:creationId xmlns:p14="http://schemas.microsoft.com/office/powerpoint/2010/main" val="1287381242"/>
       </p:ext>
     </p:extLst>
   </p:cSld>
@@ -13230,8 +13166,8 @@
         </p:nvSpPr>
         <p:spPr>
           <a:xfrm>
-            <a:off x="1039618" y="1828743"/>
-            <a:ext cx="9212778" cy="2862322"/>
+            <a:off x="1039619" y="1828743"/>
+            <a:ext cx="10515600" cy="2862322"/>
           </a:xfrm>
           <a:prstGeom prst="rect">
             <a:avLst/>
@@ -13239,7 +13175,7 @@
           <a:noFill/>
         </p:spPr>
         <p:txBody>
-          <a:bodyPr wrap="none" rtlCol="0">
+          <a:bodyPr wrap="square" rtlCol="0">
             <a:spAutoFit/>
           </a:bodyPr>
           <a:lstStyle/>
@@ -13251,7 +13187,25 @@
                 </a:solidFill>
                 <a:latin typeface="Consolas" panose="020B0609020204030204" pitchFamily="49" charset="0"/>
               </a:rPr>
-              <a:t>Which code snippet will take less time to execute on a computer?</a:t>
+              <a:t>Which code snippet will have a higher growth rate </a:t>
+            </a:r>
+            <a:r>
+              <a:rPr lang="en-US" sz="2000" dirty="0" err="1">
+                <a:solidFill>
+                  <a:srgbClr val="0081E2"/>
+                </a:solidFill>
+                <a:latin typeface="Consolas" panose="020B0609020204030204" pitchFamily="49" charset="0"/>
+              </a:rPr>
+              <a:t>asymtotically</a:t>
+            </a:r>
+            <a:r>
+              <a:rPr lang="en-US" sz="2000" dirty="0">
+                <a:solidFill>
+                  <a:srgbClr val="0081E2"/>
+                </a:solidFill>
+                <a:latin typeface="Consolas" panose="020B0609020204030204" pitchFamily="49" charset="0"/>
+              </a:rPr>
+              <a:t> in terms of Big O notation?</a:t>
             </a:r>
           </a:p>
           <a:p>
@@ -13348,17 +13302,6 @@
               </a:solidFill>
               <a:latin typeface="Consolas" panose="020B0609020204030204" pitchFamily="49" charset="0"/>
             </a:endParaRPr>
-          </a:p>
-          <a:p>
-            <a:r>
-              <a:rPr lang="en-US" sz="2000" dirty="0">
-                <a:solidFill>
-                  <a:srgbClr val="00DA63"/>
-                </a:solidFill>
-                <a:latin typeface="Consolas" panose="020B0609020204030204" pitchFamily="49" charset="0"/>
-              </a:rPr>
-              <a:t>Answer: A</a:t>
-            </a:r>
           </a:p>
         </p:txBody>
       </p:sp>
@@ -13376,7 +13319,7 @@
         </p:nvSpPr>
         <p:spPr>
           <a:xfrm>
-            <a:off x="6353071" y="2798239"/>
+            <a:off x="6297419" y="3059496"/>
             <a:ext cx="6094324" cy="923330"/>
           </a:xfrm>
           <a:prstGeom prst="rect">
@@ -13445,7 +13388,7 @@
     </p:spTree>
     <p:extLst>
       <p:ext uri="{BB962C8B-B14F-4D97-AF65-F5344CB8AC3E}">
-        <p14:creationId xmlns:p14="http://schemas.microsoft.com/office/powerpoint/2010/main" val="1287381242"/>
+        <p14:creationId xmlns:p14="http://schemas.microsoft.com/office/powerpoint/2010/main" val="1211821534"/>
       </p:ext>
     </p:extLst>
   </p:cSld>
@@ -13530,7 +13473,7 @@
         <p:spPr>
           <a:xfrm>
             <a:off x="1039619" y="1828743"/>
-            <a:ext cx="10515600" cy="2862322"/>
+            <a:ext cx="10515600" cy="3170099"/>
           </a:xfrm>
           <a:prstGeom prst="rect">
             <a:avLst/>
@@ -13550,25 +13493,7 @@
                 </a:solidFill>
                 <a:latin typeface="Consolas" panose="020B0609020204030204" pitchFamily="49" charset="0"/>
               </a:rPr>
-              <a:t>Which code snippet will have a higher growth rate </a:t>
-            </a:r>
-            <a:r>
-              <a:rPr lang="en-US" sz="2000" dirty="0" err="1">
-                <a:solidFill>
-                  <a:srgbClr val="0081E2"/>
-                </a:solidFill>
-                <a:latin typeface="Consolas" panose="020B0609020204030204" pitchFamily="49" charset="0"/>
-              </a:rPr>
-              <a:t>asymtotically</a:t>
-            </a:r>
-            <a:r>
-              <a:rPr lang="en-US" sz="2000" dirty="0">
-                <a:solidFill>
-                  <a:srgbClr val="0081E2"/>
-                </a:solidFill>
-                <a:latin typeface="Consolas" panose="020B0609020204030204" pitchFamily="49" charset="0"/>
-              </a:rPr>
-              <a:t> in terms of Big O notation?</a:t>
+              <a:t>Which code snippet will have a higher growth rate asymptotically in terms of Big O notation?</a:t>
             </a:r>
           </a:p>
           <a:p>
@@ -13662,6 +13587,32 @@
             <a:endParaRPr lang="en-US" sz="2000" dirty="0">
               <a:solidFill>
                 <a:srgbClr val="EB6E19"/>
+              </a:solidFill>
+              <a:latin typeface="Consolas" panose="020B0609020204030204" pitchFamily="49" charset="0"/>
+            </a:endParaRPr>
+          </a:p>
+          <a:p>
+            <a:r>
+              <a:rPr lang="en-US" sz="2000" dirty="0">
+                <a:solidFill>
+                  <a:srgbClr val="00DA63"/>
+                </a:solidFill>
+                <a:latin typeface="Consolas" panose="020B0609020204030204" pitchFamily="49" charset="0"/>
+              </a:rPr>
+              <a:t>Answer: A and B grow at the same rate </a:t>
+            </a:r>
+            <a:r>
+              <a:rPr lang="en-US" sz="2000" dirty="0" err="1">
+                <a:solidFill>
+                  <a:srgbClr val="00DA63"/>
+                </a:solidFill>
+                <a:latin typeface="Consolas" panose="020B0609020204030204" pitchFamily="49" charset="0"/>
+              </a:rPr>
+              <a:t>asymtotically</a:t>
+            </a:r>
+            <a:endParaRPr lang="en-US" sz="2000" dirty="0">
+              <a:solidFill>
+                <a:srgbClr val="00DA63"/>
               </a:solidFill>
               <a:latin typeface="Consolas" panose="020B0609020204030204" pitchFamily="49" charset="0"/>
             </a:endParaRPr>
@@ -13751,7 +13702,7 @@
     </p:spTree>
     <p:extLst>
       <p:ext uri="{BB962C8B-B14F-4D97-AF65-F5344CB8AC3E}">
-        <p14:creationId xmlns:p14="http://schemas.microsoft.com/office/powerpoint/2010/main" val="1211821534"/>
+        <p14:creationId xmlns:p14="http://schemas.microsoft.com/office/powerpoint/2010/main" val="2651317974"/>
       </p:ext>
     </p:extLst>
   </p:cSld>
@@ -14805,7 +14756,7 @@
             </a:ln>
             <a:extLst>
               <a:ext uri="{909E8E84-426E-40dd-AFC4-6F175D3DCCD1}">
-                <a14:hiddenFill xmlns="" xmlns:a14="http://schemas.microsoft.com/office/drawing/2010/main">
+                <a14:hiddenFill xmlns:a14="http://schemas.microsoft.com/office/drawing/2010/main" xmlns="">
                   <a:noFill/>
                 </a14:hiddenFill>
               </a:ext>
@@ -14847,7 +14798,7 @@
             </a:ln>
             <a:extLst>
               <a:ext uri="{909E8E84-426E-40dd-AFC4-6F175D3DCCD1}">
-                <a14:hiddenFill xmlns="" xmlns:a14="http://schemas.microsoft.com/office/drawing/2010/main">
+                <a14:hiddenFill xmlns:a14="http://schemas.microsoft.com/office/drawing/2010/main" xmlns="">
                   <a:noFill/>
                 </a14:hiddenFill>
               </a:ext>
@@ -15211,7 +15162,7 @@
             </a:ln>
             <a:extLst>
               <a:ext uri="{909E8E84-426E-40dd-AFC4-6F175D3DCCD1}">
-                <a14:hiddenFill xmlns="" xmlns:a14="http://schemas.microsoft.com/office/drawing/2010/main">
+                <a14:hiddenFill xmlns:a14="http://schemas.microsoft.com/office/drawing/2010/main" xmlns="">
                   <a:noFill/>
                 </a14:hiddenFill>
               </a:ext>
@@ -15256,7 +15207,7 @@
             </a:ln>
             <a:extLst>
               <a:ext uri="{909E8E84-426E-40dd-AFC4-6F175D3DCCD1}">
-                <a14:hiddenFill xmlns="" xmlns:a14="http://schemas.microsoft.com/office/drawing/2010/main">
+                <a14:hiddenFill xmlns:a14="http://schemas.microsoft.com/office/drawing/2010/main" xmlns="">
                   <a:noFill/>
                 </a14:hiddenFill>
               </a:ext>
@@ -15301,7 +15252,7 @@
             </a:ln>
             <a:extLst>
               <a:ext uri="{909E8E84-426E-40dd-AFC4-6F175D3DCCD1}">
-                <a14:hiddenFill xmlns="" xmlns:a14="http://schemas.microsoft.com/office/drawing/2010/main">
+                <a14:hiddenFill xmlns:a14="http://schemas.microsoft.com/office/drawing/2010/main" xmlns="">
                   <a:noFill/>
                 </a14:hiddenFill>
               </a:ext>
@@ -15345,7 +15296,7 @@
             </a:ln>
             <a:extLst>
               <a:ext uri="{909E8E84-426E-40dd-AFC4-6F175D3DCCD1}">
-                <a14:hiddenFill xmlns="" xmlns:a14="http://schemas.microsoft.com/office/drawing/2010/main">
+                <a14:hiddenFill xmlns:a14="http://schemas.microsoft.com/office/drawing/2010/main" xmlns="">
                   <a:noFill/>
                 </a14:hiddenFill>
               </a:ext>
@@ -15421,256 +15372,268 @@
                 </a:solidFill>
                 <a:latin typeface="Gotham Bold" pitchFamily="50" charset="0"/>
               </a:rPr>
-              <a:t>Mini Review – Complexity</a:t>
-            </a:r>
-          </a:p>
-        </p:txBody>
-      </p:sp>
-      <p:sp>
-        <p:nvSpPr>
-          <p:cNvPr id="4" name="TextBox 3">
+              <a:t>Mini Review – Linked Lists</a:t>
+            </a:r>
+          </a:p>
+        </p:txBody>
+      </p:sp>
+      <p:sp>
+        <p:nvSpPr>
+          <p:cNvPr id="5" name="Content Placeholder 1">
             <a:extLst>
               <a:ext uri="{FF2B5EF4-FFF2-40B4-BE49-F238E27FC236}">
-                <a16:creationId xmlns:a16="http://schemas.microsoft.com/office/drawing/2014/main" id="{A70E6009-18FB-490F-970D-3C9B83737A5E}"/>
+                <a16:creationId xmlns:a16="http://schemas.microsoft.com/office/drawing/2014/main" id="{9069B1C4-5084-4E0D-9FA0-9C8B794FA1FE}"/>
               </a:ext>
             </a:extLst>
           </p:cNvPr>
-          <p:cNvSpPr txBox="1"/>
+          <p:cNvSpPr txBox="1">
+            <a:spLocks/>
+          </p:cNvSpPr>
           <p:nvPr/>
         </p:nvSpPr>
         <p:spPr>
           <a:xfrm>
-            <a:off x="1039619" y="1828743"/>
-            <a:ext cx="10515600" cy="3170099"/>
+            <a:off x="940881" y="1690688"/>
+            <a:ext cx="9790759" cy="5057971"/>
           </a:xfrm>
           <a:prstGeom prst="rect">
             <a:avLst/>
           </a:prstGeom>
-          <a:noFill/>
         </p:spPr>
         <p:txBody>
-          <a:bodyPr wrap="square" rtlCol="0">
-            <a:spAutoFit/>
-          </a:bodyPr>
-          <a:lstStyle/>
-          <a:p>
-            <a:r>
-              <a:rPr lang="en-US" sz="2000" dirty="0">
+          <a:bodyPr vert="horz" lIns="91440" tIns="45720" rIns="91440" bIns="45720" rtlCol="0" anchor="t"/>
+          <a:lstStyle>
+            <a:defPPr>
+              <a:defRPr lang="en-US"/>
+            </a:defPPr>
+            <a:lvl1pPr marL="0" algn="l" defTabSz="914400" rtl="0" eaLnBrk="1" latinLnBrk="0" hangingPunct="1">
+              <a:defRPr sz="1200" kern="1200">
+                <a:solidFill>
+                  <a:schemeClr val="tx1">
+                    <a:tint val="75000"/>
+                  </a:schemeClr>
+                </a:solidFill>
+                <a:latin typeface="+mn-lt"/>
+                <a:ea typeface="+mn-ea"/>
+                <a:cs typeface="+mn-cs"/>
+              </a:defRPr>
+            </a:lvl1pPr>
+            <a:lvl2pPr marL="457200" algn="l" defTabSz="914400" rtl="0" eaLnBrk="1" latinLnBrk="0" hangingPunct="1">
+              <a:defRPr sz="1800" kern="1200">
+                <a:solidFill>
+                  <a:schemeClr val="tx1"/>
+                </a:solidFill>
+                <a:latin typeface="+mn-lt"/>
+                <a:ea typeface="+mn-ea"/>
+                <a:cs typeface="+mn-cs"/>
+              </a:defRPr>
+            </a:lvl2pPr>
+            <a:lvl3pPr marL="914400" algn="l" defTabSz="914400" rtl="0" eaLnBrk="1" latinLnBrk="0" hangingPunct="1">
+              <a:defRPr sz="1800" kern="1200">
+                <a:solidFill>
+                  <a:schemeClr val="tx1"/>
+                </a:solidFill>
+                <a:latin typeface="+mn-lt"/>
+                <a:ea typeface="+mn-ea"/>
+                <a:cs typeface="+mn-cs"/>
+              </a:defRPr>
+            </a:lvl3pPr>
+            <a:lvl4pPr marL="1371600" algn="l" defTabSz="914400" rtl="0" eaLnBrk="1" latinLnBrk="0" hangingPunct="1">
+              <a:defRPr sz="1800" kern="1200">
+                <a:solidFill>
+                  <a:schemeClr val="tx1"/>
+                </a:solidFill>
+                <a:latin typeface="+mn-lt"/>
+                <a:ea typeface="+mn-ea"/>
+                <a:cs typeface="+mn-cs"/>
+              </a:defRPr>
+            </a:lvl4pPr>
+            <a:lvl5pPr marL="1828800" algn="l" defTabSz="914400" rtl="0" eaLnBrk="1" latinLnBrk="0" hangingPunct="1">
+              <a:defRPr sz="1800" kern="1200">
+                <a:solidFill>
+                  <a:schemeClr val="tx1"/>
+                </a:solidFill>
+                <a:latin typeface="+mn-lt"/>
+                <a:ea typeface="+mn-ea"/>
+                <a:cs typeface="+mn-cs"/>
+              </a:defRPr>
+            </a:lvl5pPr>
+            <a:lvl6pPr marL="2286000" algn="l" defTabSz="914400" rtl="0" eaLnBrk="1" latinLnBrk="0" hangingPunct="1">
+              <a:defRPr sz="1800" kern="1200">
+                <a:solidFill>
+                  <a:schemeClr val="tx1"/>
+                </a:solidFill>
+                <a:latin typeface="+mn-lt"/>
+                <a:ea typeface="+mn-ea"/>
+                <a:cs typeface="+mn-cs"/>
+              </a:defRPr>
+            </a:lvl6pPr>
+            <a:lvl7pPr marL="2743200" algn="l" defTabSz="914400" rtl="0" eaLnBrk="1" latinLnBrk="0" hangingPunct="1">
+              <a:defRPr sz="1800" kern="1200">
+                <a:solidFill>
+                  <a:schemeClr val="tx1"/>
+                </a:solidFill>
+                <a:latin typeface="+mn-lt"/>
+                <a:ea typeface="+mn-ea"/>
+                <a:cs typeface="+mn-cs"/>
+              </a:defRPr>
+            </a:lvl7pPr>
+            <a:lvl8pPr marL="3200400" algn="l" defTabSz="914400" rtl="0" eaLnBrk="1" latinLnBrk="0" hangingPunct="1">
+              <a:defRPr sz="1800" kern="1200">
+                <a:solidFill>
+                  <a:schemeClr val="tx1"/>
+                </a:solidFill>
+                <a:latin typeface="+mn-lt"/>
+                <a:ea typeface="+mn-ea"/>
+                <a:cs typeface="+mn-cs"/>
+              </a:defRPr>
+            </a:lvl8pPr>
+            <a:lvl9pPr marL="3657600" algn="l" defTabSz="914400" rtl="0" eaLnBrk="1" latinLnBrk="0" hangingPunct="1">
+              <a:defRPr sz="1800" kern="1200">
+                <a:solidFill>
+                  <a:schemeClr val="tx1"/>
+                </a:solidFill>
+                <a:latin typeface="+mn-lt"/>
+                <a:ea typeface="+mn-ea"/>
+                <a:cs typeface="+mn-cs"/>
+              </a:defRPr>
+            </a:lvl9pPr>
+          </a:lstStyle>
+          <a:p>
+            <a:r>
+              <a:rPr lang="en-US" sz="1600" dirty="0">
                 <a:solidFill>
                   <a:srgbClr val="0081E2"/>
                 </a:solidFill>
                 <a:latin typeface="Consolas" panose="020B0609020204030204" pitchFamily="49" charset="0"/>
               </a:rPr>
-              <a:t>Which code snippet will have a higher growth rate asymptotically in terms of Big O notation?</a:t>
-            </a:r>
-          </a:p>
-          <a:p>
-            <a:endParaRPr lang="en-US" sz="2000" dirty="0">
+              <a:t>Consider a class List that implements an </a:t>
+            </a:r>
+            <a:r>
+              <a:rPr lang="en-US" sz="1600" dirty="0">
+                <a:solidFill>
+                  <a:srgbClr val="EB6E19"/>
+                </a:solidFill>
+                <a:latin typeface="Consolas" panose="020B0609020204030204" pitchFamily="49" charset="0"/>
+              </a:rPr>
+              <a:t>ordered</a:t>
+            </a:r>
+            <a:r>
+              <a:rPr lang="en-US" sz="1600" dirty="0">
+                <a:solidFill>
+                  <a:srgbClr val="0081E2"/>
+                </a:solidFill>
+                <a:latin typeface="Consolas" panose="020B0609020204030204" pitchFamily="49" charset="0"/>
+              </a:rPr>
+              <a:t> list backed by a singly linked list with a head pointer. The invariant “</a:t>
+            </a:r>
+            <a:r>
+              <a:rPr lang="en-US" sz="1600" dirty="0">
+                <a:solidFill>
+                  <a:srgbClr val="EB6E19"/>
+                </a:solidFill>
+                <a:latin typeface="Consolas" panose="020B0609020204030204" pitchFamily="49" charset="0"/>
+              </a:rPr>
+              <a:t>ordered</a:t>
+            </a:r>
+            <a:r>
+              <a:rPr lang="en-US" sz="1600" dirty="0">
+                <a:solidFill>
+                  <a:srgbClr val="0081E2"/>
+                </a:solidFill>
+                <a:latin typeface="Consolas" panose="020B0609020204030204" pitchFamily="49" charset="0"/>
+              </a:rPr>
+              <a:t>” is maintained always. Given that representation, what is the worst-case time complexity of the following operations? Assume the list is sorted in ascending order.</a:t>
+            </a:r>
+          </a:p>
+          <a:p>
+            <a:endParaRPr lang="en-US" sz="1600" dirty="0">
               <a:solidFill>
-                <a:srgbClr val="EB6E19"/>
+                <a:srgbClr val="0081E2"/>
               </a:solidFill>
               <a:latin typeface="Consolas" panose="020B0609020204030204" pitchFamily="49" charset="0"/>
             </a:endParaRPr>
           </a:p>
           <a:p>
             <a:r>
-              <a:rPr lang="en-US" sz="2000" dirty="0">
-                <a:solidFill>
-                  <a:srgbClr val="EB6E19"/>
-                </a:solidFill>
-                <a:latin typeface="Consolas" panose="020B0609020204030204" pitchFamily="49" charset="0"/>
-              </a:rPr>
-              <a:t>            </a:t>
-            </a:r>
-            <a:r>
-              <a:rPr lang="en-US" sz="2000" dirty="0">
-                <a:solidFill>
-                  <a:srgbClr val="00DA63"/>
-                </a:solidFill>
-                <a:latin typeface="Consolas" panose="020B0609020204030204" pitchFamily="49" charset="0"/>
-              </a:rPr>
-              <a:t> A                                    B</a:t>
-            </a:r>
-          </a:p>
-          <a:p>
-            <a:r>
-              <a:rPr lang="en-US" sz="2000" dirty="0">
-                <a:solidFill>
-                  <a:srgbClr val="EB6E19"/>
-                </a:solidFill>
-                <a:latin typeface="Consolas" panose="020B0609020204030204" pitchFamily="49" charset="0"/>
-              </a:rPr>
-              <a:t>for (int i=1; i &lt; n; i++)</a:t>
-            </a:r>
-          </a:p>
-          <a:p>
-            <a:r>
-              <a:rPr lang="en-US" sz="2000" dirty="0">
-                <a:solidFill>
-                  <a:srgbClr val="EB6E19"/>
-                </a:solidFill>
-                <a:latin typeface="Consolas" panose="020B0609020204030204" pitchFamily="49" charset="0"/>
-              </a:rPr>
-              <a:t>	for (int j=1; j &lt; n; </a:t>
-            </a:r>
-            <a:r>
-              <a:rPr lang="en-US" sz="2000" dirty="0" err="1">
-                <a:solidFill>
-                  <a:srgbClr val="EB6E19"/>
-                </a:solidFill>
-                <a:latin typeface="Consolas" panose="020B0609020204030204" pitchFamily="49" charset="0"/>
-              </a:rPr>
-              <a:t>j++</a:t>
-            </a:r>
-            <a:r>
-              <a:rPr lang="en-US" sz="2000" dirty="0">
-                <a:solidFill>
-                  <a:srgbClr val="EB6E19"/>
-                </a:solidFill>
-                <a:latin typeface="Consolas" panose="020B0609020204030204" pitchFamily="49" charset="0"/>
-              </a:rPr>
-              <a:t>)</a:t>
-            </a:r>
-          </a:p>
-          <a:p>
-            <a:r>
-              <a:rPr lang="en-US" sz="2000" dirty="0">
-                <a:solidFill>
-                  <a:srgbClr val="EB6E19"/>
-                </a:solidFill>
-                <a:latin typeface="Consolas" panose="020B0609020204030204" pitchFamily="49" charset="0"/>
-              </a:rPr>
-              <a:t>		sum = sum + 1;</a:t>
-            </a:r>
-          </a:p>
-          <a:p>
-            <a:endParaRPr lang="en-US" sz="2000" dirty="0">
+              <a:rPr lang="en-US" sz="1600" dirty="0">
+                <a:solidFill>
+                  <a:srgbClr val="0081E2"/>
+                </a:solidFill>
+                <a:latin typeface="Consolas" panose="020B0609020204030204" pitchFamily="49" charset="0"/>
+              </a:rPr>
+              <a:t>A. Insert an item</a:t>
+            </a:r>
+          </a:p>
+          <a:p>
+            <a:r>
+              <a:rPr lang="en-US" sz="1600" dirty="0">
+                <a:solidFill>
+                  <a:srgbClr val="0081E2"/>
+                </a:solidFill>
+                <a:latin typeface="Consolas" panose="020B0609020204030204" pitchFamily="49" charset="0"/>
+              </a:rPr>
+              <a:t>B. Finding the minimum element</a:t>
+            </a:r>
+          </a:p>
+          <a:p>
+            <a:r>
+              <a:rPr lang="en-US" sz="1600" dirty="0">
+                <a:solidFill>
+                  <a:srgbClr val="0081E2"/>
+                </a:solidFill>
+                <a:latin typeface="Consolas" panose="020B0609020204030204" pitchFamily="49" charset="0"/>
+              </a:rPr>
+              <a:t>C. Delete the largest element from list</a:t>
+            </a:r>
+          </a:p>
+          <a:p>
+            <a:r>
+              <a:rPr lang="en-US" sz="1600" dirty="0">
+                <a:solidFill>
+                  <a:srgbClr val="0081E2"/>
+                </a:solidFill>
+                <a:latin typeface="Consolas" panose="020B0609020204030204" pitchFamily="49" charset="0"/>
+              </a:rPr>
+              <a:t>D. Finding the largest element</a:t>
+            </a:r>
+          </a:p>
+          <a:p>
+            <a:r>
+              <a:rPr lang="en-US" sz="1600" dirty="0">
+                <a:solidFill>
+                  <a:srgbClr val="0081E2"/>
+                </a:solidFill>
+                <a:latin typeface="Consolas" panose="020B0609020204030204" pitchFamily="49" charset="0"/>
+              </a:rPr>
+              <a:t>E. Finding a random element, n</a:t>
+            </a:r>
+          </a:p>
+          <a:p>
+            <a:r>
+              <a:rPr lang="en-US" sz="1600" dirty="0">
+                <a:solidFill>
+                  <a:srgbClr val="0081E2"/>
+                </a:solidFill>
+                <a:latin typeface="Consolas" panose="020B0609020204030204" pitchFamily="49" charset="0"/>
+              </a:rPr>
+              <a:t>F. Deleting the minimum element in the list</a:t>
+            </a:r>
+          </a:p>
+          <a:p>
+            <a:endParaRPr lang="en-US" sz="1600" dirty="0">
               <a:solidFill>
-                <a:srgbClr val="EB6E19"/>
+                <a:srgbClr val="0081E2"/>
               </a:solidFill>
               <a:latin typeface="Consolas" panose="020B0609020204030204" pitchFamily="49" charset="0"/>
             </a:endParaRPr>
           </a:p>
-          <a:p>
-            <a:endParaRPr lang="en-US" sz="2000" dirty="0">
-              <a:solidFill>
-                <a:srgbClr val="EB6E19"/>
-              </a:solidFill>
-              <a:latin typeface="Consolas" panose="020B0609020204030204" pitchFamily="49" charset="0"/>
-            </a:endParaRPr>
-          </a:p>
-          <a:p>
-            <a:r>
-              <a:rPr lang="en-US" sz="2000" dirty="0">
-                <a:solidFill>
-                  <a:srgbClr val="00DA63"/>
-                </a:solidFill>
-                <a:latin typeface="Consolas" panose="020B0609020204030204" pitchFamily="49" charset="0"/>
-              </a:rPr>
-              <a:t>Answer: A and B grow at the same rate </a:t>
-            </a:r>
-            <a:r>
-              <a:rPr lang="en-US" sz="2000" dirty="0" err="1">
-                <a:solidFill>
-                  <a:srgbClr val="00DA63"/>
-                </a:solidFill>
-                <a:latin typeface="Consolas" panose="020B0609020204030204" pitchFamily="49" charset="0"/>
-              </a:rPr>
-              <a:t>asymtotically</a:t>
-            </a:r>
-            <a:endParaRPr lang="en-US" sz="2000" dirty="0">
-              <a:solidFill>
-                <a:srgbClr val="00DA63"/>
-              </a:solidFill>
-              <a:latin typeface="Consolas" panose="020B0609020204030204" pitchFamily="49" charset="0"/>
-            </a:endParaRPr>
-          </a:p>
-        </p:txBody>
-      </p:sp>
-      <p:sp>
-        <p:nvSpPr>
-          <p:cNvPr id="7" name="TextBox 6">
-            <a:extLst>
-              <a:ext uri="{FF2B5EF4-FFF2-40B4-BE49-F238E27FC236}">
-                <a16:creationId xmlns:a16="http://schemas.microsoft.com/office/drawing/2014/main" id="{92A4DF68-D3B8-4D4F-85C6-D314CAD1A865}"/>
-              </a:ext>
-            </a:extLst>
-          </p:cNvPr>
-          <p:cNvSpPr txBox="1"/>
-          <p:nvPr/>
-        </p:nvSpPr>
-        <p:spPr>
-          <a:xfrm>
-            <a:off x="6297419" y="3059496"/>
-            <a:ext cx="6094324" cy="923330"/>
-          </a:xfrm>
-          <a:prstGeom prst="rect">
-            <a:avLst/>
-          </a:prstGeom>
-          <a:noFill/>
-        </p:spPr>
-        <p:txBody>
-          <a:bodyPr wrap="square">
-            <a:spAutoFit/>
-          </a:bodyPr>
-          <a:lstStyle/>
-          <a:p>
-            <a:r>
-              <a:rPr lang="en-US" sz="1800" dirty="0">
-                <a:solidFill>
-                  <a:srgbClr val="EB6E19"/>
-                </a:solidFill>
-                <a:latin typeface="Consolas" panose="020B0609020204030204" pitchFamily="49" charset="0"/>
-              </a:rPr>
-              <a:t>for (int i=1; i &lt; 2n; i++)</a:t>
-            </a:r>
-          </a:p>
-          <a:p>
-            <a:r>
-              <a:rPr lang="en-US" sz="1800" dirty="0">
-                <a:solidFill>
-                  <a:srgbClr val="EB6E19"/>
-                </a:solidFill>
-                <a:latin typeface="Consolas" panose="020B0609020204030204" pitchFamily="49" charset="0"/>
-              </a:rPr>
-              <a:t>	for (int j=1; j &lt; 2n; </a:t>
-            </a:r>
-            <a:r>
-              <a:rPr lang="en-US" sz="1800" dirty="0" err="1">
-                <a:solidFill>
-                  <a:srgbClr val="EB6E19"/>
-                </a:solidFill>
-                <a:latin typeface="Consolas" panose="020B0609020204030204" pitchFamily="49" charset="0"/>
-              </a:rPr>
-              <a:t>j++</a:t>
-            </a:r>
-            <a:r>
-              <a:rPr lang="en-US" sz="1800" dirty="0">
-                <a:solidFill>
-                  <a:srgbClr val="EB6E19"/>
-                </a:solidFill>
-                <a:latin typeface="Consolas" panose="020B0609020204030204" pitchFamily="49" charset="0"/>
-              </a:rPr>
-              <a:t>)</a:t>
-            </a:r>
-          </a:p>
-          <a:p>
-            <a:r>
-              <a:rPr lang="en-US" sz="1800" dirty="0">
-                <a:solidFill>
-                  <a:srgbClr val="EB6E19"/>
-                </a:solidFill>
-                <a:latin typeface="Consolas" panose="020B0609020204030204" pitchFamily="49" charset="0"/>
-              </a:rPr>
-              <a:t>		sum = sum + 1;</a:t>
-            </a:r>
-          </a:p>
         </p:txBody>
       </p:sp>
     </p:spTree>
     <p:extLst>
       <p:ext uri="{BB962C8B-B14F-4D97-AF65-F5344CB8AC3E}">
-        <p14:creationId xmlns:p14="http://schemas.microsoft.com/office/powerpoint/2010/main" val="2651317974"/>
+        <p14:creationId xmlns:p14="http://schemas.microsoft.com/office/powerpoint/2010/main" val="1671614239"/>
       </p:ext>
     </p:extLst>
   </p:cSld>
@@ -15925,63 +15888,125 @@
                 </a:solidFill>
                 <a:latin typeface="Consolas" panose="020B0609020204030204" pitchFamily="49" charset="0"/>
               </a:rPr>
-              <a:t>A. Insert an item</a:t>
-            </a:r>
-          </a:p>
-          <a:p>
+              <a:t>A. Insert an item </a:t>
+            </a:r>
             <a:r>
               <a:rPr lang="en-US" sz="1600" dirty="0">
                 <a:solidFill>
+                  <a:srgbClr val="EB6E19"/>
+                </a:solidFill>
+                <a:latin typeface="Consolas" panose="020B0609020204030204" pitchFamily="49" charset="0"/>
+              </a:rPr>
+              <a:t>: O(n)</a:t>
+            </a:r>
+          </a:p>
+          <a:p>
+            <a:r>
+              <a:rPr lang="en-US" sz="1600" dirty="0">
+                <a:solidFill>
                   <a:srgbClr val="0081E2"/>
                 </a:solidFill>
                 <a:latin typeface="Consolas" panose="020B0609020204030204" pitchFamily="49" charset="0"/>
               </a:rPr>
-              <a:t>B. Finding the minimum element</a:t>
-            </a:r>
-          </a:p>
-          <a:p>
+              <a:t>B. Finding the minimum element </a:t>
+            </a:r>
             <a:r>
               <a:rPr lang="en-US" sz="1600" dirty="0">
                 <a:solidFill>
+                  <a:srgbClr val="EB6E19"/>
+                </a:solidFill>
+                <a:latin typeface="Consolas" panose="020B0609020204030204" pitchFamily="49" charset="0"/>
+              </a:rPr>
+              <a:t>: O(1)</a:t>
+            </a:r>
+          </a:p>
+          <a:p>
+            <a:r>
+              <a:rPr lang="en-US" sz="1600" dirty="0">
+                <a:solidFill>
                   <a:srgbClr val="0081E2"/>
                 </a:solidFill>
                 <a:latin typeface="Consolas" panose="020B0609020204030204" pitchFamily="49" charset="0"/>
               </a:rPr>
-              <a:t>C. Delete the largest element from list</a:t>
-            </a:r>
-          </a:p>
-          <a:p>
+              <a:t>C. Delete the largest element from list </a:t>
+            </a:r>
             <a:r>
               <a:rPr lang="en-US" sz="1600" dirty="0">
                 <a:solidFill>
+                  <a:srgbClr val="EB6E19"/>
+                </a:solidFill>
+                <a:latin typeface="Consolas" panose="020B0609020204030204" pitchFamily="49" charset="0"/>
+              </a:rPr>
+              <a:t>: O(n)</a:t>
+            </a:r>
+          </a:p>
+          <a:p>
+            <a:r>
+              <a:rPr lang="en-US" sz="1600" dirty="0">
+                <a:solidFill>
                   <a:srgbClr val="0081E2"/>
                 </a:solidFill>
                 <a:latin typeface="Consolas" panose="020B0609020204030204" pitchFamily="49" charset="0"/>
               </a:rPr>
-              <a:t>D. Finding the largest element</a:t>
-            </a:r>
-          </a:p>
-          <a:p>
+              <a:t>D. Finding the largest element </a:t>
+            </a:r>
             <a:r>
               <a:rPr lang="en-US" sz="1600" dirty="0">
                 <a:solidFill>
+                  <a:srgbClr val="EB6E19"/>
+                </a:solidFill>
+                <a:latin typeface="Consolas" panose="020B0609020204030204" pitchFamily="49" charset="0"/>
+              </a:rPr>
+              <a:t>: O(n)</a:t>
+            </a:r>
+          </a:p>
+          <a:p>
+            <a:r>
+              <a:rPr lang="en-US" sz="1600" dirty="0">
+                <a:solidFill>
                   <a:srgbClr val="0081E2"/>
                 </a:solidFill>
                 <a:latin typeface="Consolas" panose="020B0609020204030204" pitchFamily="49" charset="0"/>
               </a:rPr>
-              <a:t>E. Finding a random element, n</a:t>
-            </a:r>
-          </a:p>
-          <a:p>
+              <a:t>E. Finding a random element, n </a:t>
+            </a:r>
             <a:r>
               <a:rPr lang="en-US" sz="1600" dirty="0">
                 <a:solidFill>
+                  <a:srgbClr val="EB6E19"/>
+                </a:solidFill>
+                <a:latin typeface="Consolas" panose="020B0609020204030204" pitchFamily="49" charset="0"/>
+              </a:rPr>
+              <a:t>: O(n)</a:t>
+            </a:r>
+          </a:p>
+          <a:p>
+            <a:r>
+              <a:rPr lang="en-US" sz="1600" dirty="0">
+                <a:solidFill>
                   <a:srgbClr val="0081E2"/>
                 </a:solidFill>
                 <a:latin typeface="Consolas" panose="020B0609020204030204" pitchFamily="49" charset="0"/>
               </a:rPr>
-              <a:t>F. Deleting the minimum element in the list</a:t>
-            </a:r>
+              <a:t>F. Deleting the minimum element in the list </a:t>
+            </a:r>
+            <a:r>
+              <a:rPr lang="en-US" sz="1600" dirty="0">
+                <a:solidFill>
+                  <a:srgbClr val="EB6E19"/>
+                </a:solidFill>
+                <a:latin typeface="Consolas" panose="020B0609020204030204" pitchFamily="49" charset="0"/>
+              </a:rPr>
+              <a:t>: O(1)</a:t>
+            </a:r>
+          </a:p>
+          <a:p>
+            <a:endParaRPr lang="en-US" sz="1600" dirty="0">
+              <a:solidFill>
+                <a:srgbClr val="EB6E19"/>
+              </a:solidFill>
+              <a:latin typeface="Consolas" panose="020B0609020204030204" pitchFamily="49" charset="0"/>
+            </a:endParaRPr>
           </a:p>
           <a:p>
             <a:endParaRPr lang="en-US" sz="1600" dirty="0">
@@ -15996,7 +16021,7 @@
     </p:spTree>
     <p:extLst>
       <p:ext uri="{BB962C8B-B14F-4D97-AF65-F5344CB8AC3E}">
-        <p14:creationId xmlns:p14="http://schemas.microsoft.com/office/powerpoint/2010/main" val="1671614239"/>
+        <p14:creationId xmlns:p14="http://schemas.microsoft.com/office/powerpoint/2010/main" val="3075079372"/>
       </p:ext>
     </p:extLst>
   </p:cSld>
@@ -16061,7 +16086,7 @@
                 </a:solidFill>
                 <a:latin typeface="Gotham Bold" pitchFamily="50" charset="0"/>
               </a:rPr>
-              <a:t>Mini Review – Linked Lists</a:t>
+              <a:t>Mini Review – Stacks</a:t>
             </a:r>
           </a:p>
         </p:txBody>
@@ -16083,7 +16108,7 @@
         <p:spPr>
           <a:xfrm>
             <a:off x="940881" y="1690688"/>
-            <a:ext cx="9790759" cy="5057971"/>
+            <a:ext cx="10978592" cy="5057971"/>
           </a:xfrm>
           <a:prstGeom prst="rect">
             <a:avLst/>
@@ -16196,46 +16221,16 @@
                 </a:solidFill>
                 <a:latin typeface="Consolas" panose="020B0609020204030204" pitchFamily="49" charset="0"/>
               </a:rPr>
-              <a:t>Consider a class List that implements an </a:t>
-            </a:r>
-            <a:r>
+              <a:t>Postfix Evaluation “2 3 1 * + 9 -“. We scan all elements one by one.</a:t>
+            </a:r>
+            <a:br>
               <a:rPr lang="en-US" sz="1600" dirty="0">
                 <a:solidFill>
-                  <a:srgbClr val="EB6E19"/>
-                </a:solidFill>
-                <a:latin typeface="Consolas" panose="020B0609020204030204" pitchFamily="49" charset="0"/>
-              </a:rPr>
-              <a:t>ordered</a:t>
-            </a:r>
-            <a:r>
-              <a:rPr lang="en-US" sz="1600" dirty="0">
-                <a:solidFill>
                   <a:srgbClr val="0081E2"/>
                 </a:solidFill>
                 <a:latin typeface="Consolas" panose="020B0609020204030204" pitchFamily="49" charset="0"/>
               </a:rPr>
-              <a:t> list backed by a singly linked list with a head pointer. The invariant “</a:t>
-            </a:r>
-            <a:r>
-              <a:rPr lang="en-US" sz="1600" dirty="0">
-                <a:solidFill>
-                  <a:srgbClr val="EB6E19"/>
-                </a:solidFill>
-                <a:latin typeface="Consolas" panose="020B0609020204030204" pitchFamily="49" charset="0"/>
-              </a:rPr>
-              <a:t>ordered</a:t>
-            </a:r>
-            <a:r>
-              <a:rPr lang="en-US" sz="1600" dirty="0">
-                <a:solidFill>
-                  <a:srgbClr val="0081E2"/>
-                </a:solidFill>
-                <a:latin typeface="Consolas" panose="020B0609020204030204" pitchFamily="49" charset="0"/>
-              </a:rPr>
-              <a:t>” is maintained always. Given that representation, what is the worst-case time complexity of the following operations? Assume the list is sorted in ascending order.</a:t>
-            </a:r>
-          </a:p>
-          <a:p>
+            </a:br>
             <a:endParaRPr lang="en-US" sz="1600" dirty="0">
               <a:solidFill>
                 <a:srgbClr val="0081E2"/>
@@ -16243,148 +16238,12 @@
               <a:latin typeface="Consolas" panose="020B0609020204030204" pitchFamily="49" charset="0"/>
             </a:endParaRPr>
           </a:p>
-          <a:p>
-            <a:r>
-              <a:rPr lang="en-US" sz="1600" dirty="0">
-                <a:solidFill>
-                  <a:srgbClr val="0081E2"/>
-                </a:solidFill>
-                <a:latin typeface="Consolas" panose="020B0609020204030204" pitchFamily="49" charset="0"/>
-              </a:rPr>
-              <a:t>A. Insert an item </a:t>
-            </a:r>
-            <a:r>
-              <a:rPr lang="en-US" sz="1600" dirty="0">
-                <a:solidFill>
-                  <a:srgbClr val="EB6E19"/>
-                </a:solidFill>
-                <a:latin typeface="Consolas" panose="020B0609020204030204" pitchFamily="49" charset="0"/>
-              </a:rPr>
-              <a:t>: O(n)</a:t>
-            </a:r>
-          </a:p>
-          <a:p>
-            <a:r>
-              <a:rPr lang="en-US" sz="1600" dirty="0">
-                <a:solidFill>
-                  <a:srgbClr val="0081E2"/>
-                </a:solidFill>
-                <a:latin typeface="Consolas" panose="020B0609020204030204" pitchFamily="49" charset="0"/>
-              </a:rPr>
-              <a:t>B. Finding the minimum element </a:t>
-            </a:r>
-            <a:r>
-              <a:rPr lang="en-US" sz="1600" dirty="0">
-                <a:solidFill>
-                  <a:srgbClr val="EB6E19"/>
-                </a:solidFill>
-                <a:latin typeface="Consolas" panose="020B0609020204030204" pitchFamily="49" charset="0"/>
-              </a:rPr>
-              <a:t>: O(1)</a:t>
-            </a:r>
-          </a:p>
-          <a:p>
-            <a:r>
-              <a:rPr lang="en-US" sz="1600" dirty="0">
-                <a:solidFill>
-                  <a:srgbClr val="0081E2"/>
-                </a:solidFill>
-                <a:latin typeface="Consolas" panose="020B0609020204030204" pitchFamily="49" charset="0"/>
-              </a:rPr>
-              <a:t>C. Delete the largest element from list </a:t>
-            </a:r>
-            <a:r>
-              <a:rPr lang="en-US" sz="1600" dirty="0">
-                <a:solidFill>
-                  <a:srgbClr val="EB6E19"/>
-                </a:solidFill>
-                <a:latin typeface="Consolas" panose="020B0609020204030204" pitchFamily="49" charset="0"/>
-              </a:rPr>
-              <a:t>: O(n)</a:t>
-            </a:r>
-          </a:p>
-          <a:p>
-            <a:r>
-              <a:rPr lang="en-US" sz="1600" dirty="0">
-                <a:solidFill>
-                  <a:srgbClr val="0081E2"/>
-                </a:solidFill>
-                <a:latin typeface="Consolas" panose="020B0609020204030204" pitchFamily="49" charset="0"/>
-              </a:rPr>
-              <a:t>D. Finding the largest element </a:t>
-            </a:r>
-            <a:r>
-              <a:rPr lang="en-US" sz="1600" dirty="0">
-                <a:solidFill>
-                  <a:srgbClr val="EB6E19"/>
-                </a:solidFill>
-                <a:latin typeface="Consolas" panose="020B0609020204030204" pitchFamily="49" charset="0"/>
-              </a:rPr>
-              <a:t>: O(n)</a:t>
-            </a:r>
-          </a:p>
-          <a:p>
-            <a:r>
-              <a:rPr lang="en-US" sz="1600" dirty="0">
-                <a:solidFill>
-                  <a:srgbClr val="0081E2"/>
-                </a:solidFill>
-                <a:latin typeface="Consolas" panose="020B0609020204030204" pitchFamily="49" charset="0"/>
-              </a:rPr>
-              <a:t>E. Finding a random element, n </a:t>
-            </a:r>
-            <a:r>
-              <a:rPr lang="en-US" sz="1600" dirty="0">
-                <a:solidFill>
-                  <a:srgbClr val="EB6E19"/>
-                </a:solidFill>
-                <a:latin typeface="Consolas" panose="020B0609020204030204" pitchFamily="49" charset="0"/>
-              </a:rPr>
-              <a:t>: O(n)</a:t>
-            </a:r>
-          </a:p>
-          <a:p>
-            <a:r>
-              <a:rPr lang="en-US" sz="1600" dirty="0">
-                <a:solidFill>
-                  <a:srgbClr val="0081E2"/>
-                </a:solidFill>
-                <a:latin typeface="Consolas" panose="020B0609020204030204" pitchFamily="49" charset="0"/>
-              </a:rPr>
-              <a:t>F. Deleting the minimum element in the list </a:t>
-            </a:r>
-            <a:r>
-              <a:rPr lang="en-US" sz="1600" dirty="0">
-                <a:solidFill>
-                  <a:srgbClr val="EB6E19"/>
-                </a:solidFill>
-                <a:latin typeface="Consolas" panose="020B0609020204030204" pitchFamily="49" charset="0"/>
-              </a:rPr>
-              <a:t>: O(1)</a:t>
-            </a:r>
-          </a:p>
-          <a:p>
-            <a:endParaRPr lang="en-US" sz="1600" dirty="0">
-              <a:solidFill>
-                <a:srgbClr val="EB6E19"/>
-              </a:solidFill>
-              <a:latin typeface="Consolas" panose="020B0609020204030204" pitchFamily="49" charset="0"/>
-            </a:endParaRPr>
-          </a:p>
-          <a:p>
-            <a:endParaRPr lang="en-US" sz="1600" dirty="0">
-              <a:solidFill>
-                <a:srgbClr val="0081E2"/>
-              </a:solidFill>
-              <a:latin typeface="Consolas" panose="020B0609020204030204" pitchFamily="49" charset="0"/>
-            </a:endParaRPr>
-          </a:p>
         </p:txBody>
       </p:sp>
     </p:spTree>
     <p:extLst>
       <p:ext uri="{BB962C8B-B14F-4D97-AF65-F5344CB8AC3E}">
-        <p14:creationId xmlns:p14="http://schemas.microsoft.com/office/powerpoint/2010/main" val="3075079372"/>
+        <p14:creationId xmlns:p14="http://schemas.microsoft.com/office/powerpoint/2010/main" val="2199279301"/>
       </p:ext>
     </p:extLst>
   </p:cSld>
@@ -16586,6 +16445,8 @@
               </a:rPr>
               <a:t>Postfix Evaluation “2 3 1 * + 9 -“. We scan all elements one by one.</a:t>
             </a:r>
+          </a:p>
+          <a:p>
             <a:br>
               <a:rPr lang="en-US" sz="1600" dirty="0">
                 <a:solidFill>
@@ -16594,19 +16455,141 @@
                 <a:latin typeface="Consolas" panose="020B0609020204030204" pitchFamily="49" charset="0"/>
               </a:rPr>
             </a:br>
-            <a:endParaRPr lang="en-US" sz="1600" dirty="0">
-              <a:solidFill>
-                <a:srgbClr val="0081E2"/>
-              </a:solidFill>
-              <a:latin typeface="Consolas" panose="020B0609020204030204" pitchFamily="49" charset="0"/>
-            </a:endParaRPr>
+            <a:r>
+              <a:rPr lang="en-US" sz="1600" dirty="0">
+                <a:solidFill>
+                  <a:srgbClr val="EB6E19"/>
+                </a:solidFill>
+                <a:latin typeface="Consolas" panose="020B0609020204030204" pitchFamily="49" charset="0"/>
+              </a:rPr>
+              <a:t>1) Scan ‘2’, it’s a number, so push it to stack. Stack contains ‘2’</a:t>
+            </a:r>
+            <a:br>
+              <a:rPr lang="en-US" sz="1600" dirty="0">
+                <a:solidFill>
+                  <a:srgbClr val="EB6E19"/>
+                </a:solidFill>
+                <a:latin typeface="Consolas" panose="020B0609020204030204" pitchFamily="49" charset="0"/>
+              </a:rPr>
+            </a:br>
+            <a:r>
+              <a:rPr lang="en-US" sz="1600" dirty="0">
+                <a:solidFill>
+                  <a:srgbClr val="EB6E19"/>
+                </a:solidFill>
+                <a:latin typeface="Consolas" panose="020B0609020204030204" pitchFamily="49" charset="0"/>
+              </a:rPr>
+              <a:t>2) Scan ‘3’, again a number, push it to stack, stack now contains ‘2 3’ (from bottom to top)</a:t>
+            </a:r>
+            <a:br>
+              <a:rPr lang="en-US" sz="1600" dirty="0">
+                <a:solidFill>
+                  <a:srgbClr val="EB6E19"/>
+                </a:solidFill>
+                <a:latin typeface="Consolas" panose="020B0609020204030204" pitchFamily="49" charset="0"/>
+              </a:rPr>
+            </a:br>
+            <a:r>
+              <a:rPr lang="en-US" sz="1600" dirty="0">
+                <a:solidFill>
+                  <a:srgbClr val="EB6E19"/>
+                </a:solidFill>
+                <a:latin typeface="Consolas" panose="020B0609020204030204" pitchFamily="49" charset="0"/>
+              </a:rPr>
+              <a:t>3) Scan ‘1’, again a number, push it to stack, stack now contains ‘2 3 1’</a:t>
+            </a:r>
+            <a:br>
+              <a:rPr lang="en-US" sz="1600" dirty="0">
+                <a:solidFill>
+                  <a:srgbClr val="EB6E19"/>
+                </a:solidFill>
+                <a:latin typeface="Consolas" panose="020B0609020204030204" pitchFamily="49" charset="0"/>
+              </a:rPr>
+            </a:br>
+            <a:r>
+              <a:rPr lang="en-US" sz="1600" dirty="0">
+                <a:solidFill>
+                  <a:srgbClr val="EB6E19"/>
+                </a:solidFill>
+                <a:latin typeface="Consolas" panose="020B0609020204030204" pitchFamily="49" charset="0"/>
+              </a:rPr>
+              <a:t>4) Scan ‘*’, it’s an operator, pop two operands from stack, apply the * operator on operands, we get 3*1 which results in 3. We push the result ‘3’ to stack. Stack now becomes ‘2 3’.</a:t>
+            </a:r>
+            <a:br>
+              <a:rPr lang="en-US" sz="1600" dirty="0">
+                <a:solidFill>
+                  <a:srgbClr val="EB6E19"/>
+                </a:solidFill>
+                <a:latin typeface="Consolas" panose="020B0609020204030204" pitchFamily="49" charset="0"/>
+              </a:rPr>
+            </a:br>
+            <a:r>
+              <a:rPr lang="en-US" sz="1600" dirty="0">
+                <a:solidFill>
+                  <a:srgbClr val="EB6E19"/>
+                </a:solidFill>
+                <a:latin typeface="Consolas" panose="020B0609020204030204" pitchFamily="49" charset="0"/>
+              </a:rPr>
+              <a:t>5) Scan ‘+’, it’s an operator, pop two operands from stack, apply the + operator on operands, we get 3 + 2 which results in 5. We push the result ‘5’ to stack. Stack now becomes ‘5’.</a:t>
+            </a:r>
+            <a:br>
+              <a:rPr lang="en-US" sz="1600" dirty="0">
+                <a:solidFill>
+                  <a:srgbClr val="EB6E19"/>
+                </a:solidFill>
+                <a:latin typeface="Consolas" panose="020B0609020204030204" pitchFamily="49" charset="0"/>
+              </a:rPr>
+            </a:br>
+            <a:r>
+              <a:rPr lang="en-US" sz="1600" dirty="0">
+                <a:solidFill>
+                  <a:srgbClr val="EB6E19"/>
+                </a:solidFill>
+                <a:latin typeface="Consolas" panose="020B0609020204030204" pitchFamily="49" charset="0"/>
+              </a:rPr>
+              <a:t>6) Scan ‘9’, it’s a number, we push it to the stack. Stack now becomes ‘5 9’.</a:t>
+            </a:r>
+            <a:br>
+              <a:rPr lang="en-US" sz="1600" dirty="0">
+                <a:solidFill>
+                  <a:srgbClr val="EB6E19"/>
+                </a:solidFill>
+                <a:latin typeface="Consolas" panose="020B0609020204030204" pitchFamily="49" charset="0"/>
+              </a:rPr>
+            </a:br>
+            <a:r>
+              <a:rPr lang="en-US" sz="1600" dirty="0">
+                <a:solidFill>
+                  <a:srgbClr val="EB6E19"/>
+                </a:solidFill>
+                <a:latin typeface="Consolas" panose="020B0609020204030204" pitchFamily="49" charset="0"/>
+              </a:rPr>
+              <a:t>7) Scan ‘-‘, it’s an operator, pop two operands from stack, apply the – operator on operands, we get 5 – 9 which results in -4. We push the result ‘-4’ to stack. Stack now becomes ‘-4’.</a:t>
+            </a:r>
+            <a:br>
+              <a:rPr lang="en-US" sz="1600" dirty="0">
+                <a:solidFill>
+                  <a:srgbClr val="EB6E19"/>
+                </a:solidFill>
+                <a:latin typeface="Consolas" panose="020B0609020204030204" pitchFamily="49" charset="0"/>
+              </a:rPr>
+            </a:br>
+            <a:r>
+              <a:rPr lang="en-US" sz="1600" dirty="0">
+                <a:solidFill>
+                  <a:srgbClr val="EB6E19"/>
+                </a:solidFill>
+                <a:latin typeface="Consolas" panose="020B0609020204030204" pitchFamily="49" charset="0"/>
+              </a:rPr>
+              <a:t>8) There are no more elements to scan, we return the top element from stack (which is the only element left in stack).</a:t>
+            </a:r>
           </a:p>
         </p:txBody>
       </p:sp>
     </p:spTree>
     <p:extLst>
       <p:ext uri="{BB962C8B-B14F-4D97-AF65-F5344CB8AC3E}">
-        <p14:creationId xmlns:p14="http://schemas.microsoft.com/office/powerpoint/2010/main" val="2199279301"/>
+        <p14:creationId xmlns:p14="http://schemas.microsoft.com/office/powerpoint/2010/main" val="3921623338"/>
       </p:ext>
     </p:extLst>
   </p:cSld>
@@ -16671,7 +16654,7 @@
                 </a:solidFill>
                 <a:latin typeface="Gotham Bold" pitchFamily="50" charset="0"/>
               </a:rPr>
-              <a:t>Mini Review – Stacks</a:t>
+              <a:t>Output Prediction / Coding Questions</a:t>
             </a:r>
           </a:p>
         </p:txBody>
@@ -16805,146 +16788,72 @@
                   <a:srgbClr val="0081E2"/>
                 </a:solidFill>
                 <a:latin typeface="Consolas" panose="020B0609020204030204" pitchFamily="49" charset="0"/>
-              </a:rPr>
-              <a:t>Postfix Evaluation “2 3 1 * + 9 -“. We scan all elements one by one.</a:t>
-            </a:r>
-          </a:p>
-          <a:p>
-            <a:br>
+                <a:hlinkClick r:id="rId3">
+                  <a:extLst>
+                    <a:ext uri="{A12FA001-AC4F-418D-AE19-62706E023703}">
+                      <ahyp:hlinkClr xmlns:ahyp="http://schemas.microsoft.com/office/drawing/2018/hyperlinkcolor" val="tx"/>
+                    </a:ext>
+                  </a:extLst>
+                </a:hlinkClick>
+              </a:rPr>
+              <a:t>https://onlinegdb.com/BJ4hyD7vP</a:t>
+            </a:r>
+            <a:endParaRPr lang="en-US" sz="1600" dirty="0">
+              <a:solidFill>
+                <a:srgbClr val="0081E2"/>
+              </a:solidFill>
+              <a:latin typeface="Consolas" panose="020B0609020204030204" pitchFamily="49" charset="0"/>
+            </a:endParaRPr>
+          </a:p>
+          <a:p>
+            <a:r>
               <a:rPr lang="en-US" sz="1600" dirty="0">
                 <a:solidFill>
                   <a:srgbClr val="0081E2"/>
                 </a:solidFill>
                 <a:latin typeface="Consolas" panose="020B0609020204030204" pitchFamily="49" charset="0"/>
-              </a:rPr>
-            </a:br>
+                <a:hlinkClick r:id="rId4">
+                  <a:extLst>
+                    <a:ext uri="{A12FA001-AC4F-418D-AE19-62706E023703}">
+                      <ahyp:hlinkClr xmlns:ahyp="http://schemas.microsoft.com/office/drawing/2018/hyperlinkcolor" val="tx"/>
+                    </a:ext>
+                  </a:extLst>
+                </a:hlinkClick>
+              </a:rPr>
+              <a:t>https://onlinegdb.com/BJ6gewQDP</a:t>
+            </a:r>
+            <a:endParaRPr lang="en-US" sz="1600" dirty="0">
+              <a:solidFill>
+                <a:srgbClr val="0081E2"/>
+              </a:solidFill>
+              <a:latin typeface="Consolas" panose="020B0609020204030204" pitchFamily="49" charset="0"/>
+            </a:endParaRPr>
+          </a:p>
+          <a:p>
             <a:r>
               <a:rPr lang="en-US" sz="1600" dirty="0">
                 <a:solidFill>
-                  <a:srgbClr val="EB6E19"/>
-                </a:solidFill>
-                <a:latin typeface="Consolas" panose="020B0609020204030204" pitchFamily="49" charset="0"/>
-              </a:rPr>
-              <a:t>1) Scan ‘2’, it’s a number, so push it to stack. Stack contains ‘2’</a:t>
-            </a:r>
-            <a:br>
+                  <a:srgbClr val="0081E2"/>
+                </a:solidFill>
+                <a:latin typeface="Consolas" panose="020B0609020204030204" pitchFamily="49" charset="0"/>
+                <a:hlinkClick r:id="rId5">
+                  <a:extLst>
+                    <a:ext uri="{A12FA001-AC4F-418D-AE19-62706E023703}">
+                      <ahyp:hlinkClr xmlns:ahyp="http://schemas.microsoft.com/office/drawing/2018/hyperlinkcolor" val="tx"/>
+                    </a:ext>
+                  </a:extLst>
+                </a:hlinkClick>
+              </a:rPr>
+              <a:t>https://onlinegdb.com/OefiHIntV</a:t>
+            </a:r>
+            <a:r>
               <a:rPr lang="en-US" sz="1600" dirty="0">
                 <a:solidFill>
-                  <a:srgbClr val="EB6E19"/>
-                </a:solidFill>
-                <a:latin typeface="Consolas" panose="020B0609020204030204" pitchFamily="49" charset="0"/>
-              </a:rPr>
-            </a:br>
-            <a:r>
-              <a:rPr lang="en-US" sz="1600" dirty="0">
-                <a:solidFill>
-                  <a:srgbClr val="EB6E19"/>
-                </a:solidFill>
-                <a:latin typeface="Consolas" panose="020B0609020204030204" pitchFamily="49" charset="0"/>
-              </a:rPr>
-              <a:t>2) Scan ‘3’, again a number, push it to stack, stack now contains ‘2 3’ (from bottom to top)</a:t>
-            </a:r>
-            <a:br>
-              <a:rPr lang="en-US" sz="1600" dirty="0">
-                <a:solidFill>
-                  <a:srgbClr val="EB6E19"/>
-                </a:solidFill>
-                <a:latin typeface="Consolas" panose="020B0609020204030204" pitchFamily="49" charset="0"/>
-              </a:rPr>
-            </a:br>
-            <a:r>
-              <a:rPr lang="en-US" sz="1600" dirty="0">
-                <a:solidFill>
-                  <a:srgbClr val="EB6E19"/>
-                </a:solidFill>
-                <a:latin typeface="Consolas" panose="020B0609020204030204" pitchFamily="49" charset="0"/>
-              </a:rPr>
-              <a:t>3) Scan ‘1’, again a number, push it to stack, stack now contains ‘2 3 1’</a:t>
-            </a:r>
-            <a:br>
-              <a:rPr lang="en-US" sz="1600" dirty="0">
-                <a:solidFill>
-                  <a:srgbClr val="EB6E19"/>
-                </a:solidFill>
-                <a:latin typeface="Consolas" panose="020B0609020204030204" pitchFamily="49" charset="0"/>
-              </a:rPr>
-            </a:br>
-            <a:r>
-              <a:rPr lang="en-US" sz="1600" dirty="0">
-                <a:solidFill>
-                  <a:srgbClr val="EB6E19"/>
-                </a:solidFill>
-                <a:latin typeface="Consolas" panose="020B0609020204030204" pitchFamily="49" charset="0"/>
-              </a:rPr>
-              <a:t>4) Scan ‘*’, it’s an operator, pop two operands from stack, apply the * operator on operands, we get 3*1 which results in 3. We push the result ‘3’ to stack. Stack now becomes ‘2 3’.</a:t>
-            </a:r>
-            <a:br>
-              <a:rPr lang="en-US" sz="1600" dirty="0">
-                <a:solidFill>
-                  <a:srgbClr val="EB6E19"/>
-                </a:solidFill>
-                <a:latin typeface="Consolas" panose="020B0609020204030204" pitchFamily="49" charset="0"/>
-              </a:rPr>
-            </a:br>
-            <a:r>
-              <a:rPr lang="en-US" sz="1600" dirty="0">
-                <a:solidFill>
-                  <a:srgbClr val="EB6E19"/>
-                </a:solidFill>
-                <a:latin typeface="Consolas" panose="020B0609020204030204" pitchFamily="49" charset="0"/>
-              </a:rPr>
-              <a:t>5) Scan ‘+’, it’s an operator, pop two operands from stack, apply the + operator on operands, we get 3 + 2 which results in 5. We push the result ‘5’ to stack. Stack now becomes ‘5’.</a:t>
-            </a:r>
-            <a:br>
-              <a:rPr lang="en-US" sz="1600" dirty="0">
-                <a:solidFill>
-                  <a:srgbClr val="EB6E19"/>
-                </a:solidFill>
-                <a:latin typeface="Consolas" panose="020B0609020204030204" pitchFamily="49" charset="0"/>
-              </a:rPr>
-            </a:br>
-            <a:r>
-              <a:rPr lang="en-US" sz="1600" dirty="0">
-                <a:solidFill>
-                  <a:srgbClr val="EB6E19"/>
-                </a:solidFill>
-                <a:latin typeface="Consolas" panose="020B0609020204030204" pitchFamily="49" charset="0"/>
-              </a:rPr>
-              <a:t>6) Scan ‘9’, it’s a number, we push it to the stack. Stack now becomes ‘5 9’.</a:t>
-            </a:r>
-            <a:br>
-              <a:rPr lang="en-US" sz="1600" dirty="0">
-                <a:solidFill>
-                  <a:srgbClr val="EB6E19"/>
-                </a:solidFill>
-                <a:latin typeface="Consolas" panose="020B0609020204030204" pitchFamily="49" charset="0"/>
-              </a:rPr>
-            </a:br>
-            <a:r>
-              <a:rPr lang="en-US" sz="1600" dirty="0">
-                <a:solidFill>
-                  <a:srgbClr val="EB6E19"/>
-                </a:solidFill>
-                <a:latin typeface="Consolas" panose="020B0609020204030204" pitchFamily="49" charset="0"/>
-              </a:rPr>
-              <a:t>7) Scan ‘-‘, it’s an operator, pop two operands from stack, apply the – operator on operands, we get 5 – 9 which results in -4. We push the result ‘-4’ to stack. Stack now becomes ‘-4’.</a:t>
-            </a:r>
-            <a:br>
-              <a:rPr lang="en-US" sz="1600" dirty="0">
-                <a:solidFill>
-                  <a:srgbClr val="EB6E19"/>
-                </a:solidFill>
-                <a:latin typeface="Consolas" panose="020B0609020204030204" pitchFamily="49" charset="0"/>
-              </a:rPr>
-            </a:br>
-            <a:r>
-              <a:rPr lang="en-US" sz="1600" dirty="0">
-                <a:solidFill>
-                  <a:srgbClr val="EB6E19"/>
-                </a:solidFill>
-                <a:latin typeface="Consolas" panose="020B0609020204030204" pitchFamily="49" charset="0"/>
-              </a:rPr>
-              <a:t>8) There are no more elements to scan, we return the top element from stack (which is the only element left in stack).</a:t>
+                  <a:srgbClr val="0081E2"/>
+                </a:solidFill>
+                <a:latin typeface="Consolas" panose="020B0609020204030204" pitchFamily="49" charset="0"/>
+              </a:rPr>
+              <a:t>  </a:t>
             </a:r>
           </a:p>
         </p:txBody>
@@ -16952,7 +16861,7 @@
     </p:spTree>
     <p:extLst>
       <p:ext uri="{BB962C8B-B14F-4D97-AF65-F5344CB8AC3E}">
-        <p14:creationId xmlns:p14="http://schemas.microsoft.com/office/powerpoint/2010/main" val="3921623338"/>
+        <p14:creationId xmlns:p14="http://schemas.microsoft.com/office/powerpoint/2010/main" val="3092846301"/>
       </p:ext>
     </p:extLst>
   </p:cSld>
@@ -17017,278 +16926,6 @@
                 </a:solidFill>
                 <a:latin typeface="Gotham Bold" pitchFamily="50" charset="0"/>
               </a:rPr>
-              <a:t>Output Prediction / Coding Questions</a:t>
-            </a:r>
-          </a:p>
-        </p:txBody>
-      </p:sp>
-      <p:sp>
-        <p:nvSpPr>
-          <p:cNvPr id="5" name="Content Placeholder 1">
-            <a:extLst>
-              <a:ext uri="{FF2B5EF4-FFF2-40B4-BE49-F238E27FC236}">
-                <a16:creationId xmlns:a16="http://schemas.microsoft.com/office/drawing/2014/main" id="{9069B1C4-5084-4E0D-9FA0-9C8B794FA1FE}"/>
-              </a:ext>
-            </a:extLst>
-          </p:cNvPr>
-          <p:cNvSpPr txBox="1">
-            <a:spLocks/>
-          </p:cNvSpPr>
-          <p:nvPr/>
-        </p:nvSpPr>
-        <p:spPr>
-          <a:xfrm>
-            <a:off x="940881" y="1690688"/>
-            <a:ext cx="10978592" cy="5057971"/>
-          </a:xfrm>
-          <a:prstGeom prst="rect">
-            <a:avLst/>
-          </a:prstGeom>
-        </p:spPr>
-        <p:txBody>
-          <a:bodyPr vert="horz" lIns="91440" tIns="45720" rIns="91440" bIns="45720" rtlCol="0" anchor="t"/>
-          <a:lstStyle>
-            <a:defPPr>
-              <a:defRPr lang="en-US"/>
-            </a:defPPr>
-            <a:lvl1pPr marL="0" algn="l" defTabSz="914400" rtl="0" eaLnBrk="1" latinLnBrk="0" hangingPunct="1">
-              <a:defRPr sz="1200" kern="1200">
-                <a:solidFill>
-                  <a:schemeClr val="tx1">
-                    <a:tint val="75000"/>
-                  </a:schemeClr>
-                </a:solidFill>
-                <a:latin typeface="+mn-lt"/>
-                <a:ea typeface="+mn-ea"/>
-                <a:cs typeface="+mn-cs"/>
-              </a:defRPr>
-            </a:lvl1pPr>
-            <a:lvl2pPr marL="457200" algn="l" defTabSz="914400" rtl="0" eaLnBrk="1" latinLnBrk="0" hangingPunct="1">
-              <a:defRPr sz="1800" kern="1200">
-                <a:solidFill>
-                  <a:schemeClr val="tx1"/>
-                </a:solidFill>
-                <a:latin typeface="+mn-lt"/>
-                <a:ea typeface="+mn-ea"/>
-                <a:cs typeface="+mn-cs"/>
-              </a:defRPr>
-            </a:lvl2pPr>
-            <a:lvl3pPr marL="914400" algn="l" defTabSz="914400" rtl="0" eaLnBrk="1" latinLnBrk="0" hangingPunct="1">
-              <a:defRPr sz="1800" kern="1200">
-                <a:solidFill>
-                  <a:schemeClr val="tx1"/>
-                </a:solidFill>
-                <a:latin typeface="+mn-lt"/>
-                <a:ea typeface="+mn-ea"/>
-                <a:cs typeface="+mn-cs"/>
-              </a:defRPr>
-            </a:lvl3pPr>
-            <a:lvl4pPr marL="1371600" algn="l" defTabSz="914400" rtl="0" eaLnBrk="1" latinLnBrk="0" hangingPunct="1">
-              <a:defRPr sz="1800" kern="1200">
-                <a:solidFill>
-                  <a:schemeClr val="tx1"/>
-                </a:solidFill>
-                <a:latin typeface="+mn-lt"/>
-                <a:ea typeface="+mn-ea"/>
-                <a:cs typeface="+mn-cs"/>
-              </a:defRPr>
-            </a:lvl4pPr>
-            <a:lvl5pPr marL="1828800" algn="l" defTabSz="914400" rtl="0" eaLnBrk="1" latinLnBrk="0" hangingPunct="1">
-              <a:defRPr sz="1800" kern="1200">
-                <a:solidFill>
-                  <a:schemeClr val="tx1"/>
-                </a:solidFill>
-                <a:latin typeface="+mn-lt"/>
-                <a:ea typeface="+mn-ea"/>
-                <a:cs typeface="+mn-cs"/>
-              </a:defRPr>
-            </a:lvl5pPr>
-            <a:lvl6pPr marL="2286000" algn="l" defTabSz="914400" rtl="0" eaLnBrk="1" latinLnBrk="0" hangingPunct="1">
-              <a:defRPr sz="1800" kern="1200">
-                <a:solidFill>
-                  <a:schemeClr val="tx1"/>
-                </a:solidFill>
-                <a:latin typeface="+mn-lt"/>
-                <a:ea typeface="+mn-ea"/>
-                <a:cs typeface="+mn-cs"/>
-              </a:defRPr>
-            </a:lvl6pPr>
-            <a:lvl7pPr marL="2743200" algn="l" defTabSz="914400" rtl="0" eaLnBrk="1" latinLnBrk="0" hangingPunct="1">
-              <a:defRPr sz="1800" kern="1200">
-                <a:solidFill>
-                  <a:schemeClr val="tx1"/>
-                </a:solidFill>
-                <a:latin typeface="+mn-lt"/>
-                <a:ea typeface="+mn-ea"/>
-                <a:cs typeface="+mn-cs"/>
-              </a:defRPr>
-            </a:lvl7pPr>
-            <a:lvl8pPr marL="3200400" algn="l" defTabSz="914400" rtl="0" eaLnBrk="1" latinLnBrk="0" hangingPunct="1">
-              <a:defRPr sz="1800" kern="1200">
-                <a:solidFill>
-                  <a:schemeClr val="tx1"/>
-                </a:solidFill>
-                <a:latin typeface="+mn-lt"/>
-                <a:ea typeface="+mn-ea"/>
-                <a:cs typeface="+mn-cs"/>
-              </a:defRPr>
-            </a:lvl8pPr>
-            <a:lvl9pPr marL="3657600" algn="l" defTabSz="914400" rtl="0" eaLnBrk="1" latinLnBrk="0" hangingPunct="1">
-              <a:defRPr sz="1800" kern="1200">
-                <a:solidFill>
-                  <a:schemeClr val="tx1"/>
-                </a:solidFill>
-                <a:latin typeface="+mn-lt"/>
-                <a:ea typeface="+mn-ea"/>
-                <a:cs typeface="+mn-cs"/>
-              </a:defRPr>
-            </a:lvl9pPr>
-          </a:lstStyle>
-          <a:p>
-            <a:r>
-              <a:rPr lang="en-US" sz="1600" dirty="0">
-                <a:solidFill>
-                  <a:srgbClr val="0081E2"/>
-                </a:solidFill>
-                <a:latin typeface="Consolas" panose="020B0609020204030204" pitchFamily="49" charset="0"/>
-                <a:hlinkClick r:id="rId3">
-                  <a:extLst>
-                    <a:ext uri="{A12FA001-AC4F-418D-AE19-62706E023703}">
-                      <ahyp:hlinkClr xmlns:ahyp="http://schemas.microsoft.com/office/drawing/2018/hyperlinkcolor" val="tx"/>
-                    </a:ext>
-                  </a:extLst>
-                </a:hlinkClick>
-              </a:rPr>
-              <a:t>https://onlinegdb.com/BJ4hyD7vP</a:t>
-            </a:r>
-            <a:endParaRPr lang="en-US" sz="1600" dirty="0">
-              <a:solidFill>
-                <a:srgbClr val="0081E2"/>
-              </a:solidFill>
-              <a:latin typeface="Consolas" panose="020B0609020204030204" pitchFamily="49" charset="0"/>
-            </a:endParaRPr>
-          </a:p>
-          <a:p>
-            <a:r>
-              <a:rPr lang="en-US" sz="1600" dirty="0">
-                <a:solidFill>
-                  <a:srgbClr val="0081E2"/>
-                </a:solidFill>
-                <a:latin typeface="Consolas" panose="020B0609020204030204" pitchFamily="49" charset="0"/>
-                <a:hlinkClick r:id="rId4">
-                  <a:extLst>
-                    <a:ext uri="{A12FA001-AC4F-418D-AE19-62706E023703}">
-                      <ahyp:hlinkClr xmlns:ahyp="http://schemas.microsoft.com/office/drawing/2018/hyperlinkcolor" val="tx"/>
-                    </a:ext>
-                  </a:extLst>
-                </a:hlinkClick>
-              </a:rPr>
-              <a:t>https://onlinegdb.com/BJ6gewQDP</a:t>
-            </a:r>
-            <a:endParaRPr lang="en-US" sz="1600" dirty="0">
-              <a:solidFill>
-                <a:srgbClr val="0081E2"/>
-              </a:solidFill>
-              <a:latin typeface="Consolas" panose="020B0609020204030204" pitchFamily="49" charset="0"/>
-            </a:endParaRPr>
-          </a:p>
-          <a:p>
-            <a:r>
-              <a:rPr lang="en-US" sz="1600" dirty="0">
-                <a:solidFill>
-                  <a:srgbClr val="0081E2"/>
-                </a:solidFill>
-                <a:latin typeface="Consolas" panose="020B0609020204030204" pitchFamily="49" charset="0"/>
-                <a:hlinkClick r:id="rId5">
-                  <a:extLst>
-                    <a:ext uri="{A12FA001-AC4F-418D-AE19-62706E023703}">
-                      <ahyp:hlinkClr xmlns:ahyp="http://schemas.microsoft.com/office/drawing/2018/hyperlinkcolor" val="tx"/>
-                    </a:ext>
-                  </a:extLst>
-                </a:hlinkClick>
-              </a:rPr>
-              <a:t>https://onlinegdb.com/OefiHIntV</a:t>
-            </a:r>
-            <a:r>
-              <a:rPr lang="en-US" sz="1600" dirty="0">
-                <a:solidFill>
-                  <a:srgbClr val="0081E2"/>
-                </a:solidFill>
-                <a:latin typeface="Consolas" panose="020B0609020204030204" pitchFamily="49" charset="0"/>
-              </a:rPr>
-              <a:t>  </a:t>
-            </a:r>
-          </a:p>
-        </p:txBody>
-      </p:sp>
-    </p:spTree>
-    <p:extLst>
-      <p:ext uri="{BB962C8B-B14F-4D97-AF65-F5344CB8AC3E}">
-        <p14:creationId xmlns:p14="http://schemas.microsoft.com/office/powerpoint/2010/main" val="3092846301"/>
-      </p:ext>
-    </p:extLst>
-  </p:cSld>
-  <p:clrMapOvr>
-    <a:masterClrMapping/>
-  </p:clrMapOvr>
-</p:sld>
-</file>
-
-<file path=ppt/slides/slide26.xml><?xml version="1.0" encoding="utf-8"?>
-<p:sld xmlns:a="http://schemas.openxmlformats.org/drawingml/2006/main" xmlns:r="http://schemas.openxmlformats.org/officeDocument/2006/relationships" xmlns:p="http://schemas.openxmlformats.org/presentationml/2006/main">
-  <p:cSld>
-    <p:bg>
-      <p:bgPr>
-        <a:solidFill>
-          <a:schemeClr val="tx1"/>
-        </a:solidFill>
-        <a:effectLst/>
-      </p:bgPr>
-    </p:bg>
-    <p:spTree>
-      <p:nvGrpSpPr>
-        <p:cNvPr id="1" name=""/>
-        <p:cNvGrpSpPr/>
-        <p:nvPr/>
-      </p:nvGrpSpPr>
-      <p:grpSpPr>
-        <a:xfrm>
-          <a:off x="0" y="0"/>
-          <a:ext cx="0" cy="0"/>
-          <a:chOff x="0" y="0"/>
-          <a:chExt cx="0" cy="0"/>
-        </a:xfrm>
-      </p:grpSpPr>
-      <p:sp>
-        <p:nvSpPr>
-          <p:cNvPr id="2" name="Title 1">
-            <a:extLst>
-              <a:ext uri="{FF2B5EF4-FFF2-40B4-BE49-F238E27FC236}">
-                <a16:creationId xmlns:a16="http://schemas.microsoft.com/office/drawing/2014/main" id="{FA98DF2D-4C21-45B7-8CEE-41E2C22A3166}"/>
-              </a:ext>
-            </a:extLst>
-          </p:cNvPr>
-          <p:cNvSpPr>
-            <a:spLocks noGrp="1"/>
-          </p:cNvSpPr>
-          <p:nvPr>
-            <p:ph type="title"/>
-          </p:nvPr>
-        </p:nvSpPr>
-        <p:spPr/>
-        <p:txBody>
-          <a:bodyPr>
-            <a:normAutofit/>
-          </a:bodyPr>
-          <a:lstStyle/>
-          <a:p>
-            <a:r>
-              <a:rPr lang="en-US" sz="3600" dirty="0">
-                <a:solidFill>
-                  <a:schemeClr val="bg1"/>
-                </a:solidFill>
-                <a:latin typeface="Gotham Bold" pitchFamily="50" charset="0"/>
-              </a:rPr>
               <a:t>Mini Review – Coding questions</a:t>
             </a:r>
           </a:p>
@@ -17502,6 +17139,51 @@
               </a:rPr>
               <a:t> 4.5</a:t>
             </a:r>
+          </a:p>
+          <a:p>
+            <a:pPr marL="285750" indent="-285750">
+              <a:buFont typeface="Arial" panose="020B0604020202020204" pitchFamily="34" charset="0"/>
+              <a:buChar char="•"/>
+            </a:pPr>
+            <a:endParaRPr lang="en-US" sz="1600" dirty="0">
+              <a:solidFill>
+                <a:srgbClr val="EB6E19"/>
+              </a:solidFill>
+              <a:latin typeface="Consolas" panose="020B0609020204030204" pitchFamily="49" charset="0"/>
+            </a:endParaRPr>
+          </a:p>
+          <a:p>
+            <a:pPr marL="285750" indent="-285750">
+              <a:buFont typeface="Arial" panose="020B0604020202020204" pitchFamily="34" charset="0"/>
+              <a:buChar char="•"/>
+            </a:pPr>
+            <a:r>
+              <a:rPr lang="en-US" sz="1600" dirty="0">
+                <a:solidFill>
+                  <a:srgbClr val="0081E2"/>
+                </a:solidFill>
+                <a:latin typeface="Consolas" panose="020B0609020204030204" pitchFamily="49" charset="0"/>
+              </a:rPr>
+              <a:t>Write C++ code to reverse a singly linked list.</a:t>
+            </a:r>
+            <a:endParaRPr lang="en-US" sz="1600" dirty="0">
+              <a:solidFill>
+                <a:srgbClr val="EB6E19"/>
+              </a:solidFill>
+              <a:latin typeface="Consolas" panose="020B0609020204030204" pitchFamily="49" charset="0"/>
+            </a:endParaRPr>
+          </a:p>
+          <a:p>
+            <a:pPr marL="285750" indent="-285750">
+              <a:buFont typeface="Arial" panose="020B0604020202020204" pitchFamily="34" charset="0"/>
+              <a:buChar char="•"/>
+            </a:pPr>
+            <a:endParaRPr lang="en-US" sz="1600" dirty="0">
+              <a:solidFill>
+                <a:srgbClr val="EB6E19"/>
+              </a:solidFill>
+              <a:latin typeface="Consolas" panose="020B0609020204030204" pitchFamily="49" charset="0"/>
+            </a:endParaRPr>
           </a:p>
           <a:p>
             <a:pPr marL="285750" indent="-285750">
@@ -17538,7 +17220,7 @@
 </p:sld>
 </file>
 
-<file path=ppt/slides/slide27.xml><?xml version="1.0" encoding="utf-8"?>
+<file path=ppt/slides/slide26.xml><?xml version="1.0" encoding="utf-8"?>
 <p:sld xmlns:a="http://schemas.openxmlformats.org/drawingml/2006/main" xmlns:r="http://schemas.openxmlformats.org/officeDocument/2006/relationships" xmlns:p="http://schemas.openxmlformats.org/presentationml/2006/main">
   <p:cSld>
     <p:bg>
@@ -17772,7 +17454,7 @@
 </p:sld>
 </file>
 
-<file path=ppt/slides/slide28.xml><?xml version="1.0" encoding="utf-8"?>
+<file path=ppt/slides/slide27.xml><?xml version="1.0" encoding="utf-8"?>
 <p:sld xmlns:a="http://schemas.openxmlformats.org/drawingml/2006/main" xmlns:r="http://schemas.openxmlformats.org/officeDocument/2006/relationships" xmlns:p="http://schemas.openxmlformats.org/presentationml/2006/main">
   <p:cSld>
     <p:bg>
@@ -18731,7 +18413,7 @@
 </p:sld>
 </file>
 
-<file path=ppt/slides/slide29.xml><?xml version="1.0" encoding="utf-8"?>
+<file path=ppt/slides/slide28.xml><?xml version="1.0" encoding="utf-8"?>
 <p:sld xmlns:a="http://schemas.openxmlformats.org/drawingml/2006/main" xmlns:r="http://schemas.openxmlformats.org/officeDocument/2006/relationships" xmlns:p="http://schemas.openxmlformats.org/presentationml/2006/main">
   <p:cSld>
     <p:bg>
@@ -19613,6 +19295,176 @@
     <p:extLst>
       <p:ext uri="{BB962C8B-B14F-4D97-AF65-F5344CB8AC3E}">
         <p14:creationId xmlns:p14="http://schemas.microsoft.com/office/powerpoint/2010/main" val="3655248238"/>
+      </p:ext>
+    </p:extLst>
+  </p:cSld>
+  <p:clrMapOvr>
+    <a:masterClrMapping/>
+  </p:clrMapOvr>
+</p:sld>
+</file>
+
+<file path=ppt/slides/slide29.xml><?xml version="1.0" encoding="utf-8"?>
+<p:sld xmlns:a="http://schemas.openxmlformats.org/drawingml/2006/main" xmlns:r="http://schemas.openxmlformats.org/officeDocument/2006/relationships" xmlns:p="http://schemas.openxmlformats.org/presentationml/2006/main" show="0">
+  <p:cSld>
+    <p:bg>
+      <p:bgPr>
+        <a:solidFill>
+          <a:schemeClr val="tx1"/>
+        </a:solidFill>
+        <a:effectLst/>
+      </p:bgPr>
+    </p:bg>
+    <p:spTree>
+      <p:nvGrpSpPr>
+        <p:cNvPr id="1" name=""/>
+        <p:cNvGrpSpPr/>
+        <p:nvPr/>
+      </p:nvGrpSpPr>
+      <p:grpSpPr>
+        <a:xfrm>
+          <a:off x="0" y="0"/>
+          <a:ext cx="0" cy="0"/>
+          <a:chOff x="0" y="0"/>
+          <a:chExt cx="0" cy="0"/>
+        </a:xfrm>
+      </p:grpSpPr>
+      <p:sp>
+        <p:nvSpPr>
+          <p:cNvPr id="2" name="Title 1">
+            <a:extLst>
+              <a:ext uri="{FF2B5EF4-FFF2-40B4-BE49-F238E27FC236}">
+                <a16:creationId xmlns:a16="http://schemas.microsoft.com/office/drawing/2014/main" id="{FA98DF2D-4C21-45B7-8CEE-41E2C22A3166}"/>
+              </a:ext>
+            </a:extLst>
+          </p:cNvPr>
+          <p:cNvSpPr>
+            <a:spLocks noGrp="1"/>
+          </p:cNvSpPr>
+          <p:nvPr>
+            <p:ph type="title"/>
+          </p:nvPr>
+        </p:nvSpPr>
+        <p:spPr/>
+        <p:txBody>
+          <a:bodyPr>
+            <a:normAutofit/>
+          </a:bodyPr>
+          <a:lstStyle/>
+          <a:p>
+            <a:r>
+              <a:rPr lang="en-US" sz="3600" dirty="0">
+                <a:solidFill>
+                  <a:schemeClr val="bg1"/>
+                </a:solidFill>
+                <a:latin typeface="Gotham Bold" pitchFamily="50" charset="0"/>
+              </a:rPr>
+              <a:t>Mini Review – Sorting</a:t>
+            </a:r>
+          </a:p>
+        </p:txBody>
+      </p:sp>
+      <p:sp>
+        <p:nvSpPr>
+          <p:cNvPr id="6" name="TextBox 5">
+            <a:extLst>
+              <a:ext uri="{FF2B5EF4-FFF2-40B4-BE49-F238E27FC236}">
+                <a16:creationId xmlns:a16="http://schemas.microsoft.com/office/drawing/2014/main" id="{6910D817-7706-4B40-61E0-933842B0CC61}"/>
+              </a:ext>
+            </a:extLst>
+          </p:cNvPr>
+          <p:cNvSpPr txBox="1"/>
+          <p:nvPr/>
+        </p:nvSpPr>
+        <p:spPr>
+          <a:xfrm>
+            <a:off x="1103126" y="2326068"/>
+            <a:ext cx="9252985" cy="2585323"/>
+          </a:xfrm>
+          <a:prstGeom prst="rect">
+            <a:avLst/>
+          </a:prstGeom>
+          <a:noFill/>
+        </p:spPr>
+        <p:txBody>
+          <a:bodyPr wrap="square">
+            <a:spAutoFit/>
+          </a:bodyPr>
+          <a:lstStyle/>
+          <a:p>
+            <a:r>
+              <a:rPr lang="en-US" dirty="0">
+                <a:solidFill>
+                  <a:srgbClr val="EB6E19"/>
+                </a:solidFill>
+              </a:rPr>
+              <a:t>Recognize the following techniques with the most appropriate algorithm.</a:t>
+            </a:r>
+          </a:p>
+          <a:p>
+            <a:endParaRPr lang="en-US" dirty="0">
+              <a:solidFill>
+                <a:srgbClr val="EB6E19"/>
+              </a:solidFill>
+            </a:endParaRPr>
+          </a:p>
+          <a:p>
+            <a:r>
+              <a:rPr lang="en-US" dirty="0">
+                <a:solidFill>
+                  <a:schemeClr val="bg1"/>
+                </a:solidFill>
+              </a:rPr>
+              <a:t>Finds smallest element and puts in lowest index, then puts second smallest in the second index, and so on</a:t>
+            </a:r>
+          </a:p>
+          <a:p>
+            <a:endParaRPr lang="en-US" dirty="0">
+              <a:solidFill>
+                <a:schemeClr val="bg1"/>
+              </a:solidFill>
+            </a:endParaRPr>
+          </a:p>
+          <a:p>
+            <a:r>
+              <a:rPr lang="en-US" dirty="0">
+                <a:solidFill>
+                  <a:schemeClr val="bg1"/>
+                </a:solidFill>
+              </a:rPr>
+              <a:t>Swaps neighboring items</a:t>
+            </a:r>
+          </a:p>
+          <a:p>
+            <a:endParaRPr lang="en-US" dirty="0">
+              <a:solidFill>
+                <a:schemeClr val="bg1"/>
+              </a:solidFill>
+            </a:endParaRPr>
+          </a:p>
+          <a:p>
+            <a:r>
+              <a:rPr lang="en-US" dirty="0">
+                <a:solidFill>
+                  <a:schemeClr val="bg1"/>
+                </a:solidFill>
+              </a:rPr>
+              <a:t>Rearranges elements at a gap and reduces gaps across passes until it converges</a:t>
+            </a:r>
+          </a:p>
+          <a:p>
+            <a:endParaRPr lang="en-US" dirty="0">
+              <a:solidFill>
+                <a:srgbClr val="EB6E19"/>
+              </a:solidFill>
+            </a:endParaRPr>
+          </a:p>
+        </p:txBody>
+      </p:sp>
+    </p:spTree>
+    <p:extLst>
+      <p:ext uri="{BB962C8B-B14F-4D97-AF65-F5344CB8AC3E}">
+        <p14:creationId xmlns:p14="http://schemas.microsoft.com/office/powerpoint/2010/main" val="4067574677"/>
       </p:ext>
     </p:extLst>
   </p:cSld>
@@ -19989,176 +19841,6 @@
                   <a:schemeClr val="bg1"/>
                 </a:solidFill>
               </a:rPr>
-              <a:t>Finds smallest element and puts in lowest index, then puts second smallest in the second index, and so on</a:t>
-            </a:r>
-          </a:p>
-          <a:p>
-            <a:endParaRPr lang="en-US" dirty="0">
-              <a:solidFill>
-                <a:schemeClr val="bg1"/>
-              </a:solidFill>
-            </a:endParaRPr>
-          </a:p>
-          <a:p>
-            <a:r>
-              <a:rPr lang="en-US" dirty="0">
-                <a:solidFill>
-                  <a:schemeClr val="bg1"/>
-                </a:solidFill>
-              </a:rPr>
-              <a:t>Swaps neighboring items</a:t>
-            </a:r>
-          </a:p>
-          <a:p>
-            <a:endParaRPr lang="en-US" dirty="0">
-              <a:solidFill>
-                <a:schemeClr val="bg1"/>
-              </a:solidFill>
-            </a:endParaRPr>
-          </a:p>
-          <a:p>
-            <a:r>
-              <a:rPr lang="en-US" dirty="0">
-                <a:solidFill>
-                  <a:schemeClr val="bg1"/>
-                </a:solidFill>
-              </a:rPr>
-              <a:t>Rearranges elements at a gap and reduces gaps across passes until it converges</a:t>
-            </a:r>
-          </a:p>
-          <a:p>
-            <a:endParaRPr lang="en-US" dirty="0">
-              <a:solidFill>
-                <a:srgbClr val="EB6E19"/>
-              </a:solidFill>
-            </a:endParaRPr>
-          </a:p>
-        </p:txBody>
-      </p:sp>
-    </p:spTree>
-    <p:extLst>
-      <p:ext uri="{BB962C8B-B14F-4D97-AF65-F5344CB8AC3E}">
-        <p14:creationId xmlns:p14="http://schemas.microsoft.com/office/powerpoint/2010/main" val="4067574677"/>
-      </p:ext>
-    </p:extLst>
-  </p:cSld>
-  <p:clrMapOvr>
-    <a:masterClrMapping/>
-  </p:clrMapOvr>
-</p:sld>
-</file>
-
-<file path=ppt/slides/slide31.xml><?xml version="1.0" encoding="utf-8"?>
-<p:sld xmlns:a="http://schemas.openxmlformats.org/drawingml/2006/main" xmlns:r="http://schemas.openxmlformats.org/officeDocument/2006/relationships" xmlns:p="http://schemas.openxmlformats.org/presentationml/2006/main" show="0">
-  <p:cSld>
-    <p:bg>
-      <p:bgPr>
-        <a:solidFill>
-          <a:schemeClr val="tx1"/>
-        </a:solidFill>
-        <a:effectLst/>
-      </p:bgPr>
-    </p:bg>
-    <p:spTree>
-      <p:nvGrpSpPr>
-        <p:cNvPr id="1" name=""/>
-        <p:cNvGrpSpPr/>
-        <p:nvPr/>
-      </p:nvGrpSpPr>
-      <p:grpSpPr>
-        <a:xfrm>
-          <a:off x="0" y="0"/>
-          <a:ext cx="0" cy="0"/>
-          <a:chOff x="0" y="0"/>
-          <a:chExt cx="0" cy="0"/>
-        </a:xfrm>
-      </p:grpSpPr>
-      <p:sp>
-        <p:nvSpPr>
-          <p:cNvPr id="2" name="Title 1">
-            <a:extLst>
-              <a:ext uri="{FF2B5EF4-FFF2-40B4-BE49-F238E27FC236}">
-                <a16:creationId xmlns:a16="http://schemas.microsoft.com/office/drawing/2014/main" id="{FA98DF2D-4C21-45B7-8CEE-41E2C22A3166}"/>
-              </a:ext>
-            </a:extLst>
-          </p:cNvPr>
-          <p:cNvSpPr>
-            <a:spLocks noGrp="1"/>
-          </p:cNvSpPr>
-          <p:nvPr>
-            <p:ph type="title"/>
-          </p:nvPr>
-        </p:nvSpPr>
-        <p:spPr/>
-        <p:txBody>
-          <a:bodyPr>
-            <a:normAutofit/>
-          </a:bodyPr>
-          <a:lstStyle/>
-          <a:p>
-            <a:r>
-              <a:rPr lang="en-US" sz="3600" dirty="0">
-                <a:solidFill>
-                  <a:schemeClr val="bg1"/>
-                </a:solidFill>
-                <a:latin typeface="Gotham Bold" pitchFamily="50" charset="0"/>
-              </a:rPr>
-              <a:t>Mini Review – Sorting</a:t>
-            </a:r>
-          </a:p>
-        </p:txBody>
-      </p:sp>
-      <p:sp>
-        <p:nvSpPr>
-          <p:cNvPr id="6" name="TextBox 5">
-            <a:extLst>
-              <a:ext uri="{FF2B5EF4-FFF2-40B4-BE49-F238E27FC236}">
-                <a16:creationId xmlns:a16="http://schemas.microsoft.com/office/drawing/2014/main" id="{6910D817-7706-4B40-61E0-933842B0CC61}"/>
-              </a:ext>
-            </a:extLst>
-          </p:cNvPr>
-          <p:cNvSpPr txBox="1"/>
-          <p:nvPr/>
-        </p:nvSpPr>
-        <p:spPr>
-          <a:xfrm>
-            <a:off x="1103126" y="2326068"/>
-            <a:ext cx="9252985" cy="2585323"/>
-          </a:xfrm>
-          <a:prstGeom prst="rect">
-            <a:avLst/>
-          </a:prstGeom>
-          <a:noFill/>
-        </p:spPr>
-        <p:txBody>
-          <a:bodyPr wrap="square">
-            <a:spAutoFit/>
-          </a:bodyPr>
-          <a:lstStyle/>
-          <a:p>
-            <a:r>
-              <a:rPr lang="en-US" dirty="0">
-                <a:solidFill>
-                  <a:srgbClr val="EB6E19"/>
-                </a:solidFill>
-              </a:rPr>
-              <a:t>Recognize the following techniques with the most appropriate algorithm.</a:t>
-            </a:r>
-          </a:p>
-          <a:p>
-            <a:endParaRPr lang="en-US" dirty="0">
-              <a:solidFill>
-                <a:srgbClr val="EB6E19"/>
-              </a:solidFill>
-            </a:endParaRPr>
-          </a:p>
-          <a:p>
-            <a:r>
-              <a:rPr lang="en-US" dirty="0">
-                <a:solidFill>
-                  <a:schemeClr val="bg1"/>
-                </a:solidFill>
-              </a:rPr>
               <a:t>Finds smallest element and puts in lowest index, then puts second smallest in the second index, and so on: </a:t>
             </a:r>
             <a:r>
@@ -20247,7 +19929,7 @@
 </p:sld>
 </file>
 
-<file path=ppt/slides/slide32.xml><?xml version="1.0" encoding="utf-8"?>
+<file path=ppt/slides/slide31.xml><?xml version="1.0" encoding="utf-8"?>
 <p:sld xmlns:a="http://schemas.openxmlformats.org/drawingml/2006/main" xmlns:r="http://schemas.openxmlformats.org/officeDocument/2006/relationships" xmlns:p="http://schemas.openxmlformats.org/presentationml/2006/main" show="0">
   <p:cSld>
     <p:bg>
@@ -21436,7 +21118,7 @@
 </p:sld>
 </file>
 
-<file path=ppt/slides/slide33.xml><?xml version="1.0" encoding="utf-8"?>
+<file path=ppt/slides/slide32.xml><?xml version="1.0" encoding="utf-8"?>
 <p:sld xmlns:a="http://schemas.openxmlformats.org/drawingml/2006/main" xmlns:r="http://schemas.openxmlformats.org/officeDocument/2006/relationships" xmlns:p="http://schemas.openxmlformats.org/presentationml/2006/main" show="0">
   <p:cSld>
     <p:bg>
@@ -22631,7 +22313,7 @@
 </p:sld>
 </file>
 
-<file path=ppt/slides/slide34.xml><?xml version="1.0" encoding="utf-8"?>
+<file path=ppt/slides/slide33.xml><?xml version="1.0" encoding="utf-8"?>
 <p:sld xmlns:a="http://schemas.openxmlformats.org/drawingml/2006/main" xmlns:r="http://schemas.openxmlformats.org/officeDocument/2006/relationships" xmlns:p="http://schemas.openxmlformats.org/presentationml/2006/main">
   <p:cSld>
     <p:bg>
@@ -22893,18 +22575,8 @@
                 <a:ea typeface="+mn-ea"/>
                 <a:cs typeface="+mn-cs"/>
               </a:rPr>
-              <a:t>Date and timings :</a:t>
-            </a:r>
-          </a:p>
-          <a:p>
-            <a:pPr marL="742950" lvl="1" indent="-285750">
-              <a:lnSpc>
-                <a:spcPct val="150000"/>
-              </a:lnSpc>
-              <a:buFont typeface="Wingdings" panose="05000000000000000000" pitchFamily="2" charset="2"/>
-              <a:buChar char="§"/>
-              <a:defRPr/>
-            </a:pPr>
+              <a:t>Date and timings : </a:t>
+            </a:r>
             <a:r>
               <a:rPr kumimoji="0" lang="en-US" sz="1600" b="0" i="0" u="none" strike="noStrike" kern="1200" cap="none" spc="0" normalizeH="0" baseline="0" noProof="0" dirty="0">
                 <a:ln>
@@ -22918,103 +22590,20 @@
                 <a:uFillTx/>
                 <a:latin typeface="Consolas" panose="020B0609020204030204" pitchFamily="49" charset="0"/>
               </a:rPr>
-              <a:t>For campus students (excluding students who need accommodations): </a:t>
-            </a:r>
-            <a:r>
-              <a:rPr kumimoji="0" lang="en-US" sz="1600" b="0" i="0" u="none" strike="noStrike" kern="1200" cap="none" spc="0" normalizeH="0" baseline="0" noProof="0" dirty="0">
-                <a:ln>
-                  <a:noFill/>
-                </a:ln>
-                <a:solidFill>
-                  <a:srgbClr val="EB6E19"/>
-                </a:solidFill>
-                <a:effectLst/>
-                <a:uLnTx/>
-                <a:uFillTx/>
-                <a:latin typeface="Consolas" panose="020B0609020204030204" pitchFamily="49" charset="0"/>
-              </a:rPr>
-              <a:t>Exam 1 will be on Feb 26 (Thursday) at 8:20 pm to 10:10 pm on campus in-person. The location of the exam is dependent on your last name.</a:t>
-            </a:r>
-          </a:p>
-          <a:p>
-            <a:pPr marL="742950" lvl="1" indent="-285750">
-              <a:lnSpc>
-                <a:spcPct val="150000"/>
-              </a:lnSpc>
-              <a:buFont typeface="Wingdings" panose="05000000000000000000" pitchFamily="2" charset="2"/>
-              <a:buChar char="§"/>
-              <a:defRPr/>
-            </a:pPr>
-            <a:r>
-              <a:rPr kumimoji="0" lang="en-US" sz="1600" b="0" i="0" u="none" strike="noStrike" kern="1200" cap="none" spc="0" normalizeH="0" baseline="0" noProof="0" dirty="0">
-                <a:ln>
-                  <a:noFill/>
-                </a:ln>
-                <a:solidFill>
-                  <a:srgbClr val="00B050"/>
-                </a:solidFill>
-                <a:effectLst/>
-                <a:uLnTx/>
-                <a:uFillTx/>
-                <a:latin typeface="Consolas" panose="020B0609020204030204" pitchFamily="49" charset="0"/>
-              </a:rPr>
-              <a:t>For campus students who need accommodations as per DRC: </a:t>
-            </a:r>
-            <a:r>
-              <a:rPr kumimoji="0" lang="en-US" sz="1600" b="0" i="0" u="none" strike="noStrike" kern="1200" cap="none" spc="0" normalizeH="0" baseline="0" noProof="0" dirty="0">
-                <a:ln>
-                  <a:noFill/>
-                </a:ln>
-                <a:solidFill>
-                  <a:srgbClr val="EB6E19"/>
-                </a:solidFill>
-                <a:effectLst/>
-                <a:uLnTx/>
-                <a:uFillTx/>
-                <a:latin typeface="Consolas" panose="020B0609020204030204" pitchFamily="49" charset="0"/>
-              </a:rPr>
-              <a:t>Exam 1 will be on Feb 26 (Thursday). You can take the exam on Honorlock anytime between 6 pm to 11:59 pm at your home.</a:t>
-            </a:r>
-          </a:p>
-          <a:p>
-            <a:pPr marL="742950" lvl="1" indent="-285750">
-              <a:lnSpc>
-                <a:spcPct val="150000"/>
-              </a:lnSpc>
-              <a:buFont typeface="Wingdings" panose="05000000000000000000" pitchFamily="2" charset="2"/>
-              <a:buChar char="§"/>
-              <a:defRPr/>
-            </a:pPr>
-            <a:r>
-              <a:rPr kumimoji="0" lang="en-US" sz="1600" b="0" i="0" u="none" strike="noStrike" kern="1200" cap="none" spc="0" normalizeH="0" baseline="0" noProof="0" dirty="0">
-                <a:ln>
-                  <a:noFill/>
-                </a:ln>
-                <a:solidFill>
-                  <a:srgbClr val="00B050"/>
-                </a:solidFill>
-                <a:effectLst/>
-                <a:uLnTx/>
-                <a:uFillTx/>
-                <a:latin typeface="Consolas" panose="020B0609020204030204" pitchFamily="49" charset="0"/>
-              </a:rPr>
-              <a:t>For UFOL/UDER students: </a:t>
-            </a:r>
-            <a:r>
-              <a:rPr kumimoji="0" lang="en-US" sz="1600" b="0" i="0" u="none" strike="noStrike" kern="1200" cap="none" spc="0" normalizeH="0" baseline="0" noProof="0" dirty="0">
-                <a:ln>
-                  <a:noFill/>
-                </a:ln>
-                <a:solidFill>
-                  <a:srgbClr val="EB6E19"/>
-                </a:solidFill>
-                <a:effectLst/>
-                <a:uLnTx/>
-                <a:uFillTx/>
-                <a:latin typeface="Consolas" panose="020B0609020204030204" pitchFamily="49" charset="0"/>
-              </a:rPr>
-              <a:t>Exam 1 will available between 8:20 pm on Feb 26 (Thursday) to midnight on Feb 28 (Saturday). You can take the exam on Honorlock anytime at your home.</a:t>
-            </a:r>
+              <a:t>Exam 1 will be on June 16, 8 pm to midnight via Honorlock and you can take it at home.</a:t>
+            </a:r>
+            <a:endParaRPr kumimoji="0" lang="en-US" sz="1600" b="0" i="0" u="none" strike="noStrike" kern="1200" cap="none" spc="0" normalizeH="0" baseline="0" noProof="0" dirty="0">
+              <a:ln>
+                <a:noFill/>
+              </a:ln>
+              <a:solidFill>
+                <a:srgbClr val="EB6E19"/>
+              </a:solidFill>
+              <a:effectLst/>
+              <a:uLnTx/>
+              <a:uFillTx/>
+              <a:latin typeface="Consolas" panose="020B0609020204030204" pitchFamily="49" charset="0"/>
+            </a:endParaRPr>
           </a:p>
           <a:p>
             <a:pPr marL="285750" indent="-285750">
@@ -23040,7 +22629,7 @@
                 <a:ea typeface="+mn-ea"/>
                 <a:cs typeface="+mn-cs"/>
               </a:rPr>
-              <a:t>The exam duration is 1 hr 50 minutes hours. </a:t>
+              <a:t>The exam duration is 2 hours. </a:t>
             </a:r>
           </a:p>
           <a:p>
@@ -23148,13 +22737,7 @@
     </p:bg>
     <p:spTree>
       <p:nvGrpSpPr>
-        <p:cNvPr id="1" name="">
-          <a:extLst>
-            <a:ext uri="{FF2B5EF4-FFF2-40B4-BE49-F238E27FC236}">
-              <a16:creationId xmlns:a16="http://schemas.microsoft.com/office/drawing/2014/main" id="{475CB625-007D-DED2-4640-E7409BD83A52}"/>
-            </a:ext>
-          </a:extLst>
-        </p:cNvPr>
+        <p:cNvPr id="1" name=""/>
         <p:cNvGrpSpPr/>
         <p:nvPr/>
       </p:nvGrpSpPr>
@@ -23171,7 +22754,7 @@
           <p:cNvPr id="2" name="Title 1">
             <a:extLst>
               <a:ext uri="{FF2B5EF4-FFF2-40B4-BE49-F238E27FC236}">
-                <a16:creationId xmlns:a16="http://schemas.microsoft.com/office/drawing/2014/main" id="{9C549461-62E7-7462-ED21-EB75ECB9EE97}"/>
+                <a16:creationId xmlns:a16="http://schemas.microsoft.com/office/drawing/2014/main" id="{FA98DF2D-4C21-45B7-8CEE-41E2C22A3166}"/>
               </a:ext>
             </a:extLst>
           </p:cNvPr>
@@ -23185,110 +22768,67 @@
         <p:spPr/>
         <p:txBody>
           <a:bodyPr>
-            <a:normAutofit fontScale="90000"/>
+            <a:normAutofit/>
           </a:bodyPr>
           <a:lstStyle/>
           <a:p>
-            <a:br>
-              <a:rPr lang="en-US" dirty="0">
+            <a:r>
+              <a:rPr lang="en-US" sz="3600" dirty="0">
                 <a:solidFill>
                   <a:schemeClr val="bg1"/>
                 </a:solidFill>
                 <a:latin typeface="Gotham Bold" pitchFamily="50" charset="0"/>
               </a:rPr>
-            </a:br>
-            <a:br>
-              <a:rPr lang="en-US" dirty="0">
-                <a:solidFill>
-                  <a:schemeClr val="bg1"/>
-                </a:solidFill>
-                <a:latin typeface="Gotham Bold" pitchFamily="50" charset="0"/>
-              </a:rPr>
-            </a:br>
-            <a:br>
-              <a:rPr lang="en-US" dirty="0">
-                <a:solidFill>
-                  <a:schemeClr val="bg1"/>
-                </a:solidFill>
-                <a:latin typeface="Gotham Bold" pitchFamily="50" charset="0"/>
-              </a:rPr>
-            </a:br>
-            <a:r>
-              <a:rPr lang="en-US" dirty="0">
-                <a:solidFill>
-                  <a:schemeClr val="bg1"/>
-                </a:solidFill>
-                <a:latin typeface="Gotham Bold" pitchFamily="50" charset="0"/>
-              </a:rPr>
-              <a:t>Exam 1 Logistics</a:t>
-            </a:r>
-            <a:br>
-              <a:rPr lang="en-US" dirty="0">
-                <a:solidFill>
-                  <a:schemeClr val="bg1"/>
-                </a:solidFill>
-                <a:latin typeface="Gotham Bold" pitchFamily="50" charset="0"/>
-              </a:rPr>
-            </a:br>
-            <a:br>
-              <a:rPr lang="en-US" dirty="0">
-                <a:solidFill>
-                  <a:schemeClr val="bg1"/>
-                </a:solidFill>
-                <a:latin typeface="Gotham Bold" pitchFamily="50" charset="0"/>
-              </a:rPr>
-            </a:br>
-            <a:br>
-              <a:rPr lang="en-US" dirty="0">
-                <a:solidFill>
-                  <a:schemeClr val="bg1"/>
-                </a:solidFill>
-                <a:latin typeface="Gotham Bold" pitchFamily="50" charset="0"/>
-              </a:rPr>
-            </a:br>
-            <a:endParaRPr lang="en-US" dirty="0">
-              <a:solidFill>
-                <a:schemeClr val="bg1"/>
-              </a:solidFill>
-              <a:latin typeface="Gotham Bold" pitchFamily="50" charset="0"/>
-            </a:endParaRPr>
-          </a:p>
-        </p:txBody>
-      </p:sp>
-      <p:pic>
-        <p:nvPicPr>
-          <p:cNvPr id="7" name="Picture 6">
+              <a:t>Exam 1 Topics and Expectations</a:t>
+            </a:r>
+          </a:p>
+        </p:txBody>
+      </p:sp>
+      <p:sp>
+        <p:nvSpPr>
+          <p:cNvPr id="5" name="TextBox 4">
             <a:extLst>
               <a:ext uri="{FF2B5EF4-FFF2-40B4-BE49-F238E27FC236}">
-                <a16:creationId xmlns:a16="http://schemas.microsoft.com/office/drawing/2014/main" id="{2DC7121D-0AB6-F308-1F5A-7CB6076A5177}"/>
+                <a16:creationId xmlns:a16="http://schemas.microsoft.com/office/drawing/2014/main" id="{B9F3F2B3-9659-875A-AE5F-17F90640C5E8}"/>
               </a:ext>
             </a:extLst>
           </p:cNvPr>
-          <p:cNvPicPr>
-            <a:picLocks noChangeAspect="1"/>
-          </p:cNvPicPr>
+          <p:cNvSpPr txBox="1"/>
           <p:nvPr/>
-        </p:nvPicPr>
-        <p:blipFill>
-          <a:blip r:embed="rId3"/>
-          <a:stretch>
-            <a:fillRect/>
-          </a:stretch>
-        </p:blipFill>
+        </p:nvSpPr>
         <p:spPr>
           <a:xfrm>
-            <a:off x="2177185" y="2080027"/>
-            <a:ext cx="6911939" cy="2110923"/>
+            <a:off x="1083527" y="1823445"/>
+            <a:ext cx="10870580" cy="369332"/>
           </a:xfrm>
           <a:prstGeom prst="rect">
             <a:avLst/>
           </a:prstGeom>
+          <a:noFill/>
         </p:spPr>
-      </p:pic>
+        <p:txBody>
+          <a:bodyPr wrap="square">
+            <a:spAutoFit/>
+          </a:bodyPr>
+          <a:lstStyle/>
+          <a:p>
+            <a:r>
+              <a:rPr lang="en-US" dirty="0">
+                <a:hlinkClick r:id="rId3"/>
+              </a:rPr>
+              <a:t>https://docs.google.com/document/d/1mfFdECreuzJLSRuCWvGjSMqbiQ88ZvFY_9UHE3I9iNM/edit?usp=sharing</a:t>
+            </a:r>
+            <a:r>
+              <a:rPr lang="en-US" dirty="0"/>
+              <a:t> </a:t>
+            </a:r>
+          </a:p>
+        </p:txBody>
+      </p:sp>
     </p:spTree>
     <p:extLst>
       <p:ext uri="{BB962C8B-B14F-4D97-AF65-F5344CB8AC3E}">
-        <p14:creationId xmlns:p14="http://schemas.microsoft.com/office/powerpoint/2010/main" val="8960134"/>
+        <p14:creationId xmlns:p14="http://schemas.microsoft.com/office/powerpoint/2010/main" val="1488638803"/>
       </p:ext>
     </p:extLst>
   </p:cSld>
@@ -23353,17 +22893,17 @@
                 </a:solidFill>
                 <a:latin typeface="Gotham Bold" pitchFamily="50" charset="0"/>
               </a:rPr>
-              <a:t>Exam 1 Topics and Expectations</a:t>
-            </a:r>
-          </a:p>
-        </p:txBody>
-      </p:sp>
-      <p:sp>
-        <p:nvSpPr>
-          <p:cNvPr id="5" name="TextBox 4">
+              <a:t>Mini Review – Complexity</a:t>
+            </a:r>
+          </a:p>
+        </p:txBody>
+      </p:sp>
+      <p:sp>
+        <p:nvSpPr>
+          <p:cNvPr id="4" name="TextBox 3">
             <a:extLst>
               <a:ext uri="{FF2B5EF4-FFF2-40B4-BE49-F238E27FC236}">
-                <a16:creationId xmlns:a16="http://schemas.microsoft.com/office/drawing/2014/main" id="{B9F3F2B3-9659-875A-AE5F-17F90640C5E8}"/>
+                <a16:creationId xmlns:a16="http://schemas.microsoft.com/office/drawing/2014/main" id="{A70E6009-18FB-490F-970D-3C9B83737A5E}"/>
               </a:ext>
             </a:extLst>
           </p:cNvPr>
@@ -23372,8 +22912,8 @@
         </p:nvSpPr>
         <p:spPr>
           <a:xfrm>
-            <a:off x="1083527" y="1823445"/>
-            <a:ext cx="10870580" cy="369332"/>
+            <a:off x="1039618" y="1828743"/>
+            <a:ext cx="8422881" cy="1323439"/>
           </a:xfrm>
           <a:prstGeom prst="rect">
             <a:avLst/>
@@ -23381,28 +22921,49 @@
           <a:noFill/>
         </p:spPr>
         <p:txBody>
-          <a:bodyPr wrap="square">
+          <a:bodyPr wrap="square" rtlCol="0">
             <a:spAutoFit/>
           </a:bodyPr>
           <a:lstStyle/>
           <a:p>
             <a:r>
-              <a:rPr lang="en-US" dirty="0">
-                <a:hlinkClick r:id="rId3"/>
-              </a:rPr>
-              <a:t>https://docs.google.com/document/d/1XAUGHQE4JWmOsDkkbfTnLFoVi_QXySxC-J4XZnK4VTQ/edit?tab=t.0</a:t>
-            </a:r>
-            <a:r>
-              <a:rPr lang="en-US" dirty="0"/>
-              <a:t> </a:t>
-            </a:r>
+              <a:rPr lang="en-US" sz="2000" dirty="0">
+                <a:solidFill>
+                  <a:srgbClr val="0081E2"/>
+                </a:solidFill>
+                <a:latin typeface="Consolas" panose="020B0609020204030204" pitchFamily="49" charset="0"/>
+              </a:rPr>
+              <a:t>What is the computational complexity of adding an item to a stack in the worst case in terms of Big O notation?</a:t>
+            </a:r>
+            <a:endParaRPr lang="en-US" sz="2000" dirty="0">
+              <a:solidFill>
+                <a:srgbClr val="EB6E19"/>
+              </a:solidFill>
+              <a:latin typeface="Consolas" panose="020B0609020204030204" pitchFamily="49" charset="0"/>
+            </a:endParaRPr>
+          </a:p>
+          <a:p>
+            <a:endParaRPr lang="en-US" sz="2000" dirty="0">
+              <a:solidFill>
+                <a:srgbClr val="EB6E19"/>
+              </a:solidFill>
+              <a:latin typeface="Consolas" panose="020B0609020204030204" pitchFamily="49" charset="0"/>
+            </a:endParaRPr>
+          </a:p>
+          <a:p>
+            <a:endParaRPr lang="en-US" sz="2000" dirty="0">
+              <a:solidFill>
+                <a:srgbClr val="EB6E19"/>
+              </a:solidFill>
+              <a:latin typeface="Consolas" panose="020B0609020204030204" pitchFamily="49" charset="0"/>
+            </a:endParaRPr>
           </a:p>
         </p:txBody>
       </p:sp>
     </p:spTree>
     <p:extLst>
       <p:ext uri="{BB962C8B-B14F-4D97-AF65-F5344CB8AC3E}">
-        <p14:creationId xmlns:p14="http://schemas.microsoft.com/office/powerpoint/2010/main" val="1488638803"/>
+        <p14:creationId xmlns:p14="http://schemas.microsoft.com/office/powerpoint/2010/main" val="211684098"/>
       </p:ext>
     </p:extLst>
   </p:cSld>
@@ -23487,7 +23048,7 @@
         <p:spPr>
           <a:xfrm>
             <a:off x="1039618" y="1828743"/>
-            <a:ext cx="8422881" cy="1323439"/>
+            <a:ext cx="8422881" cy="1631216"/>
           </a:xfrm>
           <a:prstGeom prst="rect">
             <a:avLst/>
@@ -23532,12 +23093,23 @@
               <a:latin typeface="Consolas" panose="020B0609020204030204" pitchFamily="49" charset="0"/>
             </a:endParaRPr>
           </a:p>
+          <a:p>
+            <a:r>
+              <a:rPr lang="en-US" sz="2000" dirty="0">
+                <a:solidFill>
+                  <a:srgbClr val="00DA63"/>
+                </a:solidFill>
+                <a:latin typeface="Consolas" panose="020B0609020204030204" pitchFamily="49" charset="0"/>
+              </a:rPr>
+              <a:t>Answer: O(1)</a:t>
+            </a:r>
+          </a:p>
         </p:txBody>
       </p:sp>
     </p:spTree>
     <p:extLst>
       <p:ext uri="{BB962C8B-B14F-4D97-AF65-F5344CB8AC3E}">
-        <p14:creationId xmlns:p14="http://schemas.microsoft.com/office/powerpoint/2010/main" val="211684098"/>
+        <p14:creationId xmlns:p14="http://schemas.microsoft.com/office/powerpoint/2010/main" val="4094376154"/>
       </p:ext>
     </p:extLst>
   </p:cSld>
@@ -23622,7 +23194,7 @@
         <p:spPr>
           <a:xfrm>
             <a:off x="1039618" y="1828743"/>
-            <a:ext cx="8422881" cy="1631216"/>
+            <a:ext cx="9635971" cy="1938992"/>
           </a:xfrm>
           <a:prstGeom prst="rect">
             <a:avLst/>
@@ -23630,7 +23202,7 @@
           <a:noFill/>
         </p:spPr>
         <p:txBody>
-          <a:bodyPr wrap="square" rtlCol="0">
+          <a:bodyPr wrap="none" rtlCol="0">
             <a:spAutoFit/>
           </a:bodyPr>
           <a:lstStyle/>
@@ -23642,8 +23214,10 @@
                 </a:solidFill>
                 <a:latin typeface="Consolas" panose="020B0609020204030204" pitchFamily="49" charset="0"/>
               </a:rPr>
-              <a:t>What is the computational complexity of adding an item to a stack in the worst case in terms of Big O notation?</a:t>
-            </a:r>
+              <a:t>What is the computational complexity of the following code snippet?</a:t>
+            </a:r>
+          </a:p>
+          <a:p>
             <a:endParaRPr lang="en-US" sz="2000" dirty="0">
               <a:solidFill>
                 <a:srgbClr val="EB6E19"/>
@@ -23652,30 +23226,92 @@
             </a:endParaRPr>
           </a:p>
           <a:p>
-            <a:endParaRPr lang="en-US" sz="2000" dirty="0">
-              <a:solidFill>
-                <a:srgbClr val="EB6E19"/>
-              </a:solidFill>
-              <a:latin typeface="Consolas" panose="020B0609020204030204" pitchFamily="49" charset="0"/>
-            </a:endParaRPr>
-          </a:p>
-          <a:p>
-            <a:endParaRPr lang="en-US" sz="2000" dirty="0">
-              <a:solidFill>
-                <a:srgbClr val="EB6E19"/>
-              </a:solidFill>
-              <a:latin typeface="Consolas" panose="020B0609020204030204" pitchFamily="49" charset="0"/>
-            </a:endParaRPr>
-          </a:p>
-          <a:p>
+            <a:r>
+              <a:rPr lang="en-US" sz="2000" dirty="0" err="1">
+                <a:solidFill>
+                  <a:srgbClr val="EB6E19"/>
+                </a:solidFill>
+                <a:latin typeface="Consolas" panose="020B0609020204030204" pitchFamily="49" charset="0"/>
+              </a:rPr>
+              <a:t>int</a:t>
+            </a:r>
             <a:r>
               <a:rPr lang="en-US" sz="2000" dirty="0">
                 <a:solidFill>
-                  <a:srgbClr val="00DA63"/>
-                </a:solidFill>
-                <a:latin typeface="Consolas" panose="020B0609020204030204" pitchFamily="49" charset="0"/>
-              </a:rPr>
-              <a:t>Answer: O(1)</a:t>
+                  <a:srgbClr val="EB6E19"/>
+                </a:solidFill>
+                <a:latin typeface="Consolas" panose="020B0609020204030204" pitchFamily="49" charset="0"/>
+              </a:rPr>
+              <a:t> k;</a:t>
+            </a:r>
+          </a:p>
+          <a:p>
+            <a:r>
+              <a:rPr lang="en-US" sz="2000" dirty="0">
+                <a:solidFill>
+                  <a:srgbClr val="EB6E19"/>
+                </a:solidFill>
+                <a:latin typeface="Consolas" panose="020B0609020204030204" pitchFamily="49" charset="0"/>
+              </a:rPr>
+              <a:t>for (int i=1; i &lt; n; i++)</a:t>
+            </a:r>
+          </a:p>
+          <a:p>
+            <a:r>
+              <a:rPr lang="en-US" sz="2000" dirty="0">
+                <a:solidFill>
+                  <a:srgbClr val="EB6E19"/>
+                </a:solidFill>
+                <a:latin typeface="Consolas" panose="020B0609020204030204" pitchFamily="49" charset="0"/>
+              </a:rPr>
+              <a:t>	for (</a:t>
+            </a:r>
+            <a:r>
+              <a:rPr lang="en-US" sz="2000" dirty="0" err="1">
+                <a:solidFill>
+                  <a:srgbClr val="EB6E19"/>
+                </a:solidFill>
+                <a:latin typeface="Consolas" panose="020B0609020204030204" pitchFamily="49" charset="0"/>
+              </a:rPr>
+              <a:t>int</a:t>
+            </a:r>
+            <a:r>
+              <a:rPr lang="en-US" sz="2000" dirty="0">
+                <a:solidFill>
+                  <a:srgbClr val="EB6E19"/>
+                </a:solidFill>
+                <a:latin typeface="Consolas" panose="020B0609020204030204" pitchFamily="49" charset="0"/>
+              </a:rPr>
+              <a:t> j=n; j&gt;1; j=j/2)</a:t>
+            </a:r>
+          </a:p>
+          <a:p>
+            <a:r>
+              <a:rPr lang="en-US" sz="2000" dirty="0">
+                <a:solidFill>
+                  <a:srgbClr val="EB6E19"/>
+                </a:solidFill>
+                <a:latin typeface="Consolas" panose="020B0609020204030204" pitchFamily="49" charset="0"/>
+              </a:rPr>
+              <a:t>		k = </a:t>
+            </a:r>
+            <a:r>
+              <a:rPr lang="en-US" sz="2000" dirty="0" err="1">
+                <a:solidFill>
+                  <a:srgbClr val="EB6E19"/>
+                </a:solidFill>
+                <a:latin typeface="Consolas" panose="020B0609020204030204" pitchFamily="49" charset="0"/>
+              </a:rPr>
+              <a:t>i</a:t>
+            </a:r>
+            <a:r>
+              <a:rPr lang="en-US" sz="2000" dirty="0">
+                <a:solidFill>
+                  <a:srgbClr val="EB6E19"/>
+                </a:solidFill>
+                <a:latin typeface="Consolas" panose="020B0609020204030204" pitchFamily="49" charset="0"/>
+              </a:rPr>
+              <a:t>*j;</a:t>
             </a:r>
           </a:p>
         </p:txBody>
@@ -23683,7 +23319,7 @@
     </p:spTree>
     <p:extLst>
       <p:ext uri="{BB962C8B-B14F-4D97-AF65-F5344CB8AC3E}">
-        <p14:creationId xmlns:p14="http://schemas.microsoft.com/office/powerpoint/2010/main" val="4094376154"/>
+        <p14:creationId xmlns:p14="http://schemas.microsoft.com/office/powerpoint/2010/main" val="228209108"/>
       </p:ext>
     </p:extLst>
   </p:cSld>
@@ -23768,7 +23404,7 @@
         <p:spPr>
           <a:xfrm>
             <a:off x="1039618" y="1828743"/>
-            <a:ext cx="9635971" cy="1938992"/>
+            <a:ext cx="9635971" cy="3170099"/>
           </a:xfrm>
           <a:prstGeom prst="rect">
             <a:avLst/>
@@ -23867,25 +23503,60 @@
                 </a:solidFill>
                 <a:latin typeface="Consolas" panose="020B0609020204030204" pitchFamily="49" charset="0"/>
               </a:rPr>
-              <a:t>		k = </a:t>
-            </a:r>
-            <a:r>
-              <a:rPr lang="en-US" sz="2000" dirty="0" err="1">
-                <a:solidFill>
-                  <a:srgbClr val="EB6E19"/>
-                </a:solidFill>
-                <a:latin typeface="Consolas" panose="020B0609020204030204" pitchFamily="49" charset="0"/>
-              </a:rPr>
-              <a:t>i</a:t>
-            </a:r>
+              <a:t>		k = i*j;</a:t>
+            </a:r>
+          </a:p>
+          <a:p>
+            <a:endParaRPr lang="en-US" sz="2000" dirty="0">
+              <a:solidFill>
+                <a:srgbClr val="EB6E19"/>
+              </a:solidFill>
+              <a:latin typeface="Consolas" panose="020B0609020204030204" pitchFamily="49" charset="0"/>
+            </a:endParaRPr>
+          </a:p>
+          <a:p>
+            <a:endParaRPr lang="en-US" sz="2000" dirty="0">
+              <a:solidFill>
+                <a:srgbClr val="EB6E19"/>
+              </a:solidFill>
+              <a:latin typeface="Consolas" panose="020B0609020204030204" pitchFamily="49" charset="0"/>
+            </a:endParaRPr>
+          </a:p>
+          <a:p>
+            <a:endParaRPr lang="en-US" sz="2000" dirty="0">
+              <a:solidFill>
+                <a:srgbClr val="EB6E19"/>
+              </a:solidFill>
+              <a:latin typeface="Consolas" panose="020B0609020204030204" pitchFamily="49" charset="0"/>
+            </a:endParaRPr>
+          </a:p>
+          <a:p>
             <a:r>
               <a:rPr lang="en-US" sz="2000" dirty="0">
                 <a:solidFill>
-                  <a:srgbClr val="EB6E19"/>
-                </a:solidFill>
-                <a:latin typeface="Consolas" panose="020B0609020204030204" pitchFamily="49" charset="0"/>
-              </a:rPr>
-              <a:t>*j;</a:t>
+                  <a:srgbClr val="00DA63"/>
+                </a:solidFill>
+                <a:latin typeface="Consolas" panose="020B0609020204030204" pitchFamily="49" charset="0"/>
+              </a:rPr>
+              <a:t>Answer: O(n log</a:t>
+            </a:r>
+            <a:r>
+              <a:rPr lang="en-US" sz="2000" baseline="-25000" dirty="0">
+                <a:solidFill>
+                  <a:srgbClr val="00DA63"/>
+                </a:solidFill>
+                <a:latin typeface="Consolas" panose="020B0609020204030204" pitchFamily="49" charset="0"/>
+              </a:rPr>
+              <a:t>2</a:t>
+            </a:r>
+            <a:r>
+              <a:rPr lang="en-US" sz="2000" dirty="0">
+                <a:solidFill>
+                  <a:srgbClr val="00DA63"/>
+                </a:solidFill>
+                <a:latin typeface="Consolas" panose="020B0609020204030204" pitchFamily="49" charset="0"/>
+              </a:rPr>
+              <a:t> n)</a:t>
             </a:r>
           </a:p>
         </p:txBody>
@@ -23893,7 +23564,7 @@
     </p:spTree>
     <p:extLst>
       <p:ext uri="{BB962C8B-B14F-4D97-AF65-F5344CB8AC3E}">
-        <p14:creationId xmlns:p14="http://schemas.microsoft.com/office/powerpoint/2010/main" val="228209108"/>
+        <p14:creationId xmlns:p14="http://schemas.microsoft.com/office/powerpoint/2010/main" val="2941247419"/>
       </p:ext>
     </p:extLst>
   </p:cSld>

--- a/Slides/Slides-PPT/Exam 1 - Review A.pptx
+++ b/Slides/Slides-PPT/Exam 1 - Review A.pptx
@@ -6,43 +6,42 @@
     <p:sldMasterId id="2147483672" r:id="rId2"/>
   </p:sldMasterIdLst>
   <p:notesMasterIdLst>
-    <p:notesMasterId r:id="rId37"/>
+    <p:notesMasterId r:id="rId36"/>
   </p:notesMasterIdLst>
   <p:sldIdLst>
     <p:sldId id="268" r:id="rId3"/>
     <p:sldId id="440" r:id="rId4"/>
     <p:sldId id="377" r:id="rId5"/>
     <p:sldId id="493" r:id="rId6"/>
-    <p:sldId id="691" r:id="rId7"/>
-    <p:sldId id="406" r:id="rId8"/>
-    <p:sldId id="504" r:id="rId9"/>
-    <p:sldId id="505" r:id="rId10"/>
-    <p:sldId id="480" r:id="rId11"/>
-    <p:sldId id="494" r:id="rId12"/>
-    <p:sldId id="496" r:id="rId13"/>
-    <p:sldId id="497" r:id="rId14"/>
-    <p:sldId id="498" r:id="rId15"/>
-    <p:sldId id="499" r:id="rId16"/>
-    <p:sldId id="500" r:id="rId17"/>
-    <p:sldId id="501" r:id="rId18"/>
-    <p:sldId id="502" r:id="rId19"/>
-    <p:sldId id="506" r:id="rId20"/>
-    <p:sldId id="507" r:id="rId21"/>
-    <p:sldId id="508" r:id="rId22"/>
-    <p:sldId id="681" r:id="rId23"/>
-    <p:sldId id="682" r:id="rId24"/>
-    <p:sldId id="485" r:id="rId25"/>
-    <p:sldId id="487" r:id="rId26"/>
-    <p:sldId id="509" r:id="rId27"/>
-    <p:sldId id="486" r:id="rId28"/>
-    <p:sldId id="688" r:id="rId29"/>
-    <p:sldId id="690" r:id="rId30"/>
-    <p:sldId id="689" r:id="rId31"/>
-    <p:sldId id="684" r:id="rId32"/>
-    <p:sldId id="686" r:id="rId33"/>
-    <p:sldId id="685" r:id="rId34"/>
-    <p:sldId id="687" r:id="rId35"/>
-    <p:sldId id="394" r:id="rId36"/>
+    <p:sldId id="406" r:id="rId7"/>
+    <p:sldId id="504" r:id="rId8"/>
+    <p:sldId id="505" r:id="rId9"/>
+    <p:sldId id="480" r:id="rId10"/>
+    <p:sldId id="494" r:id="rId11"/>
+    <p:sldId id="496" r:id="rId12"/>
+    <p:sldId id="497" r:id="rId13"/>
+    <p:sldId id="498" r:id="rId14"/>
+    <p:sldId id="499" r:id="rId15"/>
+    <p:sldId id="500" r:id="rId16"/>
+    <p:sldId id="501" r:id="rId17"/>
+    <p:sldId id="502" r:id="rId18"/>
+    <p:sldId id="506" r:id="rId19"/>
+    <p:sldId id="507" r:id="rId20"/>
+    <p:sldId id="508" r:id="rId21"/>
+    <p:sldId id="681" r:id="rId22"/>
+    <p:sldId id="682" r:id="rId23"/>
+    <p:sldId id="485" r:id="rId24"/>
+    <p:sldId id="487" r:id="rId25"/>
+    <p:sldId id="509" r:id="rId26"/>
+    <p:sldId id="486" r:id="rId27"/>
+    <p:sldId id="688" r:id="rId28"/>
+    <p:sldId id="690" r:id="rId29"/>
+    <p:sldId id="689" r:id="rId30"/>
+    <p:sldId id="684" r:id="rId31"/>
+    <p:sldId id="686" r:id="rId32"/>
+    <p:sldId id="685" r:id="rId33"/>
+    <p:sldId id="687" r:id="rId34"/>
+    <p:sldId id="394" r:id="rId35"/>
   </p:sldIdLst>
   <p:sldSz cx="12192000" cy="6858000"/>
   <p:notesSz cx="6858000" cy="9144000"/>
@@ -149,6 +148,65 @@
 </p:presentation>
 </file>
 
+<file path=ppt/revisionInfo.xml><?xml version="1.0" encoding="utf-8"?>
+<p1510:revInfo xmlns:a="http://schemas.openxmlformats.org/drawingml/2006/main" xmlns:r="http://schemas.openxmlformats.org/officeDocument/2006/relationships" xmlns:p1510="http://schemas.microsoft.com/office/powerpoint/2015/10/main">
+  <p1510:revLst>
+    <p1510:client id="{B7E846E1-99B9-47BF-BA5D-00D1AB335FFB}" v="3" dt="2026-10-01T16:36:44.134"/>
+  </p1510:revLst>
+</p1510:revInfo>
+</file>
+
+<file path=ppt/changesInfos/changesInfo1.xml><?xml version="1.0" encoding="utf-8"?>
+<pc:chgInfo xmlns:a="http://schemas.openxmlformats.org/drawingml/2006/main" xmlns:r="http://schemas.openxmlformats.org/officeDocument/2006/relationships" xmlns:ac="http://schemas.microsoft.com/office/drawing/2013/main/command" xmlns:pc="http://schemas.microsoft.com/office/powerpoint/2013/main/command">
+  <pc:docChgLst>
+    <pc:chgData name="Kapoor,Amanpreet" userId="5465ae5f-3ea6-4989-a24a-46ffecd15609" providerId="ADAL" clId="{E7E610D5-8D10-40F3-A5B7-2B0026961471}"/>
+    <pc:docChg chg="delSld modSld">
+      <pc:chgData name="Kapoor,Amanpreet" userId="5465ae5f-3ea6-4989-a24a-46ffecd15609" providerId="ADAL" clId="{E7E610D5-8D10-40F3-A5B7-2B0026961471}" dt="2026-10-01T16:36:48.028" v="54" actId="207"/>
+      <pc:docMkLst>
+        <pc:docMk/>
+      </pc:docMkLst>
+      <pc:sldChg chg="modSp mod">
+        <pc:chgData name="Kapoor,Amanpreet" userId="5465ae5f-3ea6-4989-a24a-46ffecd15609" providerId="ADAL" clId="{E7E610D5-8D10-40F3-A5B7-2B0026961471}" dt="2026-10-01T16:36:48.028" v="54" actId="207"/>
+        <pc:sldMkLst>
+          <pc:docMk/>
+          <pc:sldMk cId="1488638803" sldId="406"/>
+        </pc:sldMkLst>
+        <pc:spChg chg="mod">
+          <ac:chgData name="Kapoor,Amanpreet" userId="5465ae5f-3ea6-4989-a24a-46ffecd15609" providerId="ADAL" clId="{E7E610D5-8D10-40F3-A5B7-2B0026961471}" dt="2026-10-01T16:36:48.028" v="54" actId="207"/>
+          <ac:spMkLst>
+            <pc:docMk/>
+            <pc:sldMk cId="1488638803" sldId="406"/>
+            <ac:spMk id="5" creationId="{B9F3F2B3-9659-875A-AE5F-17F90640C5E8}"/>
+          </ac:spMkLst>
+        </pc:spChg>
+      </pc:sldChg>
+      <pc:sldChg chg="modSp mod">
+        <pc:chgData name="Kapoor,Amanpreet" userId="5465ae5f-3ea6-4989-a24a-46ffecd15609" providerId="ADAL" clId="{E7E610D5-8D10-40F3-A5B7-2B0026961471}" dt="2026-10-01T16:35:58.095" v="44" actId="207"/>
+        <pc:sldMkLst>
+          <pc:docMk/>
+          <pc:sldMk cId="2790307224" sldId="493"/>
+        </pc:sldMkLst>
+        <pc:spChg chg="mod">
+          <ac:chgData name="Kapoor,Amanpreet" userId="5465ae5f-3ea6-4989-a24a-46ffecd15609" providerId="ADAL" clId="{E7E610D5-8D10-40F3-A5B7-2B0026961471}" dt="2026-10-01T16:35:58.095" v="44" actId="207"/>
+          <ac:spMkLst>
+            <pc:docMk/>
+            <pc:sldMk cId="2790307224" sldId="493"/>
+            <ac:spMk id="4" creationId="{4A681ECE-2602-4BFB-B297-488969F24B6C}"/>
+          </ac:spMkLst>
+        </pc:spChg>
+      </pc:sldChg>
+      <pc:sldChg chg="del">
+        <pc:chgData name="Kapoor,Amanpreet" userId="5465ae5f-3ea6-4989-a24a-46ffecd15609" providerId="ADAL" clId="{E7E610D5-8D10-40F3-A5B7-2B0026961471}" dt="2026-10-01T16:36:14.599" v="45" actId="47"/>
+        <pc:sldMkLst>
+          <pc:docMk/>
+          <pc:sldMk cId="8960134" sldId="691"/>
+        </pc:sldMkLst>
+      </pc:sldChg>
+    </pc:docChg>
+  </pc:docChgLst>
+</pc:chgInfo>
+</file>
+
 <file path=ppt/notesMasters/notesMaster1.xml><?xml version="1.0" encoding="utf-8"?>
 <p:notesMaster xmlns:a="http://schemas.openxmlformats.org/drawingml/2006/main" xmlns:r="http://schemas.openxmlformats.org/officeDocument/2006/relationships" xmlns:p="http://schemas.openxmlformats.org/presentationml/2006/main">
   <p:cSld>
@@ -231,7 +289,7 @@
           <a:p>
             <a:fld id="{43386AF1-EF24-4659-9089-2771856A9EA2}" type="datetimeFigureOut">
               <a:rPr lang="en-US" smtClean="0"/>
-              <a:t>2/24/2026</a:t>
+              <a:t>10/1/2026</a:t>
             </a:fld>
             <a:endParaRPr lang="en-US"/>
           </a:p>
@@ -794,7 +852,7 @@
     </p:spTree>
     <p:extLst>
       <p:ext uri="{BB962C8B-B14F-4D97-AF65-F5344CB8AC3E}">
-        <p14:creationId xmlns:p14="http://schemas.microsoft.com/office/powerpoint/2010/main" val="3728816664"/>
+        <p14:creationId xmlns:p14="http://schemas.microsoft.com/office/powerpoint/2010/main" val="876250993"/>
       </p:ext>
     </p:extLst>
   </p:cSld>
@@ -945,7 +1003,7 @@
     </p:spTree>
     <p:extLst>
       <p:ext uri="{BB962C8B-B14F-4D97-AF65-F5344CB8AC3E}">
-        <p14:creationId xmlns:p14="http://schemas.microsoft.com/office/powerpoint/2010/main" val="876250993"/>
+        <p14:creationId xmlns:p14="http://schemas.microsoft.com/office/powerpoint/2010/main" val="1072344791"/>
       </p:ext>
     </p:extLst>
   </p:cSld>
@@ -1096,7 +1154,7 @@
     </p:spTree>
     <p:extLst>
       <p:ext uri="{BB962C8B-B14F-4D97-AF65-F5344CB8AC3E}">
-        <p14:creationId xmlns:p14="http://schemas.microsoft.com/office/powerpoint/2010/main" val="1072344791"/>
+        <p14:creationId xmlns:p14="http://schemas.microsoft.com/office/powerpoint/2010/main" val="3614317947"/>
       </p:ext>
     </p:extLst>
   </p:cSld>
@@ -1247,7 +1305,7 @@
     </p:spTree>
     <p:extLst>
       <p:ext uri="{BB962C8B-B14F-4D97-AF65-F5344CB8AC3E}">
-        <p14:creationId xmlns:p14="http://schemas.microsoft.com/office/powerpoint/2010/main" val="3614317947"/>
+        <p14:creationId xmlns:p14="http://schemas.microsoft.com/office/powerpoint/2010/main" val="2237797566"/>
       </p:ext>
     </p:extLst>
   </p:cSld>
@@ -1398,7 +1456,7 @@
     </p:spTree>
     <p:extLst>
       <p:ext uri="{BB962C8B-B14F-4D97-AF65-F5344CB8AC3E}">
-        <p14:creationId xmlns:p14="http://schemas.microsoft.com/office/powerpoint/2010/main" val="2237797566"/>
+        <p14:creationId xmlns:p14="http://schemas.microsoft.com/office/powerpoint/2010/main" val="4111444355"/>
       </p:ext>
     </p:extLst>
   </p:cSld>
@@ -1549,7 +1607,7 @@
     </p:spTree>
     <p:extLst>
       <p:ext uri="{BB962C8B-B14F-4D97-AF65-F5344CB8AC3E}">
-        <p14:creationId xmlns:p14="http://schemas.microsoft.com/office/powerpoint/2010/main" val="4111444355"/>
+        <p14:creationId xmlns:p14="http://schemas.microsoft.com/office/powerpoint/2010/main" val="3298322181"/>
       </p:ext>
     </p:extLst>
   </p:cSld>
@@ -1700,7 +1758,7 @@
     </p:spTree>
     <p:extLst>
       <p:ext uri="{BB962C8B-B14F-4D97-AF65-F5344CB8AC3E}">
-        <p14:creationId xmlns:p14="http://schemas.microsoft.com/office/powerpoint/2010/main" val="3298322181"/>
+        <p14:creationId xmlns:p14="http://schemas.microsoft.com/office/powerpoint/2010/main" val="3067095419"/>
       </p:ext>
     </p:extLst>
   </p:cSld>
@@ -1851,7 +1909,7 @@
     </p:spTree>
     <p:extLst>
       <p:ext uri="{BB962C8B-B14F-4D97-AF65-F5344CB8AC3E}">
-        <p14:creationId xmlns:p14="http://schemas.microsoft.com/office/powerpoint/2010/main" val="3067095419"/>
+        <p14:creationId xmlns:p14="http://schemas.microsoft.com/office/powerpoint/2010/main" val="1788011804"/>
       </p:ext>
     </p:extLst>
   </p:cSld>
@@ -2002,7 +2060,7 @@
     </p:spTree>
     <p:extLst>
       <p:ext uri="{BB962C8B-B14F-4D97-AF65-F5344CB8AC3E}">
-        <p14:creationId xmlns:p14="http://schemas.microsoft.com/office/powerpoint/2010/main" val="1788011804"/>
+        <p14:creationId xmlns:p14="http://schemas.microsoft.com/office/powerpoint/2010/main" val="3426796180"/>
       </p:ext>
     </p:extLst>
   </p:cSld>
@@ -2153,7 +2211,7 @@
     </p:spTree>
     <p:extLst>
       <p:ext uri="{BB962C8B-B14F-4D97-AF65-F5344CB8AC3E}">
-        <p14:creationId xmlns:p14="http://schemas.microsoft.com/office/powerpoint/2010/main" val="3426796180"/>
+        <p14:creationId xmlns:p14="http://schemas.microsoft.com/office/powerpoint/2010/main" val="91040651"/>
       </p:ext>
     </p:extLst>
   </p:cSld>
@@ -2455,7 +2513,7 @@
     </p:spTree>
     <p:extLst>
       <p:ext uri="{BB962C8B-B14F-4D97-AF65-F5344CB8AC3E}">
-        <p14:creationId xmlns:p14="http://schemas.microsoft.com/office/powerpoint/2010/main" val="91040651"/>
+        <p14:creationId xmlns:p14="http://schemas.microsoft.com/office/powerpoint/2010/main" val="3737278891"/>
       </p:ext>
     </p:extLst>
   </p:cSld>
@@ -2606,7 +2664,7 @@
     </p:spTree>
     <p:extLst>
       <p:ext uri="{BB962C8B-B14F-4D97-AF65-F5344CB8AC3E}">
-        <p14:creationId xmlns:p14="http://schemas.microsoft.com/office/powerpoint/2010/main" val="3737278891"/>
+        <p14:creationId xmlns:p14="http://schemas.microsoft.com/office/powerpoint/2010/main" val="595954518"/>
       </p:ext>
     </p:extLst>
   </p:cSld>
@@ -2757,7 +2815,7 @@
     </p:spTree>
     <p:extLst>
       <p:ext uri="{BB962C8B-B14F-4D97-AF65-F5344CB8AC3E}">
-        <p14:creationId xmlns:p14="http://schemas.microsoft.com/office/powerpoint/2010/main" val="595954518"/>
+        <p14:creationId xmlns:p14="http://schemas.microsoft.com/office/powerpoint/2010/main" val="3998982496"/>
       </p:ext>
     </p:extLst>
   </p:cSld>
@@ -2908,7 +2966,7 @@
     </p:spTree>
     <p:extLst>
       <p:ext uri="{BB962C8B-B14F-4D97-AF65-F5344CB8AC3E}">
-        <p14:creationId xmlns:p14="http://schemas.microsoft.com/office/powerpoint/2010/main" val="3998982496"/>
+        <p14:creationId xmlns:p14="http://schemas.microsoft.com/office/powerpoint/2010/main" val="1141541792"/>
       </p:ext>
     </p:extLst>
   </p:cSld>
@@ -3059,7 +3117,7 @@
     </p:spTree>
     <p:extLst>
       <p:ext uri="{BB962C8B-B14F-4D97-AF65-F5344CB8AC3E}">
-        <p14:creationId xmlns:p14="http://schemas.microsoft.com/office/powerpoint/2010/main" val="1141541792"/>
+        <p14:creationId xmlns:p14="http://schemas.microsoft.com/office/powerpoint/2010/main" val="2441855014"/>
       </p:ext>
     </p:extLst>
   </p:cSld>
@@ -3210,7 +3268,7 @@
     </p:spTree>
     <p:extLst>
       <p:ext uri="{BB962C8B-B14F-4D97-AF65-F5344CB8AC3E}">
-        <p14:creationId xmlns:p14="http://schemas.microsoft.com/office/powerpoint/2010/main" val="2441855014"/>
+        <p14:creationId xmlns:p14="http://schemas.microsoft.com/office/powerpoint/2010/main" val="3372863684"/>
       </p:ext>
     </p:extLst>
   </p:cSld>
@@ -3225,7 +3283,13 @@
   <p:cSld>
     <p:spTree>
       <p:nvGrpSpPr>
-        <p:cNvPr id="1" name=""/>
+        <p:cNvPr id="1" name="">
+          <a:extLst>
+            <a:ext uri="{FF2B5EF4-FFF2-40B4-BE49-F238E27FC236}">
+              <a16:creationId xmlns:a16="http://schemas.microsoft.com/office/drawing/2014/main" id="{F1FC9B61-F069-091E-40CA-3B40AF64A4FA}"/>
+            </a:ext>
+          </a:extLst>
+        </p:cNvPr>
         <p:cNvGrpSpPr/>
         <p:nvPr/>
       </p:nvGrpSpPr>
@@ -3239,7 +3303,13 @@
       </p:grpSpPr>
       <p:sp>
         <p:nvSpPr>
-          <p:cNvPr id="2" name="Slide Image Placeholder 1"/>
+          <p:cNvPr id="2" name="Slide Image Placeholder 1">
+            <a:extLst>
+              <a:ext uri="{FF2B5EF4-FFF2-40B4-BE49-F238E27FC236}">
+                <a16:creationId xmlns:a16="http://schemas.microsoft.com/office/drawing/2014/main" id="{69AD06FB-9C88-8377-19FB-1CFF5EA1391D}"/>
+              </a:ext>
+            </a:extLst>
+          </p:cNvPr>
           <p:cNvSpPr>
             <a:spLocks noGrp="1" noRot="1" noChangeAspect="1"/>
           </p:cNvSpPr>
@@ -3251,7 +3321,13 @@
       </p:sp>
       <p:sp>
         <p:nvSpPr>
-          <p:cNvPr id="3" name="Notes Placeholder 2"/>
+          <p:cNvPr id="3" name="Notes Placeholder 2">
+            <a:extLst>
+              <a:ext uri="{FF2B5EF4-FFF2-40B4-BE49-F238E27FC236}">
+                <a16:creationId xmlns:a16="http://schemas.microsoft.com/office/drawing/2014/main" id="{2FC19E2E-4051-DC97-3ED5-CC796D440E0E}"/>
+              </a:ext>
+            </a:extLst>
+          </p:cNvPr>
           <p:cNvSpPr>
             <a:spLocks noGrp="1"/>
           </p:cNvSpPr>
@@ -3277,7 +3353,13 @@
       </p:sp>
       <p:sp>
         <p:nvSpPr>
-          <p:cNvPr id="4" name="Slide Number Placeholder 3"/>
+          <p:cNvPr id="4" name="Slide Number Placeholder 3">
+            <a:extLst>
+              <a:ext uri="{FF2B5EF4-FFF2-40B4-BE49-F238E27FC236}">
+                <a16:creationId xmlns:a16="http://schemas.microsoft.com/office/drawing/2014/main" id="{AD7CADB8-8989-063C-C59D-CF6112D3DD5F}"/>
+              </a:ext>
+            </a:extLst>
+          </p:cNvPr>
           <p:cNvSpPr>
             <a:spLocks noGrp="1"/>
           </p:cNvSpPr>
@@ -3361,7 +3443,7 @@
     </p:spTree>
     <p:extLst>
       <p:ext uri="{BB962C8B-B14F-4D97-AF65-F5344CB8AC3E}">
-        <p14:creationId xmlns:p14="http://schemas.microsoft.com/office/powerpoint/2010/main" val="3372863684"/>
+        <p14:creationId xmlns:p14="http://schemas.microsoft.com/office/powerpoint/2010/main" val="3747576725"/>
       </p:ext>
     </p:extLst>
   </p:cSld>
@@ -3379,7 +3461,7 @@
         <p:cNvPr id="1" name="">
           <a:extLst>
             <a:ext uri="{FF2B5EF4-FFF2-40B4-BE49-F238E27FC236}">
-              <a16:creationId xmlns:a16="http://schemas.microsoft.com/office/drawing/2014/main" id="{F1FC9B61-F069-091E-40CA-3B40AF64A4FA}"/>
+              <a16:creationId xmlns:a16="http://schemas.microsoft.com/office/drawing/2014/main" id="{58A1E6EB-47E5-3D8F-806E-6D3ABF75492D}"/>
             </a:ext>
           </a:extLst>
         </p:cNvPr>
@@ -3399,7 +3481,7 @@
           <p:cNvPr id="2" name="Slide Image Placeholder 1">
             <a:extLst>
               <a:ext uri="{FF2B5EF4-FFF2-40B4-BE49-F238E27FC236}">
-                <a16:creationId xmlns:a16="http://schemas.microsoft.com/office/drawing/2014/main" id="{69AD06FB-9C88-8377-19FB-1CFF5EA1391D}"/>
+                <a16:creationId xmlns:a16="http://schemas.microsoft.com/office/drawing/2014/main" id="{09BD1E1D-26B8-4DD4-1D22-A733CAFEC05E}"/>
               </a:ext>
             </a:extLst>
           </p:cNvPr>
@@ -3417,7 +3499,7 @@
           <p:cNvPr id="3" name="Notes Placeholder 2">
             <a:extLst>
               <a:ext uri="{FF2B5EF4-FFF2-40B4-BE49-F238E27FC236}">
-                <a16:creationId xmlns:a16="http://schemas.microsoft.com/office/drawing/2014/main" id="{2FC19E2E-4051-DC97-3ED5-CC796D440E0E}"/>
+                <a16:creationId xmlns:a16="http://schemas.microsoft.com/office/drawing/2014/main" id="{2387A0C2-AEAD-A1F5-620B-F676A3226287}"/>
               </a:ext>
             </a:extLst>
           </p:cNvPr>
@@ -3449,7 +3531,7 @@
           <p:cNvPr id="4" name="Slide Number Placeholder 3">
             <a:extLst>
               <a:ext uri="{FF2B5EF4-FFF2-40B4-BE49-F238E27FC236}">
-                <a16:creationId xmlns:a16="http://schemas.microsoft.com/office/drawing/2014/main" id="{AD7CADB8-8989-063C-C59D-CF6112D3DD5F}"/>
+                <a16:creationId xmlns:a16="http://schemas.microsoft.com/office/drawing/2014/main" id="{C4A4F8B8-422C-1CC1-6896-5CE9BA249346}"/>
               </a:ext>
             </a:extLst>
           </p:cNvPr>
@@ -3536,7 +3618,7 @@
     </p:spTree>
     <p:extLst>
       <p:ext uri="{BB962C8B-B14F-4D97-AF65-F5344CB8AC3E}">
-        <p14:creationId xmlns:p14="http://schemas.microsoft.com/office/powerpoint/2010/main" val="3747576725"/>
+        <p14:creationId xmlns:p14="http://schemas.microsoft.com/office/powerpoint/2010/main" val="2132109679"/>
       </p:ext>
     </p:extLst>
   </p:cSld>
@@ -3554,7 +3636,7 @@
         <p:cNvPr id="1" name="">
           <a:extLst>
             <a:ext uri="{FF2B5EF4-FFF2-40B4-BE49-F238E27FC236}">
-              <a16:creationId xmlns:a16="http://schemas.microsoft.com/office/drawing/2014/main" id="{58A1E6EB-47E5-3D8F-806E-6D3ABF75492D}"/>
+              <a16:creationId xmlns:a16="http://schemas.microsoft.com/office/drawing/2014/main" id="{27E3851A-28DE-1D37-691E-C40AF3C00FD2}"/>
             </a:ext>
           </a:extLst>
         </p:cNvPr>
@@ -3574,7 +3656,7 @@
           <p:cNvPr id="2" name="Slide Image Placeholder 1">
             <a:extLst>
               <a:ext uri="{FF2B5EF4-FFF2-40B4-BE49-F238E27FC236}">
-                <a16:creationId xmlns:a16="http://schemas.microsoft.com/office/drawing/2014/main" id="{09BD1E1D-26B8-4DD4-1D22-A733CAFEC05E}"/>
+                <a16:creationId xmlns:a16="http://schemas.microsoft.com/office/drawing/2014/main" id="{26BDCFC6-C116-1055-08CD-36344CDCD59E}"/>
               </a:ext>
             </a:extLst>
           </p:cNvPr>
@@ -3592,7 +3674,7 @@
           <p:cNvPr id="3" name="Notes Placeholder 2">
             <a:extLst>
               <a:ext uri="{FF2B5EF4-FFF2-40B4-BE49-F238E27FC236}">
-                <a16:creationId xmlns:a16="http://schemas.microsoft.com/office/drawing/2014/main" id="{2387A0C2-AEAD-A1F5-620B-F676A3226287}"/>
+                <a16:creationId xmlns:a16="http://schemas.microsoft.com/office/drawing/2014/main" id="{194E23F2-9099-5C16-F684-A9F19247A78B}"/>
               </a:ext>
             </a:extLst>
           </p:cNvPr>
@@ -3624,7 +3706,7 @@
           <p:cNvPr id="4" name="Slide Number Placeholder 3">
             <a:extLst>
               <a:ext uri="{FF2B5EF4-FFF2-40B4-BE49-F238E27FC236}">
-                <a16:creationId xmlns:a16="http://schemas.microsoft.com/office/drawing/2014/main" id="{C4A4F8B8-422C-1CC1-6896-5CE9BA249346}"/>
+                <a16:creationId xmlns:a16="http://schemas.microsoft.com/office/drawing/2014/main" id="{90EDFD61-0969-DA35-AB64-B317AD46F257}"/>
               </a:ext>
             </a:extLst>
           </p:cNvPr>
@@ -3711,7 +3793,7 @@
     </p:spTree>
     <p:extLst>
       <p:ext uri="{BB962C8B-B14F-4D97-AF65-F5344CB8AC3E}">
-        <p14:creationId xmlns:p14="http://schemas.microsoft.com/office/powerpoint/2010/main" val="2132109679"/>
+        <p14:creationId xmlns:p14="http://schemas.microsoft.com/office/powerpoint/2010/main" val="658268153"/>
       </p:ext>
     </p:extLst>
   </p:cSld>
@@ -3726,13 +3808,7 @@
   <p:cSld>
     <p:spTree>
       <p:nvGrpSpPr>
-        <p:cNvPr id="1" name="">
-          <a:extLst>
-            <a:ext uri="{FF2B5EF4-FFF2-40B4-BE49-F238E27FC236}">
-              <a16:creationId xmlns:a16="http://schemas.microsoft.com/office/drawing/2014/main" id="{27E3851A-28DE-1D37-691E-C40AF3C00FD2}"/>
-            </a:ext>
-          </a:extLst>
-        </p:cNvPr>
+        <p:cNvPr id="1" name=""/>
         <p:cNvGrpSpPr/>
         <p:nvPr/>
       </p:nvGrpSpPr>
@@ -3746,13 +3822,7 @@
       </p:grpSpPr>
       <p:sp>
         <p:nvSpPr>
-          <p:cNvPr id="2" name="Slide Image Placeholder 1">
-            <a:extLst>
-              <a:ext uri="{FF2B5EF4-FFF2-40B4-BE49-F238E27FC236}">
-                <a16:creationId xmlns:a16="http://schemas.microsoft.com/office/drawing/2014/main" id="{26BDCFC6-C116-1055-08CD-36344CDCD59E}"/>
-              </a:ext>
-            </a:extLst>
-          </p:cNvPr>
+          <p:cNvPr id="2" name="Slide Image Placeholder 1"/>
           <p:cNvSpPr>
             <a:spLocks noGrp="1" noRot="1" noChangeAspect="1"/>
           </p:cNvSpPr>
@@ -3764,13 +3834,7 @@
       </p:sp>
       <p:sp>
         <p:nvSpPr>
-          <p:cNvPr id="3" name="Notes Placeholder 2">
-            <a:extLst>
-              <a:ext uri="{FF2B5EF4-FFF2-40B4-BE49-F238E27FC236}">
-                <a16:creationId xmlns:a16="http://schemas.microsoft.com/office/drawing/2014/main" id="{194E23F2-9099-5C16-F684-A9F19247A78B}"/>
-              </a:ext>
-            </a:extLst>
-          </p:cNvPr>
+          <p:cNvPr id="3" name="Notes Placeholder 2"/>
           <p:cNvSpPr>
             <a:spLocks noGrp="1"/>
           </p:cNvSpPr>
@@ -3796,13 +3860,7 @@
       </p:sp>
       <p:sp>
         <p:nvSpPr>
-          <p:cNvPr id="4" name="Slide Number Placeholder 3">
-            <a:extLst>
-              <a:ext uri="{FF2B5EF4-FFF2-40B4-BE49-F238E27FC236}">
-                <a16:creationId xmlns:a16="http://schemas.microsoft.com/office/drawing/2014/main" id="{90EDFD61-0969-DA35-AB64-B317AD46F257}"/>
-              </a:ext>
-            </a:extLst>
-          </p:cNvPr>
+          <p:cNvPr id="4" name="Slide Number Placeholder 3"/>
           <p:cNvSpPr>
             <a:spLocks noGrp="1"/>
           </p:cNvSpPr>
@@ -3886,7 +3944,7 @@
     </p:spTree>
     <p:extLst>
       <p:ext uri="{BB962C8B-B14F-4D97-AF65-F5344CB8AC3E}">
-        <p14:creationId xmlns:p14="http://schemas.microsoft.com/office/powerpoint/2010/main" val="658268153"/>
+        <p14:creationId xmlns:p14="http://schemas.microsoft.com/office/powerpoint/2010/main" val="2467873718"/>
       </p:ext>
     </p:extLst>
   </p:cSld>
@@ -4130,7 +4188,7 @@
     </p:spTree>
     <p:extLst>
       <p:ext uri="{BB962C8B-B14F-4D97-AF65-F5344CB8AC3E}">
-        <p14:creationId xmlns:p14="http://schemas.microsoft.com/office/powerpoint/2010/main" val="2467873718"/>
+        <p14:creationId xmlns:p14="http://schemas.microsoft.com/office/powerpoint/2010/main" val="1868775921"/>
       </p:ext>
     </p:extLst>
   </p:cSld>
@@ -4281,7 +4339,7 @@
     </p:spTree>
     <p:extLst>
       <p:ext uri="{BB962C8B-B14F-4D97-AF65-F5344CB8AC3E}">
-        <p14:creationId xmlns:p14="http://schemas.microsoft.com/office/powerpoint/2010/main" val="1868775921"/>
+        <p14:creationId xmlns:p14="http://schemas.microsoft.com/office/powerpoint/2010/main" val="554930333"/>
       </p:ext>
     </p:extLst>
   </p:cSld>
@@ -4432,7 +4490,7 @@
     </p:spTree>
     <p:extLst>
       <p:ext uri="{BB962C8B-B14F-4D97-AF65-F5344CB8AC3E}">
-        <p14:creationId xmlns:p14="http://schemas.microsoft.com/office/powerpoint/2010/main" val="554930333"/>
+        <p14:creationId xmlns:p14="http://schemas.microsoft.com/office/powerpoint/2010/main" val="3059179596"/>
       </p:ext>
     </p:extLst>
   </p:cSld>
@@ -4487,12 +4545,8 @@
           <a:lstStyle/>
           <a:p>
             <a:r>
-              <a:rPr lang="en-US" dirty="0" err="1"/>
-              <a:t>Psuedocode</a:t>
-            </a:r>
-            <a:r>
               <a:rPr lang="en-US" dirty="0"/>
-              <a:t> and code</a:t>
+              <a:t>Space: O1, Time n2</a:t>
             </a:r>
           </a:p>
         </p:txBody>
@@ -4583,153 +4637,6 @@
     </p:spTree>
     <p:extLst>
       <p:ext uri="{BB962C8B-B14F-4D97-AF65-F5344CB8AC3E}">
-        <p14:creationId xmlns:p14="http://schemas.microsoft.com/office/powerpoint/2010/main" val="3059179596"/>
-      </p:ext>
-    </p:extLst>
-  </p:cSld>
-  <p:clrMapOvr>
-    <a:masterClrMapping/>
-  </p:clrMapOvr>
-</p:notes>
-</file>
-
-<file path=ppt/notesSlides/notesSlide34.xml><?xml version="1.0" encoding="utf-8"?>
-<p:notes xmlns:a="http://schemas.openxmlformats.org/drawingml/2006/main" xmlns:r="http://schemas.openxmlformats.org/officeDocument/2006/relationships" xmlns:p="http://schemas.openxmlformats.org/presentationml/2006/main">
-  <p:cSld>
-    <p:spTree>
-      <p:nvGrpSpPr>
-        <p:cNvPr id="1" name=""/>
-        <p:cNvGrpSpPr/>
-        <p:nvPr/>
-      </p:nvGrpSpPr>
-      <p:grpSpPr>
-        <a:xfrm>
-          <a:off x="0" y="0"/>
-          <a:ext cx="0" cy="0"/>
-          <a:chOff x="0" y="0"/>
-          <a:chExt cx="0" cy="0"/>
-        </a:xfrm>
-      </p:grpSpPr>
-      <p:sp>
-        <p:nvSpPr>
-          <p:cNvPr id="2" name="Slide Image Placeholder 1"/>
-          <p:cNvSpPr>
-            <a:spLocks noGrp="1" noRot="1" noChangeAspect="1"/>
-          </p:cNvSpPr>
-          <p:nvPr>
-            <p:ph type="sldImg"/>
-          </p:nvPr>
-        </p:nvSpPr>
-        <p:spPr/>
-      </p:sp>
-      <p:sp>
-        <p:nvSpPr>
-          <p:cNvPr id="3" name="Notes Placeholder 2"/>
-          <p:cNvSpPr>
-            <a:spLocks noGrp="1"/>
-          </p:cNvSpPr>
-          <p:nvPr>
-            <p:ph type="body" idx="1"/>
-          </p:nvPr>
-        </p:nvSpPr>
-        <p:spPr/>
-        <p:txBody>
-          <a:bodyPr/>
-          <a:lstStyle/>
-          <a:p>
-            <a:r>
-              <a:rPr lang="en-US" dirty="0"/>
-              <a:t>Space: O1, Time n2</a:t>
-            </a:r>
-          </a:p>
-        </p:txBody>
-      </p:sp>
-      <p:sp>
-        <p:nvSpPr>
-          <p:cNvPr id="4" name="Slide Number Placeholder 3"/>
-          <p:cNvSpPr>
-            <a:spLocks noGrp="1"/>
-          </p:cNvSpPr>
-          <p:nvPr>
-            <p:ph type="sldNum" sz="quarter" idx="5"/>
-          </p:nvPr>
-        </p:nvSpPr>
-        <p:spPr/>
-        <p:txBody>
-          <a:bodyPr/>
-          <a:lstStyle/>
-          <a:p>
-            <a:pPr marL="0" marR="0" lvl="0" indent="0" algn="r" defTabSz="914400" rtl="0" eaLnBrk="1" fontAlgn="auto" latinLnBrk="0" hangingPunct="1">
-              <a:lnSpc>
-                <a:spcPct val="100000"/>
-              </a:lnSpc>
-              <a:spcBef>
-                <a:spcPts val="0"/>
-              </a:spcBef>
-              <a:spcAft>
-                <a:spcPts val="0"/>
-              </a:spcAft>
-              <a:buClrTx/>
-              <a:buSzTx/>
-              <a:buFontTx/>
-              <a:buNone/>
-              <a:tabLst/>
-              <a:defRPr/>
-            </a:pPr>
-            <a:fld id="{E2B3017C-A127-4C06-BF43-1875A8859C4B}" type="slidenum">
-              <a:rPr kumimoji="0" lang="en-US" sz="1200" b="0" i="0" u="none" strike="noStrike" kern="1200" cap="none" spc="0" normalizeH="0" baseline="0" noProof="0" smtClean="0">
-                <a:ln>
-                  <a:noFill/>
-                </a:ln>
-                <a:solidFill>
-                  <a:prstClr val="black"/>
-                </a:solidFill>
-                <a:effectLst/>
-                <a:uLnTx/>
-                <a:uFillTx/>
-                <a:latin typeface="Calibri" panose="020F0502020204030204"/>
-                <a:ea typeface="+mn-ea"/>
-                <a:cs typeface="+mn-cs"/>
-              </a:rPr>
-              <a:pPr marL="0" marR="0" lvl="0" indent="0" algn="r" defTabSz="914400" rtl="0" eaLnBrk="1" fontAlgn="auto" latinLnBrk="0" hangingPunct="1">
-                <a:lnSpc>
-                  <a:spcPct val="100000"/>
-                </a:lnSpc>
-                <a:spcBef>
-                  <a:spcPts val="0"/>
-                </a:spcBef>
-                <a:spcAft>
-                  <a:spcPts val="0"/>
-                </a:spcAft>
-                <a:buClrTx/>
-                <a:buSzTx/>
-                <a:buFontTx/>
-                <a:buNone/>
-                <a:tabLst/>
-                <a:defRPr/>
-              </a:pPr>
-              <a:t>34</a:t>
-            </a:fld>
-            <a:endParaRPr kumimoji="0" lang="en-US" sz="1200" b="0" i="0" u="none" strike="noStrike" kern="1200" cap="none" spc="0" normalizeH="0" baseline="0" noProof="0">
-              <a:ln>
-                <a:noFill/>
-              </a:ln>
-              <a:solidFill>
-                <a:prstClr val="black"/>
-              </a:solidFill>
-              <a:effectLst/>
-              <a:uLnTx/>
-              <a:uFillTx/>
-              <a:latin typeface="Calibri" panose="020F0502020204030204"/>
-              <a:ea typeface="+mn-ea"/>
-              <a:cs typeface="+mn-cs"/>
-            </a:endParaRPr>
-          </a:p>
-        </p:txBody>
-      </p:sp>
-    </p:spTree>
-    <p:extLst>
-      <p:ext uri="{BB962C8B-B14F-4D97-AF65-F5344CB8AC3E}">
         <p14:creationId xmlns:p14="http://schemas.microsoft.com/office/powerpoint/2010/main" val="1422712198"/>
       </p:ext>
     </p:extLst>
@@ -4838,13 +4745,7 @@
   <p:cSld>
     <p:spTree>
       <p:nvGrpSpPr>
-        <p:cNvPr id="1" name="">
-          <a:extLst>
-            <a:ext uri="{FF2B5EF4-FFF2-40B4-BE49-F238E27FC236}">
-              <a16:creationId xmlns:a16="http://schemas.microsoft.com/office/drawing/2014/main" id="{3C8FBBC6-E3B5-D2D4-5CD2-57C825FDEE9F}"/>
-            </a:ext>
-          </a:extLst>
-        </p:cNvPr>
+        <p:cNvPr id="1" name=""/>
         <p:cNvGrpSpPr/>
         <p:nvPr/>
       </p:nvGrpSpPr>
@@ -4858,13 +4759,7 @@
       </p:grpSpPr>
       <p:sp>
         <p:nvSpPr>
-          <p:cNvPr id="2" name="Slide Image Placeholder 1">
-            <a:extLst>
-              <a:ext uri="{FF2B5EF4-FFF2-40B4-BE49-F238E27FC236}">
-                <a16:creationId xmlns:a16="http://schemas.microsoft.com/office/drawing/2014/main" id="{5A0ACCBE-2350-1932-3534-AE296B00744E}"/>
-              </a:ext>
-            </a:extLst>
-          </p:cNvPr>
+          <p:cNvPr id="2" name="Slide Image Placeholder 1"/>
           <p:cNvSpPr>
             <a:spLocks noGrp="1" noRot="1" noChangeAspect="1"/>
           </p:cNvSpPr>
@@ -4876,13 +4771,7 @@
       </p:sp>
       <p:sp>
         <p:nvSpPr>
-          <p:cNvPr id="3" name="Notes Placeholder 2">
-            <a:extLst>
-              <a:ext uri="{FF2B5EF4-FFF2-40B4-BE49-F238E27FC236}">
-                <a16:creationId xmlns:a16="http://schemas.microsoft.com/office/drawing/2014/main" id="{C105B156-75CE-7E7E-7889-B308538BEEF1}"/>
-              </a:ext>
-            </a:extLst>
-          </p:cNvPr>
+          <p:cNvPr id="3" name="Notes Placeholder 2"/>
           <p:cNvSpPr>
             <a:spLocks noGrp="1"/>
           </p:cNvSpPr>
@@ -4896,27 +4785,19 @@
           <a:lstStyle/>
           <a:p>
             <a:r>
+              <a:rPr lang="en-US" dirty="0" err="1"/>
+              <a:t>Psuedocode</a:t>
+            </a:r>
+            <a:r>
               <a:rPr lang="en-US" dirty="0"/>
-              <a:t>Discussed, touched upon, went over, covered</a:t>
-            </a:r>
-          </a:p>
-          <a:p>
-            <a:r>
-              <a:rPr lang="en-US" dirty="0"/>
-              <a:t>Emerges out of the limitations offered by our second approach</a:t>
-            </a:r>
-          </a:p>
-        </p:txBody>
-      </p:sp>
-      <p:sp>
-        <p:nvSpPr>
-          <p:cNvPr id="4" name="Slide Number Placeholder 3">
-            <a:extLst>
-              <a:ext uri="{FF2B5EF4-FFF2-40B4-BE49-F238E27FC236}">
-                <a16:creationId xmlns:a16="http://schemas.microsoft.com/office/drawing/2014/main" id="{0C97CAF3-6029-94D9-2368-66F9D3141EA9}"/>
-              </a:ext>
-            </a:extLst>
-          </p:cNvPr>
+              <a:t> and code</a:t>
+            </a:r>
+          </a:p>
+        </p:txBody>
+      </p:sp>
+      <p:sp>
+        <p:nvSpPr>
+          <p:cNvPr id="4" name="Slide Number Placeholder 3"/>
           <p:cNvSpPr>
             <a:spLocks noGrp="1"/>
           </p:cNvSpPr>
@@ -4929,18 +4810,78 @@
           <a:bodyPr/>
           <a:lstStyle/>
           <a:p>
+            <a:pPr marL="0" marR="0" lvl="0" indent="0" algn="r" defTabSz="914400" rtl="0" eaLnBrk="1" fontAlgn="auto" latinLnBrk="0" hangingPunct="1">
+              <a:lnSpc>
+                <a:spcPct val="100000"/>
+              </a:lnSpc>
+              <a:spcBef>
+                <a:spcPts val="0"/>
+              </a:spcBef>
+              <a:spcAft>
+                <a:spcPts val="0"/>
+              </a:spcAft>
+              <a:buClrTx/>
+              <a:buSzTx/>
+              <a:buFontTx/>
+              <a:buNone/>
+              <a:tabLst/>
+              <a:defRPr/>
+            </a:pPr>
             <a:fld id="{E2B3017C-A127-4C06-BF43-1875A8859C4B}" type="slidenum">
-              <a:rPr lang="en-US" smtClean="0"/>
+              <a:rPr kumimoji="0" lang="en-US" sz="1200" b="0" i="0" u="none" strike="noStrike" kern="1200" cap="none" spc="0" normalizeH="0" baseline="0" noProof="0" smtClean="0">
+                <a:ln>
+                  <a:noFill/>
+                </a:ln>
+                <a:solidFill>
+                  <a:prstClr val="black"/>
+                </a:solidFill>
+                <a:effectLst/>
+                <a:uLnTx/>
+                <a:uFillTx/>
+                <a:latin typeface="Calibri" panose="020F0502020204030204"/>
+                <a:ea typeface="+mn-ea"/>
+                <a:cs typeface="+mn-cs"/>
+              </a:rPr>
+              <a:pPr marL="0" marR="0" lvl="0" indent="0" algn="r" defTabSz="914400" rtl="0" eaLnBrk="1" fontAlgn="auto" latinLnBrk="0" hangingPunct="1">
+                <a:lnSpc>
+                  <a:spcPct val="100000"/>
+                </a:lnSpc>
+                <a:spcBef>
+                  <a:spcPts val="0"/>
+                </a:spcBef>
+                <a:spcAft>
+                  <a:spcPts val="0"/>
+                </a:spcAft>
+                <a:buClrTx/>
+                <a:buSzTx/>
+                <a:buFontTx/>
+                <a:buNone/>
+                <a:tabLst/>
+                <a:defRPr/>
+              </a:pPr>
               <a:t>5</a:t>
             </a:fld>
-            <a:endParaRPr lang="en-US"/>
+            <a:endParaRPr kumimoji="0" lang="en-US" sz="1200" b="0" i="0" u="none" strike="noStrike" kern="1200" cap="none" spc="0" normalizeH="0" baseline="0" noProof="0">
+              <a:ln>
+                <a:noFill/>
+              </a:ln>
+              <a:solidFill>
+                <a:prstClr val="black"/>
+              </a:solidFill>
+              <a:effectLst/>
+              <a:uLnTx/>
+              <a:uFillTx/>
+              <a:latin typeface="Calibri" panose="020F0502020204030204"/>
+              <a:ea typeface="+mn-ea"/>
+              <a:cs typeface="+mn-cs"/>
+            </a:endParaRPr>
           </a:p>
         </p:txBody>
       </p:sp>
     </p:spTree>
     <p:extLst>
       <p:ext uri="{BB962C8B-B14F-4D97-AF65-F5344CB8AC3E}">
-        <p14:creationId xmlns:p14="http://schemas.microsoft.com/office/powerpoint/2010/main" val="1581212327"/>
+        <p14:creationId xmlns:p14="http://schemas.microsoft.com/office/powerpoint/2010/main" val="1599246421"/>
       </p:ext>
     </p:extLst>
   </p:cSld>
@@ -5091,7 +5032,7 @@
     </p:spTree>
     <p:extLst>
       <p:ext uri="{BB962C8B-B14F-4D97-AF65-F5344CB8AC3E}">
-        <p14:creationId xmlns:p14="http://schemas.microsoft.com/office/powerpoint/2010/main" val="1599246421"/>
+        <p14:creationId xmlns:p14="http://schemas.microsoft.com/office/powerpoint/2010/main" val="933738657"/>
       </p:ext>
     </p:extLst>
   </p:cSld>
@@ -5242,7 +5183,7 @@
     </p:spTree>
     <p:extLst>
       <p:ext uri="{BB962C8B-B14F-4D97-AF65-F5344CB8AC3E}">
-        <p14:creationId xmlns:p14="http://schemas.microsoft.com/office/powerpoint/2010/main" val="933738657"/>
+        <p14:creationId xmlns:p14="http://schemas.microsoft.com/office/powerpoint/2010/main" val="1723869126"/>
       </p:ext>
     </p:extLst>
   </p:cSld>
@@ -5393,7 +5334,7 @@
     </p:spTree>
     <p:extLst>
       <p:ext uri="{BB962C8B-B14F-4D97-AF65-F5344CB8AC3E}">
-        <p14:creationId xmlns:p14="http://schemas.microsoft.com/office/powerpoint/2010/main" val="1723869126"/>
+        <p14:creationId xmlns:p14="http://schemas.microsoft.com/office/powerpoint/2010/main" val="6819268"/>
       </p:ext>
     </p:extLst>
   </p:cSld>
@@ -5544,7 +5485,7 @@
     </p:spTree>
     <p:extLst>
       <p:ext uri="{BB962C8B-B14F-4D97-AF65-F5344CB8AC3E}">
-        <p14:creationId xmlns:p14="http://schemas.microsoft.com/office/powerpoint/2010/main" val="6819268"/>
+        <p14:creationId xmlns:p14="http://schemas.microsoft.com/office/powerpoint/2010/main" val="3728816664"/>
       </p:ext>
     </p:extLst>
   </p:cSld>
@@ -5685,7 +5626,7 @@
           <a:p>
             <a:fld id="{F8616885-9ED8-4298-9149-C5A410E7F61A}" type="datetime1">
               <a:rPr lang="en-US" smtClean="0"/>
-              <a:t>2/24/2026</a:t>
+              <a:t>10/1/2026</a:t>
             </a:fld>
             <a:endParaRPr lang="en-US"/>
           </a:p>
@@ -5855,7 +5796,7 @@
           <a:p>
             <a:fld id="{46647952-6535-4065-B4F6-C94B3D00772F}" type="datetime1">
               <a:rPr lang="en-US" smtClean="0"/>
-              <a:t>2/24/2026</a:t>
+              <a:t>10/1/2026</a:t>
             </a:fld>
             <a:endParaRPr lang="en-US"/>
           </a:p>
@@ -6035,7 +5976,7 @@
           <a:p>
             <a:fld id="{63870D39-F97D-4ECC-909C-35255E9A37F7}" type="datetime1">
               <a:rPr lang="en-US" smtClean="0"/>
-              <a:t>2/24/2026</a:t>
+              <a:t>10/1/2026</a:t>
             </a:fld>
             <a:endParaRPr lang="en-US"/>
           </a:p>
@@ -6227,7 +6168,7 @@
           <a:p>
             <a:fld id="{38C9C2D7-406E-45EE-9F57-B83131B49240}" type="datetimeFigureOut">
               <a:rPr lang="en-US" smtClean="0"/>
-              <a:t>2/24/2026</a:t>
+              <a:t>10/1/2026</a:t>
             </a:fld>
             <a:endParaRPr lang="en-US"/>
           </a:p>
@@ -6397,7 +6338,7 @@
           <a:p>
             <a:fld id="{38C9C2D7-406E-45EE-9F57-B83131B49240}" type="datetimeFigureOut">
               <a:rPr lang="en-US" smtClean="0"/>
-              <a:t>2/24/2026</a:t>
+              <a:t>10/1/2026</a:t>
             </a:fld>
             <a:endParaRPr lang="en-US"/>
           </a:p>
@@ -6643,7 +6584,7 @@
           <a:p>
             <a:fld id="{38C9C2D7-406E-45EE-9F57-B83131B49240}" type="datetimeFigureOut">
               <a:rPr lang="en-US" smtClean="0"/>
-              <a:t>2/24/2026</a:t>
+              <a:t>10/1/2026</a:t>
             </a:fld>
             <a:endParaRPr lang="en-US"/>
           </a:p>
@@ -6875,7 +6816,7 @@
           <a:p>
             <a:fld id="{38C9C2D7-406E-45EE-9F57-B83131B49240}" type="datetimeFigureOut">
               <a:rPr lang="en-US" smtClean="0"/>
-              <a:t>2/24/2026</a:t>
+              <a:t>10/1/2026</a:t>
             </a:fld>
             <a:endParaRPr lang="en-US"/>
           </a:p>
@@ -7242,7 +7183,7 @@
           <a:p>
             <a:fld id="{38C9C2D7-406E-45EE-9F57-B83131B49240}" type="datetimeFigureOut">
               <a:rPr lang="en-US" smtClean="0"/>
-              <a:t>2/24/2026</a:t>
+              <a:t>10/1/2026</a:t>
             </a:fld>
             <a:endParaRPr lang="en-US"/>
           </a:p>
@@ -7360,7 +7301,7 @@
           <a:p>
             <a:fld id="{38C9C2D7-406E-45EE-9F57-B83131B49240}" type="datetimeFigureOut">
               <a:rPr lang="en-US" smtClean="0"/>
-              <a:t>2/24/2026</a:t>
+              <a:t>10/1/2026</a:t>
             </a:fld>
             <a:endParaRPr lang="en-US"/>
           </a:p>
@@ -7455,7 +7396,7 @@
           <a:p>
             <a:fld id="{38C9C2D7-406E-45EE-9F57-B83131B49240}" type="datetimeFigureOut">
               <a:rPr lang="en-US" smtClean="0"/>
-              <a:t>2/24/2026</a:t>
+              <a:t>10/1/2026</a:t>
             </a:fld>
             <a:endParaRPr lang="en-US"/>
           </a:p>
@@ -7732,7 +7673,7 @@
           <a:p>
             <a:fld id="{38C9C2D7-406E-45EE-9F57-B83131B49240}" type="datetimeFigureOut">
               <a:rPr lang="en-US" smtClean="0"/>
-              <a:t>2/24/2026</a:t>
+              <a:t>10/1/2026</a:t>
             </a:fld>
             <a:endParaRPr lang="en-US"/>
           </a:p>
@@ -7902,7 +7843,7 @@
           <a:p>
             <a:fld id="{7325EFF0-82F5-4880-81B9-BC73A963ECC3}" type="datetime1">
               <a:rPr lang="en-US" smtClean="0"/>
-              <a:t>2/24/2026</a:t>
+              <a:t>10/1/2026</a:t>
             </a:fld>
             <a:endParaRPr lang="en-US"/>
           </a:p>
@@ -8159,7 +8100,7 @@
           <a:p>
             <a:fld id="{38C9C2D7-406E-45EE-9F57-B83131B49240}" type="datetimeFigureOut">
               <a:rPr lang="en-US" smtClean="0"/>
-              <a:t>2/24/2026</a:t>
+              <a:t>10/1/2026</a:t>
             </a:fld>
             <a:endParaRPr lang="en-US"/>
           </a:p>
@@ -8329,7 +8270,7 @@
           <a:p>
             <a:fld id="{38C9C2D7-406E-45EE-9F57-B83131B49240}" type="datetimeFigureOut">
               <a:rPr lang="en-US" smtClean="0"/>
-              <a:t>2/24/2026</a:t>
+              <a:t>10/1/2026</a:t>
             </a:fld>
             <a:endParaRPr lang="en-US"/>
           </a:p>
@@ -8509,7 +8450,7 @@
           <a:p>
             <a:fld id="{38C9C2D7-406E-45EE-9F57-B83131B49240}" type="datetimeFigureOut">
               <a:rPr lang="en-US" smtClean="0"/>
-              <a:t>2/24/2026</a:t>
+              <a:t>10/1/2026</a:t>
             </a:fld>
             <a:endParaRPr lang="en-US"/>
           </a:p>
@@ -8755,7 +8696,7 @@
           <a:p>
             <a:fld id="{5A946811-681C-4AC5-84B7-A52FB525DDA0}" type="datetime1">
               <a:rPr lang="en-US" smtClean="0"/>
-              <a:t>2/24/2026</a:t>
+              <a:t>10/1/2026</a:t>
             </a:fld>
             <a:endParaRPr lang="en-US"/>
           </a:p>
@@ -8987,7 +8928,7 @@
           <a:p>
             <a:fld id="{B26718EC-8AAB-4CFD-80CE-1D0FB821064C}" type="datetime1">
               <a:rPr lang="en-US" smtClean="0"/>
-              <a:t>2/24/2026</a:t>
+              <a:t>10/1/2026</a:t>
             </a:fld>
             <a:endParaRPr lang="en-US"/>
           </a:p>
@@ -9354,7 +9295,7 @@
           <a:p>
             <a:fld id="{B9FC400D-05DF-4711-8592-640F86665B5F}" type="datetime1">
               <a:rPr lang="en-US" smtClean="0"/>
-              <a:t>2/24/2026</a:t>
+              <a:t>10/1/2026</a:t>
             </a:fld>
             <a:endParaRPr lang="en-US"/>
           </a:p>
@@ -9472,7 +9413,7 @@
           <a:p>
             <a:fld id="{21DCA921-A295-445C-9DF4-D32E11171EBC}" type="datetime1">
               <a:rPr lang="en-US" smtClean="0"/>
-              <a:t>2/24/2026</a:t>
+              <a:t>10/1/2026</a:t>
             </a:fld>
             <a:endParaRPr lang="en-US"/>
           </a:p>
@@ -9567,7 +9508,7 @@
           <a:p>
             <a:fld id="{410F1947-2C73-49DA-BF00-06FEB90FBFE0}" type="datetime1">
               <a:rPr lang="en-US" smtClean="0"/>
-              <a:t>2/24/2026</a:t>
+              <a:t>10/1/2026</a:t>
             </a:fld>
             <a:endParaRPr lang="en-US"/>
           </a:p>
@@ -9844,7 +9785,7 @@
           <a:p>
             <a:fld id="{7909FA88-D630-40A8-A7C1-451FFA95718D}" type="datetime1">
               <a:rPr lang="en-US" smtClean="0"/>
-              <a:t>2/24/2026</a:t>
+              <a:t>10/1/2026</a:t>
             </a:fld>
             <a:endParaRPr lang="en-US"/>
           </a:p>
@@ -10101,7 +10042,7 @@
           <a:p>
             <a:fld id="{0B22107A-0A76-4A69-98CE-85E509F6FEC6}" type="datetime1">
               <a:rPr lang="en-US" smtClean="0"/>
-              <a:t>2/24/2026</a:t>
+              <a:t>10/1/2026</a:t>
             </a:fld>
             <a:endParaRPr lang="en-US"/>
           </a:p>
@@ -10314,7 +10255,7 @@
           <a:p>
             <a:fld id="{BFC3CE7D-A49F-42F1-B54B-0205BF41E480}" type="datetime1">
               <a:rPr lang="en-US" smtClean="0"/>
-              <a:t>2/24/2026</a:t>
+              <a:t>10/1/2026</a:t>
             </a:fld>
             <a:endParaRPr lang="en-US"/>
           </a:p>
@@ -10855,7 +10796,7 @@
           <a:p>
             <a:fld id="{38C9C2D7-406E-45EE-9F57-B83131B49240}" type="datetimeFigureOut">
               <a:rPr lang="en-US" smtClean="0"/>
-              <a:t>2/24/2026</a:t>
+              <a:t>10/1/2026</a:t>
             </a:fld>
             <a:endParaRPr lang="en-US"/>
           </a:p>
@@ -11484,14 +11425,16 @@
           </a:p>
           <a:p>
             <a:r>
-              <a:rPr lang="en-US" sz="2000" dirty="0" err="1">
+              <a:rPr lang="en-US" sz="2000" dirty="0">
                 <a:solidFill>
                   <a:srgbClr val="EB6E19"/>
                 </a:solidFill>
                 <a:latin typeface="Consolas" panose="020B0609020204030204" pitchFamily="49" charset="0"/>
               </a:rPr>
-              <a:t>int</a:t>
-            </a:r>
+              <a:t>int i = 1;</a:t>
+            </a:r>
+          </a:p>
+          <a:p>
             <a:r>
               <a:rPr lang="en-US" sz="2000" dirty="0">
                 <a:solidFill>
@@ -11499,7 +11442,7 @@
                 </a:solidFill>
                 <a:latin typeface="Consolas" panose="020B0609020204030204" pitchFamily="49" charset="0"/>
               </a:rPr>
-              <a:t> k;</a:t>
+              <a:t>while (i &lt; n)</a:t>
             </a:r>
           </a:p>
           <a:p>
@@ -11510,7 +11453,7 @@
                 </a:solidFill>
                 <a:latin typeface="Consolas" panose="020B0609020204030204" pitchFamily="49" charset="0"/>
               </a:rPr>
-              <a:t>for (int i=1; i &lt; n; i++)</a:t>
+              <a:t>{</a:t>
             </a:r>
           </a:p>
           <a:p>
@@ -11521,36 +11464,18 @@
                 </a:solidFill>
                 <a:latin typeface="Consolas" panose="020B0609020204030204" pitchFamily="49" charset="0"/>
               </a:rPr>
-              <a:t>	for (</a:t>
-            </a:r>
-            <a:r>
-              <a:rPr lang="en-US" sz="2000" dirty="0" err="1">
+              <a:t>   i = i * m;</a:t>
+            </a:r>
+          </a:p>
+          <a:p>
+            <a:r>
+              <a:rPr lang="en-US" sz="2000" dirty="0">
                 <a:solidFill>
                   <a:srgbClr val="EB6E19"/>
                 </a:solidFill>
                 <a:latin typeface="Consolas" panose="020B0609020204030204" pitchFamily="49" charset="0"/>
               </a:rPr>
-              <a:t>int</a:t>
-            </a:r>
-            <a:r>
-              <a:rPr lang="en-US" sz="2000" dirty="0">
-                <a:solidFill>
-                  <a:srgbClr val="EB6E19"/>
-                </a:solidFill>
-                <a:latin typeface="Consolas" panose="020B0609020204030204" pitchFamily="49" charset="0"/>
-              </a:rPr>
-              <a:t> j=n; j&gt;1; j=j/2)</a:t>
-            </a:r>
-          </a:p>
-          <a:p>
-            <a:r>
-              <a:rPr lang="en-US" sz="2000" dirty="0">
-                <a:solidFill>
-                  <a:srgbClr val="EB6E19"/>
-                </a:solidFill>
-                <a:latin typeface="Consolas" panose="020B0609020204030204" pitchFamily="49" charset="0"/>
-              </a:rPr>
-              <a:t>		k = i*j;</a:t>
+              <a:t>}</a:t>
             </a:r>
           </a:p>
           <a:p>
@@ -11577,41 +11502,12 @@
               <a:latin typeface="Consolas" panose="020B0609020204030204" pitchFamily="49" charset="0"/>
             </a:endParaRPr>
           </a:p>
-          <a:p>
-            <a:r>
-              <a:rPr lang="en-US" sz="2000" dirty="0">
-                <a:solidFill>
-                  <a:srgbClr val="00DA63"/>
-                </a:solidFill>
-                <a:latin typeface="Consolas" panose="020B0609020204030204" pitchFamily="49" charset="0"/>
-              </a:rPr>
-              <a:t>Answer: O(n log</a:t>
-            </a:r>
-            <a:r>
-              <a:rPr lang="en-US" sz="2000" baseline="-25000" dirty="0">
-                <a:solidFill>
-                  <a:srgbClr val="00DA63"/>
-                </a:solidFill>
-                <a:latin typeface="Consolas" panose="020B0609020204030204" pitchFamily="49" charset="0"/>
-              </a:rPr>
-              <a:t>2</a:t>
-            </a:r>
-            <a:r>
-              <a:rPr lang="en-US" sz="2000" dirty="0">
-                <a:solidFill>
-                  <a:srgbClr val="00DA63"/>
-                </a:solidFill>
-                <a:latin typeface="Consolas" panose="020B0609020204030204" pitchFamily="49" charset="0"/>
-              </a:rPr>
-              <a:t> n)</a:t>
-            </a:r>
-          </a:p>
         </p:txBody>
       </p:sp>
     </p:spTree>
     <p:extLst>
       <p:ext uri="{BB962C8B-B14F-4D97-AF65-F5344CB8AC3E}">
-        <p14:creationId xmlns:p14="http://schemas.microsoft.com/office/powerpoint/2010/main" val="2941247419"/>
+        <p14:creationId xmlns:p14="http://schemas.microsoft.com/office/powerpoint/2010/main" val="4086734313"/>
       </p:ext>
     </p:extLst>
   </p:cSld>
@@ -11696,7 +11592,7 @@
         <p:spPr>
           <a:xfrm>
             <a:off x="1039618" y="1828743"/>
-            <a:ext cx="9635971" cy="3170099"/>
+            <a:ext cx="9635971" cy="3477875"/>
           </a:xfrm>
           <a:prstGeom prst="rect">
             <a:avLst/>
@@ -11806,12 +11702,59 @@
               <a:latin typeface="Consolas" panose="020B0609020204030204" pitchFamily="49" charset="0"/>
             </a:endParaRPr>
           </a:p>
+          <a:p>
+            <a:r>
+              <a:rPr lang="en-US" sz="2000" dirty="0">
+                <a:solidFill>
+                  <a:srgbClr val="00DA63"/>
+                </a:solidFill>
+                <a:latin typeface="Consolas" panose="020B0609020204030204" pitchFamily="49" charset="0"/>
+              </a:rPr>
+              <a:t>Answer: O (</a:t>
+            </a:r>
+            <a:r>
+              <a:rPr lang="en-US" sz="2000" dirty="0" err="1">
+                <a:solidFill>
+                  <a:srgbClr val="00DA63"/>
+                </a:solidFill>
+                <a:latin typeface="Consolas" panose="020B0609020204030204" pitchFamily="49" charset="0"/>
+              </a:rPr>
+              <a:t>log</a:t>
+            </a:r>
+            <a:r>
+              <a:rPr lang="en-US" sz="2000" baseline="-25000" dirty="0" err="1">
+                <a:solidFill>
+                  <a:srgbClr val="00DA63"/>
+                </a:solidFill>
+                <a:latin typeface="Consolas" panose="020B0609020204030204" pitchFamily="49" charset="0"/>
+              </a:rPr>
+              <a:t>m</a:t>
+            </a:r>
+            <a:r>
+              <a:rPr lang="en-US" sz="2000" baseline="-25000" dirty="0">
+                <a:solidFill>
+                  <a:srgbClr val="00DA63"/>
+                </a:solidFill>
+                <a:latin typeface="Consolas" panose="020B0609020204030204" pitchFamily="49" charset="0"/>
+              </a:rPr>
+              <a:t> </a:t>
+            </a:r>
+            <a:r>
+              <a:rPr lang="en-US" sz="2000" dirty="0">
+                <a:solidFill>
+                  <a:srgbClr val="00DA63"/>
+                </a:solidFill>
+                <a:latin typeface="Consolas" panose="020B0609020204030204" pitchFamily="49" charset="0"/>
+              </a:rPr>
+              <a:t>n)</a:t>
+            </a:r>
+          </a:p>
         </p:txBody>
       </p:sp>
     </p:spTree>
     <p:extLst>
       <p:ext uri="{BB962C8B-B14F-4D97-AF65-F5344CB8AC3E}">
-        <p14:creationId xmlns:p14="http://schemas.microsoft.com/office/powerpoint/2010/main" val="4086734313"/>
+        <p14:creationId xmlns:p14="http://schemas.microsoft.com/office/powerpoint/2010/main" val="329785858"/>
       </p:ext>
     </p:extLst>
   </p:cSld>
@@ -11896,7 +11839,7 @@
         <p:spPr>
           <a:xfrm>
             <a:off x="1039618" y="1828743"/>
-            <a:ext cx="9635971" cy="3477875"/>
+            <a:ext cx="9635971" cy="2862322"/>
           </a:xfrm>
           <a:prstGeom prst="rect">
             <a:avLst/>
@@ -11935,7 +11878,7 @@
                 </a:solidFill>
                 <a:latin typeface="Consolas" panose="020B0609020204030204" pitchFamily="49" charset="0"/>
               </a:rPr>
-              <a:t>int i = 1;</a:t>
+              <a:t>result = 0</a:t>
             </a:r>
           </a:p>
           <a:p>
@@ -11946,7 +11889,7 @@
                 </a:solidFill>
                 <a:latin typeface="Consolas" panose="020B0609020204030204" pitchFamily="49" charset="0"/>
               </a:rPr>
-              <a:t>while (i &lt; n)</a:t>
+              <a:t>for (int i = 0; i &lt; n; i++)</a:t>
             </a:r>
           </a:p>
           <a:p>
@@ -11957,7 +11900,7 @@
                 </a:solidFill>
                 <a:latin typeface="Consolas" panose="020B0609020204030204" pitchFamily="49" charset="0"/>
               </a:rPr>
-              <a:t>{</a:t>
+              <a:t>  result += i;</a:t>
             </a:r>
           </a:p>
           <a:p>
@@ -11968,7 +11911,7 @@
                 </a:solidFill>
                 <a:latin typeface="Consolas" panose="020B0609020204030204" pitchFamily="49" charset="0"/>
               </a:rPr>
-              <a:t>   i = i * m;</a:t>
+              <a:t>for (int j = 1; j &lt; m; j *= 2)</a:t>
             </a:r>
           </a:p>
           <a:p>
@@ -11979,7 +11922,7 @@
                 </a:solidFill>
                 <a:latin typeface="Consolas" panose="020B0609020204030204" pitchFamily="49" charset="0"/>
               </a:rPr>
-              <a:t>}</a:t>
+              <a:t>  result *= j;</a:t>
             </a:r>
           </a:p>
           <a:p>
@@ -11998,67 +11941,12 @@
               <a:latin typeface="Consolas" panose="020B0609020204030204" pitchFamily="49" charset="0"/>
             </a:endParaRPr>
           </a:p>
-          <a:p>
-            <a:endParaRPr lang="en-US" sz="2000" dirty="0">
-              <a:solidFill>
-                <a:srgbClr val="EB6E19"/>
-              </a:solidFill>
-              <a:latin typeface="Consolas" panose="020B0609020204030204" pitchFamily="49" charset="0"/>
-            </a:endParaRPr>
-          </a:p>
-          <a:p>
-            <a:r>
-              <a:rPr lang="en-US" sz="2000" dirty="0">
-                <a:solidFill>
-                  <a:srgbClr val="00DA63"/>
-                </a:solidFill>
-                <a:latin typeface="Consolas" panose="020B0609020204030204" pitchFamily="49" charset="0"/>
-              </a:rPr>
-              <a:t>Answer: O (</a:t>
-            </a:r>
-            <a:r>
-              <a:rPr lang="en-US" sz="2000" dirty="0" err="1">
-                <a:solidFill>
-                  <a:srgbClr val="00DA63"/>
-                </a:solidFill>
-                <a:latin typeface="Consolas" panose="020B0609020204030204" pitchFamily="49" charset="0"/>
-              </a:rPr>
-              <a:t>log</a:t>
-            </a:r>
-            <a:r>
-              <a:rPr lang="en-US" sz="2000" baseline="-25000" dirty="0" err="1">
-                <a:solidFill>
-                  <a:srgbClr val="00DA63"/>
-                </a:solidFill>
-                <a:latin typeface="Consolas" panose="020B0609020204030204" pitchFamily="49" charset="0"/>
-              </a:rPr>
-              <a:t>m</a:t>
-            </a:r>
-            <a:r>
-              <a:rPr lang="en-US" sz="2000" baseline="-25000" dirty="0">
-                <a:solidFill>
-                  <a:srgbClr val="00DA63"/>
-                </a:solidFill>
-                <a:latin typeface="Consolas" panose="020B0609020204030204" pitchFamily="49" charset="0"/>
-              </a:rPr>
-              <a:t> </a:t>
-            </a:r>
-            <a:r>
-              <a:rPr lang="en-US" sz="2000" dirty="0">
-                <a:solidFill>
-                  <a:srgbClr val="00DA63"/>
-                </a:solidFill>
-                <a:latin typeface="Consolas" panose="020B0609020204030204" pitchFamily="49" charset="0"/>
-              </a:rPr>
-              <a:t>n)</a:t>
-            </a:r>
-          </a:p>
         </p:txBody>
       </p:sp>
     </p:spTree>
     <p:extLst>
       <p:ext uri="{BB962C8B-B14F-4D97-AF65-F5344CB8AC3E}">
-        <p14:creationId xmlns:p14="http://schemas.microsoft.com/office/powerpoint/2010/main" val="329785858"/>
+        <p14:creationId xmlns:p14="http://schemas.microsoft.com/office/powerpoint/2010/main" val="1688701363"/>
       </p:ext>
     </p:extLst>
   </p:cSld>
@@ -12143,7 +12031,7 @@
         <p:spPr>
           <a:xfrm>
             <a:off x="1039618" y="1828743"/>
-            <a:ext cx="9635971" cy="2862322"/>
+            <a:ext cx="9635971" cy="3170099"/>
           </a:xfrm>
           <a:prstGeom prst="rect">
             <a:avLst/>
@@ -12245,12 +12133,41 @@
               <a:latin typeface="Consolas" panose="020B0609020204030204" pitchFamily="49" charset="0"/>
             </a:endParaRPr>
           </a:p>
+          <a:p>
+            <a:r>
+              <a:rPr lang="en-US" sz="2000" dirty="0">
+                <a:solidFill>
+                  <a:srgbClr val="00DA63"/>
+                </a:solidFill>
+                <a:latin typeface="Consolas" panose="020B0609020204030204" pitchFamily="49" charset="0"/>
+              </a:rPr>
+              <a:t>Answer: O(n+log</a:t>
+            </a:r>
+            <a:r>
+              <a:rPr lang="en-US" sz="2000" baseline="-25000" dirty="0">
+                <a:solidFill>
+                  <a:srgbClr val="00DA63"/>
+                </a:solidFill>
+                <a:latin typeface="Consolas" panose="020B0609020204030204" pitchFamily="49" charset="0"/>
+              </a:rPr>
+              <a:t>2 </a:t>
+            </a:r>
+            <a:r>
+              <a:rPr lang="en-US" sz="2000" dirty="0">
+                <a:solidFill>
+                  <a:srgbClr val="00DA63"/>
+                </a:solidFill>
+                <a:latin typeface="Consolas" panose="020B0609020204030204" pitchFamily="49" charset="0"/>
+              </a:rPr>
+              <a:t>m)</a:t>
+            </a:r>
+          </a:p>
         </p:txBody>
       </p:sp>
     </p:spTree>
     <p:extLst>
       <p:ext uri="{BB962C8B-B14F-4D97-AF65-F5344CB8AC3E}">
-        <p14:creationId xmlns:p14="http://schemas.microsoft.com/office/powerpoint/2010/main" val="1688701363"/>
+        <p14:creationId xmlns:p14="http://schemas.microsoft.com/office/powerpoint/2010/main" val="2504223234"/>
       </p:ext>
     </p:extLst>
   </p:cSld>
@@ -12335,7 +12252,7 @@
         <p:spPr>
           <a:xfrm>
             <a:off x="1039618" y="1828743"/>
-            <a:ext cx="9635971" cy="3170099"/>
+            <a:ext cx="9635971" cy="2246769"/>
           </a:xfrm>
           <a:prstGeom prst="rect">
             <a:avLst/>
@@ -12374,7 +12291,7 @@
                 </a:solidFill>
                 <a:latin typeface="Consolas" panose="020B0609020204030204" pitchFamily="49" charset="0"/>
               </a:rPr>
-              <a:t>result = 0</a:t>
+              <a:t>for (int i=n; i&gt;0; i/=2)</a:t>
             </a:r>
           </a:p>
           <a:p>
@@ -12385,10 +12302,17 @@
                 </a:solidFill>
                 <a:latin typeface="Consolas" panose="020B0609020204030204" pitchFamily="49" charset="0"/>
               </a:rPr>
-              <a:t>for (int i = 0; i &lt; n; i++)</a:t>
-            </a:r>
-          </a:p>
-          <a:p>
+              <a:t>	for (int j=1; j&lt;i; </a:t>
+            </a:r>
+            <a:r>
+              <a:rPr lang="en-US" sz="2000" dirty="0" err="1">
+                <a:solidFill>
+                  <a:srgbClr val="EB6E19"/>
+                </a:solidFill>
+                <a:latin typeface="Consolas" panose="020B0609020204030204" pitchFamily="49" charset="0"/>
+              </a:rPr>
+              <a:t>j++</a:t>
+            </a:r>
             <a:r>
               <a:rPr lang="en-US" sz="2000" dirty="0">
                 <a:solidFill>
@@ -12396,7 +12320,7 @@
                 </a:solidFill>
                 <a:latin typeface="Consolas" panose="020B0609020204030204" pitchFamily="49" charset="0"/>
               </a:rPr>
-              <a:t>  result += i;</a:t>
+              <a:t>)</a:t>
             </a:r>
           </a:p>
           <a:p>
@@ -12407,18 +12331,7 @@
                 </a:solidFill>
                 <a:latin typeface="Consolas" panose="020B0609020204030204" pitchFamily="49" charset="0"/>
               </a:rPr>
-              <a:t>for (int j = 1; j &lt; m; j *= 2)</a:t>
-            </a:r>
-          </a:p>
-          <a:p>
-            <a:r>
-              <a:rPr lang="en-US" sz="2000" dirty="0">
-                <a:solidFill>
-                  <a:srgbClr val="EB6E19"/>
-                </a:solidFill>
-                <a:latin typeface="Consolas" panose="020B0609020204030204" pitchFamily="49" charset="0"/>
-              </a:rPr>
-              <a:t>  result *= j;</a:t>
+              <a:t>		sum = sum + 1;</a:t>
             </a:r>
           </a:p>
           <a:p>
@@ -12437,41 +12350,12 @@
               <a:latin typeface="Consolas" panose="020B0609020204030204" pitchFamily="49" charset="0"/>
             </a:endParaRPr>
           </a:p>
-          <a:p>
-            <a:r>
-              <a:rPr lang="en-US" sz="2000" dirty="0">
-                <a:solidFill>
-                  <a:srgbClr val="00DA63"/>
-                </a:solidFill>
-                <a:latin typeface="Consolas" panose="020B0609020204030204" pitchFamily="49" charset="0"/>
-              </a:rPr>
-              <a:t>Answer: O(n+log</a:t>
-            </a:r>
-            <a:r>
-              <a:rPr lang="en-US" sz="2000" baseline="-25000" dirty="0">
-                <a:solidFill>
-                  <a:srgbClr val="00DA63"/>
-                </a:solidFill>
-                <a:latin typeface="Consolas" panose="020B0609020204030204" pitchFamily="49" charset="0"/>
-              </a:rPr>
-              <a:t>2 </a:t>
-            </a:r>
-            <a:r>
-              <a:rPr lang="en-US" sz="2000" dirty="0">
-                <a:solidFill>
-                  <a:srgbClr val="00DA63"/>
-                </a:solidFill>
-                <a:latin typeface="Consolas" panose="020B0609020204030204" pitchFamily="49" charset="0"/>
-              </a:rPr>
-              <a:t>m)</a:t>
-            </a:r>
-          </a:p>
         </p:txBody>
       </p:sp>
     </p:spTree>
     <p:extLst>
       <p:ext uri="{BB962C8B-B14F-4D97-AF65-F5344CB8AC3E}">
-        <p14:creationId xmlns:p14="http://schemas.microsoft.com/office/powerpoint/2010/main" val="2504223234"/>
+        <p14:creationId xmlns:p14="http://schemas.microsoft.com/office/powerpoint/2010/main" val="1877007125"/>
       </p:ext>
     </p:extLst>
   </p:cSld>
@@ -12556,7 +12440,7 @@
         <p:spPr>
           <a:xfrm>
             <a:off x="1039618" y="1828743"/>
-            <a:ext cx="9635971" cy="2246769"/>
+            <a:ext cx="9635971" cy="2554545"/>
           </a:xfrm>
           <a:prstGeom prst="rect">
             <a:avLst/>
@@ -12654,12 +12538,23 @@
               <a:latin typeface="Consolas" panose="020B0609020204030204" pitchFamily="49" charset="0"/>
             </a:endParaRPr>
           </a:p>
+          <a:p>
+            <a:r>
+              <a:rPr lang="en-US" sz="2000" dirty="0">
+                <a:solidFill>
+                  <a:srgbClr val="00DA63"/>
+                </a:solidFill>
+                <a:latin typeface="Consolas" panose="020B0609020204030204" pitchFamily="49" charset="0"/>
+              </a:rPr>
+              <a:t>Answer: O(n)</a:t>
+            </a:r>
+          </a:p>
         </p:txBody>
       </p:sp>
     </p:spTree>
     <p:extLst>
       <p:ext uri="{BB962C8B-B14F-4D97-AF65-F5344CB8AC3E}">
-        <p14:creationId xmlns:p14="http://schemas.microsoft.com/office/powerpoint/2010/main" val="1877007125"/>
+        <p14:creationId xmlns:p14="http://schemas.microsoft.com/office/powerpoint/2010/main" val="2916700440"/>
       </p:ext>
     </p:extLst>
   </p:cSld>
@@ -12744,7 +12639,7 @@
         <p:spPr>
           <a:xfrm>
             <a:off x="1039618" y="1828743"/>
-            <a:ext cx="9635971" cy="2554545"/>
+            <a:ext cx="9212778" cy="2554545"/>
           </a:xfrm>
           <a:prstGeom prst="rect">
             <a:avLst/>
@@ -12764,7 +12659,7 @@
                 </a:solidFill>
                 <a:latin typeface="Consolas" panose="020B0609020204030204" pitchFamily="49" charset="0"/>
               </a:rPr>
-              <a:t>What is the computational complexity of the following code snippet?</a:t>
+              <a:t>Which code snippet will take less time to execute on a computer?</a:t>
             </a:r>
           </a:p>
           <a:p>
@@ -12783,18 +12678,38 @@
                 </a:solidFill>
                 <a:latin typeface="Consolas" panose="020B0609020204030204" pitchFamily="49" charset="0"/>
               </a:rPr>
-              <a:t>for (int i=n; i&gt;0; i/=2)</a:t>
-            </a:r>
-          </a:p>
-          <a:p>
+              <a:t>            </a:t>
+            </a:r>
             <a:r>
               <a:rPr lang="en-US" sz="2000" dirty="0">
                 <a:solidFill>
+                  <a:srgbClr val="00DA63"/>
+                </a:solidFill>
+                <a:latin typeface="Consolas" panose="020B0609020204030204" pitchFamily="49" charset="0"/>
+              </a:rPr>
+              <a:t> A                                    B</a:t>
+            </a:r>
+          </a:p>
+          <a:p>
+            <a:r>
+              <a:rPr lang="en-US" sz="2000" dirty="0">
+                <a:solidFill>
                   <a:srgbClr val="EB6E19"/>
                 </a:solidFill>
                 <a:latin typeface="Consolas" panose="020B0609020204030204" pitchFamily="49" charset="0"/>
               </a:rPr>
-              <a:t>	for (int j=1; j&lt;i; </a:t>
+              <a:t>for (int i=1; i &lt; n; i++)</a:t>
+            </a:r>
+          </a:p>
+          <a:p>
+            <a:r>
+              <a:rPr lang="en-US" sz="2000" dirty="0">
+                <a:solidFill>
+                  <a:srgbClr val="EB6E19"/>
+                </a:solidFill>
+                <a:latin typeface="Consolas" panose="020B0609020204030204" pitchFamily="49" charset="0"/>
+              </a:rPr>
+              <a:t>	for (int j=1; j &lt; n; </a:t>
             </a:r>
             <a:r>
               <a:rPr lang="en-US" sz="2000" dirty="0" err="1">
@@ -12842,15 +12757,84 @@
               <a:latin typeface="Consolas" panose="020B0609020204030204" pitchFamily="49" charset="0"/>
             </a:endParaRPr>
           </a:p>
-          <a:p>
-            <a:r>
-              <a:rPr lang="en-US" sz="2000" dirty="0">
-                <a:solidFill>
-                  <a:srgbClr val="00DA63"/>
-                </a:solidFill>
-                <a:latin typeface="Consolas" panose="020B0609020204030204" pitchFamily="49" charset="0"/>
-              </a:rPr>
-              <a:t>Answer: O(n)</a:t>
+        </p:txBody>
+      </p:sp>
+      <p:sp>
+        <p:nvSpPr>
+          <p:cNvPr id="7" name="TextBox 6">
+            <a:extLst>
+              <a:ext uri="{FF2B5EF4-FFF2-40B4-BE49-F238E27FC236}">
+                <a16:creationId xmlns:a16="http://schemas.microsoft.com/office/drawing/2014/main" id="{92A4DF68-D3B8-4D4F-85C6-D314CAD1A865}"/>
+              </a:ext>
+            </a:extLst>
+          </p:cNvPr>
+          <p:cNvSpPr txBox="1"/>
+          <p:nvPr/>
+        </p:nvSpPr>
+        <p:spPr>
+          <a:xfrm>
+            <a:off x="6353071" y="2798239"/>
+            <a:ext cx="6094324" cy="923330"/>
+          </a:xfrm>
+          <a:prstGeom prst="rect">
+            <a:avLst/>
+          </a:prstGeom>
+          <a:noFill/>
+        </p:spPr>
+        <p:txBody>
+          <a:bodyPr wrap="square">
+            <a:spAutoFit/>
+          </a:bodyPr>
+          <a:lstStyle/>
+          <a:p>
+            <a:r>
+              <a:rPr lang="en-US" sz="1800" dirty="0">
+                <a:solidFill>
+                  <a:srgbClr val="EB6E19"/>
+                </a:solidFill>
+                <a:latin typeface="Consolas" panose="020B0609020204030204" pitchFamily="49" charset="0"/>
+              </a:rPr>
+              <a:t>for (int i=1; i &lt; 2n; i++)</a:t>
+            </a:r>
+          </a:p>
+          <a:p>
+            <a:r>
+              <a:rPr lang="en-US" sz="1800" dirty="0">
+                <a:solidFill>
+                  <a:srgbClr val="EB6E19"/>
+                </a:solidFill>
+                <a:latin typeface="Consolas" panose="020B0609020204030204" pitchFamily="49" charset="0"/>
+              </a:rPr>
+              <a:t>	for (int j=1; j &lt; 2n; </a:t>
+            </a:r>
+            <a:r>
+              <a:rPr lang="en-US" sz="1800" dirty="0" err="1">
+                <a:solidFill>
+                  <a:srgbClr val="EB6E19"/>
+                </a:solidFill>
+                <a:latin typeface="Consolas" panose="020B0609020204030204" pitchFamily="49" charset="0"/>
+              </a:rPr>
+              <a:t>j++</a:t>
+            </a:r>
+            <a:r>
+              <a:rPr lang="en-US" sz="1800" dirty="0">
+                <a:solidFill>
+                  <a:srgbClr val="EB6E19"/>
+                </a:solidFill>
+                <a:latin typeface="Consolas" panose="020B0609020204030204" pitchFamily="49" charset="0"/>
+              </a:rPr>
+              <a:t>)</a:t>
+            </a:r>
+          </a:p>
+          <a:p>
+            <a:r>
+              <a:rPr lang="en-US" sz="1800" dirty="0">
+                <a:solidFill>
+                  <a:srgbClr val="EB6E19"/>
+                </a:solidFill>
+                <a:latin typeface="Consolas" panose="020B0609020204030204" pitchFamily="49" charset="0"/>
+              </a:rPr>
+              <a:t>		sum = sum + 1;</a:t>
             </a:r>
           </a:p>
         </p:txBody>
@@ -12858,7 +12842,7 @@
     </p:spTree>
     <p:extLst>
       <p:ext uri="{BB962C8B-B14F-4D97-AF65-F5344CB8AC3E}">
-        <p14:creationId xmlns:p14="http://schemas.microsoft.com/office/powerpoint/2010/main" val="2916700440"/>
+        <p14:creationId xmlns:p14="http://schemas.microsoft.com/office/powerpoint/2010/main" val="188823183"/>
       </p:ext>
     </p:extLst>
   </p:cSld>
@@ -12943,7 +12927,7 @@
         <p:spPr>
           <a:xfrm>
             <a:off x="1039618" y="1828743"/>
-            <a:ext cx="9212778" cy="2554545"/>
+            <a:ext cx="9212778" cy="2862322"/>
           </a:xfrm>
           <a:prstGeom prst="rect">
             <a:avLst/>
@@ -13060,6 +13044,17 @@
               </a:solidFill>
               <a:latin typeface="Consolas" panose="020B0609020204030204" pitchFamily="49" charset="0"/>
             </a:endParaRPr>
+          </a:p>
+          <a:p>
+            <a:r>
+              <a:rPr lang="en-US" sz="2000" dirty="0">
+                <a:solidFill>
+                  <a:srgbClr val="00DA63"/>
+                </a:solidFill>
+                <a:latin typeface="Consolas" panose="020B0609020204030204" pitchFamily="49" charset="0"/>
+              </a:rPr>
+              <a:t>Answer: A</a:t>
+            </a:r>
           </a:p>
         </p:txBody>
       </p:sp>
@@ -13146,7 +13141,7 @@
     </p:spTree>
     <p:extLst>
       <p:ext uri="{BB962C8B-B14F-4D97-AF65-F5344CB8AC3E}">
-        <p14:creationId xmlns:p14="http://schemas.microsoft.com/office/powerpoint/2010/main" val="188823183"/>
+        <p14:creationId xmlns:p14="http://schemas.microsoft.com/office/powerpoint/2010/main" val="1287381242"/>
       </p:ext>
     </p:extLst>
   </p:cSld>
@@ -13230,8 +13225,8 @@
         </p:nvSpPr>
         <p:spPr>
           <a:xfrm>
-            <a:off x="1039618" y="1828743"/>
-            <a:ext cx="9212778" cy="2862322"/>
+            <a:off x="1039619" y="1828743"/>
+            <a:ext cx="10515600" cy="2862322"/>
           </a:xfrm>
           <a:prstGeom prst="rect">
             <a:avLst/>
@@ -13239,7 +13234,7 @@
           <a:noFill/>
         </p:spPr>
         <p:txBody>
-          <a:bodyPr wrap="none" rtlCol="0">
+          <a:bodyPr wrap="square" rtlCol="0">
             <a:spAutoFit/>
           </a:bodyPr>
           <a:lstStyle/>
@@ -13251,7 +13246,25 @@
                 </a:solidFill>
                 <a:latin typeface="Consolas" panose="020B0609020204030204" pitchFamily="49" charset="0"/>
               </a:rPr>
-              <a:t>Which code snippet will take less time to execute on a computer?</a:t>
+              <a:t>Which code snippet will have a higher growth rate </a:t>
+            </a:r>
+            <a:r>
+              <a:rPr lang="en-US" sz="2000" dirty="0" err="1">
+                <a:solidFill>
+                  <a:srgbClr val="0081E2"/>
+                </a:solidFill>
+                <a:latin typeface="Consolas" panose="020B0609020204030204" pitchFamily="49" charset="0"/>
+              </a:rPr>
+              <a:t>asymtotically</a:t>
+            </a:r>
+            <a:r>
+              <a:rPr lang="en-US" sz="2000" dirty="0">
+                <a:solidFill>
+                  <a:srgbClr val="0081E2"/>
+                </a:solidFill>
+                <a:latin typeface="Consolas" panose="020B0609020204030204" pitchFamily="49" charset="0"/>
+              </a:rPr>
+              <a:t> in terms of Big O notation?</a:t>
             </a:r>
           </a:p>
           <a:p>
@@ -13348,17 +13361,6 @@
               </a:solidFill>
               <a:latin typeface="Consolas" panose="020B0609020204030204" pitchFamily="49" charset="0"/>
             </a:endParaRPr>
-          </a:p>
-          <a:p>
-            <a:r>
-              <a:rPr lang="en-US" sz="2000" dirty="0">
-                <a:solidFill>
-                  <a:srgbClr val="00DA63"/>
-                </a:solidFill>
-                <a:latin typeface="Consolas" panose="020B0609020204030204" pitchFamily="49" charset="0"/>
-              </a:rPr>
-              <a:t>Answer: A</a:t>
-            </a:r>
           </a:p>
         </p:txBody>
       </p:sp>
@@ -13376,7 +13378,7 @@
         </p:nvSpPr>
         <p:spPr>
           <a:xfrm>
-            <a:off x="6353071" y="2798239"/>
+            <a:off x="6297419" y="3059496"/>
             <a:ext cx="6094324" cy="923330"/>
           </a:xfrm>
           <a:prstGeom prst="rect">
@@ -13445,7 +13447,7 @@
     </p:spTree>
     <p:extLst>
       <p:ext uri="{BB962C8B-B14F-4D97-AF65-F5344CB8AC3E}">
-        <p14:creationId xmlns:p14="http://schemas.microsoft.com/office/powerpoint/2010/main" val="1287381242"/>
+        <p14:creationId xmlns:p14="http://schemas.microsoft.com/office/powerpoint/2010/main" val="1211821534"/>
       </p:ext>
     </p:extLst>
   </p:cSld>
@@ -13530,7 +13532,7 @@
         <p:spPr>
           <a:xfrm>
             <a:off x="1039619" y="1828743"/>
-            <a:ext cx="10515600" cy="2862322"/>
+            <a:ext cx="10515600" cy="3170099"/>
           </a:xfrm>
           <a:prstGeom prst="rect">
             <a:avLst/>
@@ -13550,25 +13552,7 @@
                 </a:solidFill>
                 <a:latin typeface="Consolas" panose="020B0609020204030204" pitchFamily="49" charset="0"/>
               </a:rPr>
-              <a:t>Which code snippet will have a higher growth rate </a:t>
-            </a:r>
-            <a:r>
-              <a:rPr lang="en-US" sz="2000" dirty="0" err="1">
-                <a:solidFill>
-                  <a:srgbClr val="0081E2"/>
-                </a:solidFill>
-                <a:latin typeface="Consolas" panose="020B0609020204030204" pitchFamily="49" charset="0"/>
-              </a:rPr>
-              <a:t>asymtotically</a:t>
-            </a:r>
-            <a:r>
-              <a:rPr lang="en-US" sz="2000" dirty="0">
-                <a:solidFill>
-                  <a:srgbClr val="0081E2"/>
-                </a:solidFill>
-                <a:latin typeface="Consolas" panose="020B0609020204030204" pitchFamily="49" charset="0"/>
-              </a:rPr>
-              <a:t> in terms of Big O notation?</a:t>
+              <a:t>Which code snippet will have a higher growth rate asymptotically in terms of Big O notation?</a:t>
             </a:r>
           </a:p>
           <a:p>
@@ -13662,6 +13646,32 @@
             <a:endParaRPr lang="en-US" sz="2000" dirty="0">
               <a:solidFill>
                 <a:srgbClr val="EB6E19"/>
+              </a:solidFill>
+              <a:latin typeface="Consolas" panose="020B0609020204030204" pitchFamily="49" charset="0"/>
+            </a:endParaRPr>
+          </a:p>
+          <a:p>
+            <a:r>
+              <a:rPr lang="en-US" sz="2000" dirty="0">
+                <a:solidFill>
+                  <a:srgbClr val="00DA63"/>
+                </a:solidFill>
+                <a:latin typeface="Consolas" panose="020B0609020204030204" pitchFamily="49" charset="0"/>
+              </a:rPr>
+              <a:t>Answer: A and B grow at the same rate </a:t>
+            </a:r>
+            <a:r>
+              <a:rPr lang="en-US" sz="2000" dirty="0" err="1">
+                <a:solidFill>
+                  <a:srgbClr val="00DA63"/>
+                </a:solidFill>
+                <a:latin typeface="Consolas" panose="020B0609020204030204" pitchFamily="49" charset="0"/>
+              </a:rPr>
+              <a:t>asymtotically</a:t>
+            </a:r>
+            <a:endParaRPr lang="en-US" sz="2000" dirty="0">
+              <a:solidFill>
+                <a:srgbClr val="00DA63"/>
               </a:solidFill>
               <a:latin typeface="Consolas" panose="020B0609020204030204" pitchFamily="49" charset="0"/>
             </a:endParaRPr>
@@ -13751,7 +13761,7 @@
     </p:spTree>
     <p:extLst>
       <p:ext uri="{BB962C8B-B14F-4D97-AF65-F5344CB8AC3E}">
-        <p14:creationId xmlns:p14="http://schemas.microsoft.com/office/powerpoint/2010/main" val="1211821534"/>
+        <p14:creationId xmlns:p14="http://schemas.microsoft.com/office/powerpoint/2010/main" val="2651317974"/>
       </p:ext>
     </p:extLst>
   </p:cSld>
@@ -14805,7 +14815,7 @@
             </a:ln>
             <a:extLst>
               <a:ext uri="{909E8E84-426E-40dd-AFC4-6F175D3DCCD1}">
-                <a14:hiddenFill xmlns="" xmlns:a14="http://schemas.microsoft.com/office/drawing/2010/main">
+                <a14:hiddenFill xmlns:a14="http://schemas.microsoft.com/office/drawing/2010/main" xmlns="">
                   <a:noFill/>
                 </a14:hiddenFill>
               </a:ext>
@@ -14847,7 +14857,7 @@
             </a:ln>
             <a:extLst>
               <a:ext uri="{909E8E84-426E-40dd-AFC4-6F175D3DCCD1}">
-                <a14:hiddenFill xmlns="" xmlns:a14="http://schemas.microsoft.com/office/drawing/2010/main">
+                <a14:hiddenFill xmlns:a14="http://schemas.microsoft.com/office/drawing/2010/main" xmlns="">
                   <a:noFill/>
                 </a14:hiddenFill>
               </a:ext>
@@ -15211,7 +15221,7 @@
             </a:ln>
             <a:extLst>
               <a:ext uri="{909E8E84-426E-40dd-AFC4-6F175D3DCCD1}">
-                <a14:hiddenFill xmlns="" xmlns:a14="http://schemas.microsoft.com/office/drawing/2010/main">
+                <a14:hiddenFill xmlns:a14="http://schemas.microsoft.com/office/drawing/2010/main" xmlns="">
                   <a:noFill/>
                 </a14:hiddenFill>
               </a:ext>
@@ -15256,7 +15266,7 @@
             </a:ln>
             <a:extLst>
               <a:ext uri="{909E8E84-426E-40dd-AFC4-6F175D3DCCD1}">
-                <a14:hiddenFill xmlns="" xmlns:a14="http://schemas.microsoft.com/office/drawing/2010/main">
+                <a14:hiddenFill xmlns:a14="http://schemas.microsoft.com/office/drawing/2010/main" xmlns="">
                   <a:noFill/>
                 </a14:hiddenFill>
               </a:ext>
@@ -15301,7 +15311,7 @@
             </a:ln>
             <a:extLst>
               <a:ext uri="{909E8E84-426E-40dd-AFC4-6F175D3DCCD1}">
-                <a14:hiddenFill xmlns="" xmlns:a14="http://schemas.microsoft.com/office/drawing/2010/main">
+                <a14:hiddenFill xmlns:a14="http://schemas.microsoft.com/office/drawing/2010/main" xmlns="">
                   <a:noFill/>
                 </a14:hiddenFill>
               </a:ext>
@@ -15345,7 +15355,7 @@
             </a:ln>
             <a:extLst>
               <a:ext uri="{909E8E84-426E-40dd-AFC4-6F175D3DCCD1}">
-                <a14:hiddenFill xmlns="" xmlns:a14="http://schemas.microsoft.com/office/drawing/2010/main">
+                <a14:hiddenFill xmlns:a14="http://schemas.microsoft.com/office/drawing/2010/main" xmlns="">
                   <a:noFill/>
                 </a14:hiddenFill>
               </a:ext>
@@ -15421,256 +15431,268 @@
                 </a:solidFill>
                 <a:latin typeface="Gotham Bold" pitchFamily="50" charset="0"/>
               </a:rPr>
-              <a:t>Mini Review – Complexity</a:t>
-            </a:r>
-          </a:p>
-        </p:txBody>
-      </p:sp>
-      <p:sp>
-        <p:nvSpPr>
-          <p:cNvPr id="4" name="TextBox 3">
+              <a:t>Mini Review – Linked Lists</a:t>
+            </a:r>
+          </a:p>
+        </p:txBody>
+      </p:sp>
+      <p:sp>
+        <p:nvSpPr>
+          <p:cNvPr id="5" name="Content Placeholder 1">
             <a:extLst>
               <a:ext uri="{FF2B5EF4-FFF2-40B4-BE49-F238E27FC236}">
-                <a16:creationId xmlns:a16="http://schemas.microsoft.com/office/drawing/2014/main" id="{A70E6009-18FB-490F-970D-3C9B83737A5E}"/>
+                <a16:creationId xmlns:a16="http://schemas.microsoft.com/office/drawing/2014/main" id="{9069B1C4-5084-4E0D-9FA0-9C8B794FA1FE}"/>
               </a:ext>
             </a:extLst>
           </p:cNvPr>
-          <p:cNvSpPr txBox="1"/>
+          <p:cNvSpPr txBox="1">
+            <a:spLocks/>
+          </p:cNvSpPr>
           <p:nvPr/>
         </p:nvSpPr>
         <p:spPr>
           <a:xfrm>
-            <a:off x="1039619" y="1828743"/>
-            <a:ext cx="10515600" cy="3170099"/>
+            <a:off x="940881" y="1690688"/>
+            <a:ext cx="9790759" cy="5057971"/>
           </a:xfrm>
           <a:prstGeom prst="rect">
             <a:avLst/>
           </a:prstGeom>
-          <a:noFill/>
         </p:spPr>
         <p:txBody>
-          <a:bodyPr wrap="square" rtlCol="0">
-            <a:spAutoFit/>
-          </a:bodyPr>
-          <a:lstStyle/>
-          <a:p>
-            <a:r>
-              <a:rPr lang="en-US" sz="2000" dirty="0">
+          <a:bodyPr vert="horz" lIns="91440" tIns="45720" rIns="91440" bIns="45720" rtlCol="0" anchor="t"/>
+          <a:lstStyle>
+            <a:defPPr>
+              <a:defRPr lang="en-US"/>
+            </a:defPPr>
+            <a:lvl1pPr marL="0" algn="l" defTabSz="914400" rtl="0" eaLnBrk="1" latinLnBrk="0" hangingPunct="1">
+              <a:defRPr sz="1200" kern="1200">
+                <a:solidFill>
+                  <a:schemeClr val="tx1">
+                    <a:tint val="75000"/>
+                  </a:schemeClr>
+                </a:solidFill>
+                <a:latin typeface="+mn-lt"/>
+                <a:ea typeface="+mn-ea"/>
+                <a:cs typeface="+mn-cs"/>
+              </a:defRPr>
+            </a:lvl1pPr>
+            <a:lvl2pPr marL="457200" algn="l" defTabSz="914400" rtl="0" eaLnBrk="1" latinLnBrk="0" hangingPunct="1">
+              <a:defRPr sz="1800" kern="1200">
+                <a:solidFill>
+                  <a:schemeClr val="tx1"/>
+                </a:solidFill>
+                <a:latin typeface="+mn-lt"/>
+                <a:ea typeface="+mn-ea"/>
+                <a:cs typeface="+mn-cs"/>
+              </a:defRPr>
+            </a:lvl2pPr>
+            <a:lvl3pPr marL="914400" algn="l" defTabSz="914400" rtl="0" eaLnBrk="1" latinLnBrk="0" hangingPunct="1">
+              <a:defRPr sz="1800" kern="1200">
+                <a:solidFill>
+                  <a:schemeClr val="tx1"/>
+                </a:solidFill>
+                <a:latin typeface="+mn-lt"/>
+                <a:ea typeface="+mn-ea"/>
+                <a:cs typeface="+mn-cs"/>
+              </a:defRPr>
+            </a:lvl3pPr>
+            <a:lvl4pPr marL="1371600" algn="l" defTabSz="914400" rtl="0" eaLnBrk="1" latinLnBrk="0" hangingPunct="1">
+              <a:defRPr sz="1800" kern="1200">
+                <a:solidFill>
+                  <a:schemeClr val="tx1"/>
+                </a:solidFill>
+                <a:latin typeface="+mn-lt"/>
+                <a:ea typeface="+mn-ea"/>
+                <a:cs typeface="+mn-cs"/>
+              </a:defRPr>
+            </a:lvl4pPr>
+            <a:lvl5pPr marL="1828800" algn="l" defTabSz="914400" rtl="0" eaLnBrk="1" latinLnBrk="0" hangingPunct="1">
+              <a:defRPr sz="1800" kern="1200">
+                <a:solidFill>
+                  <a:schemeClr val="tx1"/>
+                </a:solidFill>
+                <a:latin typeface="+mn-lt"/>
+                <a:ea typeface="+mn-ea"/>
+                <a:cs typeface="+mn-cs"/>
+              </a:defRPr>
+            </a:lvl5pPr>
+            <a:lvl6pPr marL="2286000" algn="l" defTabSz="914400" rtl="0" eaLnBrk="1" latinLnBrk="0" hangingPunct="1">
+              <a:defRPr sz="1800" kern="1200">
+                <a:solidFill>
+                  <a:schemeClr val="tx1"/>
+                </a:solidFill>
+                <a:latin typeface="+mn-lt"/>
+                <a:ea typeface="+mn-ea"/>
+                <a:cs typeface="+mn-cs"/>
+              </a:defRPr>
+            </a:lvl6pPr>
+            <a:lvl7pPr marL="2743200" algn="l" defTabSz="914400" rtl="0" eaLnBrk="1" latinLnBrk="0" hangingPunct="1">
+              <a:defRPr sz="1800" kern="1200">
+                <a:solidFill>
+                  <a:schemeClr val="tx1"/>
+                </a:solidFill>
+                <a:latin typeface="+mn-lt"/>
+                <a:ea typeface="+mn-ea"/>
+                <a:cs typeface="+mn-cs"/>
+              </a:defRPr>
+            </a:lvl7pPr>
+            <a:lvl8pPr marL="3200400" algn="l" defTabSz="914400" rtl="0" eaLnBrk="1" latinLnBrk="0" hangingPunct="1">
+              <a:defRPr sz="1800" kern="1200">
+                <a:solidFill>
+                  <a:schemeClr val="tx1"/>
+                </a:solidFill>
+                <a:latin typeface="+mn-lt"/>
+                <a:ea typeface="+mn-ea"/>
+                <a:cs typeface="+mn-cs"/>
+              </a:defRPr>
+            </a:lvl8pPr>
+            <a:lvl9pPr marL="3657600" algn="l" defTabSz="914400" rtl="0" eaLnBrk="1" latinLnBrk="0" hangingPunct="1">
+              <a:defRPr sz="1800" kern="1200">
+                <a:solidFill>
+                  <a:schemeClr val="tx1"/>
+                </a:solidFill>
+                <a:latin typeface="+mn-lt"/>
+                <a:ea typeface="+mn-ea"/>
+                <a:cs typeface="+mn-cs"/>
+              </a:defRPr>
+            </a:lvl9pPr>
+          </a:lstStyle>
+          <a:p>
+            <a:r>
+              <a:rPr lang="en-US" sz="1600" dirty="0">
                 <a:solidFill>
                   <a:srgbClr val="0081E2"/>
                 </a:solidFill>
                 <a:latin typeface="Consolas" panose="020B0609020204030204" pitchFamily="49" charset="0"/>
               </a:rPr>
-              <a:t>Which code snippet will have a higher growth rate asymptotically in terms of Big O notation?</a:t>
-            </a:r>
-          </a:p>
-          <a:p>
-            <a:endParaRPr lang="en-US" sz="2000" dirty="0">
+              <a:t>Consider a class List that implements an </a:t>
+            </a:r>
+            <a:r>
+              <a:rPr lang="en-US" sz="1600" dirty="0">
+                <a:solidFill>
+                  <a:srgbClr val="EB6E19"/>
+                </a:solidFill>
+                <a:latin typeface="Consolas" panose="020B0609020204030204" pitchFamily="49" charset="0"/>
+              </a:rPr>
+              <a:t>ordered</a:t>
+            </a:r>
+            <a:r>
+              <a:rPr lang="en-US" sz="1600" dirty="0">
+                <a:solidFill>
+                  <a:srgbClr val="0081E2"/>
+                </a:solidFill>
+                <a:latin typeface="Consolas" panose="020B0609020204030204" pitchFamily="49" charset="0"/>
+              </a:rPr>
+              <a:t> list backed by a singly linked list with a head pointer. The invariant “</a:t>
+            </a:r>
+            <a:r>
+              <a:rPr lang="en-US" sz="1600" dirty="0">
+                <a:solidFill>
+                  <a:srgbClr val="EB6E19"/>
+                </a:solidFill>
+                <a:latin typeface="Consolas" panose="020B0609020204030204" pitchFamily="49" charset="0"/>
+              </a:rPr>
+              <a:t>ordered</a:t>
+            </a:r>
+            <a:r>
+              <a:rPr lang="en-US" sz="1600" dirty="0">
+                <a:solidFill>
+                  <a:srgbClr val="0081E2"/>
+                </a:solidFill>
+                <a:latin typeface="Consolas" panose="020B0609020204030204" pitchFamily="49" charset="0"/>
+              </a:rPr>
+              <a:t>” is maintained always. Given that representation, what is the worst-case time complexity of the following operations? Assume the list is sorted in ascending order.</a:t>
+            </a:r>
+          </a:p>
+          <a:p>
+            <a:endParaRPr lang="en-US" sz="1600" dirty="0">
               <a:solidFill>
-                <a:srgbClr val="EB6E19"/>
+                <a:srgbClr val="0081E2"/>
               </a:solidFill>
               <a:latin typeface="Consolas" panose="020B0609020204030204" pitchFamily="49" charset="0"/>
             </a:endParaRPr>
           </a:p>
           <a:p>
             <a:r>
-              <a:rPr lang="en-US" sz="2000" dirty="0">
-                <a:solidFill>
-                  <a:srgbClr val="EB6E19"/>
-                </a:solidFill>
-                <a:latin typeface="Consolas" panose="020B0609020204030204" pitchFamily="49" charset="0"/>
-              </a:rPr>
-              <a:t>            </a:t>
-            </a:r>
-            <a:r>
-              <a:rPr lang="en-US" sz="2000" dirty="0">
-                <a:solidFill>
-                  <a:srgbClr val="00DA63"/>
-                </a:solidFill>
-                <a:latin typeface="Consolas" panose="020B0609020204030204" pitchFamily="49" charset="0"/>
-              </a:rPr>
-              <a:t> A                                    B</a:t>
-            </a:r>
-          </a:p>
-          <a:p>
-            <a:r>
-              <a:rPr lang="en-US" sz="2000" dirty="0">
-                <a:solidFill>
-                  <a:srgbClr val="EB6E19"/>
-                </a:solidFill>
-                <a:latin typeface="Consolas" panose="020B0609020204030204" pitchFamily="49" charset="0"/>
-              </a:rPr>
-              <a:t>for (int i=1; i &lt; n; i++)</a:t>
-            </a:r>
-          </a:p>
-          <a:p>
-            <a:r>
-              <a:rPr lang="en-US" sz="2000" dirty="0">
-                <a:solidFill>
-                  <a:srgbClr val="EB6E19"/>
-                </a:solidFill>
-                <a:latin typeface="Consolas" panose="020B0609020204030204" pitchFamily="49" charset="0"/>
-              </a:rPr>
-              <a:t>	for (int j=1; j &lt; n; </a:t>
-            </a:r>
-            <a:r>
-              <a:rPr lang="en-US" sz="2000" dirty="0" err="1">
-                <a:solidFill>
-                  <a:srgbClr val="EB6E19"/>
-                </a:solidFill>
-                <a:latin typeface="Consolas" panose="020B0609020204030204" pitchFamily="49" charset="0"/>
-              </a:rPr>
-              <a:t>j++</a:t>
-            </a:r>
-            <a:r>
-              <a:rPr lang="en-US" sz="2000" dirty="0">
-                <a:solidFill>
-                  <a:srgbClr val="EB6E19"/>
-                </a:solidFill>
-                <a:latin typeface="Consolas" panose="020B0609020204030204" pitchFamily="49" charset="0"/>
-              </a:rPr>
-              <a:t>)</a:t>
-            </a:r>
-          </a:p>
-          <a:p>
-            <a:r>
-              <a:rPr lang="en-US" sz="2000" dirty="0">
-                <a:solidFill>
-                  <a:srgbClr val="EB6E19"/>
-                </a:solidFill>
-                <a:latin typeface="Consolas" panose="020B0609020204030204" pitchFamily="49" charset="0"/>
-              </a:rPr>
-              <a:t>		sum = sum + 1;</a:t>
-            </a:r>
-          </a:p>
-          <a:p>
-            <a:endParaRPr lang="en-US" sz="2000" dirty="0">
+              <a:rPr lang="en-US" sz="1600" dirty="0">
+                <a:solidFill>
+                  <a:srgbClr val="0081E2"/>
+                </a:solidFill>
+                <a:latin typeface="Consolas" panose="020B0609020204030204" pitchFamily="49" charset="0"/>
+              </a:rPr>
+              <a:t>A. Insert an item</a:t>
+            </a:r>
+          </a:p>
+          <a:p>
+            <a:r>
+              <a:rPr lang="en-US" sz="1600" dirty="0">
+                <a:solidFill>
+                  <a:srgbClr val="0081E2"/>
+                </a:solidFill>
+                <a:latin typeface="Consolas" panose="020B0609020204030204" pitchFamily="49" charset="0"/>
+              </a:rPr>
+              <a:t>B. Finding the minimum element</a:t>
+            </a:r>
+          </a:p>
+          <a:p>
+            <a:r>
+              <a:rPr lang="en-US" sz="1600" dirty="0">
+                <a:solidFill>
+                  <a:srgbClr val="0081E2"/>
+                </a:solidFill>
+                <a:latin typeface="Consolas" panose="020B0609020204030204" pitchFamily="49" charset="0"/>
+              </a:rPr>
+              <a:t>C. Delete the largest element from list</a:t>
+            </a:r>
+          </a:p>
+          <a:p>
+            <a:r>
+              <a:rPr lang="en-US" sz="1600" dirty="0">
+                <a:solidFill>
+                  <a:srgbClr val="0081E2"/>
+                </a:solidFill>
+                <a:latin typeface="Consolas" panose="020B0609020204030204" pitchFamily="49" charset="0"/>
+              </a:rPr>
+              <a:t>D. Finding the largest element</a:t>
+            </a:r>
+          </a:p>
+          <a:p>
+            <a:r>
+              <a:rPr lang="en-US" sz="1600" dirty="0">
+                <a:solidFill>
+                  <a:srgbClr val="0081E2"/>
+                </a:solidFill>
+                <a:latin typeface="Consolas" panose="020B0609020204030204" pitchFamily="49" charset="0"/>
+              </a:rPr>
+              <a:t>E. Finding a random element, n</a:t>
+            </a:r>
+          </a:p>
+          <a:p>
+            <a:r>
+              <a:rPr lang="en-US" sz="1600" dirty="0">
+                <a:solidFill>
+                  <a:srgbClr val="0081E2"/>
+                </a:solidFill>
+                <a:latin typeface="Consolas" panose="020B0609020204030204" pitchFamily="49" charset="0"/>
+              </a:rPr>
+              <a:t>F. Deleting the minimum element in the list</a:t>
+            </a:r>
+          </a:p>
+          <a:p>
+            <a:endParaRPr lang="en-US" sz="1600" dirty="0">
               <a:solidFill>
-                <a:srgbClr val="EB6E19"/>
+                <a:srgbClr val="0081E2"/>
               </a:solidFill>
               <a:latin typeface="Consolas" panose="020B0609020204030204" pitchFamily="49" charset="0"/>
             </a:endParaRPr>
           </a:p>
-          <a:p>
-            <a:endParaRPr lang="en-US" sz="2000" dirty="0">
-              <a:solidFill>
-                <a:srgbClr val="EB6E19"/>
-              </a:solidFill>
-              <a:latin typeface="Consolas" panose="020B0609020204030204" pitchFamily="49" charset="0"/>
-            </a:endParaRPr>
-          </a:p>
-          <a:p>
-            <a:r>
-              <a:rPr lang="en-US" sz="2000" dirty="0">
-                <a:solidFill>
-                  <a:srgbClr val="00DA63"/>
-                </a:solidFill>
-                <a:latin typeface="Consolas" panose="020B0609020204030204" pitchFamily="49" charset="0"/>
-              </a:rPr>
-              <a:t>Answer: A and B grow at the same rate </a:t>
-            </a:r>
-            <a:r>
-              <a:rPr lang="en-US" sz="2000" dirty="0" err="1">
-                <a:solidFill>
-                  <a:srgbClr val="00DA63"/>
-                </a:solidFill>
-                <a:latin typeface="Consolas" panose="020B0609020204030204" pitchFamily="49" charset="0"/>
-              </a:rPr>
-              <a:t>asymtotically</a:t>
-            </a:r>
-            <a:endParaRPr lang="en-US" sz="2000" dirty="0">
-              <a:solidFill>
-                <a:srgbClr val="00DA63"/>
-              </a:solidFill>
-              <a:latin typeface="Consolas" panose="020B0609020204030204" pitchFamily="49" charset="0"/>
-            </a:endParaRPr>
-          </a:p>
-        </p:txBody>
-      </p:sp>
-      <p:sp>
-        <p:nvSpPr>
-          <p:cNvPr id="7" name="TextBox 6">
-            <a:extLst>
-              <a:ext uri="{FF2B5EF4-FFF2-40B4-BE49-F238E27FC236}">
-                <a16:creationId xmlns:a16="http://schemas.microsoft.com/office/drawing/2014/main" id="{92A4DF68-D3B8-4D4F-85C6-D314CAD1A865}"/>
-              </a:ext>
-            </a:extLst>
-          </p:cNvPr>
-          <p:cNvSpPr txBox="1"/>
-          <p:nvPr/>
-        </p:nvSpPr>
-        <p:spPr>
-          <a:xfrm>
-            <a:off x="6297419" y="3059496"/>
-            <a:ext cx="6094324" cy="923330"/>
-          </a:xfrm>
-          <a:prstGeom prst="rect">
-            <a:avLst/>
-          </a:prstGeom>
-          <a:noFill/>
-        </p:spPr>
-        <p:txBody>
-          <a:bodyPr wrap="square">
-            <a:spAutoFit/>
-          </a:bodyPr>
-          <a:lstStyle/>
-          <a:p>
-            <a:r>
-              <a:rPr lang="en-US" sz="1800" dirty="0">
-                <a:solidFill>
-                  <a:srgbClr val="EB6E19"/>
-                </a:solidFill>
-                <a:latin typeface="Consolas" panose="020B0609020204030204" pitchFamily="49" charset="0"/>
-              </a:rPr>
-              <a:t>for (int i=1; i &lt; 2n; i++)</a:t>
-            </a:r>
-          </a:p>
-          <a:p>
-            <a:r>
-              <a:rPr lang="en-US" sz="1800" dirty="0">
-                <a:solidFill>
-                  <a:srgbClr val="EB6E19"/>
-                </a:solidFill>
-                <a:latin typeface="Consolas" panose="020B0609020204030204" pitchFamily="49" charset="0"/>
-              </a:rPr>
-              <a:t>	for (int j=1; j &lt; 2n; </a:t>
-            </a:r>
-            <a:r>
-              <a:rPr lang="en-US" sz="1800" dirty="0" err="1">
-                <a:solidFill>
-                  <a:srgbClr val="EB6E19"/>
-                </a:solidFill>
-                <a:latin typeface="Consolas" panose="020B0609020204030204" pitchFamily="49" charset="0"/>
-              </a:rPr>
-              <a:t>j++</a:t>
-            </a:r>
-            <a:r>
-              <a:rPr lang="en-US" sz="1800" dirty="0">
-                <a:solidFill>
-                  <a:srgbClr val="EB6E19"/>
-                </a:solidFill>
-                <a:latin typeface="Consolas" panose="020B0609020204030204" pitchFamily="49" charset="0"/>
-              </a:rPr>
-              <a:t>)</a:t>
-            </a:r>
-          </a:p>
-          <a:p>
-            <a:r>
-              <a:rPr lang="en-US" sz="1800" dirty="0">
-                <a:solidFill>
-                  <a:srgbClr val="EB6E19"/>
-                </a:solidFill>
-                <a:latin typeface="Consolas" panose="020B0609020204030204" pitchFamily="49" charset="0"/>
-              </a:rPr>
-              <a:t>		sum = sum + 1;</a:t>
-            </a:r>
-          </a:p>
         </p:txBody>
       </p:sp>
     </p:spTree>
     <p:extLst>
       <p:ext uri="{BB962C8B-B14F-4D97-AF65-F5344CB8AC3E}">
-        <p14:creationId xmlns:p14="http://schemas.microsoft.com/office/powerpoint/2010/main" val="2651317974"/>
+        <p14:creationId xmlns:p14="http://schemas.microsoft.com/office/powerpoint/2010/main" val="1671614239"/>
       </p:ext>
     </p:extLst>
   </p:cSld>
@@ -15925,63 +15947,125 @@
                 </a:solidFill>
                 <a:latin typeface="Consolas" panose="020B0609020204030204" pitchFamily="49" charset="0"/>
               </a:rPr>
-              <a:t>A. Insert an item</a:t>
-            </a:r>
-          </a:p>
-          <a:p>
+              <a:t>A. Insert an item </a:t>
+            </a:r>
             <a:r>
               <a:rPr lang="en-US" sz="1600" dirty="0">
                 <a:solidFill>
+                  <a:srgbClr val="EB6E19"/>
+                </a:solidFill>
+                <a:latin typeface="Consolas" panose="020B0609020204030204" pitchFamily="49" charset="0"/>
+              </a:rPr>
+              <a:t>: O(n)</a:t>
+            </a:r>
+          </a:p>
+          <a:p>
+            <a:r>
+              <a:rPr lang="en-US" sz="1600" dirty="0">
+                <a:solidFill>
                   <a:srgbClr val="0081E2"/>
                 </a:solidFill>
                 <a:latin typeface="Consolas" panose="020B0609020204030204" pitchFamily="49" charset="0"/>
               </a:rPr>
-              <a:t>B. Finding the minimum element</a:t>
-            </a:r>
-          </a:p>
-          <a:p>
+              <a:t>B. Finding the minimum element </a:t>
+            </a:r>
             <a:r>
               <a:rPr lang="en-US" sz="1600" dirty="0">
                 <a:solidFill>
+                  <a:srgbClr val="EB6E19"/>
+                </a:solidFill>
+                <a:latin typeface="Consolas" panose="020B0609020204030204" pitchFamily="49" charset="0"/>
+              </a:rPr>
+              <a:t>: O(1)</a:t>
+            </a:r>
+          </a:p>
+          <a:p>
+            <a:r>
+              <a:rPr lang="en-US" sz="1600" dirty="0">
+                <a:solidFill>
                   <a:srgbClr val="0081E2"/>
                 </a:solidFill>
                 <a:latin typeface="Consolas" panose="020B0609020204030204" pitchFamily="49" charset="0"/>
               </a:rPr>
-              <a:t>C. Delete the largest element from list</a:t>
-            </a:r>
-          </a:p>
-          <a:p>
+              <a:t>C. Delete the largest element from list </a:t>
+            </a:r>
             <a:r>
               <a:rPr lang="en-US" sz="1600" dirty="0">
                 <a:solidFill>
+                  <a:srgbClr val="EB6E19"/>
+                </a:solidFill>
+                <a:latin typeface="Consolas" panose="020B0609020204030204" pitchFamily="49" charset="0"/>
+              </a:rPr>
+              <a:t>: O(n)</a:t>
+            </a:r>
+          </a:p>
+          <a:p>
+            <a:r>
+              <a:rPr lang="en-US" sz="1600" dirty="0">
+                <a:solidFill>
                   <a:srgbClr val="0081E2"/>
                 </a:solidFill>
                 <a:latin typeface="Consolas" panose="020B0609020204030204" pitchFamily="49" charset="0"/>
               </a:rPr>
-              <a:t>D. Finding the largest element</a:t>
-            </a:r>
-          </a:p>
-          <a:p>
+              <a:t>D. Finding the largest element </a:t>
+            </a:r>
             <a:r>
               <a:rPr lang="en-US" sz="1600" dirty="0">
                 <a:solidFill>
+                  <a:srgbClr val="EB6E19"/>
+                </a:solidFill>
+                <a:latin typeface="Consolas" panose="020B0609020204030204" pitchFamily="49" charset="0"/>
+              </a:rPr>
+              <a:t>: O(n)</a:t>
+            </a:r>
+          </a:p>
+          <a:p>
+            <a:r>
+              <a:rPr lang="en-US" sz="1600" dirty="0">
+                <a:solidFill>
                   <a:srgbClr val="0081E2"/>
                 </a:solidFill>
                 <a:latin typeface="Consolas" panose="020B0609020204030204" pitchFamily="49" charset="0"/>
               </a:rPr>
-              <a:t>E. Finding a random element, n</a:t>
-            </a:r>
-          </a:p>
-          <a:p>
+              <a:t>E. Finding a random element, n </a:t>
+            </a:r>
             <a:r>
               <a:rPr lang="en-US" sz="1600" dirty="0">
                 <a:solidFill>
+                  <a:srgbClr val="EB6E19"/>
+                </a:solidFill>
+                <a:latin typeface="Consolas" panose="020B0609020204030204" pitchFamily="49" charset="0"/>
+              </a:rPr>
+              <a:t>: O(n)</a:t>
+            </a:r>
+          </a:p>
+          <a:p>
+            <a:r>
+              <a:rPr lang="en-US" sz="1600" dirty="0">
+                <a:solidFill>
                   <a:srgbClr val="0081E2"/>
                 </a:solidFill>
                 <a:latin typeface="Consolas" panose="020B0609020204030204" pitchFamily="49" charset="0"/>
               </a:rPr>
-              <a:t>F. Deleting the minimum element in the list</a:t>
-            </a:r>
+              <a:t>F. Deleting the minimum element in the list </a:t>
+            </a:r>
+            <a:r>
+              <a:rPr lang="en-US" sz="1600" dirty="0">
+                <a:solidFill>
+                  <a:srgbClr val="EB6E19"/>
+                </a:solidFill>
+                <a:latin typeface="Consolas" panose="020B0609020204030204" pitchFamily="49" charset="0"/>
+              </a:rPr>
+              <a:t>: O(1)</a:t>
+            </a:r>
+          </a:p>
+          <a:p>
+            <a:endParaRPr lang="en-US" sz="1600" dirty="0">
+              <a:solidFill>
+                <a:srgbClr val="EB6E19"/>
+              </a:solidFill>
+              <a:latin typeface="Consolas" panose="020B0609020204030204" pitchFamily="49" charset="0"/>
+            </a:endParaRPr>
           </a:p>
           <a:p>
             <a:endParaRPr lang="en-US" sz="1600" dirty="0">
@@ -15996,7 +16080,7 @@
     </p:spTree>
     <p:extLst>
       <p:ext uri="{BB962C8B-B14F-4D97-AF65-F5344CB8AC3E}">
-        <p14:creationId xmlns:p14="http://schemas.microsoft.com/office/powerpoint/2010/main" val="1671614239"/>
+        <p14:creationId xmlns:p14="http://schemas.microsoft.com/office/powerpoint/2010/main" val="3075079372"/>
       </p:ext>
     </p:extLst>
   </p:cSld>
@@ -16061,7 +16145,7 @@
                 </a:solidFill>
                 <a:latin typeface="Gotham Bold" pitchFamily="50" charset="0"/>
               </a:rPr>
-              <a:t>Mini Review – Linked Lists</a:t>
+              <a:t>Mini Review – Stacks</a:t>
             </a:r>
           </a:p>
         </p:txBody>
@@ -16083,7 +16167,7 @@
         <p:spPr>
           <a:xfrm>
             <a:off x="940881" y="1690688"/>
-            <a:ext cx="9790759" cy="5057971"/>
+            <a:ext cx="10978592" cy="5057971"/>
           </a:xfrm>
           <a:prstGeom prst="rect">
             <a:avLst/>
@@ -16196,46 +16280,16 @@
                 </a:solidFill>
                 <a:latin typeface="Consolas" panose="020B0609020204030204" pitchFamily="49" charset="0"/>
               </a:rPr>
-              <a:t>Consider a class List that implements an </a:t>
-            </a:r>
-            <a:r>
+              <a:t>Postfix Evaluation “2 3 1 * + 9 -“. We scan all elements one by one.</a:t>
+            </a:r>
+            <a:br>
               <a:rPr lang="en-US" sz="1600" dirty="0">
                 <a:solidFill>
-                  <a:srgbClr val="EB6E19"/>
-                </a:solidFill>
-                <a:latin typeface="Consolas" panose="020B0609020204030204" pitchFamily="49" charset="0"/>
-              </a:rPr>
-              <a:t>ordered</a:t>
-            </a:r>
-            <a:r>
-              <a:rPr lang="en-US" sz="1600" dirty="0">
-                <a:solidFill>
                   <a:srgbClr val="0081E2"/>
                 </a:solidFill>
                 <a:latin typeface="Consolas" panose="020B0609020204030204" pitchFamily="49" charset="0"/>
               </a:rPr>
-              <a:t> list backed by a singly linked list with a head pointer. The invariant “</a:t>
-            </a:r>
-            <a:r>
-              <a:rPr lang="en-US" sz="1600" dirty="0">
-                <a:solidFill>
-                  <a:srgbClr val="EB6E19"/>
-                </a:solidFill>
-                <a:latin typeface="Consolas" panose="020B0609020204030204" pitchFamily="49" charset="0"/>
-              </a:rPr>
-              <a:t>ordered</a:t>
-            </a:r>
-            <a:r>
-              <a:rPr lang="en-US" sz="1600" dirty="0">
-                <a:solidFill>
-                  <a:srgbClr val="0081E2"/>
-                </a:solidFill>
-                <a:latin typeface="Consolas" panose="020B0609020204030204" pitchFamily="49" charset="0"/>
-              </a:rPr>
-              <a:t>” is maintained always. Given that representation, what is the worst-case time complexity of the following operations? Assume the list is sorted in ascending order.</a:t>
-            </a:r>
-          </a:p>
-          <a:p>
+            </a:br>
             <a:endParaRPr lang="en-US" sz="1600" dirty="0">
               <a:solidFill>
                 <a:srgbClr val="0081E2"/>
@@ -16243,148 +16297,12 @@
               <a:latin typeface="Consolas" panose="020B0609020204030204" pitchFamily="49" charset="0"/>
             </a:endParaRPr>
           </a:p>
-          <a:p>
-            <a:r>
-              <a:rPr lang="en-US" sz="1600" dirty="0">
-                <a:solidFill>
-                  <a:srgbClr val="0081E2"/>
-                </a:solidFill>
-                <a:latin typeface="Consolas" panose="020B0609020204030204" pitchFamily="49" charset="0"/>
-              </a:rPr>
-              <a:t>A. Insert an item </a:t>
-            </a:r>
-            <a:r>
-              <a:rPr lang="en-US" sz="1600" dirty="0">
-                <a:solidFill>
-                  <a:srgbClr val="EB6E19"/>
-                </a:solidFill>
-                <a:latin typeface="Consolas" panose="020B0609020204030204" pitchFamily="49" charset="0"/>
-              </a:rPr>
-              <a:t>: O(n)</a:t>
-            </a:r>
-          </a:p>
-          <a:p>
-            <a:r>
-              <a:rPr lang="en-US" sz="1600" dirty="0">
-                <a:solidFill>
-                  <a:srgbClr val="0081E2"/>
-                </a:solidFill>
-                <a:latin typeface="Consolas" panose="020B0609020204030204" pitchFamily="49" charset="0"/>
-              </a:rPr>
-              <a:t>B. Finding the minimum element </a:t>
-            </a:r>
-            <a:r>
-              <a:rPr lang="en-US" sz="1600" dirty="0">
-                <a:solidFill>
-                  <a:srgbClr val="EB6E19"/>
-                </a:solidFill>
-                <a:latin typeface="Consolas" panose="020B0609020204030204" pitchFamily="49" charset="0"/>
-              </a:rPr>
-              <a:t>: O(1)</a:t>
-            </a:r>
-          </a:p>
-          <a:p>
-            <a:r>
-              <a:rPr lang="en-US" sz="1600" dirty="0">
-                <a:solidFill>
-                  <a:srgbClr val="0081E2"/>
-                </a:solidFill>
-                <a:latin typeface="Consolas" panose="020B0609020204030204" pitchFamily="49" charset="0"/>
-              </a:rPr>
-              <a:t>C. Delete the largest element from list </a:t>
-            </a:r>
-            <a:r>
-              <a:rPr lang="en-US" sz="1600" dirty="0">
-                <a:solidFill>
-                  <a:srgbClr val="EB6E19"/>
-                </a:solidFill>
-                <a:latin typeface="Consolas" panose="020B0609020204030204" pitchFamily="49" charset="0"/>
-              </a:rPr>
-              <a:t>: O(n)</a:t>
-            </a:r>
-          </a:p>
-          <a:p>
-            <a:r>
-              <a:rPr lang="en-US" sz="1600" dirty="0">
-                <a:solidFill>
-                  <a:srgbClr val="0081E2"/>
-                </a:solidFill>
-                <a:latin typeface="Consolas" panose="020B0609020204030204" pitchFamily="49" charset="0"/>
-              </a:rPr>
-              <a:t>D. Finding the largest element </a:t>
-            </a:r>
-            <a:r>
-              <a:rPr lang="en-US" sz="1600" dirty="0">
-                <a:solidFill>
-                  <a:srgbClr val="EB6E19"/>
-                </a:solidFill>
-                <a:latin typeface="Consolas" panose="020B0609020204030204" pitchFamily="49" charset="0"/>
-              </a:rPr>
-              <a:t>: O(n)</a:t>
-            </a:r>
-          </a:p>
-          <a:p>
-            <a:r>
-              <a:rPr lang="en-US" sz="1600" dirty="0">
-                <a:solidFill>
-                  <a:srgbClr val="0081E2"/>
-                </a:solidFill>
-                <a:latin typeface="Consolas" panose="020B0609020204030204" pitchFamily="49" charset="0"/>
-              </a:rPr>
-              <a:t>E. Finding a random element, n </a:t>
-            </a:r>
-            <a:r>
-              <a:rPr lang="en-US" sz="1600" dirty="0">
-                <a:solidFill>
-                  <a:srgbClr val="EB6E19"/>
-                </a:solidFill>
-                <a:latin typeface="Consolas" panose="020B0609020204030204" pitchFamily="49" charset="0"/>
-              </a:rPr>
-              <a:t>: O(n)</a:t>
-            </a:r>
-          </a:p>
-          <a:p>
-            <a:r>
-              <a:rPr lang="en-US" sz="1600" dirty="0">
-                <a:solidFill>
-                  <a:srgbClr val="0081E2"/>
-                </a:solidFill>
-                <a:latin typeface="Consolas" panose="020B0609020204030204" pitchFamily="49" charset="0"/>
-              </a:rPr>
-              <a:t>F. Deleting the minimum element in the list </a:t>
-            </a:r>
-            <a:r>
-              <a:rPr lang="en-US" sz="1600" dirty="0">
-                <a:solidFill>
-                  <a:srgbClr val="EB6E19"/>
-                </a:solidFill>
-                <a:latin typeface="Consolas" panose="020B0609020204030204" pitchFamily="49" charset="0"/>
-              </a:rPr>
-              <a:t>: O(1)</a:t>
-            </a:r>
-          </a:p>
-          <a:p>
-            <a:endParaRPr lang="en-US" sz="1600" dirty="0">
-              <a:solidFill>
-                <a:srgbClr val="EB6E19"/>
-              </a:solidFill>
-              <a:latin typeface="Consolas" panose="020B0609020204030204" pitchFamily="49" charset="0"/>
-            </a:endParaRPr>
-          </a:p>
-          <a:p>
-            <a:endParaRPr lang="en-US" sz="1600" dirty="0">
-              <a:solidFill>
-                <a:srgbClr val="0081E2"/>
-              </a:solidFill>
-              <a:latin typeface="Consolas" panose="020B0609020204030204" pitchFamily="49" charset="0"/>
-            </a:endParaRPr>
-          </a:p>
         </p:txBody>
       </p:sp>
     </p:spTree>
     <p:extLst>
       <p:ext uri="{BB962C8B-B14F-4D97-AF65-F5344CB8AC3E}">
-        <p14:creationId xmlns:p14="http://schemas.microsoft.com/office/powerpoint/2010/main" val="3075079372"/>
+        <p14:creationId xmlns:p14="http://schemas.microsoft.com/office/powerpoint/2010/main" val="2199279301"/>
       </p:ext>
     </p:extLst>
   </p:cSld>
@@ -16586,6 +16504,8 @@
               </a:rPr>
               <a:t>Postfix Evaluation “2 3 1 * + 9 -“. We scan all elements one by one.</a:t>
             </a:r>
+          </a:p>
+          <a:p>
             <a:br>
               <a:rPr lang="en-US" sz="1600" dirty="0">
                 <a:solidFill>
@@ -16594,19 +16514,141 @@
                 <a:latin typeface="Consolas" panose="020B0609020204030204" pitchFamily="49" charset="0"/>
               </a:rPr>
             </a:br>
-            <a:endParaRPr lang="en-US" sz="1600" dirty="0">
-              <a:solidFill>
-                <a:srgbClr val="0081E2"/>
-              </a:solidFill>
-              <a:latin typeface="Consolas" panose="020B0609020204030204" pitchFamily="49" charset="0"/>
-            </a:endParaRPr>
+            <a:r>
+              <a:rPr lang="en-US" sz="1600" dirty="0">
+                <a:solidFill>
+                  <a:srgbClr val="EB6E19"/>
+                </a:solidFill>
+                <a:latin typeface="Consolas" panose="020B0609020204030204" pitchFamily="49" charset="0"/>
+              </a:rPr>
+              <a:t>1) Scan ‘2’, it’s a number, so push it to stack. Stack contains ‘2’</a:t>
+            </a:r>
+            <a:br>
+              <a:rPr lang="en-US" sz="1600" dirty="0">
+                <a:solidFill>
+                  <a:srgbClr val="EB6E19"/>
+                </a:solidFill>
+                <a:latin typeface="Consolas" panose="020B0609020204030204" pitchFamily="49" charset="0"/>
+              </a:rPr>
+            </a:br>
+            <a:r>
+              <a:rPr lang="en-US" sz="1600" dirty="0">
+                <a:solidFill>
+                  <a:srgbClr val="EB6E19"/>
+                </a:solidFill>
+                <a:latin typeface="Consolas" panose="020B0609020204030204" pitchFamily="49" charset="0"/>
+              </a:rPr>
+              <a:t>2) Scan ‘3’, again a number, push it to stack, stack now contains ‘2 3’ (from bottom to top)</a:t>
+            </a:r>
+            <a:br>
+              <a:rPr lang="en-US" sz="1600" dirty="0">
+                <a:solidFill>
+                  <a:srgbClr val="EB6E19"/>
+                </a:solidFill>
+                <a:latin typeface="Consolas" panose="020B0609020204030204" pitchFamily="49" charset="0"/>
+              </a:rPr>
+            </a:br>
+            <a:r>
+              <a:rPr lang="en-US" sz="1600" dirty="0">
+                <a:solidFill>
+                  <a:srgbClr val="EB6E19"/>
+                </a:solidFill>
+                <a:latin typeface="Consolas" panose="020B0609020204030204" pitchFamily="49" charset="0"/>
+              </a:rPr>
+              <a:t>3) Scan ‘1’, again a number, push it to stack, stack now contains ‘2 3 1’</a:t>
+            </a:r>
+            <a:br>
+              <a:rPr lang="en-US" sz="1600" dirty="0">
+                <a:solidFill>
+                  <a:srgbClr val="EB6E19"/>
+                </a:solidFill>
+                <a:latin typeface="Consolas" panose="020B0609020204030204" pitchFamily="49" charset="0"/>
+              </a:rPr>
+            </a:br>
+            <a:r>
+              <a:rPr lang="en-US" sz="1600" dirty="0">
+                <a:solidFill>
+                  <a:srgbClr val="EB6E19"/>
+                </a:solidFill>
+                <a:latin typeface="Consolas" panose="020B0609020204030204" pitchFamily="49" charset="0"/>
+              </a:rPr>
+              <a:t>4) Scan ‘*’, it’s an operator, pop two operands from stack, apply the * operator on operands, we get 3*1 which results in 3. We push the result ‘3’ to stack. Stack now becomes ‘2 3’.</a:t>
+            </a:r>
+            <a:br>
+              <a:rPr lang="en-US" sz="1600" dirty="0">
+                <a:solidFill>
+                  <a:srgbClr val="EB6E19"/>
+                </a:solidFill>
+                <a:latin typeface="Consolas" panose="020B0609020204030204" pitchFamily="49" charset="0"/>
+              </a:rPr>
+            </a:br>
+            <a:r>
+              <a:rPr lang="en-US" sz="1600" dirty="0">
+                <a:solidFill>
+                  <a:srgbClr val="EB6E19"/>
+                </a:solidFill>
+                <a:latin typeface="Consolas" panose="020B0609020204030204" pitchFamily="49" charset="0"/>
+              </a:rPr>
+              <a:t>5) Scan ‘+’, it’s an operator, pop two operands from stack, apply the + operator on operands, we get 3 + 2 which results in 5. We push the result ‘5’ to stack. Stack now becomes ‘5’.</a:t>
+            </a:r>
+            <a:br>
+              <a:rPr lang="en-US" sz="1600" dirty="0">
+                <a:solidFill>
+                  <a:srgbClr val="EB6E19"/>
+                </a:solidFill>
+                <a:latin typeface="Consolas" panose="020B0609020204030204" pitchFamily="49" charset="0"/>
+              </a:rPr>
+            </a:br>
+            <a:r>
+              <a:rPr lang="en-US" sz="1600" dirty="0">
+                <a:solidFill>
+                  <a:srgbClr val="EB6E19"/>
+                </a:solidFill>
+                <a:latin typeface="Consolas" panose="020B0609020204030204" pitchFamily="49" charset="0"/>
+              </a:rPr>
+              <a:t>6) Scan ‘9’, it’s a number, we push it to the stack. Stack now becomes ‘5 9’.</a:t>
+            </a:r>
+            <a:br>
+              <a:rPr lang="en-US" sz="1600" dirty="0">
+                <a:solidFill>
+                  <a:srgbClr val="EB6E19"/>
+                </a:solidFill>
+                <a:latin typeface="Consolas" panose="020B0609020204030204" pitchFamily="49" charset="0"/>
+              </a:rPr>
+            </a:br>
+            <a:r>
+              <a:rPr lang="en-US" sz="1600" dirty="0">
+                <a:solidFill>
+                  <a:srgbClr val="EB6E19"/>
+                </a:solidFill>
+                <a:latin typeface="Consolas" panose="020B0609020204030204" pitchFamily="49" charset="0"/>
+              </a:rPr>
+              <a:t>7) Scan ‘-‘, it’s an operator, pop two operands from stack, apply the – operator on operands, we get 5 – 9 which results in -4. We push the result ‘-4’ to stack. Stack now becomes ‘-4’.</a:t>
+            </a:r>
+            <a:br>
+              <a:rPr lang="en-US" sz="1600" dirty="0">
+                <a:solidFill>
+                  <a:srgbClr val="EB6E19"/>
+                </a:solidFill>
+                <a:latin typeface="Consolas" panose="020B0609020204030204" pitchFamily="49" charset="0"/>
+              </a:rPr>
+            </a:br>
+            <a:r>
+              <a:rPr lang="en-US" sz="1600" dirty="0">
+                <a:solidFill>
+                  <a:srgbClr val="EB6E19"/>
+                </a:solidFill>
+                <a:latin typeface="Consolas" panose="020B0609020204030204" pitchFamily="49" charset="0"/>
+              </a:rPr>
+              <a:t>8) There are no more elements to scan, we return the top element from stack (which is the only element left in stack).</a:t>
+            </a:r>
           </a:p>
         </p:txBody>
       </p:sp>
     </p:spTree>
     <p:extLst>
       <p:ext uri="{BB962C8B-B14F-4D97-AF65-F5344CB8AC3E}">
-        <p14:creationId xmlns:p14="http://schemas.microsoft.com/office/powerpoint/2010/main" val="2199279301"/>
+        <p14:creationId xmlns:p14="http://schemas.microsoft.com/office/powerpoint/2010/main" val="3921623338"/>
       </p:ext>
     </p:extLst>
   </p:cSld>
@@ -16671,7 +16713,7 @@
                 </a:solidFill>
                 <a:latin typeface="Gotham Bold" pitchFamily="50" charset="0"/>
               </a:rPr>
-              <a:t>Mini Review – Stacks</a:t>
+              <a:t>Output Prediction / Coding Questions</a:t>
             </a:r>
           </a:p>
         </p:txBody>
@@ -16805,146 +16847,72 @@
                   <a:srgbClr val="0081E2"/>
                 </a:solidFill>
                 <a:latin typeface="Consolas" panose="020B0609020204030204" pitchFamily="49" charset="0"/>
-              </a:rPr>
-              <a:t>Postfix Evaluation “2 3 1 * + 9 -“. We scan all elements one by one.</a:t>
-            </a:r>
-          </a:p>
-          <a:p>
-            <a:br>
+                <a:hlinkClick r:id="rId3">
+                  <a:extLst>
+                    <a:ext uri="{A12FA001-AC4F-418D-AE19-62706E023703}">
+                      <ahyp:hlinkClr xmlns:ahyp="http://schemas.microsoft.com/office/drawing/2018/hyperlinkcolor" val="tx"/>
+                    </a:ext>
+                  </a:extLst>
+                </a:hlinkClick>
+              </a:rPr>
+              <a:t>https://onlinegdb.com/BJ4hyD7vP</a:t>
+            </a:r>
+            <a:endParaRPr lang="en-US" sz="1600" dirty="0">
+              <a:solidFill>
+                <a:srgbClr val="0081E2"/>
+              </a:solidFill>
+              <a:latin typeface="Consolas" panose="020B0609020204030204" pitchFamily="49" charset="0"/>
+            </a:endParaRPr>
+          </a:p>
+          <a:p>
+            <a:r>
               <a:rPr lang="en-US" sz="1600" dirty="0">
                 <a:solidFill>
                   <a:srgbClr val="0081E2"/>
                 </a:solidFill>
                 <a:latin typeface="Consolas" panose="020B0609020204030204" pitchFamily="49" charset="0"/>
-              </a:rPr>
-            </a:br>
+                <a:hlinkClick r:id="rId4">
+                  <a:extLst>
+                    <a:ext uri="{A12FA001-AC4F-418D-AE19-62706E023703}">
+                      <ahyp:hlinkClr xmlns:ahyp="http://schemas.microsoft.com/office/drawing/2018/hyperlinkcolor" val="tx"/>
+                    </a:ext>
+                  </a:extLst>
+                </a:hlinkClick>
+              </a:rPr>
+              <a:t>https://onlinegdb.com/BJ6gewQDP</a:t>
+            </a:r>
+            <a:endParaRPr lang="en-US" sz="1600" dirty="0">
+              <a:solidFill>
+                <a:srgbClr val="0081E2"/>
+              </a:solidFill>
+              <a:latin typeface="Consolas" panose="020B0609020204030204" pitchFamily="49" charset="0"/>
+            </a:endParaRPr>
+          </a:p>
+          <a:p>
             <a:r>
               <a:rPr lang="en-US" sz="1600" dirty="0">
                 <a:solidFill>
-                  <a:srgbClr val="EB6E19"/>
-                </a:solidFill>
-                <a:latin typeface="Consolas" panose="020B0609020204030204" pitchFamily="49" charset="0"/>
-              </a:rPr>
-              <a:t>1) Scan ‘2’, it’s a number, so push it to stack. Stack contains ‘2’</a:t>
-            </a:r>
-            <a:br>
+                  <a:srgbClr val="0081E2"/>
+                </a:solidFill>
+                <a:latin typeface="Consolas" panose="020B0609020204030204" pitchFamily="49" charset="0"/>
+                <a:hlinkClick r:id="rId5">
+                  <a:extLst>
+                    <a:ext uri="{A12FA001-AC4F-418D-AE19-62706E023703}">
+                      <ahyp:hlinkClr xmlns:ahyp="http://schemas.microsoft.com/office/drawing/2018/hyperlinkcolor" val="tx"/>
+                    </a:ext>
+                  </a:extLst>
+                </a:hlinkClick>
+              </a:rPr>
+              <a:t>https://onlinegdb.com/OefiHIntV</a:t>
+            </a:r>
+            <a:r>
               <a:rPr lang="en-US" sz="1600" dirty="0">
                 <a:solidFill>
-                  <a:srgbClr val="EB6E19"/>
-                </a:solidFill>
-                <a:latin typeface="Consolas" panose="020B0609020204030204" pitchFamily="49" charset="0"/>
-              </a:rPr>
-            </a:br>
-            <a:r>
-              <a:rPr lang="en-US" sz="1600" dirty="0">
-                <a:solidFill>
-                  <a:srgbClr val="EB6E19"/>
-                </a:solidFill>
-                <a:latin typeface="Consolas" panose="020B0609020204030204" pitchFamily="49" charset="0"/>
-              </a:rPr>
-              <a:t>2) Scan ‘3’, again a number, push it to stack, stack now contains ‘2 3’ (from bottom to top)</a:t>
-            </a:r>
-            <a:br>
-              <a:rPr lang="en-US" sz="1600" dirty="0">
-                <a:solidFill>
-                  <a:srgbClr val="EB6E19"/>
-                </a:solidFill>
-                <a:latin typeface="Consolas" panose="020B0609020204030204" pitchFamily="49" charset="0"/>
-              </a:rPr>
-            </a:br>
-            <a:r>
-              <a:rPr lang="en-US" sz="1600" dirty="0">
-                <a:solidFill>
-                  <a:srgbClr val="EB6E19"/>
-                </a:solidFill>
-                <a:latin typeface="Consolas" panose="020B0609020204030204" pitchFamily="49" charset="0"/>
-              </a:rPr>
-              <a:t>3) Scan ‘1’, again a number, push it to stack, stack now contains ‘2 3 1’</a:t>
-            </a:r>
-            <a:br>
-              <a:rPr lang="en-US" sz="1600" dirty="0">
-                <a:solidFill>
-                  <a:srgbClr val="EB6E19"/>
-                </a:solidFill>
-                <a:latin typeface="Consolas" panose="020B0609020204030204" pitchFamily="49" charset="0"/>
-              </a:rPr>
-            </a:br>
-            <a:r>
-              <a:rPr lang="en-US" sz="1600" dirty="0">
-                <a:solidFill>
-                  <a:srgbClr val="EB6E19"/>
-                </a:solidFill>
-                <a:latin typeface="Consolas" panose="020B0609020204030204" pitchFamily="49" charset="0"/>
-              </a:rPr>
-              <a:t>4) Scan ‘*’, it’s an operator, pop two operands from stack, apply the * operator on operands, we get 3*1 which results in 3. We push the result ‘3’ to stack. Stack now becomes ‘2 3’.</a:t>
-            </a:r>
-            <a:br>
-              <a:rPr lang="en-US" sz="1600" dirty="0">
-                <a:solidFill>
-                  <a:srgbClr val="EB6E19"/>
-                </a:solidFill>
-                <a:latin typeface="Consolas" panose="020B0609020204030204" pitchFamily="49" charset="0"/>
-              </a:rPr>
-            </a:br>
-            <a:r>
-              <a:rPr lang="en-US" sz="1600" dirty="0">
-                <a:solidFill>
-                  <a:srgbClr val="EB6E19"/>
-                </a:solidFill>
-                <a:latin typeface="Consolas" panose="020B0609020204030204" pitchFamily="49" charset="0"/>
-              </a:rPr>
-              <a:t>5) Scan ‘+’, it’s an operator, pop two operands from stack, apply the + operator on operands, we get 3 + 2 which results in 5. We push the result ‘5’ to stack. Stack now becomes ‘5’.</a:t>
-            </a:r>
-            <a:br>
-              <a:rPr lang="en-US" sz="1600" dirty="0">
-                <a:solidFill>
-                  <a:srgbClr val="EB6E19"/>
-                </a:solidFill>
-                <a:latin typeface="Consolas" panose="020B0609020204030204" pitchFamily="49" charset="0"/>
-              </a:rPr>
-            </a:br>
-            <a:r>
-              <a:rPr lang="en-US" sz="1600" dirty="0">
-                <a:solidFill>
-                  <a:srgbClr val="EB6E19"/>
-                </a:solidFill>
-                <a:latin typeface="Consolas" panose="020B0609020204030204" pitchFamily="49" charset="0"/>
-              </a:rPr>
-              <a:t>6) Scan ‘9’, it’s a number, we push it to the stack. Stack now becomes ‘5 9’.</a:t>
-            </a:r>
-            <a:br>
-              <a:rPr lang="en-US" sz="1600" dirty="0">
-                <a:solidFill>
-                  <a:srgbClr val="EB6E19"/>
-                </a:solidFill>
-                <a:latin typeface="Consolas" panose="020B0609020204030204" pitchFamily="49" charset="0"/>
-              </a:rPr>
-            </a:br>
-            <a:r>
-              <a:rPr lang="en-US" sz="1600" dirty="0">
-                <a:solidFill>
-                  <a:srgbClr val="EB6E19"/>
-                </a:solidFill>
-                <a:latin typeface="Consolas" panose="020B0609020204030204" pitchFamily="49" charset="0"/>
-              </a:rPr>
-              <a:t>7) Scan ‘-‘, it’s an operator, pop two operands from stack, apply the – operator on operands, we get 5 – 9 which results in -4. We push the result ‘-4’ to stack. Stack now becomes ‘-4’.</a:t>
-            </a:r>
-            <a:br>
-              <a:rPr lang="en-US" sz="1600" dirty="0">
-                <a:solidFill>
-                  <a:srgbClr val="EB6E19"/>
-                </a:solidFill>
-                <a:latin typeface="Consolas" panose="020B0609020204030204" pitchFamily="49" charset="0"/>
-              </a:rPr>
-            </a:br>
-            <a:r>
-              <a:rPr lang="en-US" sz="1600" dirty="0">
-                <a:solidFill>
-                  <a:srgbClr val="EB6E19"/>
-                </a:solidFill>
-                <a:latin typeface="Consolas" panose="020B0609020204030204" pitchFamily="49" charset="0"/>
-              </a:rPr>
-              <a:t>8) There are no more elements to scan, we return the top element from stack (which is the only element left in stack).</a:t>
+                  <a:srgbClr val="0081E2"/>
+                </a:solidFill>
+                <a:latin typeface="Consolas" panose="020B0609020204030204" pitchFamily="49" charset="0"/>
+              </a:rPr>
+              <a:t>  </a:t>
             </a:r>
           </a:p>
         </p:txBody>
@@ -16952,7 +16920,7 @@
     </p:spTree>
     <p:extLst>
       <p:ext uri="{BB962C8B-B14F-4D97-AF65-F5344CB8AC3E}">
-        <p14:creationId xmlns:p14="http://schemas.microsoft.com/office/powerpoint/2010/main" val="3921623338"/>
+        <p14:creationId xmlns:p14="http://schemas.microsoft.com/office/powerpoint/2010/main" val="3092846301"/>
       </p:ext>
     </p:extLst>
   </p:cSld>
@@ -17017,278 +16985,6 @@
                 </a:solidFill>
                 <a:latin typeface="Gotham Bold" pitchFamily="50" charset="0"/>
               </a:rPr>
-              <a:t>Output Prediction / Coding Questions</a:t>
-            </a:r>
-          </a:p>
-        </p:txBody>
-      </p:sp>
-      <p:sp>
-        <p:nvSpPr>
-          <p:cNvPr id="5" name="Content Placeholder 1">
-            <a:extLst>
-              <a:ext uri="{FF2B5EF4-FFF2-40B4-BE49-F238E27FC236}">
-                <a16:creationId xmlns:a16="http://schemas.microsoft.com/office/drawing/2014/main" id="{9069B1C4-5084-4E0D-9FA0-9C8B794FA1FE}"/>
-              </a:ext>
-            </a:extLst>
-          </p:cNvPr>
-          <p:cNvSpPr txBox="1">
-            <a:spLocks/>
-          </p:cNvSpPr>
-          <p:nvPr/>
-        </p:nvSpPr>
-        <p:spPr>
-          <a:xfrm>
-            <a:off x="940881" y="1690688"/>
-            <a:ext cx="10978592" cy="5057971"/>
-          </a:xfrm>
-          <a:prstGeom prst="rect">
-            <a:avLst/>
-          </a:prstGeom>
-        </p:spPr>
-        <p:txBody>
-          <a:bodyPr vert="horz" lIns="91440" tIns="45720" rIns="91440" bIns="45720" rtlCol="0" anchor="t"/>
-          <a:lstStyle>
-            <a:defPPr>
-              <a:defRPr lang="en-US"/>
-            </a:defPPr>
-            <a:lvl1pPr marL="0" algn="l" defTabSz="914400" rtl="0" eaLnBrk="1" latinLnBrk="0" hangingPunct="1">
-              <a:defRPr sz="1200" kern="1200">
-                <a:solidFill>
-                  <a:schemeClr val="tx1">
-                    <a:tint val="75000"/>
-                  </a:schemeClr>
-                </a:solidFill>
-                <a:latin typeface="+mn-lt"/>
-                <a:ea typeface="+mn-ea"/>
-                <a:cs typeface="+mn-cs"/>
-              </a:defRPr>
-            </a:lvl1pPr>
-            <a:lvl2pPr marL="457200" algn="l" defTabSz="914400" rtl="0" eaLnBrk="1" latinLnBrk="0" hangingPunct="1">
-              <a:defRPr sz="1800" kern="1200">
-                <a:solidFill>
-                  <a:schemeClr val="tx1"/>
-                </a:solidFill>
-                <a:latin typeface="+mn-lt"/>
-                <a:ea typeface="+mn-ea"/>
-                <a:cs typeface="+mn-cs"/>
-              </a:defRPr>
-            </a:lvl2pPr>
-            <a:lvl3pPr marL="914400" algn="l" defTabSz="914400" rtl="0" eaLnBrk="1" latinLnBrk="0" hangingPunct="1">
-              <a:defRPr sz="1800" kern="1200">
-                <a:solidFill>
-                  <a:schemeClr val="tx1"/>
-                </a:solidFill>
-                <a:latin typeface="+mn-lt"/>
-                <a:ea typeface="+mn-ea"/>
-                <a:cs typeface="+mn-cs"/>
-              </a:defRPr>
-            </a:lvl3pPr>
-            <a:lvl4pPr marL="1371600" algn="l" defTabSz="914400" rtl="0" eaLnBrk="1" latinLnBrk="0" hangingPunct="1">
-              <a:defRPr sz="1800" kern="1200">
-                <a:solidFill>
-                  <a:schemeClr val="tx1"/>
-                </a:solidFill>
-                <a:latin typeface="+mn-lt"/>
-                <a:ea typeface="+mn-ea"/>
-                <a:cs typeface="+mn-cs"/>
-              </a:defRPr>
-            </a:lvl4pPr>
-            <a:lvl5pPr marL="1828800" algn="l" defTabSz="914400" rtl="0" eaLnBrk="1" latinLnBrk="0" hangingPunct="1">
-              <a:defRPr sz="1800" kern="1200">
-                <a:solidFill>
-                  <a:schemeClr val="tx1"/>
-                </a:solidFill>
-                <a:latin typeface="+mn-lt"/>
-                <a:ea typeface="+mn-ea"/>
-                <a:cs typeface="+mn-cs"/>
-              </a:defRPr>
-            </a:lvl5pPr>
-            <a:lvl6pPr marL="2286000" algn="l" defTabSz="914400" rtl="0" eaLnBrk="1" latinLnBrk="0" hangingPunct="1">
-              <a:defRPr sz="1800" kern="1200">
-                <a:solidFill>
-                  <a:schemeClr val="tx1"/>
-                </a:solidFill>
-                <a:latin typeface="+mn-lt"/>
-                <a:ea typeface="+mn-ea"/>
-                <a:cs typeface="+mn-cs"/>
-              </a:defRPr>
-            </a:lvl6pPr>
-            <a:lvl7pPr marL="2743200" algn="l" defTabSz="914400" rtl="0" eaLnBrk="1" latinLnBrk="0" hangingPunct="1">
-              <a:defRPr sz="1800" kern="1200">
-                <a:solidFill>
-                  <a:schemeClr val="tx1"/>
-                </a:solidFill>
-                <a:latin typeface="+mn-lt"/>
-                <a:ea typeface="+mn-ea"/>
-                <a:cs typeface="+mn-cs"/>
-              </a:defRPr>
-            </a:lvl7pPr>
-            <a:lvl8pPr marL="3200400" algn="l" defTabSz="914400" rtl="0" eaLnBrk="1" latinLnBrk="0" hangingPunct="1">
-              <a:defRPr sz="1800" kern="1200">
-                <a:solidFill>
-                  <a:schemeClr val="tx1"/>
-                </a:solidFill>
-                <a:latin typeface="+mn-lt"/>
-                <a:ea typeface="+mn-ea"/>
-                <a:cs typeface="+mn-cs"/>
-              </a:defRPr>
-            </a:lvl8pPr>
-            <a:lvl9pPr marL="3657600" algn="l" defTabSz="914400" rtl="0" eaLnBrk="1" latinLnBrk="0" hangingPunct="1">
-              <a:defRPr sz="1800" kern="1200">
-                <a:solidFill>
-                  <a:schemeClr val="tx1"/>
-                </a:solidFill>
-                <a:latin typeface="+mn-lt"/>
-                <a:ea typeface="+mn-ea"/>
-                <a:cs typeface="+mn-cs"/>
-              </a:defRPr>
-            </a:lvl9pPr>
-          </a:lstStyle>
-          <a:p>
-            <a:r>
-              <a:rPr lang="en-US" sz="1600" dirty="0">
-                <a:solidFill>
-                  <a:srgbClr val="0081E2"/>
-                </a:solidFill>
-                <a:latin typeface="Consolas" panose="020B0609020204030204" pitchFamily="49" charset="0"/>
-                <a:hlinkClick r:id="rId3">
-                  <a:extLst>
-                    <a:ext uri="{A12FA001-AC4F-418D-AE19-62706E023703}">
-                      <ahyp:hlinkClr xmlns:ahyp="http://schemas.microsoft.com/office/drawing/2018/hyperlinkcolor" val="tx"/>
-                    </a:ext>
-                  </a:extLst>
-                </a:hlinkClick>
-              </a:rPr>
-              <a:t>https://onlinegdb.com/BJ4hyD7vP</a:t>
-            </a:r>
-            <a:endParaRPr lang="en-US" sz="1600" dirty="0">
-              <a:solidFill>
-                <a:srgbClr val="0081E2"/>
-              </a:solidFill>
-              <a:latin typeface="Consolas" panose="020B0609020204030204" pitchFamily="49" charset="0"/>
-            </a:endParaRPr>
-          </a:p>
-          <a:p>
-            <a:r>
-              <a:rPr lang="en-US" sz="1600" dirty="0">
-                <a:solidFill>
-                  <a:srgbClr val="0081E2"/>
-                </a:solidFill>
-                <a:latin typeface="Consolas" panose="020B0609020204030204" pitchFamily="49" charset="0"/>
-                <a:hlinkClick r:id="rId4">
-                  <a:extLst>
-                    <a:ext uri="{A12FA001-AC4F-418D-AE19-62706E023703}">
-                      <ahyp:hlinkClr xmlns:ahyp="http://schemas.microsoft.com/office/drawing/2018/hyperlinkcolor" val="tx"/>
-                    </a:ext>
-                  </a:extLst>
-                </a:hlinkClick>
-              </a:rPr>
-              <a:t>https://onlinegdb.com/BJ6gewQDP</a:t>
-            </a:r>
-            <a:endParaRPr lang="en-US" sz="1600" dirty="0">
-              <a:solidFill>
-                <a:srgbClr val="0081E2"/>
-              </a:solidFill>
-              <a:latin typeface="Consolas" panose="020B0609020204030204" pitchFamily="49" charset="0"/>
-            </a:endParaRPr>
-          </a:p>
-          <a:p>
-            <a:r>
-              <a:rPr lang="en-US" sz="1600" dirty="0">
-                <a:solidFill>
-                  <a:srgbClr val="0081E2"/>
-                </a:solidFill>
-                <a:latin typeface="Consolas" panose="020B0609020204030204" pitchFamily="49" charset="0"/>
-                <a:hlinkClick r:id="rId5">
-                  <a:extLst>
-                    <a:ext uri="{A12FA001-AC4F-418D-AE19-62706E023703}">
-                      <ahyp:hlinkClr xmlns:ahyp="http://schemas.microsoft.com/office/drawing/2018/hyperlinkcolor" val="tx"/>
-                    </a:ext>
-                  </a:extLst>
-                </a:hlinkClick>
-              </a:rPr>
-              <a:t>https://onlinegdb.com/OefiHIntV</a:t>
-            </a:r>
-            <a:r>
-              <a:rPr lang="en-US" sz="1600" dirty="0">
-                <a:solidFill>
-                  <a:srgbClr val="0081E2"/>
-                </a:solidFill>
-                <a:latin typeface="Consolas" panose="020B0609020204030204" pitchFamily="49" charset="0"/>
-              </a:rPr>
-              <a:t>  </a:t>
-            </a:r>
-          </a:p>
-        </p:txBody>
-      </p:sp>
-    </p:spTree>
-    <p:extLst>
-      <p:ext uri="{BB962C8B-B14F-4D97-AF65-F5344CB8AC3E}">
-        <p14:creationId xmlns:p14="http://schemas.microsoft.com/office/powerpoint/2010/main" val="3092846301"/>
-      </p:ext>
-    </p:extLst>
-  </p:cSld>
-  <p:clrMapOvr>
-    <a:masterClrMapping/>
-  </p:clrMapOvr>
-</p:sld>
-</file>
-
-<file path=ppt/slides/slide26.xml><?xml version="1.0" encoding="utf-8"?>
-<p:sld xmlns:a="http://schemas.openxmlformats.org/drawingml/2006/main" xmlns:r="http://schemas.openxmlformats.org/officeDocument/2006/relationships" xmlns:p="http://schemas.openxmlformats.org/presentationml/2006/main">
-  <p:cSld>
-    <p:bg>
-      <p:bgPr>
-        <a:solidFill>
-          <a:schemeClr val="tx1"/>
-        </a:solidFill>
-        <a:effectLst/>
-      </p:bgPr>
-    </p:bg>
-    <p:spTree>
-      <p:nvGrpSpPr>
-        <p:cNvPr id="1" name=""/>
-        <p:cNvGrpSpPr/>
-        <p:nvPr/>
-      </p:nvGrpSpPr>
-      <p:grpSpPr>
-        <a:xfrm>
-          <a:off x="0" y="0"/>
-          <a:ext cx="0" cy="0"/>
-          <a:chOff x="0" y="0"/>
-          <a:chExt cx="0" cy="0"/>
-        </a:xfrm>
-      </p:grpSpPr>
-      <p:sp>
-        <p:nvSpPr>
-          <p:cNvPr id="2" name="Title 1">
-            <a:extLst>
-              <a:ext uri="{FF2B5EF4-FFF2-40B4-BE49-F238E27FC236}">
-                <a16:creationId xmlns:a16="http://schemas.microsoft.com/office/drawing/2014/main" id="{FA98DF2D-4C21-45B7-8CEE-41E2C22A3166}"/>
-              </a:ext>
-            </a:extLst>
-          </p:cNvPr>
-          <p:cNvSpPr>
-            <a:spLocks noGrp="1"/>
-          </p:cNvSpPr>
-          <p:nvPr>
-            <p:ph type="title"/>
-          </p:nvPr>
-        </p:nvSpPr>
-        <p:spPr/>
-        <p:txBody>
-          <a:bodyPr>
-            <a:normAutofit/>
-          </a:bodyPr>
-          <a:lstStyle/>
-          <a:p>
-            <a:r>
-              <a:rPr lang="en-US" sz="3600" dirty="0">
-                <a:solidFill>
-                  <a:schemeClr val="bg1"/>
-                </a:solidFill>
-                <a:latin typeface="Gotham Bold" pitchFamily="50" charset="0"/>
-              </a:rPr>
               <a:t>Mini Review – Coding questions</a:t>
             </a:r>
           </a:p>
@@ -17538,7 +17234,7 @@
 </p:sld>
 </file>
 
-<file path=ppt/slides/slide27.xml><?xml version="1.0" encoding="utf-8"?>
+<file path=ppt/slides/slide26.xml><?xml version="1.0" encoding="utf-8"?>
 <p:sld xmlns:a="http://schemas.openxmlformats.org/drawingml/2006/main" xmlns:r="http://schemas.openxmlformats.org/officeDocument/2006/relationships" xmlns:p="http://schemas.openxmlformats.org/presentationml/2006/main">
   <p:cSld>
     <p:bg>
@@ -17772,7 +17468,7 @@
 </p:sld>
 </file>
 
-<file path=ppt/slides/slide28.xml><?xml version="1.0" encoding="utf-8"?>
+<file path=ppt/slides/slide27.xml><?xml version="1.0" encoding="utf-8"?>
 <p:sld xmlns:a="http://schemas.openxmlformats.org/drawingml/2006/main" xmlns:r="http://schemas.openxmlformats.org/officeDocument/2006/relationships" xmlns:p="http://schemas.openxmlformats.org/presentationml/2006/main">
   <p:cSld>
     <p:bg>
@@ -18731,7 +18427,7 @@
 </p:sld>
 </file>
 
-<file path=ppt/slides/slide29.xml><?xml version="1.0" encoding="utf-8"?>
+<file path=ppt/slides/slide28.xml><?xml version="1.0" encoding="utf-8"?>
 <p:sld xmlns:a="http://schemas.openxmlformats.org/drawingml/2006/main" xmlns:r="http://schemas.openxmlformats.org/officeDocument/2006/relationships" xmlns:p="http://schemas.openxmlformats.org/presentationml/2006/main">
   <p:cSld>
     <p:bg>
@@ -19613,6 +19309,176 @@
     <p:extLst>
       <p:ext uri="{BB962C8B-B14F-4D97-AF65-F5344CB8AC3E}">
         <p14:creationId xmlns:p14="http://schemas.microsoft.com/office/powerpoint/2010/main" val="3655248238"/>
+      </p:ext>
+    </p:extLst>
+  </p:cSld>
+  <p:clrMapOvr>
+    <a:masterClrMapping/>
+  </p:clrMapOvr>
+</p:sld>
+</file>
+
+<file path=ppt/slides/slide29.xml><?xml version="1.0" encoding="utf-8"?>
+<p:sld xmlns:a="http://schemas.openxmlformats.org/drawingml/2006/main" xmlns:r="http://schemas.openxmlformats.org/officeDocument/2006/relationships" xmlns:p="http://schemas.openxmlformats.org/presentationml/2006/main" show="0">
+  <p:cSld>
+    <p:bg>
+      <p:bgPr>
+        <a:solidFill>
+          <a:schemeClr val="tx1"/>
+        </a:solidFill>
+        <a:effectLst/>
+      </p:bgPr>
+    </p:bg>
+    <p:spTree>
+      <p:nvGrpSpPr>
+        <p:cNvPr id="1" name=""/>
+        <p:cNvGrpSpPr/>
+        <p:nvPr/>
+      </p:nvGrpSpPr>
+      <p:grpSpPr>
+        <a:xfrm>
+          <a:off x="0" y="0"/>
+          <a:ext cx="0" cy="0"/>
+          <a:chOff x="0" y="0"/>
+          <a:chExt cx="0" cy="0"/>
+        </a:xfrm>
+      </p:grpSpPr>
+      <p:sp>
+        <p:nvSpPr>
+          <p:cNvPr id="2" name="Title 1">
+            <a:extLst>
+              <a:ext uri="{FF2B5EF4-FFF2-40B4-BE49-F238E27FC236}">
+                <a16:creationId xmlns:a16="http://schemas.microsoft.com/office/drawing/2014/main" id="{FA98DF2D-4C21-45B7-8CEE-41E2C22A3166}"/>
+              </a:ext>
+            </a:extLst>
+          </p:cNvPr>
+          <p:cNvSpPr>
+            <a:spLocks noGrp="1"/>
+          </p:cNvSpPr>
+          <p:nvPr>
+            <p:ph type="title"/>
+          </p:nvPr>
+        </p:nvSpPr>
+        <p:spPr/>
+        <p:txBody>
+          <a:bodyPr>
+            <a:normAutofit/>
+          </a:bodyPr>
+          <a:lstStyle/>
+          <a:p>
+            <a:r>
+              <a:rPr lang="en-US" sz="3600" dirty="0">
+                <a:solidFill>
+                  <a:schemeClr val="bg1"/>
+                </a:solidFill>
+                <a:latin typeface="Gotham Bold" pitchFamily="50" charset="0"/>
+              </a:rPr>
+              <a:t>Mini Review – Sorting</a:t>
+            </a:r>
+          </a:p>
+        </p:txBody>
+      </p:sp>
+      <p:sp>
+        <p:nvSpPr>
+          <p:cNvPr id="6" name="TextBox 5">
+            <a:extLst>
+              <a:ext uri="{FF2B5EF4-FFF2-40B4-BE49-F238E27FC236}">
+                <a16:creationId xmlns:a16="http://schemas.microsoft.com/office/drawing/2014/main" id="{6910D817-7706-4B40-61E0-933842B0CC61}"/>
+              </a:ext>
+            </a:extLst>
+          </p:cNvPr>
+          <p:cNvSpPr txBox="1"/>
+          <p:nvPr/>
+        </p:nvSpPr>
+        <p:spPr>
+          <a:xfrm>
+            <a:off x="1103126" y="2326068"/>
+            <a:ext cx="9252985" cy="2585323"/>
+          </a:xfrm>
+          <a:prstGeom prst="rect">
+            <a:avLst/>
+          </a:prstGeom>
+          <a:noFill/>
+        </p:spPr>
+        <p:txBody>
+          <a:bodyPr wrap="square">
+            <a:spAutoFit/>
+          </a:bodyPr>
+          <a:lstStyle/>
+          <a:p>
+            <a:r>
+              <a:rPr lang="en-US" dirty="0">
+                <a:solidFill>
+                  <a:srgbClr val="EB6E19"/>
+                </a:solidFill>
+              </a:rPr>
+              <a:t>Recognize the following techniques with the most appropriate algorithm.</a:t>
+            </a:r>
+          </a:p>
+          <a:p>
+            <a:endParaRPr lang="en-US" dirty="0">
+              <a:solidFill>
+                <a:srgbClr val="EB6E19"/>
+              </a:solidFill>
+            </a:endParaRPr>
+          </a:p>
+          <a:p>
+            <a:r>
+              <a:rPr lang="en-US" dirty="0">
+                <a:solidFill>
+                  <a:schemeClr val="bg1"/>
+                </a:solidFill>
+              </a:rPr>
+              <a:t>Finds smallest element and puts in lowest index, then puts second smallest in the second index, and so on</a:t>
+            </a:r>
+          </a:p>
+          <a:p>
+            <a:endParaRPr lang="en-US" dirty="0">
+              <a:solidFill>
+                <a:schemeClr val="bg1"/>
+              </a:solidFill>
+            </a:endParaRPr>
+          </a:p>
+          <a:p>
+            <a:r>
+              <a:rPr lang="en-US" dirty="0">
+                <a:solidFill>
+                  <a:schemeClr val="bg1"/>
+                </a:solidFill>
+              </a:rPr>
+              <a:t>Swaps neighboring items</a:t>
+            </a:r>
+          </a:p>
+          <a:p>
+            <a:endParaRPr lang="en-US" dirty="0">
+              <a:solidFill>
+                <a:schemeClr val="bg1"/>
+              </a:solidFill>
+            </a:endParaRPr>
+          </a:p>
+          <a:p>
+            <a:r>
+              <a:rPr lang="en-US" dirty="0">
+                <a:solidFill>
+                  <a:schemeClr val="bg1"/>
+                </a:solidFill>
+              </a:rPr>
+              <a:t>Rearranges elements at a gap and reduces gaps across passes until it converges</a:t>
+            </a:r>
+          </a:p>
+          <a:p>
+            <a:endParaRPr lang="en-US" dirty="0">
+              <a:solidFill>
+                <a:srgbClr val="EB6E19"/>
+              </a:solidFill>
+            </a:endParaRPr>
+          </a:p>
+        </p:txBody>
+      </p:sp>
+    </p:spTree>
+    <p:extLst>
+      <p:ext uri="{BB962C8B-B14F-4D97-AF65-F5344CB8AC3E}">
+        <p14:creationId xmlns:p14="http://schemas.microsoft.com/office/powerpoint/2010/main" val="4067574677"/>
       </p:ext>
     </p:extLst>
   </p:cSld>
@@ -19989,176 +19855,6 @@
                   <a:schemeClr val="bg1"/>
                 </a:solidFill>
               </a:rPr>
-              <a:t>Finds smallest element and puts in lowest index, then puts second smallest in the second index, and so on</a:t>
-            </a:r>
-          </a:p>
-          <a:p>
-            <a:endParaRPr lang="en-US" dirty="0">
-              <a:solidFill>
-                <a:schemeClr val="bg1"/>
-              </a:solidFill>
-            </a:endParaRPr>
-          </a:p>
-          <a:p>
-            <a:r>
-              <a:rPr lang="en-US" dirty="0">
-                <a:solidFill>
-                  <a:schemeClr val="bg1"/>
-                </a:solidFill>
-              </a:rPr>
-              <a:t>Swaps neighboring items</a:t>
-            </a:r>
-          </a:p>
-          <a:p>
-            <a:endParaRPr lang="en-US" dirty="0">
-              <a:solidFill>
-                <a:schemeClr val="bg1"/>
-              </a:solidFill>
-            </a:endParaRPr>
-          </a:p>
-          <a:p>
-            <a:r>
-              <a:rPr lang="en-US" dirty="0">
-                <a:solidFill>
-                  <a:schemeClr val="bg1"/>
-                </a:solidFill>
-              </a:rPr>
-              <a:t>Rearranges elements at a gap and reduces gaps across passes until it converges</a:t>
-            </a:r>
-          </a:p>
-          <a:p>
-            <a:endParaRPr lang="en-US" dirty="0">
-              <a:solidFill>
-                <a:srgbClr val="EB6E19"/>
-              </a:solidFill>
-            </a:endParaRPr>
-          </a:p>
-        </p:txBody>
-      </p:sp>
-    </p:spTree>
-    <p:extLst>
-      <p:ext uri="{BB962C8B-B14F-4D97-AF65-F5344CB8AC3E}">
-        <p14:creationId xmlns:p14="http://schemas.microsoft.com/office/powerpoint/2010/main" val="4067574677"/>
-      </p:ext>
-    </p:extLst>
-  </p:cSld>
-  <p:clrMapOvr>
-    <a:masterClrMapping/>
-  </p:clrMapOvr>
-</p:sld>
-</file>
-
-<file path=ppt/slides/slide31.xml><?xml version="1.0" encoding="utf-8"?>
-<p:sld xmlns:a="http://schemas.openxmlformats.org/drawingml/2006/main" xmlns:r="http://schemas.openxmlformats.org/officeDocument/2006/relationships" xmlns:p="http://schemas.openxmlformats.org/presentationml/2006/main" show="0">
-  <p:cSld>
-    <p:bg>
-      <p:bgPr>
-        <a:solidFill>
-          <a:schemeClr val="tx1"/>
-        </a:solidFill>
-        <a:effectLst/>
-      </p:bgPr>
-    </p:bg>
-    <p:spTree>
-      <p:nvGrpSpPr>
-        <p:cNvPr id="1" name=""/>
-        <p:cNvGrpSpPr/>
-        <p:nvPr/>
-      </p:nvGrpSpPr>
-      <p:grpSpPr>
-        <a:xfrm>
-          <a:off x="0" y="0"/>
-          <a:ext cx="0" cy="0"/>
-          <a:chOff x="0" y="0"/>
-          <a:chExt cx="0" cy="0"/>
-        </a:xfrm>
-      </p:grpSpPr>
-      <p:sp>
-        <p:nvSpPr>
-          <p:cNvPr id="2" name="Title 1">
-            <a:extLst>
-              <a:ext uri="{FF2B5EF4-FFF2-40B4-BE49-F238E27FC236}">
-                <a16:creationId xmlns:a16="http://schemas.microsoft.com/office/drawing/2014/main" id="{FA98DF2D-4C21-45B7-8CEE-41E2C22A3166}"/>
-              </a:ext>
-            </a:extLst>
-          </p:cNvPr>
-          <p:cNvSpPr>
-            <a:spLocks noGrp="1"/>
-          </p:cNvSpPr>
-          <p:nvPr>
-            <p:ph type="title"/>
-          </p:nvPr>
-        </p:nvSpPr>
-        <p:spPr/>
-        <p:txBody>
-          <a:bodyPr>
-            <a:normAutofit/>
-          </a:bodyPr>
-          <a:lstStyle/>
-          <a:p>
-            <a:r>
-              <a:rPr lang="en-US" sz="3600" dirty="0">
-                <a:solidFill>
-                  <a:schemeClr val="bg1"/>
-                </a:solidFill>
-                <a:latin typeface="Gotham Bold" pitchFamily="50" charset="0"/>
-              </a:rPr>
-              <a:t>Mini Review – Sorting</a:t>
-            </a:r>
-          </a:p>
-        </p:txBody>
-      </p:sp>
-      <p:sp>
-        <p:nvSpPr>
-          <p:cNvPr id="6" name="TextBox 5">
-            <a:extLst>
-              <a:ext uri="{FF2B5EF4-FFF2-40B4-BE49-F238E27FC236}">
-                <a16:creationId xmlns:a16="http://schemas.microsoft.com/office/drawing/2014/main" id="{6910D817-7706-4B40-61E0-933842B0CC61}"/>
-              </a:ext>
-            </a:extLst>
-          </p:cNvPr>
-          <p:cNvSpPr txBox="1"/>
-          <p:nvPr/>
-        </p:nvSpPr>
-        <p:spPr>
-          <a:xfrm>
-            <a:off x="1103126" y="2326068"/>
-            <a:ext cx="9252985" cy="2585323"/>
-          </a:xfrm>
-          <a:prstGeom prst="rect">
-            <a:avLst/>
-          </a:prstGeom>
-          <a:noFill/>
-        </p:spPr>
-        <p:txBody>
-          <a:bodyPr wrap="square">
-            <a:spAutoFit/>
-          </a:bodyPr>
-          <a:lstStyle/>
-          <a:p>
-            <a:r>
-              <a:rPr lang="en-US" dirty="0">
-                <a:solidFill>
-                  <a:srgbClr val="EB6E19"/>
-                </a:solidFill>
-              </a:rPr>
-              <a:t>Recognize the following techniques with the most appropriate algorithm.</a:t>
-            </a:r>
-          </a:p>
-          <a:p>
-            <a:endParaRPr lang="en-US" dirty="0">
-              <a:solidFill>
-                <a:srgbClr val="EB6E19"/>
-              </a:solidFill>
-            </a:endParaRPr>
-          </a:p>
-          <a:p>
-            <a:r>
-              <a:rPr lang="en-US" dirty="0">
-                <a:solidFill>
-                  <a:schemeClr val="bg1"/>
-                </a:solidFill>
-              </a:rPr>
               <a:t>Finds smallest element and puts in lowest index, then puts second smallest in the second index, and so on: </a:t>
             </a:r>
             <a:r>
@@ -20247,7 +19943,7 @@
 </p:sld>
 </file>
 
-<file path=ppt/slides/slide32.xml><?xml version="1.0" encoding="utf-8"?>
+<file path=ppt/slides/slide31.xml><?xml version="1.0" encoding="utf-8"?>
 <p:sld xmlns:a="http://schemas.openxmlformats.org/drawingml/2006/main" xmlns:r="http://schemas.openxmlformats.org/officeDocument/2006/relationships" xmlns:p="http://schemas.openxmlformats.org/presentationml/2006/main" show="0">
   <p:cSld>
     <p:bg>
@@ -21436,7 +21132,7 @@
 </p:sld>
 </file>
 
-<file path=ppt/slides/slide33.xml><?xml version="1.0" encoding="utf-8"?>
+<file path=ppt/slides/slide32.xml><?xml version="1.0" encoding="utf-8"?>
 <p:sld xmlns:a="http://schemas.openxmlformats.org/drawingml/2006/main" xmlns:r="http://schemas.openxmlformats.org/officeDocument/2006/relationships" xmlns:p="http://schemas.openxmlformats.org/presentationml/2006/main" show="0">
   <p:cSld>
     <p:bg>
@@ -22631,7 +22327,7 @@
 </p:sld>
 </file>
 
-<file path=ppt/slides/slide34.xml><?xml version="1.0" encoding="utf-8"?>
+<file path=ppt/slides/slide33.xml><?xml version="1.0" encoding="utf-8"?>
 <p:sld xmlns:a="http://schemas.openxmlformats.org/drawingml/2006/main" xmlns:r="http://schemas.openxmlformats.org/officeDocument/2006/relationships" xmlns:p="http://schemas.openxmlformats.org/presentationml/2006/main">
   <p:cSld>
     <p:bg>
@@ -22933,7 +22629,202 @@
                 <a:uFillTx/>
                 <a:latin typeface="Consolas" panose="020B0609020204030204" pitchFamily="49" charset="0"/>
               </a:rPr>
-              <a:t>Exam 1 will be on Feb 26 (Thursday) at 8:20 pm to 10:10 pm on campus in-person. The location of the exam is dependent on your last name.</a:t>
+              <a:t>Exam 1 will be on Oct 6 (Tuesday) at 8:20 pm to 10:10 pm on campus in-person. The location of the exam is dependent on your last name.</a:t>
+            </a:r>
+          </a:p>
+          <a:p>
+            <a:pPr marL="1200150" lvl="2" indent="-285750">
+              <a:lnSpc>
+                <a:spcPct val="150000"/>
+              </a:lnSpc>
+              <a:buFont typeface="Wingdings" panose="05000000000000000000" pitchFamily="2" charset="2"/>
+              <a:buChar char="§"/>
+              <a:defRPr/>
+            </a:pPr>
+            <a:r>
+              <a:rPr kumimoji="0" lang="en-US" sz="1600" b="0" i="0" u="none" strike="noStrike" kern="1200" cap="none" spc="0" normalizeH="0" baseline="0" noProof="0" dirty="0">
+                <a:ln>
+                  <a:noFill/>
+                </a:ln>
+                <a:solidFill>
+                  <a:srgbClr val="EB6E19"/>
+                </a:solidFill>
+                <a:effectLst/>
+                <a:uLnTx/>
+                <a:uFillTx/>
+                <a:latin typeface="Consolas" panose="020B0609020204030204" pitchFamily="49" charset="0"/>
+              </a:rPr>
+              <a:t>PUGH </a:t>
+            </a:r>
+            <a:r>
+              <a:rPr kumimoji="0" lang="en-US" sz="1600" b="0" i="0" u="none" strike="noStrike" kern="1200" cap="none" spc="0" normalizeH="0" baseline="0" noProof="0" dirty="0" err="1">
+                <a:ln>
+                  <a:noFill/>
+                </a:ln>
+                <a:solidFill>
+                  <a:srgbClr val="EB6E19"/>
+                </a:solidFill>
+                <a:effectLst/>
+                <a:uLnTx/>
+                <a:uFillTx/>
+                <a:latin typeface="Consolas" panose="020B0609020204030204" pitchFamily="49" charset="0"/>
+              </a:rPr>
+              <a:t>Pugh</a:t>
+            </a:r>
+            <a:r>
+              <a:rPr kumimoji="0" lang="en-US" sz="1600" b="0" i="0" u="none" strike="noStrike" kern="1200" cap="none" spc="0" normalizeH="0" baseline="0" noProof="0" dirty="0">
+                <a:ln>
+                  <a:noFill/>
+                </a:ln>
+                <a:solidFill>
+                  <a:srgbClr val="EB6E19"/>
+                </a:solidFill>
+                <a:effectLst/>
+                <a:uLnTx/>
+                <a:uFillTx/>
+                <a:latin typeface="Consolas" panose="020B0609020204030204" pitchFamily="49" charset="0"/>
+              </a:rPr>
+              <a:t> Hall 170 : </a:t>
+            </a:r>
+            <a:r>
+              <a:rPr kumimoji="0" lang="en-US" sz="1600" b="0" i="0" u="none" strike="noStrike" kern="1200" cap="none" spc="0" normalizeH="0" baseline="0" noProof="0" dirty="0" err="1">
+                <a:ln>
+                  <a:noFill/>
+                </a:ln>
+                <a:solidFill>
+                  <a:srgbClr val="EB6E19"/>
+                </a:solidFill>
+                <a:effectLst/>
+                <a:uLnTx/>
+                <a:uFillTx/>
+                <a:latin typeface="Consolas" panose="020B0609020204030204" pitchFamily="49" charset="0"/>
+              </a:rPr>
+              <a:t>Abichou</a:t>
+            </a:r>
+            <a:r>
+              <a:rPr kumimoji="0" lang="en-US" sz="1600" b="0" i="0" u="none" strike="noStrike" kern="1200" cap="none" spc="0" normalizeH="0" baseline="0" noProof="0" dirty="0">
+                <a:ln>
+                  <a:noFill/>
+                </a:ln>
+                <a:solidFill>
+                  <a:srgbClr val="EB6E19"/>
+                </a:solidFill>
+                <a:effectLst/>
+                <a:uLnTx/>
+                <a:uFillTx/>
+                <a:latin typeface="Consolas" panose="020B0609020204030204" pitchFamily="49" charset="0"/>
+              </a:rPr>
+              <a:t> - Kalariya</a:t>
+            </a:r>
+          </a:p>
+          <a:p>
+            <a:pPr marL="1200150" lvl="2" indent="-285750">
+              <a:lnSpc>
+                <a:spcPct val="150000"/>
+              </a:lnSpc>
+              <a:buFont typeface="Wingdings" panose="05000000000000000000" pitchFamily="2" charset="2"/>
+              <a:buChar char="§"/>
+              <a:defRPr/>
+            </a:pPr>
+            <a:r>
+              <a:rPr kumimoji="0" lang="en-US" sz="1600" b="0" i="0" u="none" strike="noStrike" kern="1200" cap="none" spc="0" normalizeH="0" baseline="0" noProof="0" dirty="0">
+                <a:ln>
+                  <a:noFill/>
+                </a:ln>
+                <a:solidFill>
+                  <a:srgbClr val="EB6E19"/>
+                </a:solidFill>
+                <a:effectLst/>
+                <a:uLnTx/>
+                <a:uFillTx/>
+                <a:latin typeface="Consolas" panose="020B0609020204030204" pitchFamily="49" charset="0"/>
+              </a:rPr>
+              <a:t>TUR Turlington Hall L005 : Kanige - Perojevic</a:t>
+            </a:r>
+          </a:p>
+          <a:p>
+            <a:pPr marL="1200150" lvl="2" indent="-285750">
+              <a:lnSpc>
+                <a:spcPct val="150000"/>
+              </a:lnSpc>
+              <a:buFont typeface="Wingdings" panose="05000000000000000000" pitchFamily="2" charset="2"/>
+              <a:buChar char="§"/>
+              <a:defRPr/>
+            </a:pPr>
+            <a:r>
+              <a:rPr kumimoji="0" lang="en-US" sz="1600" b="0" i="0" u="none" strike="noStrike" kern="1200" cap="none" spc="0" normalizeH="0" baseline="0" noProof="0" dirty="0">
+                <a:ln>
+                  <a:noFill/>
+                </a:ln>
+                <a:solidFill>
+                  <a:srgbClr val="EB6E19"/>
+                </a:solidFill>
+                <a:effectLst/>
+                <a:uLnTx/>
+                <a:uFillTx/>
+                <a:latin typeface="Consolas" panose="020B0609020204030204" pitchFamily="49" charset="0"/>
+              </a:rPr>
+              <a:t>WEIL </a:t>
+            </a:r>
+            <a:r>
+              <a:rPr kumimoji="0" lang="en-US" sz="1600" b="0" i="0" u="none" strike="noStrike" kern="1200" cap="none" spc="0" normalizeH="0" baseline="0" noProof="0" dirty="0" err="1">
+                <a:ln>
+                  <a:noFill/>
+                </a:ln>
+                <a:solidFill>
+                  <a:srgbClr val="EB6E19"/>
+                </a:solidFill>
+                <a:effectLst/>
+                <a:uLnTx/>
+                <a:uFillTx/>
+                <a:latin typeface="Consolas" panose="020B0609020204030204" pitchFamily="49" charset="0"/>
+              </a:rPr>
+              <a:t>Weil</a:t>
+            </a:r>
+            <a:r>
+              <a:rPr kumimoji="0" lang="en-US" sz="1600" b="0" i="0" u="none" strike="noStrike" kern="1200" cap="none" spc="0" normalizeH="0" baseline="0" noProof="0" dirty="0">
+                <a:ln>
+                  <a:noFill/>
+                </a:ln>
+                <a:solidFill>
+                  <a:srgbClr val="EB6E19"/>
+                </a:solidFill>
+                <a:effectLst/>
+                <a:uLnTx/>
+                <a:uFillTx/>
+                <a:latin typeface="Consolas" panose="020B0609020204030204" pitchFamily="49" charset="0"/>
+              </a:rPr>
+              <a:t> Hall 0270: </a:t>
+            </a:r>
+            <a:r>
+              <a:rPr kumimoji="0" lang="en-US" sz="1600" b="0" i="0" u="none" strike="noStrike" kern="1200" cap="none" spc="0" normalizeH="0" baseline="0" noProof="0" dirty="0" err="1">
+                <a:ln>
+                  <a:noFill/>
+                </a:ln>
+                <a:solidFill>
+                  <a:srgbClr val="EB6E19"/>
+                </a:solidFill>
+                <a:effectLst/>
+                <a:uLnTx/>
+                <a:uFillTx/>
+                <a:latin typeface="Consolas" panose="020B0609020204030204" pitchFamily="49" charset="0"/>
+              </a:rPr>
+              <a:t>Petrychenko</a:t>
+            </a:r>
+            <a:r>
+              <a:rPr kumimoji="0" lang="en-US" sz="1600" b="0" i="0" u="none" strike="noStrike" kern="1200" cap="none" spc="0" normalizeH="0" baseline="0" noProof="0" dirty="0">
+                <a:ln>
+                  <a:noFill/>
+                </a:ln>
+                <a:solidFill>
+                  <a:srgbClr val="EB6E19"/>
+                </a:solidFill>
+                <a:effectLst/>
+                <a:uLnTx/>
+                <a:uFillTx/>
+                <a:latin typeface="Consolas" panose="020B0609020204030204" pitchFamily="49" charset="0"/>
+              </a:rPr>
+              <a:t> - Zozaya</a:t>
             </a:r>
           </a:p>
           <a:p>
@@ -22973,47 +22864,7 @@
                 <a:uFillTx/>
                 <a:latin typeface="Consolas" panose="020B0609020204030204" pitchFamily="49" charset="0"/>
               </a:rPr>
-              <a:t>Exam 1 will be on Feb 26 (Thursday). You can take the exam on Honorlock anytime between 6 pm to 11:59 pm at your home.</a:t>
-            </a:r>
-          </a:p>
-          <a:p>
-            <a:pPr marL="742950" lvl="1" indent="-285750">
-              <a:lnSpc>
-                <a:spcPct val="150000"/>
-              </a:lnSpc>
-              <a:buFont typeface="Wingdings" panose="05000000000000000000" pitchFamily="2" charset="2"/>
-              <a:buChar char="§"/>
-              <a:defRPr/>
-            </a:pPr>
-            <a:r>
-              <a:rPr kumimoji="0" lang="en-US" sz="1600" b="0" i="0" u="none" strike="noStrike" kern="1200" cap="none" spc="0" normalizeH="0" baseline="0" noProof="0" dirty="0">
-                <a:ln>
-                  <a:noFill/>
-                </a:ln>
-                <a:solidFill>
-                  <a:srgbClr val="00B050"/>
-                </a:solidFill>
-                <a:effectLst/>
-                <a:uLnTx/>
-                <a:uFillTx/>
-                <a:latin typeface="Consolas" panose="020B0609020204030204" pitchFamily="49" charset="0"/>
-              </a:rPr>
-              <a:t>For UFOL/UDER students: </a:t>
-            </a:r>
-            <a:r>
-              <a:rPr kumimoji="0" lang="en-US" sz="1600" b="0" i="0" u="none" strike="noStrike" kern="1200" cap="none" spc="0" normalizeH="0" baseline="0" noProof="0" dirty="0">
-                <a:ln>
-                  <a:noFill/>
-                </a:ln>
-                <a:solidFill>
-                  <a:srgbClr val="EB6E19"/>
-                </a:solidFill>
-                <a:effectLst/>
-                <a:uLnTx/>
-                <a:uFillTx/>
-                <a:latin typeface="Consolas" panose="020B0609020204030204" pitchFamily="49" charset="0"/>
-              </a:rPr>
-              <a:t>Exam 1 will available between 8:20 pm on Feb 26 (Thursday) to midnight on Feb 28 (Saturday). You can take the exam on Honorlock anytime at your home.</a:t>
+              <a:t>Exam 1 will be on Oct 6 (Tuesday). You can take the exam on Honorlock anytime at home between 6 pm to 11:59 pm at your home.</a:t>
             </a:r>
           </a:p>
           <a:p>
@@ -23148,13 +22999,7 @@
     </p:bg>
     <p:spTree>
       <p:nvGrpSpPr>
-        <p:cNvPr id="1" name="">
-          <a:extLst>
-            <a:ext uri="{FF2B5EF4-FFF2-40B4-BE49-F238E27FC236}">
-              <a16:creationId xmlns:a16="http://schemas.microsoft.com/office/drawing/2014/main" id="{475CB625-007D-DED2-4640-E7409BD83A52}"/>
-            </a:ext>
-          </a:extLst>
-        </p:cNvPr>
+        <p:cNvPr id="1" name=""/>
         <p:cNvGrpSpPr/>
         <p:nvPr/>
       </p:nvGrpSpPr>
@@ -23171,7 +23016,7 @@
           <p:cNvPr id="2" name="Title 1">
             <a:extLst>
               <a:ext uri="{FF2B5EF4-FFF2-40B4-BE49-F238E27FC236}">
-                <a16:creationId xmlns:a16="http://schemas.microsoft.com/office/drawing/2014/main" id="{9C549461-62E7-7462-ED21-EB75ECB9EE97}"/>
+                <a16:creationId xmlns:a16="http://schemas.microsoft.com/office/drawing/2014/main" id="{FA98DF2D-4C21-45B7-8CEE-41E2C22A3166}"/>
               </a:ext>
             </a:extLst>
           </p:cNvPr>
@@ -23185,110 +23030,80 @@
         <p:spPr/>
         <p:txBody>
           <a:bodyPr>
-            <a:normAutofit fontScale="90000"/>
+            <a:normAutofit/>
           </a:bodyPr>
           <a:lstStyle/>
           <a:p>
-            <a:br>
-              <a:rPr lang="en-US" dirty="0">
+            <a:r>
+              <a:rPr lang="en-US" sz="3600" dirty="0">
                 <a:solidFill>
                   <a:schemeClr val="bg1"/>
                 </a:solidFill>
                 <a:latin typeface="Gotham Bold" pitchFamily="50" charset="0"/>
               </a:rPr>
-            </a:br>
-            <a:br>
-              <a:rPr lang="en-US" dirty="0">
-                <a:solidFill>
-                  <a:schemeClr val="bg1"/>
-                </a:solidFill>
-                <a:latin typeface="Gotham Bold" pitchFamily="50" charset="0"/>
-              </a:rPr>
-            </a:br>
-            <a:br>
-              <a:rPr lang="en-US" dirty="0">
-                <a:solidFill>
-                  <a:schemeClr val="bg1"/>
-                </a:solidFill>
-                <a:latin typeface="Gotham Bold" pitchFamily="50" charset="0"/>
-              </a:rPr>
-            </a:br>
-            <a:r>
-              <a:rPr lang="en-US" dirty="0">
-                <a:solidFill>
-                  <a:schemeClr val="bg1"/>
-                </a:solidFill>
-                <a:latin typeface="Gotham Bold" pitchFamily="50" charset="0"/>
-              </a:rPr>
-              <a:t>Exam 1 Logistics</a:t>
-            </a:r>
-            <a:br>
-              <a:rPr lang="en-US" dirty="0">
-                <a:solidFill>
-                  <a:schemeClr val="bg1"/>
-                </a:solidFill>
-                <a:latin typeface="Gotham Bold" pitchFamily="50" charset="0"/>
-              </a:rPr>
-            </a:br>
-            <a:br>
-              <a:rPr lang="en-US" dirty="0">
-                <a:solidFill>
-                  <a:schemeClr val="bg1"/>
-                </a:solidFill>
-                <a:latin typeface="Gotham Bold" pitchFamily="50" charset="0"/>
-              </a:rPr>
-            </a:br>
-            <a:br>
-              <a:rPr lang="en-US" dirty="0">
-                <a:solidFill>
-                  <a:schemeClr val="bg1"/>
-                </a:solidFill>
-                <a:latin typeface="Gotham Bold" pitchFamily="50" charset="0"/>
-              </a:rPr>
-            </a:br>
-            <a:endParaRPr lang="en-US" dirty="0">
-              <a:solidFill>
-                <a:schemeClr val="bg1"/>
-              </a:solidFill>
-              <a:latin typeface="Gotham Bold" pitchFamily="50" charset="0"/>
-            </a:endParaRPr>
-          </a:p>
-        </p:txBody>
-      </p:sp>
-      <p:pic>
-        <p:nvPicPr>
-          <p:cNvPr id="7" name="Picture 6">
+              <a:t>Exam 1 Topics and Expectations</a:t>
+            </a:r>
+          </a:p>
+        </p:txBody>
+      </p:sp>
+      <p:sp>
+        <p:nvSpPr>
+          <p:cNvPr id="5" name="TextBox 4">
             <a:extLst>
               <a:ext uri="{FF2B5EF4-FFF2-40B4-BE49-F238E27FC236}">
-                <a16:creationId xmlns:a16="http://schemas.microsoft.com/office/drawing/2014/main" id="{2DC7121D-0AB6-F308-1F5A-7CB6076A5177}"/>
+                <a16:creationId xmlns:a16="http://schemas.microsoft.com/office/drawing/2014/main" id="{B9F3F2B3-9659-875A-AE5F-17F90640C5E8}"/>
               </a:ext>
             </a:extLst>
           </p:cNvPr>
-          <p:cNvPicPr>
-            <a:picLocks noChangeAspect="1"/>
-          </p:cNvPicPr>
+          <p:cNvSpPr txBox="1"/>
           <p:nvPr/>
-        </p:nvPicPr>
-        <p:blipFill>
-          <a:blip r:embed="rId3"/>
-          <a:stretch>
-            <a:fillRect/>
-          </a:stretch>
-        </p:blipFill>
+        </p:nvSpPr>
         <p:spPr>
           <a:xfrm>
-            <a:off x="2177185" y="2080027"/>
-            <a:ext cx="6911939" cy="2110923"/>
+            <a:off x="1083527" y="1823445"/>
+            <a:ext cx="10870580" cy="369332"/>
           </a:xfrm>
           <a:prstGeom prst="rect">
             <a:avLst/>
           </a:prstGeom>
+          <a:noFill/>
         </p:spPr>
-      </p:pic>
+        <p:txBody>
+          <a:bodyPr wrap="square">
+            <a:spAutoFit/>
+          </a:bodyPr>
+          <a:lstStyle/>
+          <a:p>
+            <a:r>
+              <a:rPr lang="en-US" dirty="0">
+                <a:solidFill>
+                  <a:srgbClr val="0081E2"/>
+                </a:solidFill>
+                <a:hlinkClick r:id="rId3">
+                  <a:extLst>
+                    <a:ext uri="{A12FA001-AC4F-418D-AE19-62706E023703}">
+                      <ahyp:hlinkClr xmlns:ahyp="http://schemas.microsoft.com/office/drawing/2018/hyperlinkcolor" val="tx"/>
+                    </a:ext>
+                  </a:extLst>
+                </a:hlinkClick>
+              </a:rPr>
+              <a:t>https://docs.google.com/document/d/1mfFdECreuzJLSRuCWvGjSMqbiQ88ZvFY_9UHE3I9iNM/edit?usp=sharing</a:t>
+            </a:r>
+            <a:r>
+              <a:rPr lang="en-US" dirty="0">
+                <a:solidFill>
+                  <a:srgbClr val="0081E2"/>
+                </a:solidFill>
+              </a:rPr>
+              <a:t> </a:t>
+            </a:r>
+          </a:p>
+        </p:txBody>
+      </p:sp>
     </p:spTree>
     <p:extLst>
       <p:ext uri="{BB962C8B-B14F-4D97-AF65-F5344CB8AC3E}">
-        <p14:creationId xmlns:p14="http://schemas.microsoft.com/office/powerpoint/2010/main" val="8960134"/>
+        <p14:creationId xmlns:p14="http://schemas.microsoft.com/office/powerpoint/2010/main" val="1488638803"/>
       </p:ext>
     </p:extLst>
   </p:cSld>
@@ -23353,17 +23168,17 @@
                 </a:solidFill>
                 <a:latin typeface="Gotham Bold" pitchFamily="50" charset="0"/>
               </a:rPr>
-              <a:t>Exam 1 Topics and Expectations</a:t>
-            </a:r>
-          </a:p>
-        </p:txBody>
-      </p:sp>
-      <p:sp>
-        <p:nvSpPr>
-          <p:cNvPr id="5" name="TextBox 4">
+              <a:t>Mini Review – Complexity</a:t>
+            </a:r>
+          </a:p>
+        </p:txBody>
+      </p:sp>
+      <p:sp>
+        <p:nvSpPr>
+          <p:cNvPr id="4" name="TextBox 3">
             <a:extLst>
               <a:ext uri="{FF2B5EF4-FFF2-40B4-BE49-F238E27FC236}">
-                <a16:creationId xmlns:a16="http://schemas.microsoft.com/office/drawing/2014/main" id="{B9F3F2B3-9659-875A-AE5F-17F90640C5E8}"/>
+                <a16:creationId xmlns:a16="http://schemas.microsoft.com/office/drawing/2014/main" id="{A70E6009-18FB-490F-970D-3C9B83737A5E}"/>
               </a:ext>
             </a:extLst>
           </p:cNvPr>
@@ -23372,8 +23187,8 @@
         </p:nvSpPr>
         <p:spPr>
           <a:xfrm>
-            <a:off x="1083527" y="1823445"/>
-            <a:ext cx="10870580" cy="369332"/>
+            <a:off x="1039618" y="1828743"/>
+            <a:ext cx="8422881" cy="1323439"/>
           </a:xfrm>
           <a:prstGeom prst="rect">
             <a:avLst/>
@@ -23381,28 +23196,49 @@
           <a:noFill/>
         </p:spPr>
         <p:txBody>
-          <a:bodyPr wrap="square">
+          <a:bodyPr wrap="square" rtlCol="0">
             <a:spAutoFit/>
           </a:bodyPr>
           <a:lstStyle/>
           <a:p>
             <a:r>
-              <a:rPr lang="en-US" dirty="0">
-                <a:hlinkClick r:id="rId3"/>
-              </a:rPr>
-              <a:t>https://docs.google.com/document/d/1XAUGHQE4JWmOsDkkbfTnLFoVi_QXySxC-J4XZnK4VTQ/edit?tab=t.0</a:t>
-            </a:r>
-            <a:r>
-              <a:rPr lang="en-US" dirty="0"/>
-              <a:t> </a:t>
-            </a:r>
+              <a:rPr lang="en-US" sz="2000" dirty="0">
+                <a:solidFill>
+                  <a:srgbClr val="0081E2"/>
+                </a:solidFill>
+                <a:latin typeface="Consolas" panose="020B0609020204030204" pitchFamily="49" charset="0"/>
+              </a:rPr>
+              <a:t>What is the computational complexity of adding an item to a stack in the worst case in terms of Big O notation?</a:t>
+            </a:r>
+            <a:endParaRPr lang="en-US" sz="2000" dirty="0">
+              <a:solidFill>
+                <a:srgbClr val="EB6E19"/>
+              </a:solidFill>
+              <a:latin typeface="Consolas" panose="020B0609020204030204" pitchFamily="49" charset="0"/>
+            </a:endParaRPr>
+          </a:p>
+          <a:p>
+            <a:endParaRPr lang="en-US" sz="2000" dirty="0">
+              <a:solidFill>
+                <a:srgbClr val="EB6E19"/>
+              </a:solidFill>
+              <a:latin typeface="Consolas" panose="020B0609020204030204" pitchFamily="49" charset="0"/>
+            </a:endParaRPr>
+          </a:p>
+          <a:p>
+            <a:endParaRPr lang="en-US" sz="2000" dirty="0">
+              <a:solidFill>
+                <a:srgbClr val="EB6E19"/>
+              </a:solidFill>
+              <a:latin typeface="Consolas" panose="020B0609020204030204" pitchFamily="49" charset="0"/>
+            </a:endParaRPr>
           </a:p>
         </p:txBody>
       </p:sp>
     </p:spTree>
     <p:extLst>
       <p:ext uri="{BB962C8B-B14F-4D97-AF65-F5344CB8AC3E}">
-        <p14:creationId xmlns:p14="http://schemas.microsoft.com/office/powerpoint/2010/main" val="1488638803"/>
+        <p14:creationId xmlns:p14="http://schemas.microsoft.com/office/powerpoint/2010/main" val="211684098"/>
       </p:ext>
     </p:extLst>
   </p:cSld>
@@ -23487,7 +23323,7 @@
         <p:spPr>
           <a:xfrm>
             <a:off x="1039618" y="1828743"/>
-            <a:ext cx="8422881" cy="1323439"/>
+            <a:ext cx="8422881" cy="1631216"/>
           </a:xfrm>
           <a:prstGeom prst="rect">
             <a:avLst/>
@@ -23532,12 +23368,23 @@
               <a:latin typeface="Consolas" panose="020B0609020204030204" pitchFamily="49" charset="0"/>
             </a:endParaRPr>
           </a:p>
+          <a:p>
+            <a:r>
+              <a:rPr lang="en-US" sz="2000" dirty="0">
+                <a:solidFill>
+                  <a:srgbClr val="00DA63"/>
+                </a:solidFill>
+                <a:latin typeface="Consolas" panose="020B0609020204030204" pitchFamily="49" charset="0"/>
+              </a:rPr>
+              <a:t>Answer: O(1)</a:t>
+            </a:r>
+          </a:p>
         </p:txBody>
       </p:sp>
     </p:spTree>
     <p:extLst>
       <p:ext uri="{BB962C8B-B14F-4D97-AF65-F5344CB8AC3E}">
-        <p14:creationId xmlns:p14="http://schemas.microsoft.com/office/powerpoint/2010/main" val="211684098"/>
+        <p14:creationId xmlns:p14="http://schemas.microsoft.com/office/powerpoint/2010/main" val="4094376154"/>
       </p:ext>
     </p:extLst>
   </p:cSld>
@@ -23622,7 +23469,7 @@
         <p:spPr>
           <a:xfrm>
             <a:off x="1039618" y="1828743"/>
-            <a:ext cx="8422881" cy="1631216"/>
+            <a:ext cx="9635971" cy="1938992"/>
           </a:xfrm>
           <a:prstGeom prst="rect">
             <a:avLst/>
@@ -23630,7 +23477,7 @@
           <a:noFill/>
         </p:spPr>
         <p:txBody>
-          <a:bodyPr wrap="square" rtlCol="0">
+          <a:bodyPr wrap="none" rtlCol="0">
             <a:spAutoFit/>
           </a:bodyPr>
           <a:lstStyle/>
@@ -23642,8 +23489,10 @@
                 </a:solidFill>
                 <a:latin typeface="Consolas" panose="020B0609020204030204" pitchFamily="49" charset="0"/>
               </a:rPr>
-              <a:t>What is the computational complexity of adding an item to a stack in the worst case in terms of Big O notation?</a:t>
-            </a:r>
+              <a:t>What is the computational complexity of the following code snippet?</a:t>
+            </a:r>
+          </a:p>
+          <a:p>
             <a:endParaRPr lang="en-US" sz="2000" dirty="0">
               <a:solidFill>
                 <a:srgbClr val="EB6E19"/>
@@ -23652,30 +23501,92 @@
             </a:endParaRPr>
           </a:p>
           <a:p>
-            <a:endParaRPr lang="en-US" sz="2000" dirty="0">
-              <a:solidFill>
-                <a:srgbClr val="EB6E19"/>
-              </a:solidFill>
-              <a:latin typeface="Consolas" panose="020B0609020204030204" pitchFamily="49" charset="0"/>
-            </a:endParaRPr>
-          </a:p>
-          <a:p>
-            <a:endParaRPr lang="en-US" sz="2000" dirty="0">
-              <a:solidFill>
-                <a:srgbClr val="EB6E19"/>
-              </a:solidFill>
-              <a:latin typeface="Consolas" panose="020B0609020204030204" pitchFamily="49" charset="0"/>
-            </a:endParaRPr>
-          </a:p>
-          <a:p>
+            <a:r>
+              <a:rPr lang="en-US" sz="2000" dirty="0" err="1">
+                <a:solidFill>
+                  <a:srgbClr val="EB6E19"/>
+                </a:solidFill>
+                <a:latin typeface="Consolas" panose="020B0609020204030204" pitchFamily="49" charset="0"/>
+              </a:rPr>
+              <a:t>int</a:t>
+            </a:r>
             <a:r>
               <a:rPr lang="en-US" sz="2000" dirty="0">
                 <a:solidFill>
-                  <a:srgbClr val="00DA63"/>
-                </a:solidFill>
-                <a:latin typeface="Consolas" panose="020B0609020204030204" pitchFamily="49" charset="0"/>
-              </a:rPr>
-              <a:t>Answer: O(1)</a:t>
+                  <a:srgbClr val="EB6E19"/>
+                </a:solidFill>
+                <a:latin typeface="Consolas" panose="020B0609020204030204" pitchFamily="49" charset="0"/>
+              </a:rPr>
+              <a:t> k;</a:t>
+            </a:r>
+          </a:p>
+          <a:p>
+            <a:r>
+              <a:rPr lang="en-US" sz="2000" dirty="0">
+                <a:solidFill>
+                  <a:srgbClr val="EB6E19"/>
+                </a:solidFill>
+                <a:latin typeface="Consolas" panose="020B0609020204030204" pitchFamily="49" charset="0"/>
+              </a:rPr>
+              <a:t>for (int i=1; i &lt; n; i++)</a:t>
+            </a:r>
+          </a:p>
+          <a:p>
+            <a:r>
+              <a:rPr lang="en-US" sz="2000" dirty="0">
+                <a:solidFill>
+                  <a:srgbClr val="EB6E19"/>
+                </a:solidFill>
+                <a:latin typeface="Consolas" panose="020B0609020204030204" pitchFamily="49" charset="0"/>
+              </a:rPr>
+              <a:t>	for (</a:t>
+            </a:r>
+            <a:r>
+              <a:rPr lang="en-US" sz="2000" dirty="0" err="1">
+                <a:solidFill>
+                  <a:srgbClr val="EB6E19"/>
+                </a:solidFill>
+                <a:latin typeface="Consolas" panose="020B0609020204030204" pitchFamily="49" charset="0"/>
+              </a:rPr>
+              <a:t>int</a:t>
+            </a:r>
+            <a:r>
+              <a:rPr lang="en-US" sz="2000" dirty="0">
+                <a:solidFill>
+                  <a:srgbClr val="EB6E19"/>
+                </a:solidFill>
+                <a:latin typeface="Consolas" panose="020B0609020204030204" pitchFamily="49" charset="0"/>
+              </a:rPr>
+              <a:t> j=n; j&gt;1; j=j/2)</a:t>
+            </a:r>
+          </a:p>
+          <a:p>
+            <a:r>
+              <a:rPr lang="en-US" sz="2000" dirty="0">
+                <a:solidFill>
+                  <a:srgbClr val="EB6E19"/>
+                </a:solidFill>
+                <a:latin typeface="Consolas" panose="020B0609020204030204" pitchFamily="49" charset="0"/>
+              </a:rPr>
+              <a:t>		k = </a:t>
+            </a:r>
+            <a:r>
+              <a:rPr lang="en-US" sz="2000" dirty="0" err="1">
+                <a:solidFill>
+                  <a:srgbClr val="EB6E19"/>
+                </a:solidFill>
+                <a:latin typeface="Consolas" panose="020B0609020204030204" pitchFamily="49" charset="0"/>
+              </a:rPr>
+              <a:t>i</a:t>
+            </a:r>
+            <a:r>
+              <a:rPr lang="en-US" sz="2000" dirty="0">
+                <a:solidFill>
+                  <a:srgbClr val="EB6E19"/>
+                </a:solidFill>
+                <a:latin typeface="Consolas" panose="020B0609020204030204" pitchFamily="49" charset="0"/>
+              </a:rPr>
+              <a:t>*j;</a:t>
             </a:r>
           </a:p>
         </p:txBody>
@@ -23683,7 +23594,7 @@
     </p:spTree>
     <p:extLst>
       <p:ext uri="{BB962C8B-B14F-4D97-AF65-F5344CB8AC3E}">
-        <p14:creationId xmlns:p14="http://schemas.microsoft.com/office/powerpoint/2010/main" val="4094376154"/>
+        <p14:creationId xmlns:p14="http://schemas.microsoft.com/office/powerpoint/2010/main" val="228209108"/>
       </p:ext>
     </p:extLst>
   </p:cSld>
@@ -23768,7 +23679,7 @@
         <p:spPr>
           <a:xfrm>
             <a:off x="1039618" y="1828743"/>
-            <a:ext cx="9635971" cy="1938992"/>
+            <a:ext cx="9635971" cy="3170099"/>
           </a:xfrm>
           <a:prstGeom prst="rect">
             <a:avLst/>
@@ -23867,25 +23778,60 @@
                 </a:solidFill>
                 <a:latin typeface="Consolas" panose="020B0609020204030204" pitchFamily="49" charset="0"/>
               </a:rPr>
-              <a:t>		k = </a:t>
-            </a:r>
-            <a:r>
-              <a:rPr lang="en-US" sz="2000" dirty="0" err="1">
-                <a:solidFill>
-                  <a:srgbClr val="EB6E19"/>
-                </a:solidFill>
-                <a:latin typeface="Consolas" panose="020B0609020204030204" pitchFamily="49" charset="0"/>
-              </a:rPr>
-              <a:t>i</a:t>
-            </a:r>
+              <a:t>		k = i*j;</a:t>
+            </a:r>
+          </a:p>
+          <a:p>
+            <a:endParaRPr lang="en-US" sz="2000" dirty="0">
+              <a:solidFill>
+                <a:srgbClr val="EB6E19"/>
+              </a:solidFill>
+              <a:latin typeface="Consolas" panose="020B0609020204030204" pitchFamily="49" charset="0"/>
+            </a:endParaRPr>
+          </a:p>
+          <a:p>
+            <a:endParaRPr lang="en-US" sz="2000" dirty="0">
+              <a:solidFill>
+                <a:srgbClr val="EB6E19"/>
+              </a:solidFill>
+              <a:latin typeface="Consolas" panose="020B0609020204030204" pitchFamily="49" charset="0"/>
+            </a:endParaRPr>
+          </a:p>
+          <a:p>
+            <a:endParaRPr lang="en-US" sz="2000" dirty="0">
+              <a:solidFill>
+                <a:srgbClr val="EB6E19"/>
+              </a:solidFill>
+              <a:latin typeface="Consolas" panose="020B0609020204030204" pitchFamily="49" charset="0"/>
+            </a:endParaRPr>
+          </a:p>
+          <a:p>
             <a:r>
               <a:rPr lang="en-US" sz="2000" dirty="0">
                 <a:solidFill>
-                  <a:srgbClr val="EB6E19"/>
-                </a:solidFill>
-                <a:latin typeface="Consolas" panose="020B0609020204030204" pitchFamily="49" charset="0"/>
-              </a:rPr>
-              <a:t>*j;</a:t>
+                  <a:srgbClr val="00DA63"/>
+                </a:solidFill>
+                <a:latin typeface="Consolas" panose="020B0609020204030204" pitchFamily="49" charset="0"/>
+              </a:rPr>
+              <a:t>Answer: O(n log</a:t>
+            </a:r>
+            <a:r>
+              <a:rPr lang="en-US" sz="2000" baseline="-25000" dirty="0">
+                <a:solidFill>
+                  <a:srgbClr val="00DA63"/>
+                </a:solidFill>
+                <a:latin typeface="Consolas" panose="020B0609020204030204" pitchFamily="49" charset="0"/>
+              </a:rPr>
+              <a:t>2</a:t>
+            </a:r>
+            <a:r>
+              <a:rPr lang="en-US" sz="2000" dirty="0">
+                <a:solidFill>
+                  <a:srgbClr val="00DA63"/>
+                </a:solidFill>
+                <a:latin typeface="Consolas" panose="020B0609020204030204" pitchFamily="49" charset="0"/>
+              </a:rPr>
+              <a:t> n)</a:t>
             </a:r>
           </a:p>
         </p:txBody>
@@ -23893,7 +23839,7 @@
     </p:spTree>
     <p:extLst>
       <p:ext uri="{BB962C8B-B14F-4D97-AF65-F5344CB8AC3E}">
-        <p14:creationId xmlns:p14="http://schemas.microsoft.com/office/powerpoint/2010/main" val="228209108"/>
+        <p14:creationId xmlns:p14="http://schemas.microsoft.com/office/powerpoint/2010/main" val="2941247419"/>
       </p:ext>
     </p:extLst>
   </p:cSld>
